--- a/assets/engineering/self-balancing-robot/Figures.pptx
+++ b/assets/engineering/self-balancing-robot/Figures.pptx
@@ -6,6 +6,10 @@
   </p:sldMasterIdLst>
   <p:sldIdLst>
     <p:sldId id="256" r:id="rId2"/>
+    <p:sldId id="258" r:id="rId3"/>
+    <p:sldId id="257" r:id="rId4"/>
+    <p:sldId id="259" r:id="rId5"/>
+    <p:sldId id="260" r:id="rId6"/>
   </p:sldIdLst>
   <p:sldSz cx="12192000" cy="6858000"/>
   <p:notesSz cx="6858000" cy="9144000"/>
@@ -104,6 +108,11 @@
       </a:defRPr>
     </a:lvl9pPr>
   </p:defaultTextStyle>
+  <p:extLst>
+    <p:ext uri="{EFAFB233-063F-42B5-8137-9DF3F51BA10A}">
+      <p15:sldGuideLst xmlns:p15="http://schemas.microsoft.com/office/powerpoint/2012/main"/>
+    </p:ext>
+  </p:extLst>
 </p:presentation>
 </file>
 
@@ -254,7 +263,7 @@
           <a:p>
             <a:fld id="{6F5E2787-809E-9049-9C6F-D5528A76A6DA}" type="datetimeFigureOut">
               <a:rPr lang="en-US" smtClean="0"/>
-              <a:t>10/13/25</a:t>
+              <a:t>7/12/26</a:t>
             </a:fld>
             <a:endParaRPr lang="en-US"/>
           </a:p>
@@ -452,7 +461,7 @@
           <a:p>
             <a:fld id="{6F5E2787-809E-9049-9C6F-D5528A76A6DA}" type="datetimeFigureOut">
               <a:rPr lang="en-US" smtClean="0"/>
-              <a:t>10/13/25</a:t>
+              <a:t>7/12/26</a:t>
             </a:fld>
             <a:endParaRPr lang="en-US"/>
           </a:p>
@@ -660,7 +669,7 @@
           <a:p>
             <a:fld id="{6F5E2787-809E-9049-9C6F-D5528A76A6DA}" type="datetimeFigureOut">
               <a:rPr lang="en-US" smtClean="0"/>
-              <a:t>10/13/25</a:t>
+              <a:t>7/12/26</a:t>
             </a:fld>
             <a:endParaRPr lang="en-US"/>
           </a:p>
@@ -858,7 +867,7 @@
           <a:p>
             <a:fld id="{6F5E2787-809E-9049-9C6F-D5528A76A6DA}" type="datetimeFigureOut">
               <a:rPr lang="en-US" smtClean="0"/>
-              <a:t>10/13/25</a:t>
+              <a:t>7/12/26</a:t>
             </a:fld>
             <a:endParaRPr lang="en-US"/>
           </a:p>
@@ -1133,7 +1142,7 @@
           <a:p>
             <a:fld id="{6F5E2787-809E-9049-9C6F-D5528A76A6DA}" type="datetimeFigureOut">
               <a:rPr lang="en-US" smtClean="0"/>
-              <a:t>10/13/25</a:t>
+              <a:t>7/12/26</a:t>
             </a:fld>
             <a:endParaRPr lang="en-US"/>
           </a:p>
@@ -1398,7 +1407,7 @@
           <a:p>
             <a:fld id="{6F5E2787-809E-9049-9C6F-D5528A76A6DA}" type="datetimeFigureOut">
               <a:rPr lang="en-US" smtClean="0"/>
-              <a:t>10/13/25</a:t>
+              <a:t>7/12/26</a:t>
             </a:fld>
             <a:endParaRPr lang="en-US"/>
           </a:p>
@@ -1810,7 +1819,7 @@
           <a:p>
             <a:fld id="{6F5E2787-809E-9049-9C6F-D5528A76A6DA}" type="datetimeFigureOut">
               <a:rPr lang="en-US" smtClean="0"/>
-              <a:t>10/13/25</a:t>
+              <a:t>7/12/26</a:t>
             </a:fld>
             <a:endParaRPr lang="en-US"/>
           </a:p>
@@ -1951,7 +1960,7 @@
           <a:p>
             <a:fld id="{6F5E2787-809E-9049-9C6F-D5528A76A6DA}" type="datetimeFigureOut">
               <a:rPr lang="en-US" smtClean="0"/>
-              <a:t>10/13/25</a:t>
+              <a:t>7/12/26</a:t>
             </a:fld>
             <a:endParaRPr lang="en-US"/>
           </a:p>
@@ -2064,7 +2073,7 @@
           <a:p>
             <a:fld id="{6F5E2787-809E-9049-9C6F-D5528A76A6DA}" type="datetimeFigureOut">
               <a:rPr lang="en-US" smtClean="0"/>
-              <a:t>10/13/25</a:t>
+              <a:t>7/12/26</a:t>
             </a:fld>
             <a:endParaRPr lang="en-US"/>
           </a:p>
@@ -2375,7 +2384,7 @@
           <a:p>
             <a:fld id="{6F5E2787-809E-9049-9C6F-D5528A76A6DA}" type="datetimeFigureOut">
               <a:rPr lang="en-US" smtClean="0"/>
-              <a:t>10/13/25</a:t>
+              <a:t>7/12/26</a:t>
             </a:fld>
             <a:endParaRPr lang="en-US"/>
           </a:p>
@@ -2663,7 +2672,7 @@
           <a:p>
             <a:fld id="{6F5E2787-809E-9049-9C6F-D5528A76A6DA}" type="datetimeFigureOut">
               <a:rPr lang="en-US" smtClean="0"/>
-              <a:t>10/13/25</a:t>
+              <a:t>7/12/26</a:t>
             </a:fld>
             <a:endParaRPr lang="en-US"/>
           </a:p>
@@ -2904,7 +2913,7 @@
           <a:p>
             <a:fld id="{6F5E2787-809E-9049-9C6F-D5528A76A6DA}" type="datetimeFigureOut">
               <a:rPr lang="en-US" smtClean="0"/>
-              <a:t>10/13/25</a:t>
+              <a:t>7/12/26</a:t>
             </a:fld>
             <a:endParaRPr lang="en-US"/>
           </a:p>
@@ -3321,8 +3330,8 @@
           <a:chExt cx="0" cy="0"/>
         </a:xfrm>
       </p:grpSpPr>
-      <mc:AlternateContent xmlns:mc="http://schemas.openxmlformats.org/markup-compatibility/2006">
-        <mc:Choice xmlns:a14="http://schemas.microsoft.com/office/drawing/2010/main" Requires="a14">
+      <mc:AlternateContent xmlns:mc="http://schemas.openxmlformats.org/markup-compatibility/2006" xmlns:a14="http://schemas.microsoft.com/office/drawing/2010/main">
+        <mc:Choice Requires="a14">
           <p:sp>
             <p:nvSpPr>
               <p:cNvPr id="4" name="Rectangle 3">
@@ -3461,7 +3470,7 @@
             </p:txBody>
           </p:sp>
         </mc:Choice>
-        <mc:Fallback>
+        <mc:Fallback xmlns="">
           <p:sp>
             <p:nvSpPr>
               <p:cNvPr id="4" name="Rectangle 3">
@@ -3692,8 +3701,8 @@
           </p:txBody>
         </p:sp>
       </p:grpSp>
-      <mc:AlternateContent xmlns:mc="http://schemas.openxmlformats.org/markup-compatibility/2006">
-        <mc:Choice xmlns:a14="http://schemas.microsoft.com/office/drawing/2010/main" Requires="a14">
+      <mc:AlternateContent xmlns:mc="http://schemas.openxmlformats.org/markup-compatibility/2006" xmlns:a14="http://schemas.microsoft.com/office/drawing/2010/main">
+        <mc:Choice Requires="a14">
           <p:sp>
             <p:nvSpPr>
               <p:cNvPr id="11" name="Triangle 10">
@@ -3771,7 +3780,7 @@
                       <m:sSub>
                         <m:sSubPr>
                           <m:ctrlPr>
-                            <a:rPr lang="en-US" sz="2400" b="1" smtClean="0">
+                            <a:rPr lang="en-US" sz="2400" b="1" i="1" smtClean="0">
                               <a:solidFill>
                                 <a:schemeClr val="tx1">
                                   <a:lumMod val="75000"/>
@@ -3831,7 +3840,7 @@
             </p:txBody>
           </p:sp>
         </mc:Choice>
-        <mc:Fallback>
+        <mc:Fallback xmlns="">
           <p:sp>
             <p:nvSpPr>
               <p:cNvPr id="11" name="Triangle 10">
@@ -3884,8 +3893,8 @@
           </p:sp>
         </mc:Fallback>
       </mc:AlternateContent>
-      <mc:AlternateContent xmlns:mc="http://schemas.openxmlformats.org/markup-compatibility/2006">
-        <mc:Choice xmlns:a14="http://schemas.microsoft.com/office/drawing/2010/main" Requires="a14">
+      <mc:AlternateContent xmlns:mc="http://schemas.openxmlformats.org/markup-compatibility/2006" xmlns:a14="http://schemas.microsoft.com/office/drawing/2010/main">
+        <mc:Choice Requires="a14">
           <p:sp>
             <p:nvSpPr>
               <p:cNvPr id="12" name="Rectangle 11">
@@ -4102,7 +4111,7 @@
             </p:txBody>
           </p:sp>
         </mc:Choice>
-        <mc:Fallback>
+        <mc:Fallback xmlns="">
           <p:sp>
             <p:nvSpPr>
               <p:cNvPr id="12" name="Rectangle 11">
@@ -4155,8 +4164,8 @@
           </p:sp>
         </mc:Fallback>
       </mc:AlternateContent>
-      <mc:AlternateContent xmlns:mc="http://schemas.openxmlformats.org/markup-compatibility/2006">
-        <mc:Choice xmlns:a14="http://schemas.microsoft.com/office/drawing/2010/main" Requires="a14">
+      <mc:AlternateContent xmlns:mc="http://schemas.openxmlformats.org/markup-compatibility/2006" xmlns:a14="http://schemas.microsoft.com/office/drawing/2010/main">
+        <mc:Choice Requires="a14">
           <p:sp>
             <p:nvSpPr>
               <p:cNvPr id="13" name="Rectangle 12">
@@ -4341,7 +4350,7 @@
             </p:txBody>
           </p:sp>
         </mc:Choice>
-        <mc:Fallback>
+        <mc:Fallback xmlns="">
           <p:sp>
             <p:nvSpPr>
               <p:cNvPr id="13" name="Rectangle 12">
@@ -4394,8 +4403,8 @@
           </p:sp>
         </mc:Fallback>
       </mc:AlternateContent>
-      <mc:AlternateContent xmlns:mc="http://schemas.openxmlformats.org/markup-compatibility/2006">
-        <mc:Choice xmlns:a14="http://schemas.microsoft.com/office/drawing/2010/main" Requires="a14">
+      <mc:AlternateContent xmlns:mc="http://schemas.openxmlformats.org/markup-compatibility/2006" xmlns:a14="http://schemas.microsoft.com/office/drawing/2010/main">
+        <mc:Choice Requires="a14">
           <p:sp>
             <p:nvSpPr>
               <p:cNvPr id="14" name="Triangle 13">
@@ -4473,7 +4482,7 @@
                       <m:sSub>
                         <m:sSubPr>
                           <m:ctrlPr>
-                            <a:rPr lang="en-US" sz="2400" b="1" smtClean="0">
+                            <a:rPr lang="en-US" sz="2400" b="1" i="1" smtClean="0">
                               <a:solidFill>
                                 <a:schemeClr val="tx1">
                                   <a:lumMod val="75000"/>
@@ -4536,7 +4545,7 @@
             </p:txBody>
           </p:sp>
         </mc:Choice>
-        <mc:Fallback>
+        <mc:Fallback xmlns="">
           <p:sp>
             <p:nvSpPr>
               <p:cNvPr id="14" name="Triangle 13">
@@ -4589,8 +4598,8 @@
           </p:sp>
         </mc:Fallback>
       </mc:AlternateContent>
-      <mc:AlternateContent xmlns:mc="http://schemas.openxmlformats.org/markup-compatibility/2006">
-        <mc:Choice xmlns:a14="http://schemas.microsoft.com/office/drawing/2010/main" Requires="a14">
+      <mc:AlternateContent xmlns:mc="http://schemas.openxmlformats.org/markup-compatibility/2006" xmlns:a14="http://schemas.microsoft.com/office/drawing/2010/main">
+        <mc:Choice Requires="a14">
           <p:sp>
             <p:nvSpPr>
               <p:cNvPr id="15" name="Triangle 14">
@@ -4668,7 +4677,7 @@
                       <m:sSub>
                         <m:sSubPr>
                           <m:ctrlPr>
-                            <a:rPr lang="en-US" sz="2400" b="1" smtClean="0">
+                            <a:rPr lang="en-US" sz="2400" b="1" i="1" smtClean="0">
                               <a:solidFill>
                                 <a:schemeClr val="tx1">
                                   <a:lumMod val="75000"/>
@@ -4731,7 +4740,7 @@
             </p:txBody>
           </p:sp>
         </mc:Choice>
-        <mc:Fallback>
+        <mc:Fallback xmlns="">
           <p:sp>
             <p:nvSpPr>
               <p:cNvPr id="15" name="Triangle 14">
@@ -5815,8 +5824,8 @@
           </a:fontRef>
         </p:style>
       </p:cxnSp>
-      <mc:AlternateContent xmlns:mc="http://schemas.openxmlformats.org/markup-compatibility/2006">
-        <mc:Choice xmlns:a14="http://schemas.microsoft.com/office/drawing/2010/main" Requires="a14">
+      <mc:AlternateContent xmlns:mc="http://schemas.openxmlformats.org/markup-compatibility/2006" xmlns:a14="http://schemas.microsoft.com/office/drawing/2010/main">
+        <mc:Choice Requires="a14">
           <p:sp>
             <p:nvSpPr>
               <p:cNvPr id="103" name="TextBox 102">
@@ -5878,7 +5887,7 @@
             </p:txBody>
           </p:sp>
         </mc:Choice>
-        <mc:Fallback>
+        <mc:Fallback xmlns="">
           <p:sp>
             <p:nvSpPr>
               <p:cNvPr id="103" name="TextBox 102">
@@ -5923,8 +5932,8 @@
           </p:sp>
         </mc:Fallback>
       </mc:AlternateContent>
-      <mc:AlternateContent xmlns:mc="http://schemas.openxmlformats.org/markup-compatibility/2006">
-        <mc:Choice xmlns:a14="http://schemas.microsoft.com/office/drawing/2010/main" Requires="a14">
+      <mc:AlternateContent xmlns:mc="http://schemas.openxmlformats.org/markup-compatibility/2006" xmlns:a14="http://schemas.microsoft.com/office/drawing/2010/main">
+        <mc:Choice Requires="a14">
           <p:sp>
             <p:nvSpPr>
               <p:cNvPr id="105" name="TextBox 104">
@@ -6021,7 +6030,7 @@
             </p:txBody>
           </p:sp>
         </mc:Choice>
-        <mc:Fallback>
+        <mc:Fallback xmlns="">
           <p:sp>
             <p:nvSpPr>
               <p:cNvPr id="105" name="TextBox 104">
@@ -6066,8 +6075,8 @@
           </p:sp>
         </mc:Fallback>
       </mc:AlternateContent>
-      <mc:AlternateContent xmlns:mc="http://schemas.openxmlformats.org/markup-compatibility/2006">
-        <mc:Choice xmlns:a14="http://schemas.microsoft.com/office/drawing/2010/main" Requires="a14">
+      <mc:AlternateContent xmlns:mc="http://schemas.openxmlformats.org/markup-compatibility/2006" xmlns:a14="http://schemas.microsoft.com/office/drawing/2010/main">
+        <mc:Choice Requires="a14">
           <p:sp>
             <p:nvSpPr>
               <p:cNvPr id="106" name="TextBox 105">
@@ -6182,7 +6191,7 @@
             </p:txBody>
           </p:sp>
         </mc:Choice>
-        <mc:Fallback>
+        <mc:Fallback xmlns="">
           <p:sp>
             <p:nvSpPr>
               <p:cNvPr id="106" name="TextBox 105">
@@ -6227,8 +6236,8 @@
           </p:sp>
         </mc:Fallback>
       </mc:AlternateContent>
-      <mc:AlternateContent xmlns:mc="http://schemas.openxmlformats.org/markup-compatibility/2006">
-        <mc:Choice xmlns:a14="http://schemas.microsoft.com/office/drawing/2010/main" Requires="a14">
+      <mc:AlternateContent xmlns:mc="http://schemas.openxmlformats.org/markup-compatibility/2006" xmlns:a14="http://schemas.microsoft.com/office/drawing/2010/main">
+        <mc:Choice Requires="a14">
           <p:sp>
             <p:nvSpPr>
               <p:cNvPr id="107" name="TextBox 106">
@@ -6283,7 +6292,7 @@
             </p:txBody>
           </p:sp>
         </mc:Choice>
-        <mc:Fallback>
+        <mc:Fallback xmlns="">
           <p:sp>
             <p:nvSpPr>
               <p:cNvPr id="107" name="TextBox 106">
@@ -6328,8 +6337,8 @@
           </p:sp>
         </mc:Fallback>
       </mc:AlternateContent>
-      <mc:AlternateContent xmlns:mc="http://schemas.openxmlformats.org/markup-compatibility/2006">
-        <mc:Choice xmlns:a14="http://schemas.microsoft.com/office/drawing/2010/main" Requires="a14">
+      <mc:AlternateContent xmlns:mc="http://schemas.openxmlformats.org/markup-compatibility/2006" xmlns:a14="http://schemas.microsoft.com/office/drawing/2010/main">
+        <mc:Choice Requires="a14">
           <p:sp>
             <p:nvSpPr>
               <p:cNvPr id="108" name="TextBox 107">
@@ -6387,7 +6396,7 @@
             </p:txBody>
           </p:sp>
         </mc:Choice>
-        <mc:Fallback>
+        <mc:Fallback xmlns="">
           <p:sp>
             <p:nvSpPr>
               <p:cNvPr id="108" name="TextBox 107">
@@ -6432,8 +6441,8 @@
           </p:sp>
         </mc:Fallback>
       </mc:AlternateContent>
-      <mc:AlternateContent xmlns:mc="http://schemas.openxmlformats.org/markup-compatibility/2006">
-        <mc:Choice xmlns:a14="http://schemas.microsoft.com/office/drawing/2010/main" Requires="a14">
+      <mc:AlternateContent xmlns:mc="http://schemas.openxmlformats.org/markup-compatibility/2006" xmlns:a14="http://schemas.microsoft.com/office/drawing/2010/main">
+        <mc:Choice Requires="a14">
           <p:sp>
             <p:nvSpPr>
               <p:cNvPr id="109" name="TextBox 108">
@@ -6491,7 +6500,7 @@
             </p:txBody>
           </p:sp>
         </mc:Choice>
-        <mc:Fallback>
+        <mc:Fallback xmlns="">
           <p:sp>
             <p:nvSpPr>
               <p:cNvPr id="109" name="TextBox 108">
@@ -6536,8 +6545,8 @@
           </p:sp>
         </mc:Fallback>
       </mc:AlternateContent>
-      <mc:AlternateContent xmlns:mc="http://schemas.openxmlformats.org/markup-compatibility/2006">
-        <mc:Choice xmlns:a14="http://schemas.microsoft.com/office/drawing/2010/main" Requires="a14">
+      <mc:AlternateContent xmlns:mc="http://schemas.openxmlformats.org/markup-compatibility/2006" xmlns:a14="http://schemas.microsoft.com/office/drawing/2010/main">
+        <mc:Choice Requires="a14">
           <p:sp>
             <p:nvSpPr>
               <p:cNvPr id="110" name="TextBox 109">
@@ -6595,7 +6604,7 @@
             </p:txBody>
           </p:sp>
         </mc:Choice>
-        <mc:Fallback>
+        <mc:Fallback xmlns="">
           <p:sp>
             <p:nvSpPr>
               <p:cNvPr id="110" name="TextBox 109">
@@ -6640,8 +6649,8 @@
           </p:sp>
         </mc:Fallback>
       </mc:AlternateContent>
-      <mc:AlternateContent xmlns:mc="http://schemas.openxmlformats.org/markup-compatibility/2006">
-        <mc:Choice xmlns:a14="http://schemas.microsoft.com/office/drawing/2010/main" Requires="a14">
+      <mc:AlternateContent xmlns:mc="http://schemas.openxmlformats.org/markup-compatibility/2006" xmlns:a14="http://schemas.microsoft.com/office/drawing/2010/main">
+        <mc:Choice Requires="a14">
           <p:sp>
             <p:nvSpPr>
               <p:cNvPr id="111" name="TextBox 110">
@@ -6699,7 +6708,7 @@
             </p:txBody>
           </p:sp>
         </mc:Choice>
-        <mc:Fallback>
+        <mc:Fallback xmlns="">
           <p:sp>
             <p:nvSpPr>
               <p:cNvPr id="111" name="TextBox 110">
@@ -6832,8 +6841,8 @@
           </a:p>
         </p:txBody>
       </p:sp>
-      <mc:AlternateContent xmlns:mc="http://schemas.openxmlformats.org/markup-compatibility/2006">
-        <mc:Choice xmlns:a14="http://schemas.microsoft.com/office/drawing/2010/main" Requires="a14">
+      <mc:AlternateContent xmlns:mc="http://schemas.openxmlformats.org/markup-compatibility/2006" xmlns:a14="http://schemas.microsoft.com/office/drawing/2010/main">
+        <mc:Choice Requires="a14">
           <p:sp>
             <p:nvSpPr>
               <p:cNvPr id="119" name="TextBox 118">
@@ -6933,7 +6942,7 @@
             </p:txBody>
           </p:sp>
         </mc:Choice>
-        <mc:Fallback>
+        <mc:Fallback xmlns="">
           <p:sp>
             <p:nvSpPr>
               <p:cNvPr id="119" name="TextBox 118">
@@ -6982,6 +6991,9440 @@
     <p:extLst>
       <p:ext uri="{BB962C8B-B14F-4D97-AF65-F5344CB8AC3E}">
         <p14:creationId xmlns:p14="http://schemas.microsoft.com/office/powerpoint/2010/main" val="3595951199"/>
+      </p:ext>
+    </p:extLst>
+  </p:cSld>
+  <p:clrMapOvr>
+    <a:masterClrMapping/>
+  </p:clrMapOvr>
+</p:sld>
+</file>
+
+<file path=ppt/slides/slide2.xml><?xml version="1.0" encoding="utf-8"?>
+<p:sld xmlns:a="http://schemas.openxmlformats.org/drawingml/2006/main" xmlns:r="http://schemas.openxmlformats.org/officeDocument/2006/relationships" xmlns:p="http://schemas.openxmlformats.org/presentationml/2006/main">
+  <p:cSld>
+    <p:spTree>
+      <p:nvGrpSpPr>
+        <p:cNvPr id="1" name="">
+          <a:extLst>
+            <a:ext uri="{FF2B5EF4-FFF2-40B4-BE49-F238E27FC236}">
+              <a16:creationId xmlns:a16="http://schemas.microsoft.com/office/drawing/2014/main" id="{000E48DE-D2B8-F61D-BDC6-08FC9EA7593A}"/>
+            </a:ext>
+          </a:extLst>
+        </p:cNvPr>
+        <p:cNvGrpSpPr/>
+        <p:nvPr/>
+      </p:nvGrpSpPr>
+      <p:grpSpPr>
+        <a:xfrm>
+          <a:off x="0" y="0"/>
+          <a:ext cx="0" cy="0"/>
+          <a:chOff x="0" y="0"/>
+          <a:chExt cx="0" cy="0"/>
+        </a:xfrm>
+      </p:grpSpPr>
+      <p:sp>
+        <p:nvSpPr>
+          <p:cNvPr id="2" name="Rectangle 1">
+            <a:extLst>
+              <a:ext uri="{FF2B5EF4-FFF2-40B4-BE49-F238E27FC236}">
+                <a16:creationId xmlns:a16="http://schemas.microsoft.com/office/drawing/2014/main" id="{CBA97A36-B104-37E1-0287-EEC12971B274}"/>
+              </a:ext>
+            </a:extLst>
+          </p:cNvPr>
+          <p:cNvSpPr>
+            <a:spLocks noChangeAspect="1"/>
+          </p:cNvSpPr>
+          <p:nvPr/>
+        </p:nvSpPr>
+        <p:spPr>
+          <a:xfrm>
+            <a:off x="-280952" y="-384602"/>
+            <a:ext cx="13943234" cy="7843069"/>
+          </a:xfrm>
+          <a:prstGeom prst="rect">
+            <a:avLst/>
+          </a:prstGeom>
+          <a:solidFill>
+            <a:schemeClr val="bg1">
+              <a:lumMod val="95000"/>
+            </a:schemeClr>
+          </a:solidFill>
+        </p:spPr>
+        <p:style>
+          <a:lnRef idx="2">
+            <a:schemeClr val="accent1">
+              <a:shade val="15000"/>
+            </a:schemeClr>
+          </a:lnRef>
+          <a:fillRef idx="1">
+            <a:schemeClr val="accent1"/>
+          </a:fillRef>
+          <a:effectRef idx="0">
+            <a:schemeClr val="accent1"/>
+          </a:effectRef>
+          <a:fontRef idx="minor">
+            <a:schemeClr val="lt1"/>
+          </a:fontRef>
+        </p:style>
+        <p:txBody>
+          <a:bodyPr rtlCol="0" anchor="ctr"/>
+          <a:lstStyle/>
+          <a:p>
+            <a:pPr algn="ctr"/>
+            <a:endParaRPr lang="en-US"/>
+          </a:p>
+        </p:txBody>
+      </p:sp>
+      <mc:AlternateContent xmlns:mc="http://schemas.openxmlformats.org/markup-compatibility/2006" xmlns:a14="http://schemas.microsoft.com/office/drawing/2010/main">
+        <mc:Choice Requires="a14">
+          <p:sp>
+            <p:nvSpPr>
+              <p:cNvPr id="4" name="Rectangle 3">
+                <a:extLst>
+                  <a:ext uri="{FF2B5EF4-FFF2-40B4-BE49-F238E27FC236}">
+                    <a16:creationId xmlns:a16="http://schemas.microsoft.com/office/drawing/2014/main" id="{4C8544A7-A74B-3E2F-A9C5-F2E6F08F627B}"/>
+                  </a:ext>
+                </a:extLst>
+              </p:cNvPr>
+              <p:cNvSpPr/>
+              <p:nvPr/>
+            </p:nvSpPr>
+            <p:spPr>
+              <a:xfrm>
+                <a:off x="5225612" y="1748509"/>
+                <a:ext cx="2104780" cy="709137"/>
+              </a:xfrm>
+              <a:prstGeom prst="rect">
+                <a:avLst/>
+              </a:prstGeom>
+              <a:solidFill>
+                <a:schemeClr val="bg1">
+                  <a:lumMod val="85000"/>
+                </a:schemeClr>
+              </a:solidFill>
+              <a:ln>
+                <a:solidFill>
+                  <a:schemeClr val="tx1">
+                    <a:lumMod val="50000"/>
+                    <a:lumOff val="50000"/>
+                  </a:schemeClr>
+                </a:solidFill>
+              </a:ln>
+            </p:spPr>
+            <p:style>
+              <a:lnRef idx="2">
+                <a:schemeClr val="accent1">
+                  <a:shade val="15000"/>
+                </a:schemeClr>
+              </a:lnRef>
+              <a:fillRef idx="1">
+                <a:schemeClr val="accent1"/>
+              </a:fillRef>
+              <a:effectRef idx="0">
+                <a:schemeClr val="accent1"/>
+              </a:effectRef>
+              <a:fontRef idx="minor">
+                <a:schemeClr val="lt1"/>
+              </a:fontRef>
+            </p:style>
+            <p:txBody>
+              <a:bodyPr rtlCol="0" anchor="ctr"/>
+              <a:lstStyle/>
+              <a:p>
+                <a:pPr algn="ctr"/>
+                <a:r>
+                  <a:rPr lang="en-US" sz="2400" b="1" dirty="0">
+                    <a:solidFill>
+                      <a:schemeClr val="tx1">
+                        <a:lumMod val="75000"/>
+                        <a:lumOff val="25000"/>
+                      </a:schemeClr>
+                    </a:solidFill>
+                    <a:latin typeface="Arial Black" panose="020B0604020202020204" pitchFamily="34" charset="0"/>
+                    <a:cs typeface="Arial Black" panose="020B0604020202020204" pitchFamily="34" charset="0"/>
+                  </a:rPr>
+                  <a:t>P          </a:t>
+                </a:r>
+                <a14:m>
+                  <m:oMath xmlns:m="http://schemas.openxmlformats.org/officeDocument/2006/math">
+                    <m:r>
+                      <a:rPr lang="en-US" sz="2400" b="0" i="1" smtClean="0">
+                        <a:solidFill>
+                          <a:schemeClr val="tx1">
+                            <a:lumMod val="75000"/>
+                            <a:lumOff val="25000"/>
+                          </a:schemeClr>
+                        </a:solidFill>
+                        <a:latin typeface="Cambria Math" panose="02040503050406030204" pitchFamily="18" charset="0"/>
+                        <a:cs typeface="Arial Black" panose="020B0604020202020204" pitchFamily="34" charset="0"/>
+                      </a:rPr>
+                      <m:t>𝑒</m:t>
+                    </m:r>
+                    <m:r>
+                      <a:rPr lang="en-US" sz="2400" b="0" i="1" smtClean="0">
+                        <a:solidFill>
+                          <a:schemeClr val="tx1">
+                            <a:lumMod val="75000"/>
+                            <a:lumOff val="25000"/>
+                          </a:schemeClr>
+                        </a:solidFill>
+                        <a:latin typeface="Cambria Math" panose="02040503050406030204" pitchFamily="18" charset="0"/>
+                        <a:cs typeface="Arial Black" panose="020B0604020202020204" pitchFamily="34" charset="0"/>
+                      </a:rPr>
+                      <m:t>(</m:t>
+                    </m:r>
+                    <m:r>
+                      <a:rPr lang="en-US" sz="2400" b="0" i="1" smtClean="0">
+                        <a:solidFill>
+                          <a:schemeClr val="tx1">
+                            <a:lumMod val="75000"/>
+                            <a:lumOff val="25000"/>
+                          </a:schemeClr>
+                        </a:solidFill>
+                        <a:latin typeface="Cambria Math" panose="02040503050406030204" pitchFamily="18" charset="0"/>
+                        <a:cs typeface="Arial Black" panose="020B0604020202020204" pitchFamily="34" charset="0"/>
+                      </a:rPr>
+                      <m:t>𝑡</m:t>
+                    </m:r>
+                    <m:r>
+                      <a:rPr lang="en-US" sz="2400" b="0" i="1" smtClean="0">
+                        <a:solidFill>
+                          <a:schemeClr val="tx1">
+                            <a:lumMod val="75000"/>
+                            <a:lumOff val="25000"/>
+                          </a:schemeClr>
+                        </a:solidFill>
+                        <a:latin typeface="Cambria Math" panose="02040503050406030204" pitchFamily="18" charset="0"/>
+                        <a:cs typeface="Arial Black" panose="020B0604020202020204" pitchFamily="34" charset="0"/>
+                      </a:rPr>
+                      <m:t>)</m:t>
+                    </m:r>
+                  </m:oMath>
+                </a14:m>
+                <a:endParaRPr lang="en-US" sz="3200" i="1" dirty="0">
+                  <a:solidFill>
+                    <a:schemeClr val="tx1">
+                      <a:lumMod val="75000"/>
+                      <a:lumOff val="25000"/>
+                    </a:schemeClr>
+                  </a:solidFill>
+                  <a:latin typeface="Arial Black" panose="020B0604020202020204" pitchFamily="34" charset="0"/>
+                  <a:cs typeface="Arial Black" panose="020B0604020202020204" pitchFamily="34" charset="0"/>
+                </a:endParaRPr>
+              </a:p>
+            </p:txBody>
+          </p:sp>
+        </mc:Choice>
+        <mc:Fallback xmlns="">
+          <p:sp>
+            <p:nvSpPr>
+              <p:cNvPr id="4" name="Rectangle 3">
+                <a:extLst>
+                  <a:ext uri="{FF2B5EF4-FFF2-40B4-BE49-F238E27FC236}">
+                    <a16:creationId xmlns:a16="http://schemas.microsoft.com/office/drawing/2014/main" id="{9292F49F-30DE-9A4B-2565-6FA0D0B4CDCD}"/>
+                  </a:ext>
+                </a:extLst>
+              </p:cNvPr>
+              <p:cNvSpPr>
+                <a:spLocks noRot="1" noChangeAspect="1" noMove="1" noResize="1" noEditPoints="1" noAdjustHandles="1" noChangeArrowheads="1" noChangeShapeType="1" noTextEdit="1"/>
+              </p:cNvSpPr>
+              <p:nvPr/>
+            </p:nvSpPr>
+            <p:spPr>
+              <a:xfrm>
+                <a:off x="5225612" y="1748509"/>
+                <a:ext cx="2104780" cy="709137"/>
+              </a:xfrm>
+              <a:prstGeom prst="rect">
+                <a:avLst/>
+              </a:prstGeom>
+              <a:blipFill>
+                <a:blip r:embed="rId2"/>
+                <a:stretch>
+                  <a:fillRect l="-595"/>
+                </a:stretch>
+              </a:blipFill>
+              <a:ln>
+                <a:solidFill>
+                  <a:schemeClr val="tx1">
+                    <a:lumMod val="50000"/>
+                    <a:lumOff val="50000"/>
+                  </a:schemeClr>
+                </a:solidFill>
+              </a:ln>
+            </p:spPr>
+            <p:txBody>
+              <a:bodyPr/>
+              <a:lstStyle/>
+              <a:p>
+                <a:r>
+                  <a:rPr lang="en-US">
+                    <a:noFill/>
+                  </a:rPr>
+                  <a:t> </a:t>
+                </a:r>
+              </a:p>
+            </p:txBody>
+          </p:sp>
+        </mc:Fallback>
+      </mc:AlternateContent>
+      <p:cxnSp>
+        <p:nvCxnSpPr>
+          <p:cNvPr id="6" name="Straight Arrow Connector 5">
+            <a:extLst>
+              <a:ext uri="{FF2B5EF4-FFF2-40B4-BE49-F238E27FC236}">
+                <a16:creationId xmlns:a16="http://schemas.microsoft.com/office/drawing/2014/main" id="{52E38CAA-9FCE-20A2-D33A-2021CD2F1626}"/>
+              </a:ext>
+            </a:extLst>
+          </p:cNvPr>
+          <p:cNvCxnSpPr>
+            <a:cxnSpLocks/>
+          </p:cNvCxnSpPr>
+          <p:nvPr/>
+        </p:nvCxnSpPr>
+        <p:spPr>
+          <a:xfrm>
+            <a:off x="138191" y="3182364"/>
+            <a:ext cx="1455153" cy="0"/>
+          </a:xfrm>
+          <a:prstGeom prst="straightConnector1">
+            <a:avLst/>
+          </a:prstGeom>
+          <a:ln w="57150">
+            <a:tailEnd type="triangle"/>
+          </a:ln>
+        </p:spPr>
+        <p:style>
+          <a:lnRef idx="2">
+            <a:schemeClr val="dk1"/>
+          </a:lnRef>
+          <a:fillRef idx="0">
+            <a:schemeClr val="dk1"/>
+          </a:fillRef>
+          <a:effectRef idx="1">
+            <a:schemeClr val="dk1"/>
+          </a:effectRef>
+          <a:fontRef idx="minor">
+            <a:schemeClr val="tx1"/>
+          </a:fontRef>
+        </p:style>
+      </p:cxnSp>
+      <p:grpSp>
+        <p:nvGrpSpPr>
+          <p:cNvPr id="17" name="Group 16">
+            <a:extLst>
+              <a:ext uri="{FF2B5EF4-FFF2-40B4-BE49-F238E27FC236}">
+                <a16:creationId xmlns:a16="http://schemas.microsoft.com/office/drawing/2014/main" id="{96C0BBA2-0CEC-B9CE-728F-1C6759E9268C}"/>
+              </a:ext>
+            </a:extLst>
+          </p:cNvPr>
+          <p:cNvGrpSpPr/>
+          <p:nvPr/>
+        </p:nvGrpSpPr>
+        <p:grpSpPr>
+          <a:xfrm>
+            <a:off x="1412105" y="2574288"/>
+            <a:ext cx="1216152" cy="1216152"/>
+            <a:chOff x="1871202" y="2751585"/>
+            <a:chExt cx="1216152" cy="1216152"/>
+          </a:xfrm>
+        </p:grpSpPr>
+        <p:sp>
+          <p:nvSpPr>
+            <p:cNvPr id="7" name="Oval 6">
+              <a:extLst>
+                <a:ext uri="{FF2B5EF4-FFF2-40B4-BE49-F238E27FC236}">
+                  <a16:creationId xmlns:a16="http://schemas.microsoft.com/office/drawing/2014/main" id="{A6B3BCFC-8156-F659-62A9-DF0C50948A82}"/>
+                </a:ext>
+              </a:extLst>
+            </p:cNvPr>
+            <p:cNvSpPr/>
+            <p:nvPr/>
+          </p:nvSpPr>
+          <p:spPr>
+            <a:xfrm>
+              <a:off x="2033683" y="2914066"/>
+              <a:ext cx="891190" cy="891190"/>
+            </a:xfrm>
+            <a:prstGeom prst="ellipse">
+              <a:avLst/>
+            </a:prstGeom>
+            <a:solidFill>
+              <a:schemeClr val="bg1">
+                <a:lumMod val="85000"/>
+              </a:schemeClr>
+            </a:solidFill>
+            <a:ln>
+              <a:solidFill>
+                <a:schemeClr val="tx1">
+                  <a:lumMod val="50000"/>
+                  <a:lumOff val="50000"/>
+                </a:schemeClr>
+              </a:solidFill>
+            </a:ln>
+          </p:spPr>
+          <p:style>
+            <a:lnRef idx="2">
+              <a:schemeClr val="accent1">
+                <a:shade val="15000"/>
+              </a:schemeClr>
+            </a:lnRef>
+            <a:fillRef idx="1">
+              <a:schemeClr val="accent1"/>
+            </a:fillRef>
+            <a:effectRef idx="0">
+              <a:schemeClr val="accent1"/>
+            </a:effectRef>
+            <a:fontRef idx="minor">
+              <a:schemeClr val="lt1"/>
+            </a:fontRef>
+          </p:style>
+          <p:txBody>
+            <a:bodyPr rtlCol="0" anchor="ctr"/>
+            <a:lstStyle/>
+            <a:p>
+              <a:pPr algn="ctr"/>
+              <a:endParaRPr lang="en-US"/>
+            </a:p>
+          </p:txBody>
+        </p:sp>
+        <p:sp>
+          <p:nvSpPr>
+            <p:cNvPr id="9" name="Multiply 8">
+              <a:extLst>
+                <a:ext uri="{FF2B5EF4-FFF2-40B4-BE49-F238E27FC236}">
+                  <a16:creationId xmlns:a16="http://schemas.microsoft.com/office/drawing/2014/main" id="{BAD93941-6837-C146-07F7-CDD529CE9BFC}"/>
+                </a:ext>
+              </a:extLst>
+            </p:cNvPr>
+            <p:cNvSpPr/>
+            <p:nvPr/>
+          </p:nvSpPr>
+          <p:spPr>
+            <a:xfrm>
+              <a:off x="1871202" y="2751585"/>
+              <a:ext cx="1216152" cy="1216152"/>
+            </a:xfrm>
+            <a:prstGeom prst="mathMultiply">
+              <a:avLst>
+                <a:gd name="adj1" fmla="val 2711"/>
+              </a:avLst>
+            </a:prstGeom>
+            <a:solidFill>
+              <a:schemeClr val="tx1">
+                <a:lumMod val="50000"/>
+                <a:lumOff val="50000"/>
+              </a:schemeClr>
+            </a:solidFill>
+            <a:ln>
+              <a:noFill/>
+            </a:ln>
+          </p:spPr>
+          <p:style>
+            <a:lnRef idx="2">
+              <a:schemeClr val="accent1">
+                <a:shade val="15000"/>
+              </a:schemeClr>
+            </a:lnRef>
+            <a:fillRef idx="1">
+              <a:schemeClr val="accent1"/>
+            </a:fillRef>
+            <a:effectRef idx="0">
+              <a:schemeClr val="accent1"/>
+            </a:effectRef>
+            <a:fontRef idx="minor">
+              <a:schemeClr val="lt1"/>
+            </a:fontRef>
+          </p:style>
+          <p:txBody>
+            <a:bodyPr rtlCol="0" anchor="ctr"/>
+            <a:lstStyle/>
+            <a:p>
+              <a:pPr algn="ctr"/>
+              <a:endParaRPr lang="en-US"/>
+            </a:p>
+          </p:txBody>
+        </p:sp>
+      </p:grpSp>
+      <mc:AlternateContent xmlns:mc="http://schemas.openxmlformats.org/markup-compatibility/2006" xmlns:a14="http://schemas.microsoft.com/office/drawing/2010/main">
+        <mc:Choice Requires="a14">
+          <p:sp>
+            <p:nvSpPr>
+              <p:cNvPr id="11" name="Triangle 10">
+                <a:extLst>
+                  <a:ext uri="{FF2B5EF4-FFF2-40B4-BE49-F238E27FC236}">
+                    <a16:creationId xmlns:a16="http://schemas.microsoft.com/office/drawing/2014/main" id="{581E665E-9C95-693C-3530-1186086D5797}"/>
+                  </a:ext>
+                </a:extLst>
+              </p:cNvPr>
+              <p:cNvSpPr/>
+              <p:nvPr/>
+            </p:nvSpPr>
+            <p:spPr>
+              <a:xfrm rot="5400000">
+                <a:off x="3951730" y="1586455"/>
+                <a:ext cx="671673" cy="1043189"/>
+              </a:xfrm>
+              <a:prstGeom prst="triangle">
+                <a:avLst/>
+              </a:prstGeom>
+              <a:solidFill>
+                <a:schemeClr val="bg1">
+                  <a:lumMod val="85000"/>
+                </a:schemeClr>
+              </a:solidFill>
+              <a:ln>
+                <a:solidFill>
+                  <a:schemeClr val="tx1">
+                    <a:lumMod val="50000"/>
+                    <a:lumOff val="50000"/>
+                  </a:schemeClr>
+                </a:solidFill>
+              </a:ln>
+            </p:spPr>
+            <p:style>
+              <a:lnRef idx="2">
+                <a:schemeClr val="accent1">
+                  <a:shade val="15000"/>
+                </a:schemeClr>
+              </a:lnRef>
+              <a:fillRef idx="1">
+                <a:schemeClr val="accent1"/>
+              </a:fillRef>
+              <a:effectRef idx="0">
+                <a:schemeClr val="accent1"/>
+              </a:effectRef>
+              <a:fontRef idx="minor">
+                <a:schemeClr val="lt1"/>
+              </a:fontRef>
+            </p:style>
+            <p:txBody>
+              <a:bodyPr vert="vert270" rtlCol="0" anchor="ctr"/>
+              <a:lstStyle/>
+              <a:p>
+                <a:pPr algn="ctr"/>
+                <a14:m>
+                  <m:oMathPara xmlns:m="http://schemas.openxmlformats.org/officeDocument/2006/math">
+                    <m:oMathParaPr>
+                      <m:jc m:val="centerGroup"/>
+                    </m:oMathParaPr>
+                    <m:oMath xmlns:m="http://schemas.openxmlformats.org/officeDocument/2006/math">
+                      <m:r>
+                        <a:rPr lang="en-US" sz="2400" b="1" i="0" smtClean="0">
+                          <a:solidFill>
+                            <a:schemeClr val="tx1">
+                              <a:lumMod val="75000"/>
+                              <a:lumOff val="25000"/>
+                            </a:schemeClr>
+                          </a:solidFill>
+                          <a:latin typeface="Cambria Math" panose="02040503050406030204" pitchFamily="18" charset="0"/>
+                          <a:cs typeface="Arial Black" panose="020B0604020202020204" pitchFamily="34" charset="0"/>
+                        </a:rPr>
+                        <m:t>   </m:t>
+                      </m:r>
+                      <m:sSub>
+                        <m:sSubPr>
+                          <m:ctrlPr>
+                            <a:rPr lang="en-US" sz="2400" b="1" i="1" smtClean="0">
+                              <a:solidFill>
+                                <a:schemeClr val="tx1">
+                                  <a:lumMod val="75000"/>
+                                  <a:lumOff val="25000"/>
+                                </a:schemeClr>
+                              </a:solidFill>
+                              <a:latin typeface="Cambria Math" panose="02040503050406030204" pitchFamily="18" charset="0"/>
+                              <a:cs typeface="Arial Black" panose="020B0604020202020204" pitchFamily="34" charset="0"/>
+                            </a:rPr>
+                          </m:ctrlPr>
+                        </m:sSubPr>
+                        <m:e>
+                          <m:r>
+                            <a:rPr lang="en-US" sz="2400" b="1" i="0" smtClean="0">
+                              <a:solidFill>
+                                <a:schemeClr val="tx1">
+                                  <a:lumMod val="75000"/>
+                                  <a:lumOff val="25000"/>
+                                </a:schemeClr>
+                              </a:solidFill>
+                              <a:latin typeface="Cambria Math" panose="02040503050406030204" pitchFamily="18" charset="0"/>
+                              <a:cs typeface="Arial Black" panose="020B0604020202020204" pitchFamily="34" charset="0"/>
+                            </a:rPr>
+                            <m:t>𝐊</m:t>
+                          </m:r>
+                        </m:e>
+                        <m:sub>
+                          <m:r>
+                            <a:rPr lang="en-US" sz="2400" b="1" i="0" smtClean="0">
+                              <a:solidFill>
+                                <a:schemeClr val="tx1">
+                                  <a:lumMod val="75000"/>
+                                  <a:lumOff val="25000"/>
+                                </a:schemeClr>
+                              </a:solidFill>
+                              <a:latin typeface="Cambria Math" panose="02040503050406030204" pitchFamily="18" charset="0"/>
+                              <a:cs typeface="Arial Black" panose="020B0604020202020204" pitchFamily="34" charset="0"/>
+                            </a:rPr>
+                            <m:t>𝐩</m:t>
+                          </m:r>
+                        </m:sub>
+                      </m:sSub>
+                    </m:oMath>
+                  </m:oMathPara>
+                </a14:m>
+                <a:endParaRPr lang="en-US" sz="2400" b="1" dirty="0">
+                  <a:solidFill>
+                    <a:schemeClr val="tx1">
+                      <a:lumMod val="75000"/>
+                      <a:lumOff val="25000"/>
+                    </a:schemeClr>
+                  </a:solidFill>
+                  <a:latin typeface="Arial Black" panose="020B0604020202020204" pitchFamily="34" charset="0"/>
+                  <a:cs typeface="Arial Black" panose="020B0604020202020204" pitchFamily="34" charset="0"/>
+                </a:endParaRPr>
+              </a:p>
+            </p:txBody>
+          </p:sp>
+        </mc:Choice>
+        <mc:Fallback xmlns="">
+          <p:sp>
+            <p:nvSpPr>
+              <p:cNvPr id="11" name="Triangle 10">
+                <a:extLst>
+                  <a:ext uri="{FF2B5EF4-FFF2-40B4-BE49-F238E27FC236}">
+                    <a16:creationId xmlns:a16="http://schemas.microsoft.com/office/drawing/2014/main" id="{AAB6991D-4EED-F3DF-90A1-7AFADAE55396}"/>
+                  </a:ext>
+                </a:extLst>
+              </p:cNvPr>
+              <p:cNvSpPr>
+                <a:spLocks noRot="1" noChangeAspect="1" noMove="1" noResize="1" noEditPoints="1" noAdjustHandles="1" noChangeArrowheads="1" noChangeShapeType="1" noTextEdit="1"/>
+              </p:cNvSpPr>
+              <p:nvPr/>
+            </p:nvSpPr>
+            <p:spPr>
+              <a:xfrm rot="5400000">
+                <a:off x="3951730" y="1586455"/>
+                <a:ext cx="671673" cy="1043189"/>
+              </a:xfrm>
+              <a:prstGeom prst="triangle">
+                <a:avLst/>
+              </a:prstGeom>
+              <a:blipFill>
+                <a:blip r:embed="rId3"/>
+                <a:stretch>
+                  <a:fillRect l="-20930"/>
+                </a:stretch>
+              </a:blipFill>
+              <a:ln>
+                <a:solidFill>
+                  <a:schemeClr val="tx1">
+                    <a:lumMod val="50000"/>
+                    <a:lumOff val="50000"/>
+                  </a:schemeClr>
+                </a:solidFill>
+              </a:ln>
+            </p:spPr>
+            <p:txBody>
+              <a:bodyPr/>
+              <a:lstStyle/>
+              <a:p>
+                <a:r>
+                  <a:rPr lang="en-US">
+                    <a:noFill/>
+                  </a:rPr>
+                  <a:t> </a:t>
+                </a:r>
+              </a:p>
+            </p:txBody>
+          </p:sp>
+        </mc:Fallback>
+      </mc:AlternateContent>
+      <mc:AlternateContent xmlns:mc="http://schemas.openxmlformats.org/markup-compatibility/2006" xmlns:a14="http://schemas.microsoft.com/office/drawing/2010/main">
+        <mc:Choice Requires="a14">
+          <p:sp>
+            <p:nvSpPr>
+              <p:cNvPr id="12" name="Rectangle 11">
+                <a:extLst>
+                  <a:ext uri="{FF2B5EF4-FFF2-40B4-BE49-F238E27FC236}">
+                    <a16:creationId xmlns:a16="http://schemas.microsoft.com/office/drawing/2014/main" id="{5B3616C5-B9D2-BFDC-9EA4-0EA3AC70DCE8}"/>
+                  </a:ext>
+                </a:extLst>
+              </p:cNvPr>
+              <p:cNvSpPr/>
+              <p:nvPr/>
+            </p:nvSpPr>
+            <p:spPr>
+              <a:xfrm>
+                <a:off x="5225612" y="2827796"/>
+                <a:ext cx="2104780" cy="709137"/>
+              </a:xfrm>
+              <a:prstGeom prst="rect">
+                <a:avLst/>
+              </a:prstGeom>
+              <a:solidFill>
+                <a:schemeClr val="bg1">
+                  <a:lumMod val="85000"/>
+                </a:schemeClr>
+              </a:solidFill>
+              <a:ln>
+                <a:solidFill>
+                  <a:schemeClr val="tx1">
+                    <a:lumMod val="50000"/>
+                    <a:lumOff val="50000"/>
+                  </a:schemeClr>
+                </a:solidFill>
+              </a:ln>
+            </p:spPr>
+            <p:style>
+              <a:lnRef idx="2">
+                <a:schemeClr val="accent1">
+                  <a:shade val="15000"/>
+                </a:schemeClr>
+              </a:lnRef>
+              <a:fillRef idx="1">
+                <a:schemeClr val="accent1"/>
+              </a:fillRef>
+              <a:effectRef idx="0">
+                <a:schemeClr val="accent1"/>
+              </a:effectRef>
+              <a:fontRef idx="minor">
+                <a:schemeClr val="lt1"/>
+              </a:fontRef>
+            </p:style>
+            <p:txBody>
+              <a:bodyPr rtlCol="0" anchor="ctr"/>
+              <a:lstStyle/>
+              <a:p>
+                <a:pPr algn="ctr"/>
+                <a:r>
+                  <a:rPr lang="en-US" sz="2400" b="1" dirty="0">
+                    <a:solidFill>
+                      <a:schemeClr val="tx1">
+                        <a:lumMod val="75000"/>
+                        <a:lumOff val="25000"/>
+                      </a:schemeClr>
+                    </a:solidFill>
+                    <a:latin typeface="Arial Black" panose="020B0604020202020204" pitchFamily="34" charset="0"/>
+                    <a:cs typeface="Arial Black" panose="020B0604020202020204" pitchFamily="34" charset="0"/>
+                  </a:rPr>
+                  <a:t>I    </a:t>
+                </a:r>
+                <a14:m>
+                  <m:oMath xmlns:m="http://schemas.openxmlformats.org/officeDocument/2006/math">
+                    <m:nary>
+                      <m:naryPr>
+                        <m:limLoc m:val="undOvr"/>
+                        <m:ctrlPr>
+                          <a:rPr lang="en-US" sz="2400" i="1" smtClean="0">
+                            <a:solidFill>
+                              <a:schemeClr val="tx1">
+                                <a:lumMod val="75000"/>
+                                <a:lumOff val="25000"/>
+                              </a:schemeClr>
+                            </a:solidFill>
+                            <a:latin typeface="Cambria Math" panose="02040503050406030204" pitchFamily="18" charset="0"/>
+                            <a:cs typeface="Arial Black" panose="020B0604020202020204" pitchFamily="34" charset="0"/>
+                          </a:rPr>
+                        </m:ctrlPr>
+                      </m:naryPr>
+                      <m:sub>
+                        <m:r>
+                          <m:rPr>
+                            <m:brk m:alnAt="24"/>
+                          </m:rPr>
+                          <a:rPr lang="en-US" sz="2400" b="0" i="1" smtClean="0">
+                            <a:solidFill>
+                              <a:schemeClr val="tx1">
+                                <a:lumMod val="75000"/>
+                                <a:lumOff val="25000"/>
+                              </a:schemeClr>
+                            </a:solidFill>
+                            <a:latin typeface="Cambria Math" panose="02040503050406030204" pitchFamily="18" charset="0"/>
+                            <a:cs typeface="Arial Black" panose="020B0604020202020204" pitchFamily="34" charset="0"/>
+                          </a:rPr>
+                          <m:t>0</m:t>
+                        </m:r>
+                      </m:sub>
+                      <m:sup>
+                        <m:r>
+                          <a:rPr lang="en-US" sz="2400" b="0" i="1" smtClean="0">
+                            <a:solidFill>
+                              <a:schemeClr val="tx1">
+                                <a:lumMod val="75000"/>
+                                <a:lumOff val="25000"/>
+                              </a:schemeClr>
+                            </a:solidFill>
+                            <a:latin typeface="Cambria Math" panose="02040503050406030204" pitchFamily="18" charset="0"/>
+                            <a:cs typeface="Arial Black" panose="020B0604020202020204" pitchFamily="34" charset="0"/>
+                          </a:rPr>
+                          <m:t>𝑡</m:t>
+                        </m:r>
+                      </m:sup>
+                      <m:e>
+                        <m:r>
+                          <a:rPr lang="en-US" sz="2400" b="0" i="1" smtClean="0">
+                            <a:solidFill>
+                              <a:schemeClr val="tx1">
+                                <a:lumMod val="75000"/>
+                                <a:lumOff val="25000"/>
+                              </a:schemeClr>
+                            </a:solidFill>
+                            <a:latin typeface="Cambria Math" panose="02040503050406030204" pitchFamily="18" charset="0"/>
+                            <a:cs typeface="Arial Black" panose="020B0604020202020204" pitchFamily="34" charset="0"/>
+                          </a:rPr>
+                          <m:t>𝑒</m:t>
+                        </m:r>
+                        <m:r>
+                          <a:rPr lang="en-US" sz="2400" b="0" i="1" smtClean="0">
+                            <a:solidFill>
+                              <a:schemeClr val="tx1">
+                                <a:lumMod val="75000"/>
+                                <a:lumOff val="25000"/>
+                              </a:schemeClr>
+                            </a:solidFill>
+                            <a:latin typeface="Cambria Math" panose="02040503050406030204" pitchFamily="18" charset="0"/>
+                            <a:cs typeface="Arial Black" panose="020B0604020202020204" pitchFamily="34" charset="0"/>
+                          </a:rPr>
+                          <m:t>(</m:t>
+                        </m:r>
+                        <m:r>
+                          <a:rPr lang="en-US" sz="2400" b="0" i="1" smtClean="0">
+                            <a:solidFill>
+                              <a:schemeClr val="tx1">
+                                <a:lumMod val="75000"/>
+                                <a:lumOff val="25000"/>
+                              </a:schemeClr>
+                            </a:solidFill>
+                            <a:latin typeface="Cambria Math" panose="02040503050406030204" pitchFamily="18" charset="0"/>
+                            <a:cs typeface="Arial Black" panose="020B0604020202020204" pitchFamily="34" charset="0"/>
+                          </a:rPr>
+                          <m:t>𝜏</m:t>
+                        </m:r>
+                        <m:r>
+                          <a:rPr lang="en-US" sz="2400" b="0" i="1" smtClean="0">
+                            <a:solidFill>
+                              <a:schemeClr val="tx1">
+                                <a:lumMod val="75000"/>
+                                <a:lumOff val="25000"/>
+                              </a:schemeClr>
+                            </a:solidFill>
+                            <a:latin typeface="Cambria Math" panose="02040503050406030204" pitchFamily="18" charset="0"/>
+                            <a:cs typeface="Arial Black" panose="020B0604020202020204" pitchFamily="34" charset="0"/>
+                          </a:rPr>
+                          <m:t>)</m:t>
+                        </m:r>
+                        <m:r>
+                          <a:rPr lang="en-US" sz="2400" b="0" i="1" smtClean="0">
+                            <a:solidFill>
+                              <a:schemeClr val="tx1">
+                                <a:lumMod val="75000"/>
+                                <a:lumOff val="25000"/>
+                              </a:schemeClr>
+                            </a:solidFill>
+                            <a:latin typeface="Cambria Math" panose="02040503050406030204" pitchFamily="18" charset="0"/>
+                            <a:cs typeface="Arial Black" panose="020B0604020202020204" pitchFamily="34" charset="0"/>
+                          </a:rPr>
+                          <m:t>𝑑</m:t>
+                        </m:r>
+                        <m:r>
+                          <a:rPr lang="en-US" sz="2400" b="0" i="1" smtClean="0">
+                            <a:solidFill>
+                              <a:schemeClr val="tx1">
+                                <a:lumMod val="75000"/>
+                                <a:lumOff val="25000"/>
+                              </a:schemeClr>
+                            </a:solidFill>
+                            <a:latin typeface="Cambria Math" panose="02040503050406030204" pitchFamily="18" charset="0"/>
+                            <a:cs typeface="Arial Black" panose="020B0604020202020204" pitchFamily="34" charset="0"/>
+                          </a:rPr>
+                          <m:t>𝜏</m:t>
+                        </m:r>
+                      </m:e>
+                    </m:nary>
+                  </m:oMath>
+                </a14:m>
+                <a:endParaRPr lang="en-US" sz="3200" i="1" dirty="0">
+                  <a:solidFill>
+                    <a:schemeClr val="tx1">
+                      <a:lumMod val="75000"/>
+                      <a:lumOff val="25000"/>
+                    </a:schemeClr>
+                  </a:solidFill>
+                  <a:latin typeface="Arial Black" panose="020B0604020202020204" pitchFamily="34" charset="0"/>
+                  <a:cs typeface="Arial Black" panose="020B0604020202020204" pitchFamily="34" charset="0"/>
+                </a:endParaRPr>
+              </a:p>
+            </p:txBody>
+          </p:sp>
+        </mc:Choice>
+        <mc:Fallback xmlns="">
+          <p:sp>
+            <p:nvSpPr>
+              <p:cNvPr id="12" name="Rectangle 11">
+                <a:extLst>
+                  <a:ext uri="{FF2B5EF4-FFF2-40B4-BE49-F238E27FC236}">
+                    <a16:creationId xmlns:a16="http://schemas.microsoft.com/office/drawing/2014/main" id="{A9548E43-F5BA-CAEE-B2F0-010B5C08D2BE}"/>
+                  </a:ext>
+                </a:extLst>
+              </p:cNvPr>
+              <p:cNvSpPr>
+                <a:spLocks noRot="1" noChangeAspect="1" noMove="1" noResize="1" noEditPoints="1" noAdjustHandles="1" noChangeArrowheads="1" noChangeShapeType="1" noTextEdit="1"/>
+              </p:cNvSpPr>
+              <p:nvPr/>
+            </p:nvSpPr>
+            <p:spPr>
+              <a:xfrm>
+                <a:off x="5225612" y="2827796"/>
+                <a:ext cx="2104780" cy="709137"/>
+              </a:xfrm>
+              <a:prstGeom prst="rect">
+                <a:avLst/>
+              </a:prstGeom>
+              <a:blipFill>
+                <a:blip r:embed="rId4"/>
+                <a:stretch>
+                  <a:fillRect t="-81034" b="-134483"/>
+                </a:stretch>
+              </a:blipFill>
+              <a:ln>
+                <a:solidFill>
+                  <a:schemeClr val="tx1">
+                    <a:lumMod val="50000"/>
+                    <a:lumOff val="50000"/>
+                  </a:schemeClr>
+                </a:solidFill>
+              </a:ln>
+            </p:spPr>
+            <p:txBody>
+              <a:bodyPr/>
+              <a:lstStyle/>
+              <a:p>
+                <a:r>
+                  <a:rPr lang="en-US">
+                    <a:noFill/>
+                  </a:rPr>
+                  <a:t> </a:t>
+                </a:r>
+              </a:p>
+            </p:txBody>
+          </p:sp>
+        </mc:Fallback>
+      </mc:AlternateContent>
+      <mc:AlternateContent xmlns:mc="http://schemas.openxmlformats.org/markup-compatibility/2006" xmlns:a14="http://schemas.microsoft.com/office/drawing/2010/main">
+        <mc:Choice Requires="a14">
+          <p:sp>
+            <p:nvSpPr>
+              <p:cNvPr id="13" name="Rectangle 12">
+                <a:extLst>
+                  <a:ext uri="{FF2B5EF4-FFF2-40B4-BE49-F238E27FC236}">
+                    <a16:creationId xmlns:a16="http://schemas.microsoft.com/office/drawing/2014/main" id="{68188D49-D80B-4F3A-7EBE-C763B104BC7A}"/>
+                  </a:ext>
+                </a:extLst>
+              </p:cNvPr>
+              <p:cNvSpPr/>
+              <p:nvPr/>
+            </p:nvSpPr>
+            <p:spPr>
+              <a:xfrm>
+                <a:off x="5225612" y="3907408"/>
+                <a:ext cx="2104780" cy="709137"/>
+              </a:xfrm>
+              <a:prstGeom prst="rect">
+                <a:avLst/>
+              </a:prstGeom>
+              <a:solidFill>
+                <a:schemeClr val="bg1">
+                  <a:lumMod val="85000"/>
+                </a:schemeClr>
+              </a:solidFill>
+              <a:ln>
+                <a:solidFill>
+                  <a:schemeClr val="tx1">
+                    <a:lumMod val="50000"/>
+                    <a:lumOff val="50000"/>
+                  </a:schemeClr>
+                </a:solidFill>
+              </a:ln>
+            </p:spPr>
+            <p:style>
+              <a:lnRef idx="2">
+                <a:schemeClr val="accent1">
+                  <a:shade val="15000"/>
+                </a:schemeClr>
+              </a:lnRef>
+              <a:fillRef idx="1">
+                <a:schemeClr val="accent1"/>
+              </a:fillRef>
+              <a:effectRef idx="0">
+                <a:schemeClr val="accent1"/>
+              </a:effectRef>
+              <a:fontRef idx="minor">
+                <a:schemeClr val="lt1"/>
+              </a:fontRef>
+            </p:style>
+            <p:txBody>
+              <a:bodyPr rtlCol="0" anchor="ctr"/>
+              <a:lstStyle/>
+              <a:p>
+                <a:pPr algn="ctr"/>
+                <a:r>
+                  <a:rPr lang="en-US" sz="2400" b="1" dirty="0">
+                    <a:solidFill>
+                      <a:schemeClr val="tx1">
+                        <a:lumMod val="75000"/>
+                        <a:lumOff val="25000"/>
+                      </a:schemeClr>
+                    </a:solidFill>
+                    <a:latin typeface="Arial Black" panose="020B0604020202020204" pitchFamily="34" charset="0"/>
+                    <a:cs typeface="Arial Black" panose="020B0604020202020204" pitchFamily="34" charset="0"/>
+                  </a:rPr>
+                  <a:t>D       </a:t>
+                </a:r>
+                <a14:m>
+                  <m:oMath xmlns:m="http://schemas.openxmlformats.org/officeDocument/2006/math">
+                    <m:f>
+                      <m:fPr>
+                        <m:ctrlPr>
+                          <a:rPr lang="en-US" sz="2400" i="1" smtClean="0">
+                            <a:solidFill>
+                              <a:schemeClr val="tx1">
+                                <a:lumMod val="75000"/>
+                                <a:lumOff val="25000"/>
+                              </a:schemeClr>
+                            </a:solidFill>
+                            <a:latin typeface="Cambria Math" panose="02040503050406030204" pitchFamily="18" charset="0"/>
+                            <a:cs typeface="Arial Black" panose="020B0604020202020204" pitchFamily="34" charset="0"/>
+                          </a:rPr>
+                        </m:ctrlPr>
+                      </m:fPr>
+                      <m:num>
+                        <m:r>
+                          <a:rPr lang="en-US" sz="2400" b="0" i="1" smtClean="0">
+                            <a:solidFill>
+                              <a:schemeClr val="tx1">
+                                <a:lumMod val="75000"/>
+                                <a:lumOff val="25000"/>
+                              </a:schemeClr>
+                            </a:solidFill>
+                            <a:latin typeface="Cambria Math" panose="02040503050406030204" pitchFamily="18" charset="0"/>
+                            <a:cs typeface="Arial Black" panose="020B0604020202020204" pitchFamily="34" charset="0"/>
+                          </a:rPr>
+                          <m:t>𝑑</m:t>
+                        </m:r>
+                      </m:num>
+                      <m:den>
+                        <m:r>
+                          <a:rPr lang="en-US" sz="2400" b="0" i="1" smtClean="0">
+                            <a:solidFill>
+                              <a:schemeClr val="tx1">
+                                <a:lumMod val="75000"/>
+                                <a:lumOff val="25000"/>
+                              </a:schemeClr>
+                            </a:solidFill>
+                            <a:latin typeface="Cambria Math" panose="02040503050406030204" pitchFamily="18" charset="0"/>
+                            <a:cs typeface="Arial Black" panose="020B0604020202020204" pitchFamily="34" charset="0"/>
+                          </a:rPr>
+                          <m:t>𝑑𝑡</m:t>
+                        </m:r>
+                      </m:den>
+                    </m:f>
+                    <m:r>
+                      <a:rPr lang="en-US" sz="2400" b="0" i="1" smtClean="0">
+                        <a:solidFill>
+                          <a:schemeClr val="tx1">
+                            <a:lumMod val="75000"/>
+                            <a:lumOff val="25000"/>
+                          </a:schemeClr>
+                        </a:solidFill>
+                        <a:latin typeface="Cambria Math" panose="02040503050406030204" pitchFamily="18" charset="0"/>
+                        <a:cs typeface="Arial Black" panose="020B0604020202020204" pitchFamily="34" charset="0"/>
+                      </a:rPr>
+                      <m:t>𝑒</m:t>
+                    </m:r>
+                    <m:r>
+                      <a:rPr lang="en-US" sz="2400" b="0" i="1" smtClean="0">
+                        <a:solidFill>
+                          <a:schemeClr val="tx1">
+                            <a:lumMod val="75000"/>
+                            <a:lumOff val="25000"/>
+                          </a:schemeClr>
+                        </a:solidFill>
+                        <a:latin typeface="Cambria Math" panose="02040503050406030204" pitchFamily="18" charset="0"/>
+                        <a:cs typeface="Arial Black" panose="020B0604020202020204" pitchFamily="34" charset="0"/>
+                      </a:rPr>
+                      <m:t>(</m:t>
+                    </m:r>
+                    <m:r>
+                      <a:rPr lang="en-US" sz="2400" b="0" i="1" smtClean="0">
+                        <a:solidFill>
+                          <a:schemeClr val="tx1">
+                            <a:lumMod val="75000"/>
+                            <a:lumOff val="25000"/>
+                          </a:schemeClr>
+                        </a:solidFill>
+                        <a:latin typeface="Cambria Math" panose="02040503050406030204" pitchFamily="18" charset="0"/>
+                        <a:cs typeface="Arial Black" panose="020B0604020202020204" pitchFamily="34" charset="0"/>
+                      </a:rPr>
+                      <m:t>𝑡</m:t>
+                    </m:r>
+                    <m:r>
+                      <a:rPr lang="en-US" sz="2400" b="0" i="1" smtClean="0">
+                        <a:solidFill>
+                          <a:schemeClr val="tx1">
+                            <a:lumMod val="75000"/>
+                            <a:lumOff val="25000"/>
+                          </a:schemeClr>
+                        </a:solidFill>
+                        <a:latin typeface="Cambria Math" panose="02040503050406030204" pitchFamily="18" charset="0"/>
+                        <a:cs typeface="Arial Black" panose="020B0604020202020204" pitchFamily="34" charset="0"/>
+                      </a:rPr>
+                      <m:t>)</m:t>
+                    </m:r>
+                  </m:oMath>
+                </a14:m>
+                <a:endParaRPr lang="en-US" sz="3200" i="1" dirty="0">
+                  <a:solidFill>
+                    <a:schemeClr val="tx1">
+                      <a:lumMod val="75000"/>
+                      <a:lumOff val="25000"/>
+                    </a:schemeClr>
+                  </a:solidFill>
+                  <a:latin typeface="Arial Black" panose="020B0604020202020204" pitchFamily="34" charset="0"/>
+                  <a:cs typeface="Arial Black" panose="020B0604020202020204" pitchFamily="34" charset="0"/>
+                </a:endParaRPr>
+              </a:p>
+            </p:txBody>
+          </p:sp>
+        </mc:Choice>
+        <mc:Fallback xmlns="">
+          <p:sp>
+            <p:nvSpPr>
+              <p:cNvPr id="13" name="Rectangle 12">
+                <a:extLst>
+                  <a:ext uri="{FF2B5EF4-FFF2-40B4-BE49-F238E27FC236}">
+                    <a16:creationId xmlns:a16="http://schemas.microsoft.com/office/drawing/2014/main" id="{5EE4FE36-C929-FFD9-DFEB-AD6567302AA4}"/>
+                  </a:ext>
+                </a:extLst>
+              </p:cNvPr>
+              <p:cNvSpPr>
+                <a:spLocks noRot="1" noChangeAspect="1" noMove="1" noResize="1" noEditPoints="1" noAdjustHandles="1" noChangeArrowheads="1" noChangeShapeType="1" noTextEdit="1"/>
+              </p:cNvSpPr>
+              <p:nvPr/>
+            </p:nvSpPr>
+            <p:spPr>
+              <a:xfrm>
+                <a:off x="5225612" y="3907408"/>
+                <a:ext cx="2104780" cy="709137"/>
+              </a:xfrm>
+              <a:prstGeom prst="rect">
+                <a:avLst/>
+              </a:prstGeom>
+              <a:blipFill>
+                <a:blip r:embed="rId5"/>
+                <a:stretch>
+                  <a:fillRect l="-595"/>
+                </a:stretch>
+              </a:blipFill>
+              <a:ln>
+                <a:solidFill>
+                  <a:schemeClr val="tx1">
+                    <a:lumMod val="50000"/>
+                    <a:lumOff val="50000"/>
+                  </a:schemeClr>
+                </a:solidFill>
+              </a:ln>
+            </p:spPr>
+            <p:txBody>
+              <a:bodyPr/>
+              <a:lstStyle/>
+              <a:p>
+                <a:r>
+                  <a:rPr lang="en-US">
+                    <a:noFill/>
+                  </a:rPr>
+                  <a:t> </a:t>
+                </a:r>
+              </a:p>
+            </p:txBody>
+          </p:sp>
+        </mc:Fallback>
+      </mc:AlternateContent>
+      <mc:AlternateContent xmlns:mc="http://schemas.openxmlformats.org/markup-compatibility/2006" xmlns:a14="http://schemas.microsoft.com/office/drawing/2010/main">
+        <mc:Choice Requires="a14">
+          <p:sp>
+            <p:nvSpPr>
+              <p:cNvPr id="14" name="Triangle 13">
+                <a:extLst>
+                  <a:ext uri="{FF2B5EF4-FFF2-40B4-BE49-F238E27FC236}">
+                    <a16:creationId xmlns:a16="http://schemas.microsoft.com/office/drawing/2014/main" id="{8008D610-2FC5-651D-864E-4B56213BC19B}"/>
+                  </a:ext>
+                </a:extLst>
+              </p:cNvPr>
+              <p:cNvSpPr/>
+              <p:nvPr/>
+            </p:nvSpPr>
+            <p:spPr>
+              <a:xfrm rot="5400000">
+                <a:off x="3963181" y="2663353"/>
+                <a:ext cx="671673" cy="1043189"/>
+              </a:xfrm>
+              <a:prstGeom prst="triangle">
+                <a:avLst/>
+              </a:prstGeom>
+              <a:solidFill>
+                <a:schemeClr val="bg1">
+                  <a:lumMod val="85000"/>
+                </a:schemeClr>
+              </a:solidFill>
+              <a:ln>
+                <a:solidFill>
+                  <a:schemeClr val="tx1">
+                    <a:lumMod val="50000"/>
+                    <a:lumOff val="50000"/>
+                  </a:schemeClr>
+                </a:solidFill>
+              </a:ln>
+            </p:spPr>
+            <p:style>
+              <a:lnRef idx="2">
+                <a:schemeClr val="accent1">
+                  <a:shade val="15000"/>
+                </a:schemeClr>
+              </a:lnRef>
+              <a:fillRef idx="1">
+                <a:schemeClr val="accent1"/>
+              </a:fillRef>
+              <a:effectRef idx="0">
+                <a:schemeClr val="accent1"/>
+              </a:effectRef>
+              <a:fontRef idx="minor">
+                <a:schemeClr val="lt1"/>
+              </a:fontRef>
+            </p:style>
+            <p:txBody>
+              <a:bodyPr vert="vert270" rtlCol="0" anchor="ctr"/>
+              <a:lstStyle/>
+              <a:p>
+                <a:pPr algn="ctr"/>
+                <a14:m>
+                  <m:oMathPara xmlns:m="http://schemas.openxmlformats.org/officeDocument/2006/math">
+                    <m:oMathParaPr>
+                      <m:jc m:val="centerGroup"/>
+                    </m:oMathParaPr>
+                    <m:oMath xmlns:m="http://schemas.openxmlformats.org/officeDocument/2006/math">
+                      <m:r>
+                        <a:rPr lang="en-US" sz="2400" b="1" i="0" smtClean="0">
+                          <a:solidFill>
+                            <a:schemeClr val="tx1">
+                              <a:lumMod val="75000"/>
+                              <a:lumOff val="25000"/>
+                            </a:schemeClr>
+                          </a:solidFill>
+                          <a:latin typeface="Cambria Math" panose="02040503050406030204" pitchFamily="18" charset="0"/>
+                          <a:cs typeface="Arial Black" panose="020B0604020202020204" pitchFamily="34" charset="0"/>
+                        </a:rPr>
+                        <m:t>   </m:t>
+                      </m:r>
+                      <m:sSub>
+                        <m:sSubPr>
+                          <m:ctrlPr>
+                            <a:rPr lang="en-US" sz="2400" b="1" i="1" smtClean="0">
+                              <a:solidFill>
+                                <a:schemeClr val="tx1">
+                                  <a:lumMod val="75000"/>
+                                  <a:lumOff val="25000"/>
+                                </a:schemeClr>
+                              </a:solidFill>
+                              <a:latin typeface="Cambria Math" panose="02040503050406030204" pitchFamily="18" charset="0"/>
+                              <a:cs typeface="Arial Black" panose="020B0604020202020204" pitchFamily="34" charset="0"/>
+                            </a:rPr>
+                          </m:ctrlPr>
+                        </m:sSubPr>
+                        <m:e>
+                          <m:r>
+                            <a:rPr lang="en-US" sz="2400" b="1" i="0" smtClean="0">
+                              <a:solidFill>
+                                <a:schemeClr val="tx1">
+                                  <a:lumMod val="75000"/>
+                                  <a:lumOff val="25000"/>
+                                </a:schemeClr>
+                              </a:solidFill>
+                              <a:latin typeface="Cambria Math" panose="02040503050406030204" pitchFamily="18" charset="0"/>
+                              <a:cs typeface="Arial Black" panose="020B0604020202020204" pitchFamily="34" charset="0"/>
+                            </a:rPr>
+                            <m:t>𝐊</m:t>
+                          </m:r>
+                        </m:e>
+                        <m:sub>
+                          <m:r>
+                            <m:rPr>
+                              <m:sty m:val="p"/>
+                            </m:rPr>
+                            <a:rPr lang="en-US" sz="2400" b="1" i="0" smtClean="0">
+                              <a:solidFill>
+                                <a:schemeClr val="tx1">
+                                  <a:lumMod val="75000"/>
+                                  <a:lumOff val="25000"/>
+                                </a:schemeClr>
+                              </a:solidFill>
+                              <a:latin typeface="Cambria Math" panose="02040503050406030204" pitchFamily="18" charset="0"/>
+                              <a:cs typeface="Arial Black" panose="020B0604020202020204" pitchFamily="34" charset="0"/>
+                            </a:rPr>
+                            <m:t>i</m:t>
+                          </m:r>
+                        </m:sub>
+                      </m:sSub>
+                    </m:oMath>
+                  </m:oMathPara>
+                </a14:m>
+                <a:endParaRPr lang="en-US" sz="2400" b="1" dirty="0">
+                  <a:solidFill>
+                    <a:schemeClr val="tx1">
+                      <a:lumMod val="75000"/>
+                      <a:lumOff val="25000"/>
+                    </a:schemeClr>
+                  </a:solidFill>
+                  <a:latin typeface="Arial Black" panose="020B0604020202020204" pitchFamily="34" charset="0"/>
+                  <a:cs typeface="Arial Black" panose="020B0604020202020204" pitchFamily="34" charset="0"/>
+                </a:endParaRPr>
+              </a:p>
+            </p:txBody>
+          </p:sp>
+        </mc:Choice>
+        <mc:Fallback xmlns="">
+          <p:sp>
+            <p:nvSpPr>
+              <p:cNvPr id="14" name="Triangle 13">
+                <a:extLst>
+                  <a:ext uri="{FF2B5EF4-FFF2-40B4-BE49-F238E27FC236}">
+                    <a16:creationId xmlns:a16="http://schemas.microsoft.com/office/drawing/2014/main" id="{B280C401-B14C-B848-04EC-4F598F764C01}"/>
+                  </a:ext>
+                </a:extLst>
+              </p:cNvPr>
+              <p:cNvSpPr>
+                <a:spLocks noRot="1" noChangeAspect="1" noMove="1" noResize="1" noEditPoints="1" noAdjustHandles="1" noChangeArrowheads="1" noChangeShapeType="1" noTextEdit="1"/>
+              </p:cNvSpPr>
+              <p:nvPr/>
+            </p:nvSpPr>
+            <p:spPr>
+              <a:xfrm rot="5400000">
+                <a:off x="3963181" y="2663353"/>
+                <a:ext cx="671673" cy="1043189"/>
+              </a:xfrm>
+              <a:prstGeom prst="triangle">
+                <a:avLst/>
+              </a:prstGeom>
+              <a:blipFill>
+                <a:blip r:embed="rId6"/>
+                <a:stretch>
+                  <a:fillRect l="-18605"/>
+                </a:stretch>
+              </a:blipFill>
+              <a:ln>
+                <a:solidFill>
+                  <a:schemeClr val="tx1">
+                    <a:lumMod val="50000"/>
+                    <a:lumOff val="50000"/>
+                  </a:schemeClr>
+                </a:solidFill>
+              </a:ln>
+            </p:spPr>
+            <p:txBody>
+              <a:bodyPr/>
+              <a:lstStyle/>
+              <a:p>
+                <a:r>
+                  <a:rPr lang="en-US">
+                    <a:noFill/>
+                  </a:rPr>
+                  <a:t> </a:t>
+                </a:r>
+              </a:p>
+            </p:txBody>
+          </p:sp>
+        </mc:Fallback>
+      </mc:AlternateContent>
+      <mc:AlternateContent xmlns:mc="http://schemas.openxmlformats.org/markup-compatibility/2006" xmlns:a14="http://schemas.microsoft.com/office/drawing/2010/main">
+        <mc:Choice Requires="a14">
+          <p:sp>
+            <p:nvSpPr>
+              <p:cNvPr id="15" name="Triangle 14">
+                <a:extLst>
+                  <a:ext uri="{FF2B5EF4-FFF2-40B4-BE49-F238E27FC236}">
+                    <a16:creationId xmlns:a16="http://schemas.microsoft.com/office/drawing/2014/main" id="{06AB1AAD-4D04-F733-4E99-8F75C5986799}"/>
+                  </a:ext>
+                </a:extLst>
+              </p:cNvPr>
+              <p:cNvSpPr/>
+              <p:nvPr/>
+            </p:nvSpPr>
+            <p:spPr>
+              <a:xfrm rot="5400000">
+                <a:off x="3951731" y="3740251"/>
+                <a:ext cx="671673" cy="1043189"/>
+              </a:xfrm>
+              <a:prstGeom prst="triangle">
+                <a:avLst/>
+              </a:prstGeom>
+              <a:solidFill>
+                <a:schemeClr val="bg1">
+                  <a:lumMod val="85000"/>
+                </a:schemeClr>
+              </a:solidFill>
+              <a:ln>
+                <a:solidFill>
+                  <a:schemeClr val="tx1">
+                    <a:lumMod val="50000"/>
+                    <a:lumOff val="50000"/>
+                  </a:schemeClr>
+                </a:solidFill>
+              </a:ln>
+            </p:spPr>
+            <p:style>
+              <a:lnRef idx="2">
+                <a:schemeClr val="accent1">
+                  <a:shade val="15000"/>
+                </a:schemeClr>
+              </a:lnRef>
+              <a:fillRef idx="1">
+                <a:schemeClr val="accent1"/>
+              </a:fillRef>
+              <a:effectRef idx="0">
+                <a:schemeClr val="accent1"/>
+              </a:effectRef>
+              <a:fontRef idx="minor">
+                <a:schemeClr val="lt1"/>
+              </a:fontRef>
+            </p:style>
+            <p:txBody>
+              <a:bodyPr vert="vert270" rtlCol="0" anchor="ctr"/>
+              <a:lstStyle/>
+              <a:p>
+                <a:pPr algn="ctr"/>
+                <a14:m>
+                  <m:oMathPara xmlns:m="http://schemas.openxmlformats.org/officeDocument/2006/math">
+                    <m:oMathParaPr>
+                      <m:jc m:val="centerGroup"/>
+                    </m:oMathParaPr>
+                    <m:oMath xmlns:m="http://schemas.openxmlformats.org/officeDocument/2006/math">
+                      <m:r>
+                        <a:rPr lang="en-US" sz="2400" b="1" i="0" smtClean="0">
+                          <a:solidFill>
+                            <a:schemeClr val="tx1">
+                              <a:lumMod val="75000"/>
+                              <a:lumOff val="25000"/>
+                            </a:schemeClr>
+                          </a:solidFill>
+                          <a:latin typeface="Cambria Math" panose="02040503050406030204" pitchFamily="18" charset="0"/>
+                          <a:cs typeface="Arial Black" panose="020B0604020202020204" pitchFamily="34" charset="0"/>
+                        </a:rPr>
+                        <m:t>   </m:t>
+                      </m:r>
+                      <m:sSub>
+                        <m:sSubPr>
+                          <m:ctrlPr>
+                            <a:rPr lang="en-US" sz="2400" b="1" i="1" smtClean="0">
+                              <a:solidFill>
+                                <a:schemeClr val="tx1">
+                                  <a:lumMod val="75000"/>
+                                  <a:lumOff val="25000"/>
+                                </a:schemeClr>
+                              </a:solidFill>
+                              <a:latin typeface="Cambria Math" panose="02040503050406030204" pitchFamily="18" charset="0"/>
+                              <a:cs typeface="Arial Black" panose="020B0604020202020204" pitchFamily="34" charset="0"/>
+                            </a:rPr>
+                          </m:ctrlPr>
+                        </m:sSubPr>
+                        <m:e>
+                          <m:r>
+                            <a:rPr lang="en-US" sz="2400" b="1" i="0" smtClean="0">
+                              <a:solidFill>
+                                <a:schemeClr val="tx1">
+                                  <a:lumMod val="75000"/>
+                                  <a:lumOff val="25000"/>
+                                </a:schemeClr>
+                              </a:solidFill>
+                              <a:latin typeface="Cambria Math" panose="02040503050406030204" pitchFamily="18" charset="0"/>
+                              <a:cs typeface="Arial Black" panose="020B0604020202020204" pitchFamily="34" charset="0"/>
+                            </a:rPr>
+                            <m:t>𝐊</m:t>
+                          </m:r>
+                        </m:e>
+                        <m:sub>
+                          <m:r>
+                            <m:rPr>
+                              <m:sty m:val="p"/>
+                            </m:rPr>
+                            <a:rPr lang="en-US" sz="2400" b="1" i="0" smtClean="0">
+                              <a:solidFill>
+                                <a:schemeClr val="tx1">
+                                  <a:lumMod val="75000"/>
+                                  <a:lumOff val="25000"/>
+                                </a:schemeClr>
+                              </a:solidFill>
+                              <a:latin typeface="Cambria Math" panose="02040503050406030204" pitchFamily="18" charset="0"/>
+                              <a:cs typeface="Arial Black" panose="020B0604020202020204" pitchFamily="34" charset="0"/>
+                            </a:rPr>
+                            <m:t>d</m:t>
+                          </m:r>
+                        </m:sub>
+                      </m:sSub>
+                    </m:oMath>
+                  </m:oMathPara>
+                </a14:m>
+                <a:endParaRPr lang="en-US" sz="2400" b="1" dirty="0">
+                  <a:solidFill>
+                    <a:schemeClr val="tx1">
+                      <a:lumMod val="75000"/>
+                      <a:lumOff val="25000"/>
+                    </a:schemeClr>
+                  </a:solidFill>
+                  <a:latin typeface="Arial Black" panose="020B0604020202020204" pitchFamily="34" charset="0"/>
+                  <a:cs typeface="Arial Black" panose="020B0604020202020204" pitchFamily="34" charset="0"/>
+                </a:endParaRPr>
+              </a:p>
+            </p:txBody>
+          </p:sp>
+        </mc:Choice>
+        <mc:Fallback xmlns="">
+          <p:sp>
+            <p:nvSpPr>
+              <p:cNvPr id="15" name="Triangle 14">
+                <a:extLst>
+                  <a:ext uri="{FF2B5EF4-FFF2-40B4-BE49-F238E27FC236}">
+                    <a16:creationId xmlns:a16="http://schemas.microsoft.com/office/drawing/2014/main" id="{E0825100-377A-9407-1909-1D8B9D3E9AF4}"/>
+                  </a:ext>
+                </a:extLst>
+              </p:cNvPr>
+              <p:cNvSpPr>
+                <a:spLocks noRot="1" noChangeAspect="1" noMove="1" noResize="1" noEditPoints="1" noAdjustHandles="1" noChangeArrowheads="1" noChangeShapeType="1" noTextEdit="1"/>
+              </p:cNvSpPr>
+              <p:nvPr/>
+            </p:nvSpPr>
+            <p:spPr>
+              <a:xfrm rot="5400000">
+                <a:off x="3951731" y="3740251"/>
+                <a:ext cx="671673" cy="1043189"/>
+              </a:xfrm>
+              <a:prstGeom prst="triangle">
+                <a:avLst/>
+              </a:prstGeom>
+              <a:blipFill>
+                <a:blip r:embed="rId7"/>
+                <a:stretch>
+                  <a:fillRect l="-22093"/>
+                </a:stretch>
+              </a:blipFill>
+              <a:ln>
+                <a:solidFill>
+                  <a:schemeClr val="tx1">
+                    <a:lumMod val="50000"/>
+                    <a:lumOff val="50000"/>
+                  </a:schemeClr>
+                </a:solidFill>
+              </a:ln>
+            </p:spPr>
+            <p:txBody>
+              <a:bodyPr/>
+              <a:lstStyle/>
+              <a:p>
+                <a:r>
+                  <a:rPr lang="en-US">
+                    <a:noFill/>
+                  </a:rPr>
+                  <a:t> </a:t>
+                </a:r>
+              </a:p>
+            </p:txBody>
+          </p:sp>
+        </mc:Fallback>
+      </mc:AlternateContent>
+      <p:cxnSp>
+        <p:nvCxnSpPr>
+          <p:cNvPr id="19" name="Straight Arrow Connector 18">
+            <a:extLst>
+              <a:ext uri="{FF2B5EF4-FFF2-40B4-BE49-F238E27FC236}">
+                <a16:creationId xmlns:a16="http://schemas.microsoft.com/office/drawing/2014/main" id="{C4E49AF9-9E20-6BFC-F268-76AD6237D63D}"/>
+              </a:ext>
+            </a:extLst>
+          </p:cNvPr>
+          <p:cNvCxnSpPr>
+            <a:cxnSpLocks/>
+            <a:endCxn id="14" idx="3"/>
+          </p:cNvCxnSpPr>
+          <p:nvPr/>
+        </p:nvCxnSpPr>
+        <p:spPr>
+          <a:xfrm>
+            <a:off x="2471297" y="3182364"/>
+            <a:ext cx="1306126" cy="2584"/>
+          </a:xfrm>
+          <a:prstGeom prst="straightConnector1">
+            <a:avLst/>
+          </a:prstGeom>
+          <a:ln w="57150">
+            <a:tailEnd type="triangle"/>
+          </a:ln>
+        </p:spPr>
+        <p:style>
+          <a:lnRef idx="2">
+            <a:schemeClr val="dk1"/>
+          </a:lnRef>
+          <a:fillRef idx="0">
+            <a:schemeClr val="dk1"/>
+          </a:fillRef>
+          <a:effectRef idx="1">
+            <a:schemeClr val="dk1"/>
+          </a:effectRef>
+          <a:fontRef idx="minor">
+            <a:schemeClr val="tx1"/>
+          </a:fontRef>
+        </p:style>
+      </p:cxnSp>
+      <p:cxnSp>
+        <p:nvCxnSpPr>
+          <p:cNvPr id="30" name="Straight Connector 29">
+            <a:extLst>
+              <a:ext uri="{FF2B5EF4-FFF2-40B4-BE49-F238E27FC236}">
+                <a16:creationId xmlns:a16="http://schemas.microsoft.com/office/drawing/2014/main" id="{6522C728-65D0-AA3B-9E86-CECB42B617D3}"/>
+              </a:ext>
+            </a:extLst>
+          </p:cNvPr>
+          <p:cNvCxnSpPr>
+            <a:cxnSpLocks/>
+          </p:cNvCxnSpPr>
+          <p:nvPr/>
+        </p:nvCxnSpPr>
+        <p:spPr>
+          <a:xfrm>
+            <a:off x="3252335" y="2088519"/>
+            <a:ext cx="0" cy="2192059"/>
+          </a:xfrm>
+          <a:prstGeom prst="line">
+            <a:avLst/>
+          </a:prstGeom>
+          <a:ln w="57150"/>
+        </p:spPr>
+        <p:style>
+          <a:lnRef idx="2">
+            <a:schemeClr val="dk1"/>
+          </a:lnRef>
+          <a:fillRef idx="0">
+            <a:schemeClr val="dk1"/>
+          </a:fillRef>
+          <a:effectRef idx="1">
+            <a:schemeClr val="dk1"/>
+          </a:effectRef>
+          <a:fontRef idx="minor">
+            <a:schemeClr val="tx1"/>
+          </a:fontRef>
+        </p:style>
+      </p:cxnSp>
+      <p:cxnSp>
+        <p:nvCxnSpPr>
+          <p:cNvPr id="32" name="Straight Arrow Connector 31">
+            <a:extLst>
+              <a:ext uri="{FF2B5EF4-FFF2-40B4-BE49-F238E27FC236}">
+                <a16:creationId xmlns:a16="http://schemas.microsoft.com/office/drawing/2014/main" id="{8A5C9622-367D-7E62-C9A1-1E5FF08E25B4}"/>
+              </a:ext>
+            </a:extLst>
+          </p:cNvPr>
+          <p:cNvCxnSpPr>
+            <a:cxnSpLocks/>
+          </p:cNvCxnSpPr>
+          <p:nvPr/>
+        </p:nvCxnSpPr>
+        <p:spPr>
+          <a:xfrm>
+            <a:off x="3223633" y="4252933"/>
+            <a:ext cx="553790" cy="0"/>
+          </a:xfrm>
+          <a:prstGeom prst="straightConnector1">
+            <a:avLst/>
+          </a:prstGeom>
+          <a:ln w="57150">
+            <a:tailEnd type="triangle"/>
+          </a:ln>
+        </p:spPr>
+        <p:style>
+          <a:lnRef idx="2">
+            <a:schemeClr val="dk1"/>
+          </a:lnRef>
+          <a:fillRef idx="0">
+            <a:schemeClr val="dk1"/>
+          </a:fillRef>
+          <a:effectRef idx="1">
+            <a:schemeClr val="dk1"/>
+          </a:effectRef>
+          <a:fontRef idx="minor">
+            <a:schemeClr val="tx1"/>
+          </a:fontRef>
+        </p:style>
+      </p:cxnSp>
+      <p:cxnSp>
+        <p:nvCxnSpPr>
+          <p:cNvPr id="38" name="Straight Arrow Connector 37">
+            <a:extLst>
+              <a:ext uri="{FF2B5EF4-FFF2-40B4-BE49-F238E27FC236}">
+                <a16:creationId xmlns:a16="http://schemas.microsoft.com/office/drawing/2014/main" id="{E26BBBD6-26D4-20FB-152F-79F69BD1D72D}"/>
+              </a:ext>
+            </a:extLst>
+          </p:cNvPr>
+          <p:cNvCxnSpPr>
+            <a:cxnSpLocks/>
+          </p:cNvCxnSpPr>
+          <p:nvPr/>
+        </p:nvCxnSpPr>
+        <p:spPr>
+          <a:xfrm>
+            <a:off x="3223633" y="2108049"/>
+            <a:ext cx="553790" cy="0"/>
+          </a:xfrm>
+          <a:prstGeom prst="straightConnector1">
+            <a:avLst/>
+          </a:prstGeom>
+          <a:ln w="57150">
+            <a:tailEnd type="triangle"/>
+          </a:ln>
+        </p:spPr>
+        <p:style>
+          <a:lnRef idx="2">
+            <a:schemeClr val="dk1"/>
+          </a:lnRef>
+          <a:fillRef idx="0">
+            <a:schemeClr val="dk1"/>
+          </a:fillRef>
+          <a:effectRef idx="1">
+            <a:schemeClr val="dk1"/>
+          </a:effectRef>
+          <a:fontRef idx="minor">
+            <a:schemeClr val="tx1"/>
+          </a:fontRef>
+        </p:style>
+      </p:cxnSp>
+      <p:cxnSp>
+        <p:nvCxnSpPr>
+          <p:cNvPr id="43" name="Straight Arrow Connector 42">
+            <a:extLst>
+              <a:ext uri="{FF2B5EF4-FFF2-40B4-BE49-F238E27FC236}">
+                <a16:creationId xmlns:a16="http://schemas.microsoft.com/office/drawing/2014/main" id="{59236BAB-3E0D-E533-E7FE-CE938F0CA032}"/>
+              </a:ext>
+            </a:extLst>
+          </p:cNvPr>
+          <p:cNvCxnSpPr>
+            <a:cxnSpLocks/>
+          </p:cNvCxnSpPr>
+          <p:nvPr/>
+        </p:nvCxnSpPr>
+        <p:spPr>
+          <a:xfrm>
+            <a:off x="4820612" y="4262221"/>
+            <a:ext cx="405000" cy="0"/>
+          </a:xfrm>
+          <a:prstGeom prst="straightConnector1">
+            <a:avLst/>
+          </a:prstGeom>
+          <a:ln w="57150">
+            <a:tailEnd type="triangle"/>
+          </a:ln>
+        </p:spPr>
+        <p:style>
+          <a:lnRef idx="2">
+            <a:schemeClr val="dk1"/>
+          </a:lnRef>
+          <a:fillRef idx="0">
+            <a:schemeClr val="dk1"/>
+          </a:fillRef>
+          <a:effectRef idx="1">
+            <a:schemeClr val="dk1"/>
+          </a:effectRef>
+          <a:fontRef idx="minor">
+            <a:schemeClr val="tx1"/>
+          </a:fontRef>
+        </p:style>
+      </p:cxnSp>
+      <p:cxnSp>
+        <p:nvCxnSpPr>
+          <p:cNvPr id="48" name="Straight Arrow Connector 47">
+            <a:extLst>
+              <a:ext uri="{FF2B5EF4-FFF2-40B4-BE49-F238E27FC236}">
+                <a16:creationId xmlns:a16="http://schemas.microsoft.com/office/drawing/2014/main" id="{0338BF0D-09F9-8354-8685-04B41F795A38}"/>
+              </a:ext>
+            </a:extLst>
+          </p:cNvPr>
+          <p:cNvCxnSpPr>
+            <a:cxnSpLocks/>
+          </p:cNvCxnSpPr>
+          <p:nvPr/>
+        </p:nvCxnSpPr>
+        <p:spPr>
+          <a:xfrm>
+            <a:off x="4820612" y="3182933"/>
+            <a:ext cx="405000" cy="0"/>
+          </a:xfrm>
+          <a:prstGeom prst="straightConnector1">
+            <a:avLst/>
+          </a:prstGeom>
+          <a:ln w="57150">
+            <a:tailEnd type="triangle"/>
+          </a:ln>
+        </p:spPr>
+        <p:style>
+          <a:lnRef idx="2">
+            <a:schemeClr val="dk1"/>
+          </a:lnRef>
+          <a:fillRef idx="0">
+            <a:schemeClr val="dk1"/>
+          </a:fillRef>
+          <a:effectRef idx="1">
+            <a:schemeClr val="dk1"/>
+          </a:effectRef>
+          <a:fontRef idx="minor">
+            <a:schemeClr val="tx1"/>
+          </a:fontRef>
+        </p:style>
+      </p:cxnSp>
+      <p:cxnSp>
+        <p:nvCxnSpPr>
+          <p:cNvPr id="49" name="Straight Arrow Connector 48">
+            <a:extLst>
+              <a:ext uri="{FF2B5EF4-FFF2-40B4-BE49-F238E27FC236}">
+                <a16:creationId xmlns:a16="http://schemas.microsoft.com/office/drawing/2014/main" id="{6E24E593-52D2-A07B-C4CE-A71CD50D79CD}"/>
+              </a:ext>
+            </a:extLst>
+          </p:cNvPr>
+          <p:cNvCxnSpPr>
+            <a:cxnSpLocks/>
+          </p:cNvCxnSpPr>
+          <p:nvPr/>
+        </p:nvCxnSpPr>
+        <p:spPr>
+          <a:xfrm>
+            <a:off x="4809161" y="2108048"/>
+            <a:ext cx="405000" cy="0"/>
+          </a:xfrm>
+          <a:prstGeom prst="straightConnector1">
+            <a:avLst/>
+          </a:prstGeom>
+          <a:ln w="57150">
+            <a:tailEnd type="triangle"/>
+          </a:ln>
+        </p:spPr>
+        <p:style>
+          <a:lnRef idx="2">
+            <a:schemeClr val="dk1"/>
+          </a:lnRef>
+          <a:fillRef idx="0">
+            <a:schemeClr val="dk1"/>
+          </a:fillRef>
+          <a:effectRef idx="1">
+            <a:schemeClr val="dk1"/>
+          </a:effectRef>
+          <a:fontRef idx="minor">
+            <a:schemeClr val="tx1"/>
+          </a:fontRef>
+        </p:style>
+      </p:cxnSp>
+      <p:grpSp>
+        <p:nvGrpSpPr>
+          <p:cNvPr id="50" name="Group 49">
+            <a:extLst>
+              <a:ext uri="{FF2B5EF4-FFF2-40B4-BE49-F238E27FC236}">
+                <a16:creationId xmlns:a16="http://schemas.microsoft.com/office/drawing/2014/main" id="{318E6523-3B15-049E-F046-F40E646B177C}"/>
+              </a:ext>
+            </a:extLst>
+          </p:cNvPr>
+          <p:cNvGrpSpPr/>
+          <p:nvPr/>
+        </p:nvGrpSpPr>
+        <p:grpSpPr>
+          <a:xfrm>
+            <a:off x="7759220" y="2566415"/>
+            <a:ext cx="1216152" cy="1216152"/>
+            <a:chOff x="1871202" y="2751585"/>
+            <a:chExt cx="1216152" cy="1216152"/>
+          </a:xfrm>
+        </p:grpSpPr>
+        <p:sp>
+          <p:nvSpPr>
+            <p:cNvPr id="51" name="Oval 50">
+              <a:extLst>
+                <a:ext uri="{FF2B5EF4-FFF2-40B4-BE49-F238E27FC236}">
+                  <a16:creationId xmlns:a16="http://schemas.microsoft.com/office/drawing/2014/main" id="{E28ABA36-9C6E-F165-CEA2-B4920898824E}"/>
+                </a:ext>
+              </a:extLst>
+            </p:cNvPr>
+            <p:cNvSpPr/>
+            <p:nvPr/>
+          </p:nvSpPr>
+          <p:spPr>
+            <a:xfrm>
+              <a:off x="2033683" y="2914066"/>
+              <a:ext cx="891190" cy="891190"/>
+            </a:xfrm>
+            <a:prstGeom prst="ellipse">
+              <a:avLst/>
+            </a:prstGeom>
+            <a:solidFill>
+              <a:schemeClr val="bg1">
+                <a:lumMod val="85000"/>
+              </a:schemeClr>
+            </a:solidFill>
+            <a:ln>
+              <a:solidFill>
+                <a:schemeClr val="tx1">
+                  <a:lumMod val="50000"/>
+                  <a:lumOff val="50000"/>
+                </a:schemeClr>
+              </a:solidFill>
+            </a:ln>
+          </p:spPr>
+          <p:style>
+            <a:lnRef idx="2">
+              <a:schemeClr val="accent1">
+                <a:shade val="15000"/>
+              </a:schemeClr>
+            </a:lnRef>
+            <a:fillRef idx="1">
+              <a:schemeClr val="accent1"/>
+            </a:fillRef>
+            <a:effectRef idx="0">
+              <a:schemeClr val="accent1"/>
+            </a:effectRef>
+            <a:fontRef idx="minor">
+              <a:schemeClr val="lt1"/>
+            </a:fontRef>
+          </p:style>
+          <p:txBody>
+            <a:bodyPr rtlCol="0" anchor="ctr"/>
+            <a:lstStyle/>
+            <a:p>
+              <a:pPr algn="ctr"/>
+              <a:endParaRPr lang="en-US"/>
+            </a:p>
+          </p:txBody>
+        </p:sp>
+        <p:sp>
+          <p:nvSpPr>
+            <p:cNvPr id="52" name="Multiply 51">
+              <a:extLst>
+                <a:ext uri="{FF2B5EF4-FFF2-40B4-BE49-F238E27FC236}">
+                  <a16:creationId xmlns:a16="http://schemas.microsoft.com/office/drawing/2014/main" id="{A94F9BFC-2372-572C-53A2-20E7ABBAC53C}"/>
+                </a:ext>
+              </a:extLst>
+            </p:cNvPr>
+            <p:cNvSpPr/>
+            <p:nvPr/>
+          </p:nvSpPr>
+          <p:spPr>
+            <a:xfrm>
+              <a:off x="1871202" y="2751585"/>
+              <a:ext cx="1216152" cy="1216152"/>
+            </a:xfrm>
+            <a:prstGeom prst="mathMultiply">
+              <a:avLst>
+                <a:gd name="adj1" fmla="val 2711"/>
+              </a:avLst>
+            </a:prstGeom>
+            <a:solidFill>
+              <a:schemeClr val="tx1">
+                <a:lumMod val="50000"/>
+                <a:lumOff val="50000"/>
+              </a:schemeClr>
+            </a:solidFill>
+            <a:ln>
+              <a:noFill/>
+            </a:ln>
+          </p:spPr>
+          <p:style>
+            <a:lnRef idx="2">
+              <a:schemeClr val="accent1">
+                <a:shade val="15000"/>
+              </a:schemeClr>
+            </a:lnRef>
+            <a:fillRef idx="1">
+              <a:schemeClr val="accent1"/>
+            </a:fillRef>
+            <a:effectRef idx="0">
+              <a:schemeClr val="accent1"/>
+            </a:effectRef>
+            <a:fontRef idx="minor">
+              <a:schemeClr val="lt1"/>
+            </a:fontRef>
+          </p:style>
+          <p:txBody>
+            <a:bodyPr rtlCol="0" anchor="ctr"/>
+            <a:lstStyle/>
+            <a:p>
+              <a:pPr algn="ctr"/>
+              <a:endParaRPr lang="en-US"/>
+            </a:p>
+          </p:txBody>
+        </p:sp>
+      </p:grpSp>
+      <p:cxnSp>
+        <p:nvCxnSpPr>
+          <p:cNvPr id="56" name="Straight Arrow Connector 55">
+            <a:extLst>
+              <a:ext uri="{FF2B5EF4-FFF2-40B4-BE49-F238E27FC236}">
+                <a16:creationId xmlns:a16="http://schemas.microsoft.com/office/drawing/2014/main" id="{4572D95D-AE83-8502-9395-0FFAED255B89}"/>
+              </a:ext>
+            </a:extLst>
+          </p:cNvPr>
+          <p:cNvCxnSpPr>
+            <a:cxnSpLocks/>
+          </p:cNvCxnSpPr>
+          <p:nvPr/>
+        </p:nvCxnSpPr>
+        <p:spPr>
+          <a:xfrm>
+            <a:off x="7333412" y="3182364"/>
+            <a:ext cx="583243" cy="0"/>
+          </a:xfrm>
+          <a:prstGeom prst="straightConnector1">
+            <a:avLst/>
+          </a:prstGeom>
+          <a:ln w="57150">
+            <a:tailEnd type="triangle"/>
+          </a:ln>
+        </p:spPr>
+        <p:style>
+          <a:lnRef idx="2">
+            <a:schemeClr val="dk1"/>
+          </a:lnRef>
+          <a:fillRef idx="0">
+            <a:schemeClr val="dk1"/>
+          </a:fillRef>
+          <a:effectRef idx="1">
+            <a:schemeClr val="dk1"/>
+          </a:effectRef>
+          <a:fontRef idx="minor">
+            <a:schemeClr val="tx1"/>
+          </a:fontRef>
+        </p:style>
+      </p:cxnSp>
+      <p:cxnSp>
+        <p:nvCxnSpPr>
+          <p:cNvPr id="58" name="Straight Connector 57">
+            <a:extLst>
+              <a:ext uri="{FF2B5EF4-FFF2-40B4-BE49-F238E27FC236}">
+                <a16:creationId xmlns:a16="http://schemas.microsoft.com/office/drawing/2014/main" id="{81BD441B-7DC6-3E63-4B9D-DEB0A4D57861}"/>
+              </a:ext>
+            </a:extLst>
+          </p:cNvPr>
+          <p:cNvCxnSpPr>
+            <a:cxnSpLocks/>
+          </p:cNvCxnSpPr>
+          <p:nvPr/>
+        </p:nvCxnSpPr>
+        <p:spPr>
+          <a:xfrm>
+            <a:off x="7335239" y="2103077"/>
+            <a:ext cx="1059459" cy="0"/>
+          </a:xfrm>
+          <a:prstGeom prst="line">
+            <a:avLst/>
+          </a:prstGeom>
+          <a:ln w="57150"/>
+        </p:spPr>
+        <p:style>
+          <a:lnRef idx="2">
+            <a:schemeClr val="dk1"/>
+          </a:lnRef>
+          <a:fillRef idx="0">
+            <a:schemeClr val="dk1"/>
+          </a:fillRef>
+          <a:effectRef idx="1">
+            <a:schemeClr val="dk1"/>
+          </a:effectRef>
+          <a:fontRef idx="minor">
+            <a:schemeClr val="tx1"/>
+          </a:fontRef>
+        </p:style>
+      </p:cxnSp>
+      <p:cxnSp>
+        <p:nvCxnSpPr>
+          <p:cNvPr id="60" name="Straight Arrow Connector 59">
+            <a:extLst>
+              <a:ext uri="{FF2B5EF4-FFF2-40B4-BE49-F238E27FC236}">
+                <a16:creationId xmlns:a16="http://schemas.microsoft.com/office/drawing/2014/main" id="{656B5615-2E8B-E50E-4994-C21BA95B6ADC}"/>
+              </a:ext>
+            </a:extLst>
+          </p:cNvPr>
+          <p:cNvCxnSpPr>
+            <a:cxnSpLocks/>
+          </p:cNvCxnSpPr>
+          <p:nvPr/>
+        </p:nvCxnSpPr>
+        <p:spPr>
+          <a:xfrm>
+            <a:off x="8367296" y="2088519"/>
+            <a:ext cx="0" cy="632101"/>
+          </a:xfrm>
+          <a:prstGeom prst="straightConnector1">
+            <a:avLst/>
+          </a:prstGeom>
+          <a:ln w="57150">
+            <a:tailEnd type="triangle"/>
+          </a:ln>
+        </p:spPr>
+        <p:style>
+          <a:lnRef idx="2">
+            <a:schemeClr val="dk1"/>
+          </a:lnRef>
+          <a:fillRef idx="0">
+            <a:schemeClr val="dk1"/>
+          </a:fillRef>
+          <a:effectRef idx="1">
+            <a:schemeClr val="dk1"/>
+          </a:effectRef>
+          <a:fontRef idx="minor">
+            <a:schemeClr val="tx1"/>
+          </a:fontRef>
+        </p:style>
+      </p:cxnSp>
+      <p:cxnSp>
+        <p:nvCxnSpPr>
+          <p:cNvPr id="65" name="Straight Connector 64">
+            <a:extLst>
+              <a:ext uri="{FF2B5EF4-FFF2-40B4-BE49-F238E27FC236}">
+                <a16:creationId xmlns:a16="http://schemas.microsoft.com/office/drawing/2014/main" id="{D6FB283A-3BFA-60FA-FEA3-D45DF040346A}"/>
+              </a:ext>
+            </a:extLst>
+          </p:cNvPr>
+          <p:cNvCxnSpPr>
+            <a:cxnSpLocks/>
+          </p:cNvCxnSpPr>
+          <p:nvPr/>
+        </p:nvCxnSpPr>
+        <p:spPr>
+          <a:xfrm>
+            <a:off x="7334353" y="4252933"/>
+            <a:ext cx="1059459" cy="0"/>
+          </a:xfrm>
+          <a:prstGeom prst="line">
+            <a:avLst/>
+          </a:prstGeom>
+          <a:ln w="57150"/>
+        </p:spPr>
+        <p:style>
+          <a:lnRef idx="2">
+            <a:schemeClr val="dk1"/>
+          </a:lnRef>
+          <a:fillRef idx="0">
+            <a:schemeClr val="dk1"/>
+          </a:fillRef>
+          <a:effectRef idx="1">
+            <a:schemeClr val="dk1"/>
+          </a:effectRef>
+          <a:fontRef idx="minor">
+            <a:schemeClr val="tx1"/>
+          </a:fontRef>
+        </p:style>
+      </p:cxnSp>
+      <p:cxnSp>
+        <p:nvCxnSpPr>
+          <p:cNvPr id="66" name="Straight Arrow Connector 65">
+            <a:extLst>
+              <a:ext uri="{FF2B5EF4-FFF2-40B4-BE49-F238E27FC236}">
+                <a16:creationId xmlns:a16="http://schemas.microsoft.com/office/drawing/2014/main" id="{1C855218-7BA0-37C4-78FF-46F0C647BB9B}"/>
+              </a:ext>
+            </a:extLst>
+          </p:cNvPr>
+          <p:cNvCxnSpPr>
+            <a:cxnSpLocks/>
+          </p:cNvCxnSpPr>
+          <p:nvPr/>
+        </p:nvCxnSpPr>
+        <p:spPr>
+          <a:xfrm flipV="1">
+            <a:off x="8367296" y="3630909"/>
+            <a:ext cx="0" cy="630936"/>
+          </a:xfrm>
+          <a:prstGeom prst="straightConnector1">
+            <a:avLst/>
+          </a:prstGeom>
+          <a:ln w="57150">
+            <a:tailEnd type="triangle"/>
+          </a:ln>
+        </p:spPr>
+        <p:style>
+          <a:lnRef idx="2">
+            <a:schemeClr val="dk1"/>
+          </a:lnRef>
+          <a:fillRef idx="0">
+            <a:schemeClr val="dk1"/>
+          </a:fillRef>
+          <a:effectRef idx="1">
+            <a:schemeClr val="dk1"/>
+          </a:effectRef>
+          <a:fontRef idx="minor">
+            <a:schemeClr val="tx1"/>
+          </a:fontRef>
+        </p:style>
+      </p:cxnSp>
+      <p:sp>
+        <p:nvSpPr>
+          <p:cNvPr id="68" name="Rectangle 67">
+            <a:extLst>
+              <a:ext uri="{FF2B5EF4-FFF2-40B4-BE49-F238E27FC236}">
+                <a16:creationId xmlns:a16="http://schemas.microsoft.com/office/drawing/2014/main" id="{756E29E8-60C2-3914-A15D-FB01A57FFB81}"/>
+              </a:ext>
+            </a:extLst>
+          </p:cNvPr>
+          <p:cNvSpPr/>
+          <p:nvPr/>
+        </p:nvSpPr>
+        <p:spPr>
+          <a:xfrm>
+            <a:off x="10314154" y="2809887"/>
+            <a:ext cx="1341902" cy="709137"/>
+          </a:xfrm>
+          <a:prstGeom prst="rect">
+            <a:avLst/>
+          </a:prstGeom>
+          <a:solidFill>
+            <a:schemeClr val="bg1">
+              <a:lumMod val="85000"/>
+            </a:schemeClr>
+          </a:solidFill>
+          <a:ln>
+            <a:solidFill>
+              <a:schemeClr val="tx1">
+                <a:lumMod val="50000"/>
+                <a:lumOff val="50000"/>
+              </a:schemeClr>
+            </a:solidFill>
+          </a:ln>
+        </p:spPr>
+        <p:style>
+          <a:lnRef idx="2">
+            <a:schemeClr val="accent1">
+              <a:shade val="15000"/>
+            </a:schemeClr>
+          </a:lnRef>
+          <a:fillRef idx="1">
+            <a:schemeClr val="accent1"/>
+          </a:fillRef>
+          <a:effectRef idx="0">
+            <a:schemeClr val="accent1"/>
+          </a:effectRef>
+          <a:fontRef idx="minor">
+            <a:schemeClr val="lt1"/>
+          </a:fontRef>
+        </p:style>
+        <p:txBody>
+          <a:bodyPr rtlCol="0" anchor="ctr"/>
+          <a:lstStyle/>
+          <a:p>
+            <a:pPr algn="ctr"/>
+            <a:r>
+              <a:rPr lang="en-US" sz="2000" b="1" dirty="0">
+                <a:solidFill>
+                  <a:schemeClr val="tx1">
+                    <a:lumMod val="75000"/>
+                    <a:lumOff val="25000"/>
+                  </a:schemeClr>
+                </a:solidFill>
+                <a:latin typeface="Arial Black" panose="020B0604020202020204" pitchFamily="34" charset="0"/>
+                <a:cs typeface="Arial Black" panose="020B0604020202020204" pitchFamily="34" charset="0"/>
+              </a:rPr>
+              <a:t>Motors</a:t>
+            </a:r>
+            <a:endParaRPr lang="en-US" sz="2800" i="1" dirty="0">
+              <a:solidFill>
+                <a:schemeClr val="tx1">
+                  <a:lumMod val="75000"/>
+                  <a:lumOff val="25000"/>
+                </a:schemeClr>
+              </a:solidFill>
+              <a:latin typeface="Arial Black" panose="020B0604020202020204" pitchFamily="34" charset="0"/>
+              <a:cs typeface="Arial Black" panose="020B0604020202020204" pitchFamily="34" charset="0"/>
+            </a:endParaRPr>
+          </a:p>
+        </p:txBody>
+      </p:sp>
+      <p:cxnSp>
+        <p:nvCxnSpPr>
+          <p:cNvPr id="69" name="Straight Arrow Connector 68">
+            <a:extLst>
+              <a:ext uri="{FF2B5EF4-FFF2-40B4-BE49-F238E27FC236}">
+                <a16:creationId xmlns:a16="http://schemas.microsoft.com/office/drawing/2014/main" id="{27B13EC1-6785-CE6E-94FF-0076A7237EA2}"/>
+              </a:ext>
+            </a:extLst>
+          </p:cNvPr>
+          <p:cNvCxnSpPr>
+            <a:cxnSpLocks/>
+            <a:stCxn id="51" idx="6"/>
+          </p:cNvCxnSpPr>
+          <p:nvPr/>
+        </p:nvCxnSpPr>
+        <p:spPr>
+          <a:xfrm flipV="1">
+            <a:off x="8812891" y="3166215"/>
+            <a:ext cx="1503766" cy="0"/>
+          </a:xfrm>
+          <a:prstGeom prst="straightConnector1">
+            <a:avLst/>
+          </a:prstGeom>
+          <a:ln w="57150">
+            <a:tailEnd type="triangle"/>
+          </a:ln>
+        </p:spPr>
+        <p:style>
+          <a:lnRef idx="2">
+            <a:schemeClr val="dk1"/>
+          </a:lnRef>
+          <a:fillRef idx="0">
+            <a:schemeClr val="dk1"/>
+          </a:fillRef>
+          <a:effectRef idx="1">
+            <a:schemeClr val="dk1"/>
+          </a:effectRef>
+          <a:fontRef idx="minor">
+            <a:schemeClr val="tx1"/>
+          </a:fontRef>
+        </p:style>
+      </p:cxnSp>
+      <p:cxnSp>
+        <p:nvCxnSpPr>
+          <p:cNvPr id="79" name="Straight Arrow Connector 78">
+            <a:extLst>
+              <a:ext uri="{FF2B5EF4-FFF2-40B4-BE49-F238E27FC236}">
+                <a16:creationId xmlns:a16="http://schemas.microsoft.com/office/drawing/2014/main" id="{9B6400BB-76B8-B455-8B42-0A13B528736C}"/>
+              </a:ext>
+            </a:extLst>
+          </p:cNvPr>
+          <p:cNvCxnSpPr>
+            <a:cxnSpLocks/>
+          </p:cNvCxnSpPr>
+          <p:nvPr/>
+        </p:nvCxnSpPr>
+        <p:spPr>
+          <a:xfrm>
+            <a:off x="11656056" y="3182364"/>
+            <a:ext cx="1661829" cy="0"/>
+          </a:xfrm>
+          <a:prstGeom prst="straightConnector1">
+            <a:avLst/>
+          </a:prstGeom>
+          <a:ln w="57150">
+            <a:tailEnd type="triangle"/>
+          </a:ln>
+        </p:spPr>
+        <p:style>
+          <a:lnRef idx="2">
+            <a:schemeClr val="dk1"/>
+          </a:lnRef>
+          <a:fillRef idx="0">
+            <a:schemeClr val="dk1"/>
+          </a:fillRef>
+          <a:effectRef idx="1">
+            <a:schemeClr val="dk1"/>
+          </a:effectRef>
+          <a:fontRef idx="minor">
+            <a:schemeClr val="tx1"/>
+          </a:fontRef>
+        </p:style>
+      </p:cxnSp>
+      <p:sp>
+        <p:nvSpPr>
+          <p:cNvPr id="81" name="Rectangle 80">
+            <a:extLst>
+              <a:ext uri="{FF2B5EF4-FFF2-40B4-BE49-F238E27FC236}">
+                <a16:creationId xmlns:a16="http://schemas.microsoft.com/office/drawing/2014/main" id="{A3430346-5AEE-CB36-CEA4-101FE2669408}"/>
+              </a:ext>
+            </a:extLst>
+          </p:cNvPr>
+          <p:cNvSpPr/>
+          <p:nvPr/>
+        </p:nvSpPr>
+        <p:spPr>
+          <a:xfrm>
+            <a:off x="5623283" y="5248885"/>
+            <a:ext cx="1341902" cy="709137"/>
+          </a:xfrm>
+          <a:prstGeom prst="rect">
+            <a:avLst/>
+          </a:prstGeom>
+          <a:solidFill>
+            <a:schemeClr val="bg1">
+              <a:lumMod val="85000"/>
+            </a:schemeClr>
+          </a:solidFill>
+          <a:ln>
+            <a:solidFill>
+              <a:schemeClr val="tx1">
+                <a:lumMod val="50000"/>
+                <a:lumOff val="50000"/>
+              </a:schemeClr>
+            </a:solidFill>
+          </a:ln>
+        </p:spPr>
+        <p:style>
+          <a:lnRef idx="2">
+            <a:schemeClr val="accent1">
+              <a:shade val="15000"/>
+            </a:schemeClr>
+          </a:lnRef>
+          <a:fillRef idx="1">
+            <a:schemeClr val="accent1"/>
+          </a:fillRef>
+          <a:effectRef idx="0">
+            <a:schemeClr val="accent1"/>
+          </a:effectRef>
+          <a:fontRef idx="minor">
+            <a:schemeClr val="lt1"/>
+          </a:fontRef>
+        </p:style>
+        <p:txBody>
+          <a:bodyPr rtlCol="0" anchor="ctr"/>
+          <a:lstStyle/>
+          <a:p>
+            <a:pPr algn="ctr"/>
+            <a:r>
+              <a:rPr lang="en-US" sz="2000" b="1" dirty="0">
+                <a:solidFill>
+                  <a:schemeClr val="tx1">
+                    <a:lumMod val="75000"/>
+                    <a:lumOff val="25000"/>
+                  </a:schemeClr>
+                </a:solidFill>
+                <a:latin typeface="Arial Black" panose="020B0604020202020204" pitchFamily="34" charset="0"/>
+                <a:cs typeface="Arial Black" panose="020B0604020202020204" pitchFamily="34" charset="0"/>
+              </a:rPr>
+              <a:t>Sensors</a:t>
+            </a:r>
+            <a:endParaRPr lang="en-US" sz="2800" i="1" dirty="0">
+              <a:solidFill>
+                <a:schemeClr val="tx1">
+                  <a:lumMod val="75000"/>
+                  <a:lumOff val="25000"/>
+                </a:schemeClr>
+              </a:solidFill>
+              <a:latin typeface="Arial Black" panose="020B0604020202020204" pitchFamily="34" charset="0"/>
+              <a:cs typeface="Arial Black" panose="020B0604020202020204" pitchFamily="34" charset="0"/>
+            </a:endParaRPr>
+          </a:p>
+        </p:txBody>
+      </p:sp>
+      <p:cxnSp>
+        <p:nvCxnSpPr>
+          <p:cNvPr id="82" name="Straight Connector 81">
+            <a:extLst>
+              <a:ext uri="{FF2B5EF4-FFF2-40B4-BE49-F238E27FC236}">
+                <a16:creationId xmlns:a16="http://schemas.microsoft.com/office/drawing/2014/main" id="{2854A6BB-A8B0-26A9-EA80-BAFA0D7E289C}"/>
+              </a:ext>
+            </a:extLst>
+          </p:cNvPr>
+          <p:cNvCxnSpPr>
+            <a:cxnSpLocks/>
+          </p:cNvCxnSpPr>
+          <p:nvPr/>
+        </p:nvCxnSpPr>
+        <p:spPr>
+          <a:xfrm>
+            <a:off x="12560032" y="3182364"/>
+            <a:ext cx="0" cy="2455804"/>
+          </a:xfrm>
+          <a:prstGeom prst="line">
+            <a:avLst/>
+          </a:prstGeom>
+          <a:ln w="57150"/>
+        </p:spPr>
+        <p:style>
+          <a:lnRef idx="2">
+            <a:schemeClr val="dk1"/>
+          </a:lnRef>
+          <a:fillRef idx="0">
+            <a:schemeClr val="dk1"/>
+          </a:fillRef>
+          <a:effectRef idx="1">
+            <a:schemeClr val="dk1"/>
+          </a:effectRef>
+          <a:fontRef idx="minor">
+            <a:schemeClr val="tx1"/>
+          </a:fontRef>
+        </p:style>
+      </p:cxnSp>
+      <p:cxnSp>
+        <p:nvCxnSpPr>
+          <p:cNvPr id="83" name="Straight Arrow Connector 82">
+            <a:extLst>
+              <a:ext uri="{FF2B5EF4-FFF2-40B4-BE49-F238E27FC236}">
+                <a16:creationId xmlns:a16="http://schemas.microsoft.com/office/drawing/2014/main" id="{5E2BC7FF-B098-4835-2ACB-F294CBDF8B43}"/>
+              </a:ext>
+            </a:extLst>
+          </p:cNvPr>
+          <p:cNvCxnSpPr>
+            <a:cxnSpLocks/>
+          </p:cNvCxnSpPr>
+          <p:nvPr/>
+        </p:nvCxnSpPr>
+        <p:spPr>
+          <a:xfrm flipH="1">
+            <a:off x="6965185" y="5607450"/>
+            <a:ext cx="5594847" cy="3566"/>
+          </a:xfrm>
+          <a:prstGeom prst="straightConnector1">
+            <a:avLst/>
+          </a:prstGeom>
+          <a:ln w="57150">
+            <a:tailEnd type="triangle"/>
+          </a:ln>
+        </p:spPr>
+        <p:style>
+          <a:lnRef idx="2">
+            <a:schemeClr val="dk1"/>
+          </a:lnRef>
+          <a:fillRef idx="0">
+            <a:schemeClr val="dk1"/>
+          </a:fillRef>
+          <a:effectRef idx="1">
+            <a:schemeClr val="dk1"/>
+          </a:effectRef>
+          <a:fontRef idx="minor">
+            <a:schemeClr val="tx1"/>
+          </a:fontRef>
+        </p:style>
+      </p:cxnSp>
+      <p:cxnSp>
+        <p:nvCxnSpPr>
+          <p:cNvPr id="94" name="Straight Connector 93">
+            <a:extLst>
+              <a:ext uri="{FF2B5EF4-FFF2-40B4-BE49-F238E27FC236}">
+                <a16:creationId xmlns:a16="http://schemas.microsoft.com/office/drawing/2014/main" id="{26726733-5CDF-CF8E-A839-10DBACBB935E}"/>
+              </a:ext>
+            </a:extLst>
+          </p:cNvPr>
+          <p:cNvCxnSpPr>
+            <a:cxnSpLocks/>
+            <a:endCxn id="81" idx="1"/>
+          </p:cNvCxnSpPr>
+          <p:nvPr/>
+        </p:nvCxnSpPr>
+        <p:spPr>
+          <a:xfrm>
+            <a:off x="1990086" y="5601645"/>
+            <a:ext cx="3633197" cy="1809"/>
+          </a:xfrm>
+          <a:prstGeom prst="line">
+            <a:avLst/>
+          </a:prstGeom>
+          <a:ln w="57150"/>
+        </p:spPr>
+        <p:style>
+          <a:lnRef idx="2">
+            <a:schemeClr val="dk1"/>
+          </a:lnRef>
+          <a:fillRef idx="0">
+            <a:schemeClr val="dk1"/>
+          </a:fillRef>
+          <a:effectRef idx="1">
+            <a:schemeClr val="dk1"/>
+          </a:effectRef>
+          <a:fontRef idx="minor">
+            <a:schemeClr val="tx1"/>
+          </a:fontRef>
+        </p:style>
+      </p:cxnSp>
+      <p:cxnSp>
+        <p:nvCxnSpPr>
+          <p:cNvPr id="95" name="Straight Arrow Connector 94">
+            <a:extLst>
+              <a:ext uri="{FF2B5EF4-FFF2-40B4-BE49-F238E27FC236}">
+                <a16:creationId xmlns:a16="http://schemas.microsoft.com/office/drawing/2014/main" id="{8770D65B-7417-CB21-2AF5-97FC77E1B52D}"/>
+              </a:ext>
+            </a:extLst>
+          </p:cNvPr>
+          <p:cNvCxnSpPr>
+            <a:cxnSpLocks/>
+            <a:endCxn id="7" idx="4"/>
+          </p:cNvCxnSpPr>
+          <p:nvPr/>
+        </p:nvCxnSpPr>
+        <p:spPr>
+          <a:xfrm flipV="1">
+            <a:off x="2017415" y="3627959"/>
+            <a:ext cx="2766" cy="1982598"/>
+          </a:xfrm>
+          <a:prstGeom prst="straightConnector1">
+            <a:avLst/>
+          </a:prstGeom>
+          <a:ln w="57150">
+            <a:tailEnd type="triangle"/>
+          </a:ln>
+        </p:spPr>
+        <p:style>
+          <a:lnRef idx="2">
+            <a:schemeClr val="dk1"/>
+          </a:lnRef>
+          <a:fillRef idx="0">
+            <a:schemeClr val="dk1"/>
+          </a:fillRef>
+          <a:effectRef idx="1">
+            <a:schemeClr val="dk1"/>
+          </a:effectRef>
+          <a:fontRef idx="minor">
+            <a:schemeClr val="tx1"/>
+          </a:fontRef>
+        </p:style>
+      </p:cxnSp>
+      <mc:AlternateContent xmlns:mc="http://schemas.openxmlformats.org/markup-compatibility/2006" xmlns:a14="http://schemas.microsoft.com/office/drawing/2010/main">
+        <mc:Choice Requires="a14">
+          <p:sp>
+            <p:nvSpPr>
+              <p:cNvPr id="103" name="TextBox 102">
+                <a:extLst>
+                  <a:ext uri="{FF2B5EF4-FFF2-40B4-BE49-F238E27FC236}">
+                    <a16:creationId xmlns:a16="http://schemas.microsoft.com/office/drawing/2014/main" id="{0F4B02B2-008F-B232-39ED-B7427ED88174}"/>
+                  </a:ext>
+                </a:extLst>
+              </p:cNvPr>
+              <p:cNvSpPr txBox="1"/>
+              <p:nvPr/>
+            </p:nvSpPr>
+            <p:spPr>
+              <a:xfrm>
+                <a:off x="-39771" y="2504630"/>
+                <a:ext cx="1661829" cy="646331"/>
+              </a:xfrm>
+              <a:prstGeom prst="rect">
+                <a:avLst/>
+              </a:prstGeom>
+              <a:noFill/>
+            </p:spPr>
+            <p:txBody>
+              <a:bodyPr wrap="square">
+                <a:spAutoFit/>
+              </a:bodyPr>
+              <a:lstStyle/>
+              <a:p>
+                <a:pPr algn="ctr"/>
+                <a:r>
+                  <a:rPr lang="en-US" dirty="0">
+                    <a:solidFill>
+                      <a:schemeClr val="tx1"/>
+                    </a:solidFill>
+                    <a:latin typeface="Trebuchet MS" panose="020B0703020202090204" pitchFamily="34" charset="0"/>
+                  </a:rPr>
+                  <a:t>Target Angle </a:t>
+                </a:r>
+                <a14:m>
+                  <m:oMath xmlns:m="http://schemas.openxmlformats.org/officeDocument/2006/math">
+                    <m:r>
+                      <a:rPr lang="en-US" i="1" smtClean="0">
+                        <a:solidFill>
+                          <a:schemeClr val="tx1"/>
+                        </a:solidFill>
+                        <a:latin typeface="Cambria Math" panose="02040503050406030204" pitchFamily="18" charset="0"/>
+                      </a:rPr>
+                      <m:t>0°</m:t>
+                    </m:r>
+                  </m:oMath>
+                </a14:m>
+                <a:endParaRPr lang="en-US" i="1" dirty="0">
+                  <a:solidFill>
+                    <a:schemeClr val="tx1"/>
+                  </a:solidFill>
+                  <a:latin typeface="Trebuchet MS" panose="020B0703020202090204" pitchFamily="34" charset="0"/>
+                </a:endParaRPr>
+              </a:p>
+            </p:txBody>
+          </p:sp>
+        </mc:Choice>
+        <mc:Fallback xmlns="">
+          <p:sp>
+            <p:nvSpPr>
+              <p:cNvPr id="103" name="TextBox 102">
+                <a:extLst>
+                  <a:ext uri="{FF2B5EF4-FFF2-40B4-BE49-F238E27FC236}">
+                    <a16:creationId xmlns:a16="http://schemas.microsoft.com/office/drawing/2014/main" id="{1711CF21-BAC6-23C7-DF21-3B9CF94B2CD7}"/>
+                  </a:ext>
+                </a:extLst>
+              </p:cNvPr>
+              <p:cNvSpPr txBox="1">
+                <a:spLocks noRot="1" noChangeAspect="1" noMove="1" noResize="1" noEditPoints="1" noAdjustHandles="1" noChangeArrowheads="1" noChangeShapeType="1" noTextEdit="1"/>
+              </p:cNvSpPr>
+              <p:nvPr/>
+            </p:nvSpPr>
+            <p:spPr>
+              <a:xfrm>
+                <a:off x="-39771" y="2504630"/>
+                <a:ext cx="1661829" cy="646331"/>
+              </a:xfrm>
+              <a:prstGeom prst="rect">
+                <a:avLst/>
+              </a:prstGeom>
+              <a:blipFill>
+                <a:blip r:embed="rId8"/>
+                <a:stretch>
+                  <a:fillRect t="-5769" r="-758"/>
+                </a:stretch>
+              </a:blipFill>
+            </p:spPr>
+            <p:txBody>
+              <a:bodyPr/>
+              <a:lstStyle/>
+              <a:p>
+                <a:r>
+                  <a:rPr lang="en-US">
+                    <a:noFill/>
+                  </a:rPr>
+                  <a:t> </a:t>
+                </a:r>
+              </a:p>
+            </p:txBody>
+          </p:sp>
+        </mc:Fallback>
+      </mc:AlternateContent>
+      <mc:AlternateContent xmlns:mc="http://schemas.openxmlformats.org/markup-compatibility/2006" xmlns:a14="http://schemas.microsoft.com/office/drawing/2010/main">
+        <mc:Choice Requires="a14">
+          <p:sp>
+            <p:nvSpPr>
+              <p:cNvPr id="105" name="TextBox 104">
+                <a:extLst>
+                  <a:ext uri="{FF2B5EF4-FFF2-40B4-BE49-F238E27FC236}">
+                    <a16:creationId xmlns:a16="http://schemas.microsoft.com/office/drawing/2014/main" id="{31644E7B-FEFC-30FB-C55C-7515358C83A0}"/>
+                  </a:ext>
+                </a:extLst>
+              </p:cNvPr>
+              <p:cNvSpPr txBox="1"/>
+              <p:nvPr/>
+            </p:nvSpPr>
+            <p:spPr>
+              <a:xfrm>
+                <a:off x="1979375" y="2523362"/>
+                <a:ext cx="1661829" cy="646331"/>
+              </a:xfrm>
+              <a:prstGeom prst="rect">
+                <a:avLst/>
+              </a:prstGeom>
+              <a:noFill/>
+            </p:spPr>
+            <p:txBody>
+              <a:bodyPr wrap="square">
+                <a:spAutoFit/>
+              </a:bodyPr>
+              <a:lstStyle/>
+              <a:p>
+                <a:pPr algn="ctr"/>
+                <a:r>
+                  <a:rPr lang="en-US" dirty="0">
+                    <a:solidFill>
+                      <a:schemeClr val="tx1"/>
+                    </a:solidFill>
+                    <a:latin typeface="Trebuchet MS" panose="020B0703020202090204" pitchFamily="34" charset="0"/>
+                  </a:rPr>
+                  <a:t>Error</a:t>
+                </a:r>
+              </a:p>
+              <a:p>
+                <a:pPr algn="ctr"/>
+                <a14:m>
+                  <m:oMathPara xmlns:m="http://schemas.openxmlformats.org/officeDocument/2006/math">
+                    <m:oMathParaPr>
+                      <m:jc m:val="centerGroup"/>
+                    </m:oMathParaPr>
+                    <m:oMath xmlns:m="http://schemas.openxmlformats.org/officeDocument/2006/math">
+                      <m:r>
+                        <a:rPr lang="en-US" b="0" i="1" smtClean="0">
+                          <a:solidFill>
+                            <a:schemeClr val="tx1"/>
+                          </a:solidFill>
+                          <a:latin typeface="Cambria Math" panose="02040503050406030204" pitchFamily="18" charset="0"/>
+                        </a:rPr>
+                        <m:t>𝑒</m:t>
+                      </m:r>
+                      <m:r>
+                        <a:rPr lang="en-US" b="0" i="1" smtClean="0">
+                          <a:solidFill>
+                            <a:schemeClr val="tx1"/>
+                          </a:solidFill>
+                          <a:latin typeface="Cambria Math" panose="02040503050406030204" pitchFamily="18" charset="0"/>
+                        </a:rPr>
+                        <m:t>(</m:t>
+                      </m:r>
+                      <m:r>
+                        <a:rPr lang="en-US" b="0" i="1" smtClean="0">
+                          <a:solidFill>
+                            <a:schemeClr val="tx1"/>
+                          </a:solidFill>
+                          <a:latin typeface="Cambria Math" panose="02040503050406030204" pitchFamily="18" charset="0"/>
+                        </a:rPr>
+                        <m:t>𝑡</m:t>
+                      </m:r>
+                      <m:r>
+                        <a:rPr lang="en-US" b="0" i="1" smtClean="0">
+                          <a:solidFill>
+                            <a:schemeClr val="tx1"/>
+                          </a:solidFill>
+                          <a:latin typeface="Cambria Math" panose="02040503050406030204" pitchFamily="18" charset="0"/>
+                        </a:rPr>
+                        <m:t>)</m:t>
+                      </m:r>
+                    </m:oMath>
+                  </m:oMathPara>
+                </a14:m>
+                <a:endParaRPr lang="en-US" i="1" dirty="0">
+                  <a:solidFill>
+                    <a:schemeClr val="tx1"/>
+                  </a:solidFill>
+                  <a:latin typeface="Trebuchet MS" panose="020B0703020202090204" pitchFamily="34" charset="0"/>
+                </a:endParaRPr>
+              </a:p>
+            </p:txBody>
+          </p:sp>
+        </mc:Choice>
+        <mc:Fallback xmlns="">
+          <p:sp>
+            <p:nvSpPr>
+              <p:cNvPr id="105" name="TextBox 104">
+                <a:extLst>
+                  <a:ext uri="{FF2B5EF4-FFF2-40B4-BE49-F238E27FC236}">
+                    <a16:creationId xmlns:a16="http://schemas.microsoft.com/office/drawing/2014/main" id="{42AB1540-E5DF-C56F-F886-F3E54CCB3BA0}"/>
+                  </a:ext>
+                </a:extLst>
+              </p:cNvPr>
+              <p:cNvSpPr txBox="1">
+                <a:spLocks noRot="1" noChangeAspect="1" noMove="1" noResize="1" noEditPoints="1" noAdjustHandles="1" noChangeArrowheads="1" noChangeShapeType="1" noTextEdit="1"/>
+              </p:cNvSpPr>
+              <p:nvPr/>
+            </p:nvSpPr>
+            <p:spPr>
+              <a:xfrm>
+                <a:off x="1979375" y="2523362"/>
+                <a:ext cx="1661829" cy="646331"/>
+              </a:xfrm>
+              <a:prstGeom prst="rect">
+                <a:avLst/>
+              </a:prstGeom>
+              <a:blipFill>
+                <a:blip r:embed="rId9"/>
+                <a:stretch>
+                  <a:fillRect t="-3846" b="-7692"/>
+                </a:stretch>
+              </a:blipFill>
+            </p:spPr>
+            <p:txBody>
+              <a:bodyPr/>
+              <a:lstStyle/>
+              <a:p>
+                <a:r>
+                  <a:rPr lang="en-US">
+                    <a:noFill/>
+                  </a:rPr>
+                  <a:t> </a:t>
+                </a:r>
+              </a:p>
+            </p:txBody>
+          </p:sp>
+        </mc:Fallback>
+      </mc:AlternateContent>
+      <mc:AlternateContent xmlns:mc="http://schemas.openxmlformats.org/markup-compatibility/2006" xmlns:a14="http://schemas.microsoft.com/office/drawing/2010/main">
+        <mc:Choice Requires="a14">
+          <p:sp>
+            <p:nvSpPr>
+              <p:cNvPr id="106" name="TextBox 105">
+                <a:extLst>
+                  <a:ext uri="{FF2B5EF4-FFF2-40B4-BE49-F238E27FC236}">
+                    <a16:creationId xmlns:a16="http://schemas.microsoft.com/office/drawing/2014/main" id="{E5DF802E-C57C-36C9-46C7-672DE32A2A73}"/>
+                  </a:ext>
+                </a:extLst>
+              </p:cNvPr>
+              <p:cNvSpPr txBox="1"/>
+              <p:nvPr/>
+            </p:nvSpPr>
+            <p:spPr>
+              <a:xfrm>
+                <a:off x="2104143" y="4914868"/>
+                <a:ext cx="1823965" cy="679481"/>
+              </a:xfrm>
+              <a:prstGeom prst="rect">
+                <a:avLst/>
+              </a:prstGeom>
+              <a:noFill/>
+            </p:spPr>
+            <p:txBody>
+              <a:bodyPr wrap="square">
+                <a:spAutoFit/>
+              </a:bodyPr>
+              <a:lstStyle/>
+              <a:p>
+                <a:pPr algn="ctr"/>
+                <a:r>
+                  <a:rPr lang="en-US" dirty="0">
+                    <a:latin typeface="Trebuchet MS" panose="020B0703020202090204" pitchFamily="34" charset="0"/>
+                  </a:rPr>
+                  <a:t>Measured Angle</a:t>
+                </a:r>
+                <a:endParaRPr lang="en-US" dirty="0">
+                  <a:solidFill>
+                    <a:schemeClr val="tx1"/>
+                  </a:solidFill>
+                  <a:latin typeface="Trebuchet MS" panose="020B0703020202090204" pitchFamily="34" charset="0"/>
+                </a:endParaRPr>
+              </a:p>
+              <a:p>
+                <a:pPr algn="ctr"/>
+                <a14:m>
+                  <m:oMathPara xmlns:m="http://schemas.openxmlformats.org/officeDocument/2006/math">
+                    <m:oMathParaPr>
+                      <m:jc m:val="centerGroup"/>
+                    </m:oMathParaPr>
+                    <m:oMath xmlns:m="http://schemas.openxmlformats.org/officeDocument/2006/math">
+                      <m:acc>
+                        <m:accPr>
+                          <m:chr m:val="̂"/>
+                          <m:ctrlPr>
+                            <a:rPr lang="en-US" b="0" i="1" smtClean="0">
+                              <a:solidFill>
+                                <a:schemeClr val="tx1"/>
+                              </a:solidFill>
+                              <a:latin typeface="Cambria Math" panose="02040503050406030204" pitchFamily="18" charset="0"/>
+                            </a:rPr>
+                          </m:ctrlPr>
+                        </m:accPr>
+                        <m:e>
+                          <m:r>
+                            <a:rPr lang="en-US" b="0" i="1" smtClean="0">
+                              <a:solidFill>
+                                <a:schemeClr val="tx1"/>
+                              </a:solidFill>
+                              <a:latin typeface="Cambria Math" panose="02040503050406030204" pitchFamily="18" charset="0"/>
+                            </a:rPr>
+                            <m:t>𝜃</m:t>
+                          </m:r>
+                        </m:e>
+                      </m:acc>
+                      <m:r>
+                        <a:rPr lang="en-US" b="0" i="1" smtClean="0">
+                          <a:solidFill>
+                            <a:schemeClr val="tx1"/>
+                          </a:solidFill>
+                          <a:latin typeface="Cambria Math" panose="02040503050406030204" pitchFamily="18" charset="0"/>
+                        </a:rPr>
+                        <m:t>(</m:t>
+                      </m:r>
+                      <m:r>
+                        <a:rPr lang="en-US" b="0" i="1" smtClean="0">
+                          <a:solidFill>
+                            <a:schemeClr val="tx1"/>
+                          </a:solidFill>
+                          <a:latin typeface="Cambria Math" panose="02040503050406030204" pitchFamily="18" charset="0"/>
+                        </a:rPr>
+                        <m:t>𝑡</m:t>
+                      </m:r>
+                      <m:r>
+                        <a:rPr lang="en-US" b="0" i="1" smtClean="0">
+                          <a:solidFill>
+                            <a:schemeClr val="tx1"/>
+                          </a:solidFill>
+                          <a:latin typeface="Cambria Math" panose="02040503050406030204" pitchFamily="18" charset="0"/>
+                        </a:rPr>
+                        <m:t>)</m:t>
+                      </m:r>
+                    </m:oMath>
+                  </m:oMathPara>
+                </a14:m>
+                <a:endParaRPr lang="en-US" i="1" dirty="0">
+                  <a:solidFill>
+                    <a:schemeClr val="tx1"/>
+                  </a:solidFill>
+                  <a:latin typeface="Trebuchet MS" panose="020B0703020202090204" pitchFamily="34" charset="0"/>
+                </a:endParaRPr>
+              </a:p>
+            </p:txBody>
+          </p:sp>
+        </mc:Choice>
+        <mc:Fallback xmlns="">
+          <p:sp>
+            <p:nvSpPr>
+              <p:cNvPr id="106" name="TextBox 105">
+                <a:extLst>
+                  <a:ext uri="{FF2B5EF4-FFF2-40B4-BE49-F238E27FC236}">
+                    <a16:creationId xmlns:a16="http://schemas.microsoft.com/office/drawing/2014/main" id="{563B74A3-C5AA-EEA3-0791-95B8D4A545E6}"/>
+                  </a:ext>
+                </a:extLst>
+              </p:cNvPr>
+              <p:cNvSpPr txBox="1">
+                <a:spLocks noRot="1" noChangeAspect="1" noMove="1" noResize="1" noEditPoints="1" noAdjustHandles="1" noChangeArrowheads="1" noChangeShapeType="1" noTextEdit="1"/>
+              </p:cNvSpPr>
+              <p:nvPr/>
+            </p:nvSpPr>
+            <p:spPr>
+              <a:xfrm>
+                <a:off x="2104143" y="4914868"/>
+                <a:ext cx="1823965" cy="679481"/>
+              </a:xfrm>
+              <a:prstGeom prst="rect">
+                <a:avLst/>
+              </a:prstGeom>
+              <a:blipFill>
+                <a:blip r:embed="rId10"/>
+                <a:stretch>
+                  <a:fillRect l="-1379" t="-3636" r="-1379" b="-5455"/>
+                </a:stretch>
+              </a:blipFill>
+            </p:spPr>
+            <p:txBody>
+              <a:bodyPr/>
+              <a:lstStyle/>
+              <a:p>
+                <a:r>
+                  <a:rPr lang="en-US">
+                    <a:noFill/>
+                  </a:rPr>
+                  <a:t> </a:t>
+                </a:r>
+              </a:p>
+            </p:txBody>
+          </p:sp>
+        </mc:Fallback>
+      </mc:AlternateContent>
+      <mc:AlternateContent xmlns:mc="http://schemas.openxmlformats.org/markup-compatibility/2006" xmlns:a14="http://schemas.microsoft.com/office/drawing/2010/main">
+        <mc:Choice Requires="a14">
+          <p:sp>
+            <p:nvSpPr>
+              <p:cNvPr id="107" name="TextBox 106">
+                <a:extLst>
+                  <a:ext uri="{FF2B5EF4-FFF2-40B4-BE49-F238E27FC236}">
+                    <a16:creationId xmlns:a16="http://schemas.microsoft.com/office/drawing/2014/main" id="{C5E66572-E617-EBC4-1393-9DA102D80CB2}"/>
+                  </a:ext>
+                </a:extLst>
+              </p:cNvPr>
+              <p:cNvSpPr txBox="1"/>
+              <p:nvPr/>
+            </p:nvSpPr>
+            <p:spPr>
+              <a:xfrm>
+                <a:off x="1979375" y="3446775"/>
+                <a:ext cx="675095" cy="523220"/>
+              </a:xfrm>
+              <a:prstGeom prst="rect">
+                <a:avLst/>
+              </a:prstGeom>
+              <a:noFill/>
+            </p:spPr>
+            <p:txBody>
+              <a:bodyPr wrap="square">
+                <a:spAutoFit/>
+              </a:bodyPr>
+              <a:lstStyle/>
+              <a:p>
+                <a:pPr algn="ctr"/>
+                <a14:m>
+                  <m:oMathPara xmlns:m="http://schemas.openxmlformats.org/officeDocument/2006/math">
+                    <m:oMathParaPr>
+                      <m:jc m:val="centerGroup"/>
+                    </m:oMathParaPr>
+                    <m:oMath xmlns:m="http://schemas.openxmlformats.org/officeDocument/2006/math">
+                      <m:r>
+                        <a:rPr lang="en-US" sz="2800" b="1" i="1">
+                          <a:latin typeface="Cambria Math" panose="02040503050406030204" pitchFamily="18" charset="0"/>
+                        </a:rPr>
+                        <m:t>–</m:t>
+                      </m:r>
+                    </m:oMath>
+                  </m:oMathPara>
+                </a14:m>
+                <a:endParaRPr lang="en-US" b="1" i="1" dirty="0">
+                  <a:solidFill>
+                    <a:schemeClr val="tx1"/>
+                  </a:solidFill>
+                  <a:latin typeface="Trebuchet MS" panose="020B0703020202090204" pitchFamily="34" charset="0"/>
+                </a:endParaRPr>
+              </a:p>
+            </p:txBody>
+          </p:sp>
+        </mc:Choice>
+        <mc:Fallback xmlns="">
+          <p:sp>
+            <p:nvSpPr>
+              <p:cNvPr id="107" name="TextBox 106">
+                <a:extLst>
+                  <a:ext uri="{FF2B5EF4-FFF2-40B4-BE49-F238E27FC236}">
+                    <a16:creationId xmlns:a16="http://schemas.microsoft.com/office/drawing/2014/main" id="{2F06FE42-86AE-5D60-B2A3-EFDA28175207}"/>
+                  </a:ext>
+                </a:extLst>
+              </p:cNvPr>
+              <p:cNvSpPr txBox="1">
+                <a:spLocks noRot="1" noChangeAspect="1" noMove="1" noResize="1" noEditPoints="1" noAdjustHandles="1" noChangeArrowheads="1" noChangeShapeType="1" noTextEdit="1"/>
+              </p:cNvSpPr>
+              <p:nvPr/>
+            </p:nvSpPr>
+            <p:spPr>
+              <a:xfrm>
+                <a:off x="1979375" y="3446775"/>
+                <a:ext cx="675095" cy="523220"/>
+              </a:xfrm>
+              <a:prstGeom prst="rect">
+                <a:avLst/>
+              </a:prstGeom>
+              <a:blipFill>
+                <a:blip r:embed="rId11"/>
+                <a:stretch>
+                  <a:fillRect/>
+                </a:stretch>
+              </a:blipFill>
+            </p:spPr>
+            <p:txBody>
+              <a:bodyPr/>
+              <a:lstStyle/>
+              <a:p>
+                <a:r>
+                  <a:rPr lang="en-US">
+                    <a:noFill/>
+                  </a:rPr>
+                  <a:t> </a:t>
+                </a:r>
+              </a:p>
+            </p:txBody>
+          </p:sp>
+        </mc:Fallback>
+      </mc:AlternateContent>
+      <mc:AlternateContent xmlns:mc="http://schemas.openxmlformats.org/markup-compatibility/2006" xmlns:a14="http://schemas.microsoft.com/office/drawing/2010/main">
+        <mc:Choice Requires="a14">
+          <p:sp>
+            <p:nvSpPr>
+              <p:cNvPr id="108" name="TextBox 107">
+                <a:extLst>
+                  <a:ext uri="{FF2B5EF4-FFF2-40B4-BE49-F238E27FC236}">
+                    <a16:creationId xmlns:a16="http://schemas.microsoft.com/office/drawing/2014/main" id="{C4958526-892B-F433-48FE-66562E1E1B05}"/>
+                  </a:ext>
+                </a:extLst>
+              </p:cNvPr>
+              <p:cNvSpPr txBox="1"/>
+              <p:nvPr/>
+            </p:nvSpPr>
+            <p:spPr>
+              <a:xfrm>
+                <a:off x="1167901" y="2744364"/>
+                <a:ext cx="675095" cy="369332"/>
+              </a:xfrm>
+              <a:prstGeom prst="rect">
+                <a:avLst/>
+              </a:prstGeom>
+              <a:noFill/>
+            </p:spPr>
+            <p:txBody>
+              <a:bodyPr wrap="square">
+                <a:spAutoFit/>
+              </a:bodyPr>
+              <a:lstStyle/>
+              <a:p>
+                <a:pPr algn="ctr"/>
+                <a14:m>
+                  <m:oMathPara xmlns:m="http://schemas.openxmlformats.org/officeDocument/2006/math">
+                    <m:oMathParaPr>
+                      <m:jc m:val="centerGroup"/>
+                    </m:oMathParaPr>
+                    <m:oMath xmlns:m="http://schemas.openxmlformats.org/officeDocument/2006/math">
+                      <m:r>
+                        <a:rPr lang="en-US" b="1" i="1" smtClean="0">
+                          <a:solidFill>
+                            <a:schemeClr val="tx1"/>
+                          </a:solidFill>
+                          <a:latin typeface="Cambria Math" panose="02040503050406030204" pitchFamily="18" charset="0"/>
+                        </a:rPr>
+                        <m:t>+</m:t>
+                      </m:r>
+                    </m:oMath>
+                  </m:oMathPara>
+                </a14:m>
+                <a:endParaRPr lang="en-US" b="1" i="1" dirty="0">
+                  <a:solidFill>
+                    <a:schemeClr val="tx1"/>
+                  </a:solidFill>
+                  <a:latin typeface="Trebuchet MS" panose="020B0703020202090204" pitchFamily="34" charset="0"/>
+                </a:endParaRPr>
+              </a:p>
+            </p:txBody>
+          </p:sp>
+        </mc:Choice>
+        <mc:Fallback xmlns="">
+          <p:sp>
+            <p:nvSpPr>
+              <p:cNvPr id="108" name="TextBox 107">
+                <a:extLst>
+                  <a:ext uri="{FF2B5EF4-FFF2-40B4-BE49-F238E27FC236}">
+                    <a16:creationId xmlns:a16="http://schemas.microsoft.com/office/drawing/2014/main" id="{379761C1-E82D-C8FE-8B26-A66C592144C8}"/>
+                  </a:ext>
+                </a:extLst>
+              </p:cNvPr>
+              <p:cNvSpPr txBox="1">
+                <a:spLocks noRot="1" noChangeAspect="1" noMove="1" noResize="1" noEditPoints="1" noAdjustHandles="1" noChangeArrowheads="1" noChangeShapeType="1" noTextEdit="1"/>
+              </p:cNvSpPr>
+              <p:nvPr/>
+            </p:nvSpPr>
+            <p:spPr>
+              <a:xfrm>
+                <a:off x="1167901" y="2744364"/>
+                <a:ext cx="675095" cy="369332"/>
+              </a:xfrm>
+              <a:prstGeom prst="rect">
+                <a:avLst/>
+              </a:prstGeom>
+              <a:blipFill>
+                <a:blip r:embed="rId12"/>
+                <a:stretch>
+                  <a:fillRect/>
+                </a:stretch>
+              </a:blipFill>
+            </p:spPr>
+            <p:txBody>
+              <a:bodyPr/>
+              <a:lstStyle/>
+              <a:p>
+                <a:r>
+                  <a:rPr lang="en-US">
+                    <a:noFill/>
+                  </a:rPr>
+                  <a:t> </a:t>
+                </a:r>
+              </a:p>
+            </p:txBody>
+          </p:sp>
+        </mc:Fallback>
+      </mc:AlternateContent>
+      <mc:AlternateContent xmlns:mc="http://schemas.openxmlformats.org/markup-compatibility/2006" xmlns:a14="http://schemas.microsoft.com/office/drawing/2010/main">
+        <mc:Choice Requires="a14">
+          <p:sp>
+            <p:nvSpPr>
+              <p:cNvPr id="109" name="TextBox 108">
+                <a:extLst>
+                  <a:ext uri="{FF2B5EF4-FFF2-40B4-BE49-F238E27FC236}">
+                    <a16:creationId xmlns:a16="http://schemas.microsoft.com/office/drawing/2014/main" id="{B6D41160-6A30-6743-0889-BFB46D9A8330}"/>
+                  </a:ext>
+                </a:extLst>
+              </p:cNvPr>
+              <p:cNvSpPr txBox="1"/>
+              <p:nvPr/>
+            </p:nvSpPr>
+            <p:spPr>
+              <a:xfrm>
+                <a:off x="7526946" y="2776629"/>
+                <a:ext cx="675095" cy="369332"/>
+              </a:xfrm>
+              <a:prstGeom prst="rect">
+                <a:avLst/>
+              </a:prstGeom>
+              <a:noFill/>
+            </p:spPr>
+            <p:txBody>
+              <a:bodyPr wrap="square">
+                <a:spAutoFit/>
+              </a:bodyPr>
+              <a:lstStyle/>
+              <a:p>
+                <a:pPr algn="ctr"/>
+                <a14:m>
+                  <m:oMathPara xmlns:m="http://schemas.openxmlformats.org/officeDocument/2006/math">
+                    <m:oMathParaPr>
+                      <m:jc m:val="centerGroup"/>
+                    </m:oMathParaPr>
+                    <m:oMath xmlns:m="http://schemas.openxmlformats.org/officeDocument/2006/math">
+                      <m:r>
+                        <a:rPr lang="en-US" b="1" i="1" smtClean="0">
+                          <a:solidFill>
+                            <a:schemeClr val="tx1"/>
+                          </a:solidFill>
+                          <a:latin typeface="Cambria Math" panose="02040503050406030204" pitchFamily="18" charset="0"/>
+                        </a:rPr>
+                        <m:t>+</m:t>
+                      </m:r>
+                    </m:oMath>
+                  </m:oMathPara>
+                </a14:m>
+                <a:endParaRPr lang="en-US" b="1" i="1" dirty="0">
+                  <a:solidFill>
+                    <a:schemeClr val="tx1"/>
+                  </a:solidFill>
+                  <a:latin typeface="Trebuchet MS" panose="020B0703020202090204" pitchFamily="34" charset="0"/>
+                </a:endParaRPr>
+              </a:p>
+            </p:txBody>
+          </p:sp>
+        </mc:Choice>
+        <mc:Fallback xmlns="">
+          <p:sp>
+            <p:nvSpPr>
+              <p:cNvPr id="109" name="TextBox 108">
+                <a:extLst>
+                  <a:ext uri="{FF2B5EF4-FFF2-40B4-BE49-F238E27FC236}">
+                    <a16:creationId xmlns:a16="http://schemas.microsoft.com/office/drawing/2014/main" id="{CC836C8F-E483-231C-D387-7050C0F4F741}"/>
+                  </a:ext>
+                </a:extLst>
+              </p:cNvPr>
+              <p:cNvSpPr txBox="1">
+                <a:spLocks noRot="1" noChangeAspect="1" noMove="1" noResize="1" noEditPoints="1" noAdjustHandles="1" noChangeArrowheads="1" noChangeShapeType="1" noTextEdit="1"/>
+              </p:cNvSpPr>
+              <p:nvPr/>
+            </p:nvSpPr>
+            <p:spPr>
+              <a:xfrm>
+                <a:off x="7526946" y="2776629"/>
+                <a:ext cx="675095" cy="369332"/>
+              </a:xfrm>
+              <a:prstGeom prst="rect">
+                <a:avLst/>
+              </a:prstGeom>
+              <a:blipFill>
+                <a:blip r:embed="rId13"/>
+                <a:stretch>
+                  <a:fillRect/>
+                </a:stretch>
+              </a:blipFill>
+            </p:spPr>
+            <p:txBody>
+              <a:bodyPr/>
+              <a:lstStyle/>
+              <a:p>
+                <a:r>
+                  <a:rPr lang="en-US">
+                    <a:noFill/>
+                  </a:rPr>
+                  <a:t> </a:t>
+                </a:r>
+              </a:p>
+            </p:txBody>
+          </p:sp>
+        </mc:Fallback>
+      </mc:AlternateContent>
+      <mc:AlternateContent xmlns:mc="http://schemas.openxmlformats.org/markup-compatibility/2006" xmlns:a14="http://schemas.microsoft.com/office/drawing/2010/main">
+        <mc:Choice Requires="a14">
+          <p:sp>
+            <p:nvSpPr>
+              <p:cNvPr id="110" name="TextBox 109">
+                <a:extLst>
+                  <a:ext uri="{FF2B5EF4-FFF2-40B4-BE49-F238E27FC236}">
+                    <a16:creationId xmlns:a16="http://schemas.microsoft.com/office/drawing/2014/main" id="{51817132-17E4-CFBE-FDA2-F487F2DFC8BF}"/>
+                  </a:ext>
+                </a:extLst>
+              </p:cNvPr>
+              <p:cNvSpPr txBox="1"/>
+              <p:nvPr/>
+            </p:nvSpPr>
+            <p:spPr>
+              <a:xfrm>
+                <a:off x="7864082" y="2420035"/>
+                <a:ext cx="675095" cy="369332"/>
+              </a:xfrm>
+              <a:prstGeom prst="rect">
+                <a:avLst/>
+              </a:prstGeom>
+              <a:noFill/>
+            </p:spPr>
+            <p:txBody>
+              <a:bodyPr wrap="square">
+                <a:spAutoFit/>
+              </a:bodyPr>
+              <a:lstStyle/>
+              <a:p>
+                <a:pPr algn="ctr"/>
+                <a14:m>
+                  <m:oMathPara xmlns:m="http://schemas.openxmlformats.org/officeDocument/2006/math">
+                    <m:oMathParaPr>
+                      <m:jc m:val="centerGroup"/>
+                    </m:oMathParaPr>
+                    <m:oMath xmlns:m="http://schemas.openxmlformats.org/officeDocument/2006/math">
+                      <m:r>
+                        <a:rPr lang="en-US" b="1" i="1" smtClean="0">
+                          <a:solidFill>
+                            <a:schemeClr val="tx1"/>
+                          </a:solidFill>
+                          <a:latin typeface="Cambria Math" panose="02040503050406030204" pitchFamily="18" charset="0"/>
+                        </a:rPr>
+                        <m:t>+</m:t>
+                      </m:r>
+                    </m:oMath>
+                  </m:oMathPara>
+                </a14:m>
+                <a:endParaRPr lang="en-US" b="1" i="1" dirty="0">
+                  <a:solidFill>
+                    <a:schemeClr val="tx1"/>
+                  </a:solidFill>
+                  <a:latin typeface="Trebuchet MS" panose="020B0703020202090204" pitchFamily="34" charset="0"/>
+                </a:endParaRPr>
+              </a:p>
+            </p:txBody>
+          </p:sp>
+        </mc:Choice>
+        <mc:Fallback xmlns="">
+          <p:sp>
+            <p:nvSpPr>
+              <p:cNvPr id="110" name="TextBox 109">
+                <a:extLst>
+                  <a:ext uri="{FF2B5EF4-FFF2-40B4-BE49-F238E27FC236}">
+                    <a16:creationId xmlns:a16="http://schemas.microsoft.com/office/drawing/2014/main" id="{FC97D0CB-1EC8-6FB7-9917-D6F016EE5756}"/>
+                  </a:ext>
+                </a:extLst>
+              </p:cNvPr>
+              <p:cNvSpPr txBox="1">
+                <a:spLocks noRot="1" noChangeAspect="1" noMove="1" noResize="1" noEditPoints="1" noAdjustHandles="1" noChangeArrowheads="1" noChangeShapeType="1" noTextEdit="1"/>
+              </p:cNvSpPr>
+              <p:nvPr/>
+            </p:nvSpPr>
+            <p:spPr>
+              <a:xfrm>
+                <a:off x="7864082" y="2420035"/>
+                <a:ext cx="675095" cy="369332"/>
+              </a:xfrm>
+              <a:prstGeom prst="rect">
+                <a:avLst/>
+              </a:prstGeom>
+              <a:blipFill>
+                <a:blip r:embed="rId14"/>
+                <a:stretch>
+                  <a:fillRect/>
+                </a:stretch>
+              </a:blipFill>
+            </p:spPr>
+            <p:txBody>
+              <a:bodyPr/>
+              <a:lstStyle/>
+              <a:p>
+                <a:r>
+                  <a:rPr lang="en-US">
+                    <a:noFill/>
+                  </a:rPr>
+                  <a:t> </a:t>
+                </a:r>
+              </a:p>
+            </p:txBody>
+          </p:sp>
+        </mc:Fallback>
+      </mc:AlternateContent>
+      <mc:AlternateContent xmlns:mc="http://schemas.openxmlformats.org/markup-compatibility/2006" xmlns:a14="http://schemas.microsoft.com/office/drawing/2010/main">
+        <mc:Choice Requires="a14">
+          <p:sp>
+            <p:nvSpPr>
+              <p:cNvPr id="111" name="TextBox 110">
+                <a:extLst>
+                  <a:ext uri="{FF2B5EF4-FFF2-40B4-BE49-F238E27FC236}">
+                    <a16:creationId xmlns:a16="http://schemas.microsoft.com/office/drawing/2014/main" id="{C2042819-84B8-BCE2-2B73-6D5AD98A0B44}"/>
+                  </a:ext>
+                </a:extLst>
+              </p:cNvPr>
+              <p:cNvSpPr txBox="1"/>
+              <p:nvPr/>
+            </p:nvSpPr>
+            <p:spPr>
+              <a:xfrm>
+                <a:off x="7865026" y="3519990"/>
+                <a:ext cx="675095" cy="369332"/>
+              </a:xfrm>
+              <a:prstGeom prst="rect">
+                <a:avLst/>
+              </a:prstGeom>
+              <a:noFill/>
+            </p:spPr>
+            <p:txBody>
+              <a:bodyPr wrap="square">
+                <a:spAutoFit/>
+              </a:bodyPr>
+              <a:lstStyle/>
+              <a:p>
+                <a:pPr algn="ctr"/>
+                <a14:m>
+                  <m:oMathPara xmlns:m="http://schemas.openxmlformats.org/officeDocument/2006/math">
+                    <m:oMathParaPr>
+                      <m:jc m:val="centerGroup"/>
+                    </m:oMathParaPr>
+                    <m:oMath xmlns:m="http://schemas.openxmlformats.org/officeDocument/2006/math">
+                      <m:r>
+                        <a:rPr lang="en-US" b="1" i="1" smtClean="0">
+                          <a:solidFill>
+                            <a:schemeClr val="tx1"/>
+                          </a:solidFill>
+                          <a:latin typeface="Cambria Math" panose="02040503050406030204" pitchFamily="18" charset="0"/>
+                        </a:rPr>
+                        <m:t>+</m:t>
+                      </m:r>
+                    </m:oMath>
+                  </m:oMathPara>
+                </a14:m>
+                <a:endParaRPr lang="en-US" b="1" i="1" dirty="0">
+                  <a:solidFill>
+                    <a:schemeClr val="tx1"/>
+                  </a:solidFill>
+                  <a:latin typeface="Trebuchet MS" panose="020B0703020202090204" pitchFamily="34" charset="0"/>
+                </a:endParaRPr>
+              </a:p>
+            </p:txBody>
+          </p:sp>
+        </mc:Choice>
+        <mc:Fallback xmlns="">
+          <p:sp>
+            <p:nvSpPr>
+              <p:cNvPr id="111" name="TextBox 110">
+                <a:extLst>
+                  <a:ext uri="{FF2B5EF4-FFF2-40B4-BE49-F238E27FC236}">
+                    <a16:creationId xmlns:a16="http://schemas.microsoft.com/office/drawing/2014/main" id="{0278F41A-8216-2173-E106-B08761864612}"/>
+                  </a:ext>
+                </a:extLst>
+              </p:cNvPr>
+              <p:cNvSpPr txBox="1">
+                <a:spLocks noRot="1" noChangeAspect="1" noMove="1" noResize="1" noEditPoints="1" noAdjustHandles="1" noChangeArrowheads="1" noChangeShapeType="1" noTextEdit="1"/>
+              </p:cNvSpPr>
+              <p:nvPr/>
+            </p:nvSpPr>
+            <p:spPr>
+              <a:xfrm>
+                <a:off x="7865026" y="3519990"/>
+                <a:ext cx="675095" cy="369332"/>
+              </a:xfrm>
+              <a:prstGeom prst="rect">
+                <a:avLst/>
+              </a:prstGeom>
+              <a:blipFill>
+                <a:blip r:embed="rId15"/>
+                <a:stretch>
+                  <a:fillRect/>
+                </a:stretch>
+              </a:blipFill>
+            </p:spPr>
+            <p:txBody>
+              <a:bodyPr/>
+              <a:lstStyle/>
+              <a:p>
+                <a:r>
+                  <a:rPr lang="en-US">
+                    <a:noFill/>
+                  </a:rPr>
+                  <a:t> </a:t>
+                </a:r>
+              </a:p>
+            </p:txBody>
+          </p:sp>
+        </mc:Fallback>
+      </mc:AlternateContent>
+      <p:sp>
+        <p:nvSpPr>
+          <p:cNvPr id="112" name="TextBox 111">
+            <a:extLst>
+              <a:ext uri="{FF2B5EF4-FFF2-40B4-BE49-F238E27FC236}">
+                <a16:creationId xmlns:a16="http://schemas.microsoft.com/office/drawing/2014/main" id="{61E712C3-7B33-62F2-7B22-3114711D887B}"/>
+              </a:ext>
+            </a:extLst>
+          </p:cNvPr>
+          <p:cNvSpPr txBox="1"/>
+          <p:nvPr/>
+        </p:nvSpPr>
+        <p:spPr>
+          <a:xfrm>
+            <a:off x="8654828" y="5201968"/>
+            <a:ext cx="1661829" cy="369332"/>
+          </a:xfrm>
+          <a:prstGeom prst="rect">
+            <a:avLst/>
+          </a:prstGeom>
+          <a:noFill/>
+        </p:spPr>
+        <p:txBody>
+          <a:bodyPr wrap="square">
+            <a:spAutoFit/>
+          </a:bodyPr>
+          <a:lstStyle/>
+          <a:p>
+            <a:pPr algn="ctr"/>
+            <a:r>
+              <a:rPr lang="en-US" dirty="0">
+                <a:latin typeface="Trebuchet MS" panose="020B0703020202090204" pitchFamily="34" charset="0"/>
+              </a:rPr>
+              <a:t>Feedback</a:t>
+            </a:r>
+            <a:endParaRPr lang="en-US" dirty="0">
+              <a:solidFill>
+                <a:schemeClr val="tx1"/>
+              </a:solidFill>
+              <a:latin typeface="Trebuchet MS" panose="020B0703020202090204" pitchFamily="34" charset="0"/>
+            </a:endParaRPr>
+          </a:p>
+        </p:txBody>
+      </p:sp>
+      <p:sp>
+        <p:nvSpPr>
+          <p:cNvPr id="113" name="TextBox 112">
+            <a:extLst>
+              <a:ext uri="{FF2B5EF4-FFF2-40B4-BE49-F238E27FC236}">
+                <a16:creationId xmlns:a16="http://schemas.microsoft.com/office/drawing/2014/main" id="{118245E2-813D-1772-C0EB-4269FEDD7ADA}"/>
+              </a:ext>
+            </a:extLst>
+          </p:cNvPr>
+          <p:cNvSpPr txBox="1"/>
+          <p:nvPr/>
+        </p:nvSpPr>
+        <p:spPr>
+          <a:xfrm>
+            <a:off x="8782763" y="2499383"/>
+            <a:ext cx="1341280" cy="646331"/>
+          </a:xfrm>
+          <a:prstGeom prst="rect">
+            <a:avLst/>
+          </a:prstGeom>
+          <a:noFill/>
+        </p:spPr>
+        <p:txBody>
+          <a:bodyPr wrap="square">
+            <a:spAutoFit/>
+          </a:bodyPr>
+          <a:lstStyle/>
+          <a:p>
+            <a:pPr algn="ctr"/>
+            <a:r>
+              <a:rPr lang="en-US" dirty="0">
+                <a:latin typeface="Trebuchet MS" panose="020B0703020202090204" pitchFamily="34" charset="0"/>
+              </a:rPr>
+              <a:t>Controller Output</a:t>
+            </a:r>
+            <a:endParaRPr lang="en-US" dirty="0">
+              <a:solidFill>
+                <a:schemeClr val="tx1"/>
+              </a:solidFill>
+              <a:latin typeface="Trebuchet MS" panose="020B0703020202090204" pitchFamily="34" charset="0"/>
+            </a:endParaRPr>
+          </a:p>
+        </p:txBody>
+      </p:sp>
+      <mc:AlternateContent xmlns:mc="http://schemas.openxmlformats.org/markup-compatibility/2006" xmlns:a14="http://schemas.microsoft.com/office/drawing/2010/main">
+        <mc:Choice Requires="a14">
+          <p:sp>
+            <p:nvSpPr>
+              <p:cNvPr id="119" name="TextBox 118">
+                <a:extLst>
+                  <a:ext uri="{FF2B5EF4-FFF2-40B4-BE49-F238E27FC236}">
+                    <a16:creationId xmlns:a16="http://schemas.microsoft.com/office/drawing/2014/main" id="{63FD76DD-A629-6E61-122A-AB94372AEB9F}"/>
+                  </a:ext>
+                </a:extLst>
+              </p:cNvPr>
+              <p:cNvSpPr txBox="1"/>
+              <p:nvPr/>
+            </p:nvSpPr>
+            <p:spPr>
+              <a:xfrm>
+                <a:off x="11656056" y="2467365"/>
+                <a:ext cx="1661829" cy="646331"/>
+              </a:xfrm>
+              <a:prstGeom prst="rect">
+                <a:avLst/>
+              </a:prstGeom>
+              <a:noFill/>
+            </p:spPr>
+            <p:txBody>
+              <a:bodyPr wrap="square">
+                <a:spAutoFit/>
+              </a:bodyPr>
+              <a:lstStyle/>
+              <a:p>
+                <a:pPr algn="ctr"/>
+                <a:r>
+                  <a:rPr lang="en-US" dirty="0">
+                    <a:latin typeface="Trebuchet MS" panose="020B0703020202090204" pitchFamily="34" charset="0"/>
+                  </a:rPr>
+                  <a:t>Current Angle</a:t>
+                </a:r>
+                <a:endParaRPr lang="en-US" dirty="0">
+                  <a:solidFill>
+                    <a:schemeClr val="tx1"/>
+                  </a:solidFill>
+                  <a:latin typeface="Trebuchet MS" panose="020B0703020202090204" pitchFamily="34" charset="0"/>
+                </a:endParaRPr>
+              </a:p>
+              <a:p>
+                <a:pPr algn="ctr"/>
+                <a14:m>
+                  <m:oMathPara xmlns:m="http://schemas.openxmlformats.org/officeDocument/2006/math">
+                    <m:oMathParaPr>
+                      <m:jc m:val="centerGroup"/>
+                    </m:oMathParaPr>
+                    <m:oMath xmlns:m="http://schemas.openxmlformats.org/officeDocument/2006/math">
+                      <m:r>
+                        <a:rPr lang="en-US" b="0" i="1" smtClean="0">
+                          <a:solidFill>
+                            <a:schemeClr val="tx1"/>
+                          </a:solidFill>
+                          <a:latin typeface="Cambria Math" panose="02040503050406030204" pitchFamily="18" charset="0"/>
+                        </a:rPr>
+                        <m:t>𝜃</m:t>
+                      </m:r>
+                      <m:r>
+                        <a:rPr lang="en-US" b="0" i="1" smtClean="0">
+                          <a:solidFill>
+                            <a:schemeClr val="tx1"/>
+                          </a:solidFill>
+                          <a:latin typeface="Cambria Math" panose="02040503050406030204" pitchFamily="18" charset="0"/>
+                        </a:rPr>
+                        <m:t>(</m:t>
+                      </m:r>
+                      <m:r>
+                        <a:rPr lang="en-US" b="0" i="1" smtClean="0">
+                          <a:solidFill>
+                            <a:schemeClr val="tx1"/>
+                          </a:solidFill>
+                          <a:latin typeface="Cambria Math" panose="02040503050406030204" pitchFamily="18" charset="0"/>
+                        </a:rPr>
+                        <m:t>𝑡</m:t>
+                      </m:r>
+                      <m:r>
+                        <a:rPr lang="en-US" b="0" i="1" smtClean="0">
+                          <a:solidFill>
+                            <a:schemeClr val="tx1"/>
+                          </a:solidFill>
+                          <a:latin typeface="Cambria Math" panose="02040503050406030204" pitchFamily="18" charset="0"/>
+                        </a:rPr>
+                        <m:t>)</m:t>
+                      </m:r>
+                    </m:oMath>
+                  </m:oMathPara>
+                </a14:m>
+                <a:endParaRPr lang="en-US" i="1" dirty="0">
+                  <a:solidFill>
+                    <a:schemeClr val="tx1"/>
+                  </a:solidFill>
+                  <a:latin typeface="Trebuchet MS" panose="020B0703020202090204" pitchFamily="34" charset="0"/>
+                </a:endParaRPr>
+              </a:p>
+            </p:txBody>
+          </p:sp>
+        </mc:Choice>
+        <mc:Fallback xmlns="">
+          <p:sp>
+            <p:nvSpPr>
+              <p:cNvPr id="119" name="TextBox 118">
+                <a:extLst>
+                  <a:ext uri="{FF2B5EF4-FFF2-40B4-BE49-F238E27FC236}">
+                    <a16:creationId xmlns:a16="http://schemas.microsoft.com/office/drawing/2014/main" id="{7DAAAB13-6877-D449-A143-024FABFB9F51}"/>
+                  </a:ext>
+                </a:extLst>
+              </p:cNvPr>
+              <p:cNvSpPr txBox="1">
+                <a:spLocks noRot="1" noChangeAspect="1" noMove="1" noResize="1" noEditPoints="1" noAdjustHandles="1" noChangeArrowheads="1" noChangeShapeType="1" noTextEdit="1"/>
+              </p:cNvSpPr>
+              <p:nvPr/>
+            </p:nvSpPr>
+            <p:spPr>
+              <a:xfrm>
+                <a:off x="11656056" y="2467365"/>
+                <a:ext cx="1661829" cy="646331"/>
+              </a:xfrm>
+              <a:prstGeom prst="rect">
+                <a:avLst/>
+              </a:prstGeom>
+              <a:blipFill>
+                <a:blip r:embed="rId16"/>
+                <a:stretch>
+                  <a:fillRect l="-758" t="-3846" r="-758" b="-7692"/>
+                </a:stretch>
+              </a:blipFill>
+            </p:spPr>
+            <p:txBody>
+              <a:bodyPr/>
+              <a:lstStyle/>
+              <a:p>
+                <a:r>
+                  <a:rPr lang="en-US">
+                    <a:noFill/>
+                  </a:rPr>
+                  <a:t> </a:t>
+                </a:r>
+              </a:p>
+            </p:txBody>
+          </p:sp>
+        </mc:Fallback>
+      </mc:AlternateContent>
+    </p:spTree>
+    <p:extLst>
+      <p:ext uri="{BB962C8B-B14F-4D97-AF65-F5344CB8AC3E}">
+        <p14:creationId xmlns:p14="http://schemas.microsoft.com/office/powerpoint/2010/main" val="3777448123"/>
+      </p:ext>
+    </p:extLst>
+  </p:cSld>
+  <p:clrMapOvr>
+    <a:masterClrMapping/>
+  </p:clrMapOvr>
+</p:sld>
+</file>
+
+<file path=ppt/slides/slide3.xml><?xml version="1.0" encoding="utf-8"?>
+<p:sld xmlns:a="http://schemas.openxmlformats.org/drawingml/2006/main" xmlns:r="http://schemas.openxmlformats.org/officeDocument/2006/relationships" xmlns:p="http://schemas.openxmlformats.org/presentationml/2006/main">
+  <p:cSld>
+    <p:bg>
+      <p:bgPr>
+        <a:solidFill>
+          <a:schemeClr val="bg1">
+            <a:lumMod val="50000"/>
+          </a:schemeClr>
+        </a:solidFill>
+        <a:effectLst/>
+      </p:bgPr>
+    </p:bg>
+    <p:spTree>
+      <p:nvGrpSpPr>
+        <p:cNvPr id="1" name="">
+          <a:extLst>
+            <a:ext uri="{FF2B5EF4-FFF2-40B4-BE49-F238E27FC236}">
+              <a16:creationId xmlns:a16="http://schemas.microsoft.com/office/drawing/2014/main" id="{95547A3B-8F38-2034-6A68-EF23C0BC9456}"/>
+            </a:ext>
+          </a:extLst>
+        </p:cNvPr>
+        <p:cNvGrpSpPr/>
+        <p:nvPr/>
+      </p:nvGrpSpPr>
+      <p:grpSpPr>
+        <a:xfrm>
+          <a:off x="0" y="0"/>
+          <a:ext cx="0" cy="0"/>
+          <a:chOff x="0" y="0"/>
+          <a:chExt cx="0" cy="0"/>
+        </a:xfrm>
+      </p:grpSpPr>
+      <mc:AlternateContent xmlns:mc="http://schemas.openxmlformats.org/markup-compatibility/2006" xmlns:a14="http://schemas.microsoft.com/office/drawing/2010/main">
+        <mc:Choice Requires="a14">
+          <p:sp>
+            <p:nvSpPr>
+              <p:cNvPr id="4" name="Rectangle 3">
+                <a:extLst>
+                  <a:ext uri="{FF2B5EF4-FFF2-40B4-BE49-F238E27FC236}">
+                    <a16:creationId xmlns:a16="http://schemas.microsoft.com/office/drawing/2014/main" id="{8BED2ADC-6A54-1947-76A4-6CC94CAD32AC}"/>
+                  </a:ext>
+                </a:extLst>
+              </p:cNvPr>
+              <p:cNvSpPr/>
+              <p:nvPr/>
+            </p:nvSpPr>
+            <p:spPr>
+              <a:xfrm>
+                <a:off x="5225612" y="1748509"/>
+                <a:ext cx="2104780" cy="709137"/>
+              </a:xfrm>
+              <a:prstGeom prst="rect">
+                <a:avLst/>
+              </a:prstGeom>
+              <a:solidFill>
+                <a:schemeClr val="bg1">
+                  <a:lumMod val="85000"/>
+                </a:schemeClr>
+              </a:solidFill>
+              <a:ln>
+                <a:solidFill>
+                  <a:schemeClr val="tx1">
+                    <a:lumMod val="50000"/>
+                    <a:lumOff val="50000"/>
+                  </a:schemeClr>
+                </a:solidFill>
+              </a:ln>
+            </p:spPr>
+            <p:style>
+              <a:lnRef idx="2">
+                <a:schemeClr val="accent1">
+                  <a:shade val="15000"/>
+                </a:schemeClr>
+              </a:lnRef>
+              <a:fillRef idx="1">
+                <a:schemeClr val="accent1"/>
+              </a:fillRef>
+              <a:effectRef idx="0">
+                <a:schemeClr val="accent1"/>
+              </a:effectRef>
+              <a:fontRef idx="minor">
+                <a:schemeClr val="lt1"/>
+              </a:fontRef>
+            </p:style>
+            <p:txBody>
+              <a:bodyPr rtlCol="0" anchor="ctr"/>
+              <a:lstStyle/>
+              <a:p>
+                <a:pPr algn="ctr"/>
+                <a:r>
+                  <a:rPr lang="en-US" sz="2400" b="1" dirty="0">
+                    <a:solidFill>
+                      <a:schemeClr val="tx1">
+                        <a:lumMod val="75000"/>
+                        <a:lumOff val="25000"/>
+                      </a:schemeClr>
+                    </a:solidFill>
+                    <a:latin typeface="Arial Black" panose="020B0604020202020204" pitchFamily="34" charset="0"/>
+                    <a:cs typeface="Arial Black" panose="020B0604020202020204" pitchFamily="34" charset="0"/>
+                  </a:rPr>
+                  <a:t>P          </a:t>
+                </a:r>
+                <a14:m>
+                  <m:oMath xmlns:m="http://schemas.openxmlformats.org/officeDocument/2006/math">
+                    <m:r>
+                      <a:rPr lang="en-US" sz="2400" b="0" i="1" smtClean="0">
+                        <a:solidFill>
+                          <a:schemeClr val="tx1">
+                            <a:lumMod val="75000"/>
+                            <a:lumOff val="25000"/>
+                          </a:schemeClr>
+                        </a:solidFill>
+                        <a:latin typeface="Cambria Math" panose="02040503050406030204" pitchFamily="18" charset="0"/>
+                        <a:cs typeface="Arial Black" panose="020B0604020202020204" pitchFamily="34" charset="0"/>
+                      </a:rPr>
+                      <m:t>𝑒</m:t>
+                    </m:r>
+                    <m:r>
+                      <a:rPr lang="en-US" sz="2400" b="0" i="1" smtClean="0">
+                        <a:solidFill>
+                          <a:schemeClr val="tx1">
+                            <a:lumMod val="75000"/>
+                            <a:lumOff val="25000"/>
+                          </a:schemeClr>
+                        </a:solidFill>
+                        <a:latin typeface="Cambria Math" panose="02040503050406030204" pitchFamily="18" charset="0"/>
+                        <a:cs typeface="Arial Black" panose="020B0604020202020204" pitchFamily="34" charset="0"/>
+                      </a:rPr>
+                      <m:t>(</m:t>
+                    </m:r>
+                    <m:r>
+                      <a:rPr lang="en-US" sz="2400" b="0" i="1" smtClean="0">
+                        <a:solidFill>
+                          <a:schemeClr val="tx1">
+                            <a:lumMod val="75000"/>
+                            <a:lumOff val="25000"/>
+                          </a:schemeClr>
+                        </a:solidFill>
+                        <a:latin typeface="Cambria Math" panose="02040503050406030204" pitchFamily="18" charset="0"/>
+                        <a:cs typeface="Arial Black" panose="020B0604020202020204" pitchFamily="34" charset="0"/>
+                      </a:rPr>
+                      <m:t>𝑡</m:t>
+                    </m:r>
+                    <m:r>
+                      <a:rPr lang="en-US" sz="2400" b="0" i="1" smtClean="0">
+                        <a:solidFill>
+                          <a:schemeClr val="tx1">
+                            <a:lumMod val="75000"/>
+                            <a:lumOff val="25000"/>
+                          </a:schemeClr>
+                        </a:solidFill>
+                        <a:latin typeface="Cambria Math" panose="02040503050406030204" pitchFamily="18" charset="0"/>
+                        <a:cs typeface="Arial Black" panose="020B0604020202020204" pitchFamily="34" charset="0"/>
+                      </a:rPr>
+                      <m:t>)</m:t>
+                    </m:r>
+                  </m:oMath>
+                </a14:m>
+                <a:endParaRPr lang="en-US" sz="3200" i="1" dirty="0">
+                  <a:solidFill>
+                    <a:schemeClr val="tx1">
+                      <a:lumMod val="75000"/>
+                      <a:lumOff val="25000"/>
+                    </a:schemeClr>
+                  </a:solidFill>
+                  <a:latin typeface="Arial Black" panose="020B0604020202020204" pitchFamily="34" charset="0"/>
+                  <a:cs typeface="Arial Black" panose="020B0604020202020204" pitchFamily="34" charset="0"/>
+                </a:endParaRPr>
+              </a:p>
+            </p:txBody>
+          </p:sp>
+        </mc:Choice>
+        <mc:Fallback xmlns="">
+          <p:sp>
+            <p:nvSpPr>
+              <p:cNvPr id="4" name="Rectangle 3">
+                <a:extLst>
+                  <a:ext uri="{FF2B5EF4-FFF2-40B4-BE49-F238E27FC236}">
+                    <a16:creationId xmlns:a16="http://schemas.microsoft.com/office/drawing/2014/main" id="{8BED2ADC-6A54-1947-76A4-6CC94CAD32AC}"/>
+                  </a:ext>
+                </a:extLst>
+              </p:cNvPr>
+              <p:cNvSpPr>
+                <a:spLocks noRot="1" noChangeAspect="1" noMove="1" noResize="1" noEditPoints="1" noAdjustHandles="1" noChangeArrowheads="1" noChangeShapeType="1" noTextEdit="1"/>
+              </p:cNvSpPr>
+              <p:nvPr/>
+            </p:nvSpPr>
+            <p:spPr>
+              <a:xfrm>
+                <a:off x="5225612" y="1748509"/>
+                <a:ext cx="2104780" cy="709137"/>
+              </a:xfrm>
+              <a:prstGeom prst="rect">
+                <a:avLst/>
+              </a:prstGeom>
+              <a:blipFill>
+                <a:blip r:embed="rId2"/>
+                <a:stretch>
+                  <a:fillRect l="-595"/>
+                </a:stretch>
+              </a:blipFill>
+              <a:ln>
+                <a:solidFill>
+                  <a:schemeClr val="tx1">
+                    <a:lumMod val="50000"/>
+                    <a:lumOff val="50000"/>
+                  </a:schemeClr>
+                </a:solidFill>
+              </a:ln>
+            </p:spPr>
+            <p:txBody>
+              <a:bodyPr/>
+              <a:lstStyle/>
+              <a:p>
+                <a:r>
+                  <a:rPr lang="en-US">
+                    <a:noFill/>
+                  </a:rPr>
+                  <a:t> </a:t>
+                </a:r>
+              </a:p>
+            </p:txBody>
+          </p:sp>
+        </mc:Fallback>
+      </mc:AlternateContent>
+      <p:cxnSp>
+        <p:nvCxnSpPr>
+          <p:cNvPr id="6" name="Straight Arrow Connector 5">
+            <a:extLst>
+              <a:ext uri="{FF2B5EF4-FFF2-40B4-BE49-F238E27FC236}">
+                <a16:creationId xmlns:a16="http://schemas.microsoft.com/office/drawing/2014/main" id="{A076D486-DE44-6E5C-B2E6-06EBB59BCCE4}"/>
+              </a:ext>
+            </a:extLst>
+          </p:cNvPr>
+          <p:cNvCxnSpPr>
+            <a:cxnSpLocks/>
+          </p:cNvCxnSpPr>
+          <p:nvPr/>
+        </p:nvCxnSpPr>
+        <p:spPr>
+          <a:xfrm>
+            <a:off x="138191" y="3182364"/>
+            <a:ext cx="1455153" cy="0"/>
+          </a:xfrm>
+          <a:prstGeom prst="straightConnector1">
+            <a:avLst/>
+          </a:prstGeom>
+          <a:ln w="57150">
+            <a:solidFill>
+              <a:schemeClr val="bg1"/>
+            </a:solidFill>
+            <a:tailEnd type="triangle"/>
+          </a:ln>
+        </p:spPr>
+        <p:style>
+          <a:lnRef idx="2">
+            <a:schemeClr val="dk1"/>
+          </a:lnRef>
+          <a:fillRef idx="0">
+            <a:schemeClr val="dk1"/>
+          </a:fillRef>
+          <a:effectRef idx="1">
+            <a:schemeClr val="dk1"/>
+          </a:effectRef>
+          <a:fontRef idx="minor">
+            <a:schemeClr val="tx1"/>
+          </a:fontRef>
+        </p:style>
+      </p:cxnSp>
+      <p:grpSp>
+        <p:nvGrpSpPr>
+          <p:cNvPr id="17" name="Group 16">
+            <a:extLst>
+              <a:ext uri="{FF2B5EF4-FFF2-40B4-BE49-F238E27FC236}">
+                <a16:creationId xmlns:a16="http://schemas.microsoft.com/office/drawing/2014/main" id="{8DF9365E-8482-C4FB-7EDA-49C54CFD6F5A}"/>
+              </a:ext>
+            </a:extLst>
+          </p:cNvPr>
+          <p:cNvGrpSpPr/>
+          <p:nvPr/>
+        </p:nvGrpSpPr>
+        <p:grpSpPr>
+          <a:xfrm>
+            <a:off x="1412105" y="2574288"/>
+            <a:ext cx="1216152" cy="1216152"/>
+            <a:chOff x="1871202" y="2751585"/>
+            <a:chExt cx="1216152" cy="1216152"/>
+          </a:xfrm>
+        </p:grpSpPr>
+        <p:sp>
+          <p:nvSpPr>
+            <p:cNvPr id="7" name="Oval 6">
+              <a:extLst>
+                <a:ext uri="{FF2B5EF4-FFF2-40B4-BE49-F238E27FC236}">
+                  <a16:creationId xmlns:a16="http://schemas.microsoft.com/office/drawing/2014/main" id="{5B318199-1DF6-6E74-9D2E-D0C758CF1E03}"/>
+                </a:ext>
+              </a:extLst>
+            </p:cNvPr>
+            <p:cNvSpPr/>
+            <p:nvPr/>
+          </p:nvSpPr>
+          <p:spPr>
+            <a:xfrm>
+              <a:off x="2033683" y="2914066"/>
+              <a:ext cx="891190" cy="891190"/>
+            </a:xfrm>
+            <a:prstGeom prst="ellipse">
+              <a:avLst/>
+            </a:prstGeom>
+            <a:solidFill>
+              <a:schemeClr val="bg1">
+                <a:lumMod val="85000"/>
+              </a:schemeClr>
+            </a:solidFill>
+            <a:ln>
+              <a:solidFill>
+                <a:schemeClr val="tx1">
+                  <a:lumMod val="50000"/>
+                  <a:lumOff val="50000"/>
+                </a:schemeClr>
+              </a:solidFill>
+            </a:ln>
+          </p:spPr>
+          <p:style>
+            <a:lnRef idx="2">
+              <a:schemeClr val="accent1">
+                <a:shade val="15000"/>
+              </a:schemeClr>
+            </a:lnRef>
+            <a:fillRef idx="1">
+              <a:schemeClr val="accent1"/>
+            </a:fillRef>
+            <a:effectRef idx="0">
+              <a:schemeClr val="accent1"/>
+            </a:effectRef>
+            <a:fontRef idx="minor">
+              <a:schemeClr val="lt1"/>
+            </a:fontRef>
+          </p:style>
+          <p:txBody>
+            <a:bodyPr rtlCol="0" anchor="ctr"/>
+            <a:lstStyle/>
+            <a:p>
+              <a:pPr algn="ctr"/>
+              <a:endParaRPr lang="en-US"/>
+            </a:p>
+          </p:txBody>
+        </p:sp>
+        <p:sp>
+          <p:nvSpPr>
+            <p:cNvPr id="9" name="Multiply 8">
+              <a:extLst>
+                <a:ext uri="{FF2B5EF4-FFF2-40B4-BE49-F238E27FC236}">
+                  <a16:creationId xmlns:a16="http://schemas.microsoft.com/office/drawing/2014/main" id="{F1A2B8BD-B3E3-8A3C-2F96-E8799C37A418}"/>
+                </a:ext>
+              </a:extLst>
+            </p:cNvPr>
+            <p:cNvSpPr/>
+            <p:nvPr/>
+          </p:nvSpPr>
+          <p:spPr>
+            <a:xfrm>
+              <a:off x="1871202" y="2751585"/>
+              <a:ext cx="1216152" cy="1216152"/>
+            </a:xfrm>
+            <a:prstGeom prst="mathMultiply">
+              <a:avLst>
+                <a:gd name="adj1" fmla="val 2711"/>
+              </a:avLst>
+            </a:prstGeom>
+            <a:solidFill>
+              <a:schemeClr val="tx1">
+                <a:lumMod val="50000"/>
+                <a:lumOff val="50000"/>
+              </a:schemeClr>
+            </a:solidFill>
+            <a:ln>
+              <a:noFill/>
+            </a:ln>
+          </p:spPr>
+          <p:style>
+            <a:lnRef idx="2">
+              <a:schemeClr val="accent1">
+                <a:shade val="15000"/>
+              </a:schemeClr>
+            </a:lnRef>
+            <a:fillRef idx="1">
+              <a:schemeClr val="accent1"/>
+            </a:fillRef>
+            <a:effectRef idx="0">
+              <a:schemeClr val="accent1"/>
+            </a:effectRef>
+            <a:fontRef idx="minor">
+              <a:schemeClr val="lt1"/>
+            </a:fontRef>
+          </p:style>
+          <p:txBody>
+            <a:bodyPr rtlCol="0" anchor="ctr"/>
+            <a:lstStyle/>
+            <a:p>
+              <a:pPr algn="ctr"/>
+              <a:endParaRPr lang="en-US"/>
+            </a:p>
+          </p:txBody>
+        </p:sp>
+      </p:grpSp>
+      <mc:AlternateContent xmlns:mc="http://schemas.openxmlformats.org/markup-compatibility/2006" xmlns:a14="http://schemas.microsoft.com/office/drawing/2010/main">
+        <mc:Choice Requires="a14">
+          <p:sp>
+            <p:nvSpPr>
+              <p:cNvPr id="11" name="Triangle 10">
+                <a:extLst>
+                  <a:ext uri="{FF2B5EF4-FFF2-40B4-BE49-F238E27FC236}">
+                    <a16:creationId xmlns:a16="http://schemas.microsoft.com/office/drawing/2014/main" id="{92AF71E5-A23F-ED85-9C73-921B14260251}"/>
+                  </a:ext>
+                </a:extLst>
+              </p:cNvPr>
+              <p:cNvSpPr/>
+              <p:nvPr/>
+            </p:nvSpPr>
+            <p:spPr>
+              <a:xfrm rot="5400000">
+                <a:off x="3951730" y="1586455"/>
+                <a:ext cx="671673" cy="1043189"/>
+              </a:xfrm>
+              <a:prstGeom prst="triangle">
+                <a:avLst/>
+              </a:prstGeom>
+              <a:solidFill>
+                <a:schemeClr val="bg1">
+                  <a:lumMod val="85000"/>
+                </a:schemeClr>
+              </a:solidFill>
+              <a:ln>
+                <a:solidFill>
+                  <a:schemeClr val="tx1">
+                    <a:lumMod val="50000"/>
+                    <a:lumOff val="50000"/>
+                  </a:schemeClr>
+                </a:solidFill>
+              </a:ln>
+            </p:spPr>
+            <p:style>
+              <a:lnRef idx="2">
+                <a:schemeClr val="accent1">
+                  <a:shade val="15000"/>
+                </a:schemeClr>
+              </a:lnRef>
+              <a:fillRef idx="1">
+                <a:schemeClr val="accent1"/>
+              </a:fillRef>
+              <a:effectRef idx="0">
+                <a:schemeClr val="accent1"/>
+              </a:effectRef>
+              <a:fontRef idx="minor">
+                <a:schemeClr val="lt1"/>
+              </a:fontRef>
+            </p:style>
+            <p:txBody>
+              <a:bodyPr vert="vert270" rtlCol="0" anchor="ctr"/>
+              <a:lstStyle/>
+              <a:p>
+                <a:pPr algn="ctr"/>
+                <a14:m>
+                  <m:oMathPara xmlns:m="http://schemas.openxmlformats.org/officeDocument/2006/math">
+                    <m:oMathParaPr>
+                      <m:jc m:val="centerGroup"/>
+                    </m:oMathParaPr>
+                    <m:oMath xmlns:m="http://schemas.openxmlformats.org/officeDocument/2006/math">
+                      <m:r>
+                        <a:rPr lang="en-US" sz="2400" b="1" i="0" smtClean="0">
+                          <a:solidFill>
+                            <a:schemeClr val="tx1">
+                              <a:lumMod val="75000"/>
+                              <a:lumOff val="25000"/>
+                            </a:schemeClr>
+                          </a:solidFill>
+                          <a:latin typeface="Cambria Math" panose="02040503050406030204" pitchFamily="18" charset="0"/>
+                          <a:cs typeface="Arial Black" panose="020B0604020202020204" pitchFamily="34" charset="0"/>
+                        </a:rPr>
+                        <m:t>   </m:t>
+                      </m:r>
+                      <m:sSub>
+                        <m:sSubPr>
+                          <m:ctrlPr>
+                            <a:rPr lang="en-US" sz="2400" b="1" i="1" smtClean="0">
+                              <a:solidFill>
+                                <a:schemeClr val="tx1">
+                                  <a:lumMod val="75000"/>
+                                  <a:lumOff val="25000"/>
+                                </a:schemeClr>
+                              </a:solidFill>
+                              <a:latin typeface="Cambria Math" panose="02040503050406030204" pitchFamily="18" charset="0"/>
+                              <a:cs typeface="Arial Black" panose="020B0604020202020204" pitchFamily="34" charset="0"/>
+                            </a:rPr>
+                          </m:ctrlPr>
+                        </m:sSubPr>
+                        <m:e>
+                          <m:r>
+                            <a:rPr lang="en-US" sz="2400" b="1" i="0" smtClean="0">
+                              <a:solidFill>
+                                <a:schemeClr val="tx1">
+                                  <a:lumMod val="75000"/>
+                                  <a:lumOff val="25000"/>
+                                </a:schemeClr>
+                              </a:solidFill>
+                              <a:latin typeface="Cambria Math" panose="02040503050406030204" pitchFamily="18" charset="0"/>
+                              <a:cs typeface="Arial Black" panose="020B0604020202020204" pitchFamily="34" charset="0"/>
+                            </a:rPr>
+                            <m:t>𝐊</m:t>
+                          </m:r>
+                        </m:e>
+                        <m:sub>
+                          <m:r>
+                            <a:rPr lang="en-US" sz="2400" b="1" i="0" smtClean="0">
+                              <a:solidFill>
+                                <a:schemeClr val="tx1">
+                                  <a:lumMod val="75000"/>
+                                  <a:lumOff val="25000"/>
+                                </a:schemeClr>
+                              </a:solidFill>
+                              <a:latin typeface="Cambria Math" panose="02040503050406030204" pitchFamily="18" charset="0"/>
+                              <a:cs typeface="Arial Black" panose="020B0604020202020204" pitchFamily="34" charset="0"/>
+                            </a:rPr>
+                            <m:t>𝐩</m:t>
+                          </m:r>
+                        </m:sub>
+                      </m:sSub>
+                    </m:oMath>
+                  </m:oMathPara>
+                </a14:m>
+                <a:endParaRPr lang="en-US" sz="2400" b="1" dirty="0">
+                  <a:solidFill>
+                    <a:schemeClr val="tx1">
+                      <a:lumMod val="75000"/>
+                      <a:lumOff val="25000"/>
+                    </a:schemeClr>
+                  </a:solidFill>
+                  <a:latin typeface="Arial Black" panose="020B0604020202020204" pitchFamily="34" charset="0"/>
+                  <a:cs typeface="Arial Black" panose="020B0604020202020204" pitchFamily="34" charset="0"/>
+                </a:endParaRPr>
+              </a:p>
+            </p:txBody>
+          </p:sp>
+        </mc:Choice>
+        <mc:Fallback xmlns="">
+          <p:sp>
+            <p:nvSpPr>
+              <p:cNvPr id="11" name="Triangle 10">
+                <a:extLst>
+                  <a:ext uri="{FF2B5EF4-FFF2-40B4-BE49-F238E27FC236}">
+                    <a16:creationId xmlns:a16="http://schemas.microsoft.com/office/drawing/2014/main" id="{92AF71E5-A23F-ED85-9C73-921B14260251}"/>
+                  </a:ext>
+                </a:extLst>
+              </p:cNvPr>
+              <p:cNvSpPr>
+                <a:spLocks noRot="1" noChangeAspect="1" noMove="1" noResize="1" noEditPoints="1" noAdjustHandles="1" noChangeArrowheads="1" noChangeShapeType="1" noTextEdit="1"/>
+              </p:cNvSpPr>
+              <p:nvPr/>
+            </p:nvSpPr>
+            <p:spPr>
+              <a:xfrm rot="5400000">
+                <a:off x="3951730" y="1586455"/>
+                <a:ext cx="671673" cy="1043189"/>
+              </a:xfrm>
+              <a:prstGeom prst="triangle">
+                <a:avLst/>
+              </a:prstGeom>
+              <a:blipFill>
+                <a:blip r:embed="rId3"/>
+                <a:stretch>
+                  <a:fillRect l="-20930"/>
+                </a:stretch>
+              </a:blipFill>
+              <a:ln>
+                <a:solidFill>
+                  <a:schemeClr val="tx1">
+                    <a:lumMod val="50000"/>
+                    <a:lumOff val="50000"/>
+                  </a:schemeClr>
+                </a:solidFill>
+              </a:ln>
+            </p:spPr>
+            <p:txBody>
+              <a:bodyPr/>
+              <a:lstStyle/>
+              <a:p>
+                <a:r>
+                  <a:rPr lang="en-US">
+                    <a:noFill/>
+                  </a:rPr>
+                  <a:t> </a:t>
+                </a:r>
+              </a:p>
+            </p:txBody>
+          </p:sp>
+        </mc:Fallback>
+      </mc:AlternateContent>
+      <mc:AlternateContent xmlns:mc="http://schemas.openxmlformats.org/markup-compatibility/2006" xmlns:a14="http://schemas.microsoft.com/office/drawing/2010/main">
+        <mc:Choice Requires="a14">
+          <p:sp>
+            <p:nvSpPr>
+              <p:cNvPr id="12" name="Rectangle 11">
+                <a:extLst>
+                  <a:ext uri="{FF2B5EF4-FFF2-40B4-BE49-F238E27FC236}">
+                    <a16:creationId xmlns:a16="http://schemas.microsoft.com/office/drawing/2014/main" id="{E8858B7B-3655-38E8-73F7-4201F9446CD2}"/>
+                  </a:ext>
+                </a:extLst>
+              </p:cNvPr>
+              <p:cNvSpPr/>
+              <p:nvPr/>
+            </p:nvSpPr>
+            <p:spPr>
+              <a:xfrm>
+                <a:off x="5225612" y="2827796"/>
+                <a:ext cx="2104780" cy="709137"/>
+              </a:xfrm>
+              <a:prstGeom prst="rect">
+                <a:avLst/>
+              </a:prstGeom>
+              <a:solidFill>
+                <a:schemeClr val="bg1">
+                  <a:lumMod val="85000"/>
+                </a:schemeClr>
+              </a:solidFill>
+              <a:ln>
+                <a:solidFill>
+                  <a:schemeClr val="tx1">
+                    <a:lumMod val="50000"/>
+                    <a:lumOff val="50000"/>
+                  </a:schemeClr>
+                </a:solidFill>
+              </a:ln>
+            </p:spPr>
+            <p:style>
+              <a:lnRef idx="2">
+                <a:schemeClr val="accent1">
+                  <a:shade val="15000"/>
+                </a:schemeClr>
+              </a:lnRef>
+              <a:fillRef idx="1">
+                <a:schemeClr val="accent1"/>
+              </a:fillRef>
+              <a:effectRef idx="0">
+                <a:schemeClr val="accent1"/>
+              </a:effectRef>
+              <a:fontRef idx="minor">
+                <a:schemeClr val="lt1"/>
+              </a:fontRef>
+            </p:style>
+            <p:txBody>
+              <a:bodyPr rtlCol="0" anchor="ctr"/>
+              <a:lstStyle/>
+              <a:p>
+                <a:pPr algn="ctr"/>
+                <a:r>
+                  <a:rPr lang="en-US" sz="2400" b="1" dirty="0">
+                    <a:solidFill>
+                      <a:schemeClr val="tx1">
+                        <a:lumMod val="75000"/>
+                        <a:lumOff val="25000"/>
+                      </a:schemeClr>
+                    </a:solidFill>
+                    <a:latin typeface="Arial Black" panose="020B0604020202020204" pitchFamily="34" charset="0"/>
+                    <a:cs typeface="Arial Black" panose="020B0604020202020204" pitchFamily="34" charset="0"/>
+                  </a:rPr>
+                  <a:t>I    </a:t>
+                </a:r>
+                <a14:m>
+                  <m:oMath xmlns:m="http://schemas.openxmlformats.org/officeDocument/2006/math">
+                    <m:nary>
+                      <m:naryPr>
+                        <m:limLoc m:val="undOvr"/>
+                        <m:ctrlPr>
+                          <a:rPr lang="en-US" sz="2400" i="1" smtClean="0">
+                            <a:solidFill>
+                              <a:schemeClr val="tx1">
+                                <a:lumMod val="75000"/>
+                                <a:lumOff val="25000"/>
+                              </a:schemeClr>
+                            </a:solidFill>
+                            <a:latin typeface="Cambria Math" panose="02040503050406030204" pitchFamily="18" charset="0"/>
+                            <a:cs typeface="Arial Black" panose="020B0604020202020204" pitchFamily="34" charset="0"/>
+                          </a:rPr>
+                        </m:ctrlPr>
+                      </m:naryPr>
+                      <m:sub>
+                        <m:r>
+                          <m:rPr>
+                            <m:brk m:alnAt="24"/>
+                          </m:rPr>
+                          <a:rPr lang="en-US" sz="2400" b="0" i="1" smtClean="0">
+                            <a:solidFill>
+                              <a:schemeClr val="tx1">
+                                <a:lumMod val="75000"/>
+                                <a:lumOff val="25000"/>
+                              </a:schemeClr>
+                            </a:solidFill>
+                            <a:latin typeface="Cambria Math" panose="02040503050406030204" pitchFamily="18" charset="0"/>
+                            <a:cs typeface="Arial Black" panose="020B0604020202020204" pitchFamily="34" charset="0"/>
+                          </a:rPr>
+                          <m:t>0</m:t>
+                        </m:r>
+                      </m:sub>
+                      <m:sup>
+                        <m:r>
+                          <a:rPr lang="en-US" sz="2400" b="0" i="1" smtClean="0">
+                            <a:solidFill>
+                              <a:schemeClr val="tx1">
+                                <a:lumMod val="75000"/>
+                                <a:lumOff val="25000"/>
+                              </a:schemeClr>
+                            </a:solidFill>
+                            <a:latin typeface="Cambria Math" panose="02040503050406030204" pitchFamily="18" charset="0"/>
+                            <a:cs typeface="Arial Black" panose="020B0604020202020204" pitchFamily="34" charset="0"/>
+                          </a:rPr>
+                          <m:t>𝑡</m:t>
+                        </m:r>
+                      </m:sup>
+                      <m:e>
+                        <m:r>
+                          <a:rPr lang="en-US" sz="2400" b="0" i="1" smtClean="0">
+                            <a:solidFill>
+                              <a:schemeClr val="tx1">
+                                <a:lumMod val="75000"/>
+                                <a:lumOff val="25000"/>
+                              </a:schemeClr>
+                            </a:solidFill>
+                            <a:latin typeface="Cambria Math" panose="02040503050406030204" pitchFamily="18" charset="0"/>
+                            <a:cs typeface="Arial Black" panose="020B0604020202020204" pitchFamily="34" charset="0"/>
+                          </a:rPr>
+                          <m:t>𝑒</m:t>
+                        </m:r>
+                        <m:r>
+                          <a:rPr lang="en-US" sz="2400" b="0" i="1" smtClean="0">
+                            <a:solidFill>
+                              <a:schemeClr val="tx1">
+                                <a:lumMod val="75000"/>
+                                <a:lumOff val="25000"/>
+                              </a:schemeClr>
+                            </a:solidFill>
+                            <a:latin typeface="Cambria Math" panose="02040503050406030204" pitchFamily="18" charset="0"/>
+                            <a:cs typeface="Arial Black" panose="020B0604020202020204" pitchFamily="34" charset="0"/>
+                          </a:rPr>
+                          <m:t>(</m:t>
+                        </m:r>
+                        <m:r>
+                          <a:rPr lang="en-US" sz="2400" b="0" i="1" smtClean="0">
+                            <a:solidFill>
+                              <a:schemeClr val="tx1">
+                                <a:lumMod val="75000"/>
+                                <a:lumOff val="25000"/>
+                              </a:schemeClr>
+                            </a:solidFill>
+                            <a:latin typeface="Cambria Math" panose="02040503050406030204" pitchFamily="18" charset="0"/>
+                            <a:cs typeface="Arial Black" panose="020B0604020202020204" pitchFamily="34" charset="0"/>
+                          </a:rPr>
+                          <m:t>𝜏</m:t>
+                        </m:r>
+                        <m:r>
+                          <a:rPr lang="en-US" sz="2400" b="0" i="1" smtClean="0">
+                            <a:solidFill>
+                              <a:schemeClr val="tx1">
+                                <a:lumMod val="75000"/>
+                                <a:lumOff val="25000"/>
+                              </a:schemeClr>
+                            </a:solidFill>
+                            <a:latin typeface="Cambria Math" panose="02040503050406030204" pitchFamily="18" charset="0"/>
+                            <a:cs typeface="Arial Black" panose="020B0604020202020204" pitchFamily="34" charset="0"/>
+                          </a:rPr>
+                          <m:t>)</m:t>
+                        </m:r>
+                        <m:r>
+                          <a:rPr lang="en-US" sz="2400" b="0" i="1" smtClean="0">
+                            <a:solidFill>
+                              <a:schemeClr val="tx1">
+                                <a:lumMod val="75000"/>
+                                <a:lumOff val="25000"/>
+                              </a:schemeClr>
+                            </a:solidFill>
+                            <a:latin typeface="Cambria Math" panose="02040503050406030204" pitchFamily="18" charset="0"/>
+                            <a:cs typeface="Arial Black" panose="020B0604020202020204" pitchFamily="34" charset="0"/>
+                          </a:rPr>
+                          <m:t>𝑑</m:t>
+                        </m:r>
+                        <m:r>
+                          <a:rPr lang="en-US" sz="2400" b="0" i="1" smtClean="0">
+                            <a:solidFill>
+                              <a:schemeClr val="tx1">
+                                <a:lumMod val="75000"/>
+                                <a:lumOff val="25000"/>
+                              </a:schemeClr>
+                            </a:solidFill>
+                            <a:latin typeface="Cambria Math" panose="02040503050406030204" pitchFamily="18" charset="0"/>
+                            <a:cs typeface="Arial Black" panose="020B0604020202020204" pitchFamily="34" charset="0"/>
+                          </a:rPr>
+                          <m:t>𝜏</m:t>
+                        </m:r>
+                      </m:e>
+                    </m:nary>
+                  </m:oMath>
+                </a14:m>
+                <a:endParaRPr lang="en-US" sz="3200" i="1" dirty="0">
+                  <a:solidFill>
+                    <a:schemeClr val="tx1">
+                      <a:lumMod val="75000"/>
+                      <a:lumOff val="25000"/>
+                    </a:schemeClr>
+                  </a:solidFill>
+                  <a:latin typeface="Arial Black" panose="020B0604020202020204" pitchFamily="34" charset="0"/>
+                  <a:cs typeface="Arial Black" panose="020B0604020202020204" pitchFamily="34" charset="0"/>
+                </a:endParaRPr>
+              </a:p>
+            </p:txBody>
+          </p:sp>
+        </mc:Choice>
+        <mc:Fallback xmlns="">
+          <p:sp>
+            <p:nvSpPr>
+              <p:cNvPr id="12" name="Rectangle 11">
+                <a:extLst>
+                  <a:ext uri="{FF2B5EF4-FFF2-40B4-BE49-F238E27FC236}">
+                    <a16:creationId xmlns:a16="http://schemas.microsoft.com/office/drawing/2014/main" id="{E8858B7B-3655-38E8-73F7-4201F9446CD2}"/>
+                  </a:ext>
+                </a:extLst>
+              </p:cNvPr>
+              <p:cNvSpPr>
+                <a:spLocks noRot="1" noChangeAspect="1" noMove="1" noResize="1" noEditPoints="1" noAdjustHandles="1" noChangeArrowheads="1" noChangeShapeType="1" noTextEdit="1"/>
+              </p:cNvSpPr>
+              <p:nvPr/>
+            </p:nvSpPr>
+            <p:spPr>
+              <a:xfrm>
+                <a:off x="5225612" y="2827796"/>
+                <a:ext cx="2104780" cy="709137"/>
+              </a:xfrm>
+              <a:prstGeom prst="rect">
+                <a:avLst/>
+              </a:prstGeom>
+              <a:blipFill>
+                <a:blip r:embed="rId4"/>
+                <a:stretch>
+                  <a:fillRect t="-81034" b="-134483"/>
+                </a:stretch>
+              </a:blipFill>
+              <a:ln>
+                <a:solidFill>
+                  <a:schemeClr val="tx1">
+                    <a:lumMod val="50000"/>
+                    <a:lumOff val="50000"/>
+                  </a:schemeClr>
+                </a:solidFill>
+              </a:ln>
+            </p:spPr>
+            <p:txBody>
+              <a:bodyPr/>
+              <a:lstStyle/>
+              <a:p>
+                <a:r>
+                  <a:rPr lang="en-US">
+                    <a:noFill/>
+                  </a:rPr>
+                  <a:t> </a:t>
+                </a:r>
+              </a:p>
+            </p:txBody>
+          </p:sp>
+        </mc:Fallback>
+      </mc:AlternateContent>
+      <mc:AlternateContent xmlns:mc="http://schemas.openxmlformats.org/markup-compatibility/2006" xmlns:a14="http://schemas.microsoft.com/office/drawing/2010/main">
+        <mc:Choice Requires="a14">
+          <p:sp>
+            <p:nvSpPr>
+              <p:cNvPr id="13" name="Rectangle 12">
+                <a:extLst>
+                  <a:ext uri="{FF2B5EF4-FFF2-40B4-BE49-F238E27FC236}">
+                    <a16:creationId xmlns:a16="http://schemas.microsoft.com/office/drawing/2014/main" id="{743B8BFE-BBF9-6B63-727A-E8D449D91252}"/>
+                  </a:ext>
+                </a:extLst>
+              </p:cNvPr>
+              <p:cNvSpPr/>
+              <p:nvPr/>
+            </p:nvSpPr>
+            <p:spPr>
+              <a:xfrm>
+                <a:off x="5225612" y="3907408"/>
+                <a:ext cx="2104780" cy="709137"/>
+              </a:xfrm>
+              <a:prstGeom prst="rect">
+                <a:avLst/>
+              </a:prstGeom>
+              <a:solidFill>
+                <a:schemeClr val="bg1">
+                  <a:lumMod val="85000"/>
+                </a:schemeClr>
+              </a:solidFill>
+              <a:ln>
+                <a:solidFill>
+                  <a:schemeClr val="tx1">
+                    <a:lumMod val="50000"/>
+                    <a:lumOff val="50000"/>
+                  </a:schemeClr>
+                </a:solidFill>
+              </a:ln>
+            </p:spPr>
+            <p:style>
+              <a:lnRef idx="2">
+                <a:schemeClr val="accent1">
+                  <a:shade val="15000"/>
+                </a:schemeClr>
+              </a:lnRef>
+              <a:fillRef idx="1">
+                <a:schemeClr val="accent1"/>
+              </a:fillRef>
+              <a:effectRef idx="0">
+                <a:schemeClr val="accent1"/>
+              </a:effectRef>
+              <a:fontRef idx="minor">
+                <a:schemeClr val="lt1"/>
+              </a:fontRef>
+            </p:style>
+            <p:txBody>
+              <a:bodyPr rtlCol="0" anchor="ctr"/>
+              <a:lstStyle/>
+              <a:p>
+                <a:pPr algn="ctr"/>
+                <a:r>
+                  <a:rPr lang="en-US" sz="2400" b="1" dirty="0">
+                    <a:solidFill>
+                      <a:schemeClr val="tx1">
+                        <a:lumMod val="75000"/>
+                        <a:lumOff val="25000"/>
+                      </a:schemeClr>
+                    </a:solidFill>
+                    <a:latin typeface="Arial Black" panose="020B0604020202020204" pitchFamily="34" charset="0"/>
+                    <a:cs typeface="Arial Black" panose="020B0604020202020204" pitchFamily="34" charset="0"/>
+                  </a:rPr>
+                  <a:t>D       </a:t>
+                </a:r>
+                <a14:m>
+                  <m:oMath xmlns:m="http://schemas.openxmlformats.org/officeDocument/2006/math">
+                    <m:f>
+                      <m:fPr>
+                        <m:ctrlPr>
+                          <a:rPr lang="en-US" sz="2400" i="1" smtClean="0">
+                            <a:solidFill>
+                              <a:schemeClr val="tx1">
+                                <a:lumMod val="75000"/>
+                                <a:lumOff val="25000"/>
+                              </a:schemeClr>
+                            </a:solidFill>
+                            <a:latin typeface="Cambria Math" panose="02040503050406030204" pitchFamily="18" charset="0"/>
+                            <a:cs typeface="Arial Black" panose="020B0604020202020204" pitchFamily="34" charset="0"/>
+                          </a:rPr>
+                        </m:ctrlPr>
+                      </m:fPr>
+                      <m:num>
+                        <m:r>
+                          <a:rPr lang="en-US" sz="2400" b="0" i="1" smtClean="0">
+                            <a:solidFill>
+                              <a:schemeClr val="tx1">
+                                <a:lumMod val="75000"/>
+                                <a:lumOff val="25000"/>
+                              </a:schemeClr>
+                            </a:solidFill>
+                            <a:latin typeface="Cambria Math" panose="02040503050406030204" pitchFamily="18" charset="0"/>
+                            <a:cs typeface="Arial Black" panose="020B0604020202020204" pitchFamily="34" charset="0"/>
+                          </a:rPr>
+                          <m:t>𝑑</m:t>
+                        </m:r>
+                      </m:num>
+                      <m:den>
+                        <m:r>
+                          <a:rPr lang="en-US" sz="2400" b="0" i="1" smtClean="0">
+                            <a:solidFill>
+                              <a:schemeClr val="tx1">
+                                <a:lumMod val="75000"/>
+                                <a:lumOff val="25000"/>
+                              </a:schemeClr>
+                            </a:solidFill>
+                            <a:latin typeface="Cambria Math" panose="02040503050406030204" pitchFamily="18" charset="0"/>
+                            <a:cs typeface="Arial Black" panose="020B0604020202020204" pitchFamily="34" charset="0"/>
+                          </a:rPr>
+                          <m:t>𝑑𝑡</m:t>
+                        </m:r>
+                      </m:den>
+                    </m:f>
+                    <m:r>
+                      <a:rPr lang="en-US" sz="2400" b="0" i="1" smtClean="0">
+                        <a:solidFill>
+                          <a:schemeClr val="tx1">
+                            <a:lumMod val="75000"/>
+                            <a:lumOff val="25000"/>
+                          </a:schemeClr>
+                        </a:solidFill>
+                        <a:latin typeface="Cambria Math" panose="02040503050406030204" pitchFamily="18" charset="0"/>
+                        <a:cs typeface="Arial Black" panose="020B0604020202020204" pitchFamily="34" charset="0"/>
+                      </a:rPr>
+                      <m:t>𝑒</m:t>
+                    </m:r>
+                    <m:r>
+                      <a:rPr lang="en-US" sz="2400" b="0" i="1" smtClean="0">
+                        <a:solidFill>
+                          <a:schemeClr val="tx1">
+                            <a:lumMod val="75000"/>
+                            <a:lumOff val="25000"/>
+                          </a:schemeClr>
+                        </a:solidFill>
+                        <a:latin typeface="Cambria Math" panose="02040503050406030204" pitchFamily="18" charset="0"/>
+                        <a:cs typeface="Arial Black" panose="020B0604020202020204" pitchFamily="34" charset="0"/>
+                      </a:rPr>
+                      <m:t>(</m:t>
+                    </m:r>
+                    <m:r>
+                      <a:rPr lang="en-US" sz="2400" b="0" i="1" smtClean="0">
+                        <a:solidFill>
+                          <a:schemeClr val="tx1">
+                            <a:lumMod val="75000"/>
+                            <a:lumOff val="25000"/>
+                          </a:schemeClr>
+                        </a:solidFill>
+                        <a:latin typeface="Cambria Math" panose="02040503050406030204" pitchFamily="18" charset="0"/>
+                        <a:cs typeface="Arial Black" panose="020B0604020202020204" pitchFamily="34" charset="0"/>
+                      </a:rPr>
+                      <m:t>𝑡</m:t>
+                    </m:r>
+                    <m:r>
+                      <a:rPr lang="en-US" sz="2400" b="0" i="1" smtClean="0">
+                        <a:solidFill>
+                          <a:schemeClr val="tx1">
+                            <a:lumMod val="75000"/>
+                            <a:lumOff val="25000"/>
+                          </a:schemeClr>
+                        </a:solidFill>
+                        <a:latin typeface="Cambria Math" panose="02040503050406030204" pitchFamily="18" charset="0"/>
+                        <a:cs typeface="Arial Black" panose="020B0604020202020204" pitchFamily="34" charset="0"/>
+                      </a:rPr>
+                      <m:t>)</m:t>
+                    </m:r>
+                  </m:oMath>
+                </a14:m>
+                <a:endParaRPr lang="en-US" sz="3200" i="1" dirty="0">
+                  <a:solidFill>
+                    <a:schemeClr val="tx1">
+                      <a:lumMod val="75000"/>
+                      <a:lumOff val="25000"/>
+                    </a:schemeClr>
+                  </a:solidFill>
+                  <a:latin typeface="Arial Black" panose="020B0604020202020204" pitchFamily="34" charset="0"/>
+                  <a:cs typeface="Arial Black" panose="020B0604020202020204" pitchFamily="34" charset="0"/>
+                </a:endParaRPr>
+              </a:p>
+            </p:txBody>
+          </p:sp>
+        </mc:Choice>
+        <mc:Fallback xmlns="">
+          <p:sp>
+            <p:nvSpPr>
+              <p:cNvPr id="13" name="Rectangle 12">
+                <a:extLst>
+                  <a:ext uri="{FF2B5EF4-FFF2-40B4-BE49-F238E27FC236}">
+                    <a16:creationId xmlns:a16="http://schemas.microsoft.com/office/drawing/2014/main" id="{743B8BFE-BBF9-6B63-727A-E8D449D91252}"/>
+                  </a:ext>
+                </a:extLst>
+              </p:cNvPr>
+              <p:cNvSpPr>
+                <a:spLocks noRot="1" noChangeAspect="1" noMove="1" noResize="1" noEditPoints="1" noAdjustHandles="1" noChangeArrowheads="1" noChangeShapeType="1" noTextEdit="1"/>
+              </p:cNvSpPr>
+              <p:nvPr/>
+            </p:nvSpPr>
+            <p:spPr>
+              <a:xfrm>
+                <a:off x="5225612" y="3907408"/>
+                <a:ext cx="2104780" cy="709137"/>
+              </a:xfrm>
+              <a:prstGeom prst="rect">
+                <a:avLst/>
+              </a:prstGeom>
+              <a:blipFill>
+                <a:blip r:embed="rId5"/>
+                <a:stretch>
+                  <a:fillRect l="-595"/>
+                </a:stretch>
+              </a:blipFill>
+              <a:ln>
+                <a:solidFill>
+                  <a:schemeClr val="tx1">
+                    <a:lumMod val="50000"/>
+                    <a:lumOff val="50000"/>
+                  </a:schemeClr>
+                </a:solidFill>
+              </a:ln>
+            </p:spPr>
+            <p:txBody>
+              <a:bodyPr/>
+              <a:lstStyle/>
+              <a:p>
+                <a:r>
+                  <a:rPr lang="en-US">
+                    <a:noFill/>
+                  </a:rPr>
+                  <a:t> </a:t>
+                </a:r>
+              </a:p>
+            </p:txBody>
+          </p:sp>
+        </mc:Fallback>
+      </mc:AlternateContent>
+      <mc:AlternateContent xmlns:mc="http://schemas.openxmlformats.org/markup-compatibility/2006" xmlns:a14="http://schemas.microsoft.com/office/drawing/2010/main">
+        <mc:Choice Requires="a14">
+          <p:sp>
+            <p:nvSpPr>
+              <p:cNvPr id="14" name="Triangle 13">
+                <a:extLst>
+                  <a:ext uri="{FF2B5EF4-FFF2-40B4-BE49-F238E27FC236}">
+                    <a16:creationId xmlns:a16="http://schemas.microsoft.com/office/drawing/2014/main" id="{6BA89D57-22E8-FB63-D82B-8481D90D8612}"/>
+                  </a:ext>
+                </a:extLst>
+              </p:cNvPr>
+              <p:cNvSpPr/>
+              <p:nvPr/>
+            </p:nvSpPr>
+            <p:spPr>
+              <a:xfrm rot="5400000">
+                <a:off x="3963181" y="2663353"/>
+                <a:ext cx="671673" cy="1043189"/>
+              </a:xfrm>
+              <a:prstGeom prst="triangle">
+                <a:avLst/>
+              </a:prstGeom>
+              <a:solidFill>
+                <a:schemeClr val="bg1">
+                  <a:lumMod val="85000"/>
+                </a:schemeClr>
+              </a:solidFill>
+              <a:ln>
+                <a:solidFill>
+                  <a:schemeClr val="tx1">
+                    <a:lumMod val="50000"/>
+                    <a:lumOff val="50000"/>
+                  </a:schemeClr>
+                </a:solidFill>
+              </a:ln>
+            </p:spPr>
+            <p:style>
+              <a:lnRef idx="2">
+                <a:schemeClr val="accent1">
+                  <a:shade val="15000"/>
+                </a:schemeClr>
+              </a:lnRef>
+              <a:fillRef idx="1">
+                <a:schemeClr val="accent1"/>
+              </a:fillRef>
+              <a:effectRef idx="0">
+                <a:schemeClr val="accent1"/>
+              </a:effectRef>
+              <a:fontRef idx="minor">
+                <a:schemeClr val="lt1"/>
+              </a:fontRef>
+            </p:style>
+            <p:txBody>
+              <a:bodyPr vert="vert270" rtlCol="0" anchor="ctr"/>
+              <a:lstStyle/>
+              <a:p>
+                <a:pPr algn="ctr"/>
+                <a14:m>
+                  <m:oMathPara xmlns:m="http://schemas.openxmlformats.org/officeDocument/2006/math">
+                    <m:oMathParaPr>
+                      <m:jc m:val="centerGroup"/>
+                    </m:oMathParaPr>
+                    <m:oMath xmlns:m="http://schemas.openxmlformats.org/officeDocument/2006/math">
+                      <m:r>
+                        <a:rPr lang="en-US" sz="2400" b="1" i="0" smtClean="0">
+                          <a:solidFill>
+                            <a:schemeClr val="tx1">
+                              <a:lumMod val="75000"/>
+                              <a:lumOff val="25000"/>
+                            </a:schemeClr>
+                          </a:solidFill>
+                          <a:latin typeface="Cambria Math" panose="02040503050406030204" pitchFamily="18" charset="0"/>
+                          <a:cs typeface="Arial Black" panose="020B0604020202020204" pitchFamily="34" charset="0"/>
+                        </a:rPr>
+                        <m:t>   </m:t>
+                      </m:r>
+                      <m:sSub>
+                        <m:sSubPr>
+                          <m:ctrlPr>
+                            <a:rPr lang="en-US" sz="2400" b="1" i="1" smtClean="0">
+                              <a:solidFill>
+                                <a:schemeClr val="tx1">
+                                  <a:lumMod val="75000"/>
+                                  <a:lumOff val="25000"/>
+                                </a:schemeClr>
+                              </a:solidFill>
+                              <a:latin typeface="Cambria Math" panose="02040503050406030204" pitchFamily="18" charset="0"/>
+                              <a:cs typeface="Arial Black" panose="020B0604020202020204" pitchFamily="34" charset="0"/>
+                            </a:rPr>
+                          </m:ctrlPr>
+                        </m:sSubPr>
+                        <m:e>
+                          <m:r>
+                            <a:rPr lang="en-US" sz="2400" b="1" i="0" smtClean="0">
+                              <a:solidFill>
+                                <a:schemeClr val="tx1">
+                                  <a:lumMod val="75000"/>
+                                  <a:lumOff val="25000"/>
+                                </a:schemeClr>
+                              </a:solidFill>
+                              <a:latin typeface="Cambria Math" panose="02040503050406030204" pitchFamily="18" charset="0"/>
+                              <a:cs typeface="Arial Black" panose="020B0604020202020204" pitchFamily="34" charset="0"/>
+                            </a:rPr>
+                            <m:t>𝐊</m:t>
+                          </m:r>
+                        </m:e>
+                        <m:sub>
+                          <m:r>
+                            <m:rPr>
+                              <m:sty m:val="p"/>
+                            </m:rPr>
+                            <a:rPr lang="en-US" sz="2400" b="1" i="0" smtClean="0">
+                              <a:solidFill>
+                                <a:schemeClr val="tx1">
+                                  <a:lumMod val="75000"/>
+                                  <a:lumOff val="25000"/>
+                                </a:schemeClr>
+                              </a:solidFill>
+                              <a:latin typeface="Cambria Math" panose="02040503050406030204" pitchFamily="18" charset="0"/>
+                              <a:cs typeface="Arial Black" panose="020B0604020202020204" pitchFamily="34" charset="0"/>
+                            </a:rPr>
+                            <m:t>i</m:t>
+                          </m:r>
+                        </m:sub>
+                      </m:sSub>
+                    </m:oMath>
+                  </m:oMathPara>
+                </a14:m>
+                <a:endParaRPr lang="en-US" sz="2400" b="1" dirty="0">
+                  <a:solidFill>
+                    <a:schemeClr val="tx1">
+                      <a:lumMod val="75000"/>
+                      <a:lumOff val="25000"/>
+                    </a:schemeClr>
+                  </a:solidFill>
+                  <a:latin typeface="Arial Black" panose="020B0604020202020204" pitchFamily="34" charset="0"/>
+                  <a:cs typeface="Arial Black" panose="020B0604020202020204" pitchFamily="34" charset="0"/>
+                </a:endParaRPr>
+              </a:p>
+            </p:txBody>
+          </p:sp>
+        </mc:Choice>
+        <mc:Fallback xmlns="">
+          <p:sp>
+            <p:nvSpPr>
+              <p:cNvPr id="14" name="Triangle 13">
+                <a:extLst>
+                  <a:ext uri="{FF2B5EF4-FFF2-40B4-BE49-F238E27FC236}">
+                    <a16:creationId xmlns:a16="http://schemas.microsoft.com/office/drawing/2014/main" id="{6BA89D57-22E8-FB63-D82B-8481D90D8612}"/>
+                  </a:ext>
+                </a:extLst>
+              </p:cNvPr>
+              <p:cNvSpPr>
+                <a:spLocks noRot="1" noChangeAspect="1" noMove="1" noResize="1" noEditPoints="1" noAdjustHandles="1" noChangeArrowheads="1" noChangeShapeType="1" noTextEdit="1"/>
+              </p:cNvSpPr>
+              <p:nvPr/>
+            </p:nvSpPr>
+            <p:spPr>
+              <a:xfrm rot="5400000">
+                <a:off x="3963181" y="2663353"/>
+                <a:ext cx="671673" cy="1043189"/>
+              </a:xfrm>
+              <a:prstGeom prst="triangle">
+                <a:avLst/>
+              </a:prstGeom>
+              <a:blipFill>
+                <a:blip r:embed="rId6"/>
+                <a:stretch>
+                  <a:fillRect l="-18605"/>
+                </a:stretch>
+              </a:blipFill>
+              <a:ln>
+                <a:solidFill>
+                  <a:schemeClr val="tx1">
+                    <a:lumMod val="50000"/>
+                    <a:lumOff val="50000"/>
+                  </a:schemeClr>
+                </a:solidFill>
+              </a:ln>
+            </p:spPr>
+            <p:txBody>
+              <a:bodyPr/>
+              <a:lstStyle/>
+              <a:p>
+                <a:r>
+                  <a:rPr lang="en-US">
+                    <a:noFill/>
+                  </a:rPr>
+                  <a:t> </a:t>
+                </a:r>
+              </a:p>
+            </p:txBody>
+          </p:sp>
+        </mc:Fallback>
+      </mc:AlternateContent>
+      <mc:AlternateContent xmlns:mc="http://schemas.openxmlformats.org/markup-compatibility/2006" xmlns:a14="http://schemas.microsoft.com/office/drawing/2010/main">
+        <mc:Choice Requires="a14">
+          <p:sp>
+            <p:nvSpPr>
+              <p:cNvPr id="15" name="Triangle 14">
+                <a:extLst>
+                  <a:ext uri="{FF2B5EF4-FFF2-40B4-BE49-F238E27FC236}">
+                    <a16:creationId xmlns:a16="http://schemas.microsoft.com/office/drawing/2014/main" id="{78C02E39-ACA4-EDA1-E7A4-5532EE4FB2B4}"/>
+                  </a:ext>
+                </a:extLst>
+              </p:cNvPr>
+              <p:cNvSpPr/>
+              <p:nvPr/>
+            </p:nvSpPr>
+            <p:spPr>
+              <a:xfrm rot="5400000">
+                <a:off x="3951731" y="3740251"/>
+                <a:ext cx="671673" cy="1043189"/>
+              </a:xfrm>
+              <a:prstGeom prst="triangle">
+                <a:avLst/>
+              </a:prstGeom>
+              <a:solidFill>
+                <a:schemeClr val="bg1">
+                  <a:lumMod val="85000"/>
+                </a:schemeClr>
+              </a:solidFill>
+              <a:ln>
+                <a:solidFill>
+                  <a:schemeClr val="tx1">
+                    <a:lumMod val="50000"/>
+                    <a:lumOff val="50000"/>
+                  </a:schemeClr>
+                </a:solidFill>
+              </a:ln>
+            </p:spPr>
+            <p:style>
+              <a:lnRef idx="2">
+                <a:schemeClr val="accent1">
+                  <a:shade val="15000"/>
+                </a:schemeClr>
+              </a:lnRef>
+              <a:fillRef idx="1">
+                <a:schemeClr val="accent1"/>
+              </a:fillRef>
+              <a:effectRef idx="0">
+                <a:schemeClr val="accent1"/>
+              </a:effectRef>
+              <a:fontRef idx="minor">
+                <a:schemeClr val="lt1"/>
+              </a:fontRef>
+            </p:style>
+            <p:txBody>
+              <a:bodyPr vert="vert270" rtlCol="0" anchor="ctr"/>
+              <a:lstStyle/>
+              <a:p>
+                <a:pPr algn="ctr"/>
+                <a14:m>
+                  <m:oMathPara xmlns:m="http://schemas.openxmlformats.org/officeDocument/2006/math">
+                    <m:oMathParaPr>
+                      <m:jc m:val="centerGroup"/>
+                    </m:oMathParaPr>
+                    <m:oMath xmlns:m="http://schemas.openxmlformats.org/officeDocument/2006/math">
+                      <m:r>
+                        <a:rPr lang="en-US" sz="2400" b="1" i="0" smtClean="0">
+                          <a:solidFill>
+                            <a:schemeClr val="tx1">
+                              <a:lumMod val="75000"/>
+                              <a:lumOff val="25000"/>
+                            </a:schemeClr>
+                          </a:solidFill>
+                          <a:latin typeface="Cambria Math" panose="02040503050406030204" pitchFamily="18" charset="0"/>
+                          <a:cs typeface="Arial Black" panose="020B0604020202020204" pitchFamily="34" charset="0"/>
+                        </a:rPr>
+                        <m:t>   </m:t>
+                      </m:r>
+                      <m:sSub>
+                        <m:sSubPr>
+                          <m:ctrlPr>
+                            <a:rPr lang="en-US" sz="2400" b="1" i="1" smtClean="0">
+                              <a:solidFill>
+                                <a:schemeClr val="tx1">
+                                  <a:lumMod val="75000"/>
+                                  <a:lumOff val="25000"/>
+                                </a:schemeClr>
+                              </a:solidFill>
+                              <a:latin typeface="Cambria Math" panose="02040503050406030204" pitchFamily="18" charset="0"/>
+                              <a:cs typeface="Arial Black" panose="020B0604020202020204" pitchFamily="34" charset="0"/>
+                            </a:rPr>
+                          </m:ctrlPr>
+                        </m:sSubPr>
+                        <m:e>
+                          <m:r>
+                            <a:rPr lang="en-US" sz="2400" b="1" i="0" smtClean="0">
+                              <a:solidFill>
+                                <a:schemeClr val="tx1">
+                                  <a:lumMod val="75000"/>
+                                  <a:lumOff val="25000"/>
+                                </a:schemeClr>
+                              </a:solidFill>
+                              <a:latin typeface="Cambria Math" panose="02040503050406030204" pitchFamily="18" charset="0"/>
+                              <a:cs typeface="Arial Black" panose="020B0604020202020204" pitchFamily="34" charset="0"/>
+                            </a:rPr>
+                            <m:t>𝐊</m:t>
+                          </m:r>
+                        </m:e>
+                        <m:sub>
+                          <m:r>
+                            <m:rPr>
+                              <m:sty m:val="p"/>
+                            </m:rPr>
+                            <a:rPr lang="en-US" sz="2400" b="1" i="0" smtClean="0">
+                              <a:solidFill>
+                                <a:schemeClr val="tx1">
+                                  <a:lumMod val="75000"/>
+                                  <a:lumOff val="25000"/>
+                                </a:schemeClr>
+                              </a:solidFill>
+                              <a:latin typeface="Cambria Math" panose="02040503050406030204" pitchFamily="18" charset="0"/>
+                              <a:cs typeface="Arial Black" panose="020B0604020202020204" pitchFamily="34" charset="0"/>
+                            </a:rPr>
+                            <m:t>d</m:t>
+                          </m:r>
+                        </m:sub>
+                      </m:sSub>
+                    </m:oMath>
+                  </m:oMathPara>
+                </a14:m>
+                <a:endParaRPr lang="en-US" sz="2400" b="1" dirty="0">
+                  <a:solidFill>
+                    <a:schemeClr val="tx1">
+                      <a:lumMod val="75000"/>
+                      <a:lumOff val="25000"/>
+                    </a:schemeClr>
+                  </a:solidFill>
+                  <a:latin typeface="Arial Black" panose="020B0604020202020204" pitchFamily="34" charset="0"/>
+                  <a:cs typeface="Arial Black" panose="020B0604020202020204" pitchFamily="34" charset="0"/>
+                </a:endParaRPr>
+              </a:p>
+            </p:txBody>
+          </p:sp>
+        </mc:Choice>
+        <mc:Fallback xmlns="">
+          <p:sp>
+            <p:nvSpPr>
+              <p:cNvPr id="15" name="Triangle 14">
+                <a:extLst>
+                  <a:ext uri="{FF2B5EF4-FFF2-40B4-BE49-F238E27FC236}">
+                    <a16:creationId xmlns:a16="http://schemas.microsoft.com/office/drawing/2014/main" id="{78C02E39-ACA4-EDA1-E7A4-5532EE4FB2B4}"/>
+                  </a:ext>
+                </a:extLst>
+              </p:cNvPr>
+              <p:cNvSpPr>
+                <a:spLocks noRot="1" noChangeAspect="1" noMove="1" noResize="1" noEditPoints="1" noAdjustHandles="1" noChangeArrowheads="1" noChangeShapeType="1" noTextEdit="1"/>
+              </p:cNvSpPr>
+              <p:nvPr/>
+            </p:nvSpPr>
+            <p:spPr>
+              <a:xfrm rot="5400000">
+                <a:off x="3951731" y="3740251"/>
+                <a:ext cx="671673" cy="1043189"/>
+              </a:xfrm>
+              <a:prstGeom prst="triangle">
+                <a:avLst/>
+              </a:prstGeom>
+              <a:blipFill>
+                <a:blip r:embed="rId7"/>
+                <a:stretch>
+                  <a:fillRect l="-22093"/>
+                </a:stretch>
+              </a:blipFill>
+              <a:ln>
+                <a:solidFill>
+                  <a:schemeClr val="tx1">
+                    <a:lumMod val="50000"/>
+                    <a:lumOff val="50000"/>
+                  </a:schemeClr>
+                </a:solidFill>
+              </a:ln>
+            </p:spPr>
+            <p:txBody>
+              <a:bodyPr/>
+              <a:lstStyle/>
+              <a:p>
+                <a:r>
+                  <a:rPr lang="en-US">
+                    <a:noFill/>
+                  </a:rPr>
+                  <a:t> </a:t>
+                </a:r>
+              </a:p>
+            </p:txBody>
+          </p:sp>
+        </mc:Fallback>
+      </mc:AlternateContent>
+      <p:cxnSp>
+        <p:nvCxnSpPr>
+          <p:cNvPr id="19" name="Straight Arrow Connector 18">
+            <a:extLst>
+              <a:ext uri="{FF2B5EF4-FFF2-40B4-BE49-F238E27FC236}">
+                <a16:creationId xmlns:a16="http://schemas.microsoft.com/office/drawing/2014/main" id="{78905C1C-5778-DAB4-2C3C-84D92D745267}"/>
+              </a:ext>
+            </a:extLst>
+          </p:cNvPr>
+          <p:cNvCxnSpPr>
+            <a:cxnSpLocks/>
+            <a:endCxn id="14" idx="3"/>
+          </p:cNvCxnSpPr>
+          <p:nvPr/>
+        </p:nvCxnSpPr>
+        <p:spPr>
+          <a:xfrm>
+            <a:off x="2471297" y="3182364"/>
+            <a:ext cx="1306126" cy="2584"/>
+          </a:xfrm>
+          <a:prstGeom prst="straightConnector1">
+            <a:avLst/>
+          </a:prstGeom>
+          <a:ln w="57150">
+            <a:solidFill>
+              <a:schemeClr val="bg1"/>
+            </a:solidFill>
+            <a:tailEnd type="triangle"/>
+          </a:ln>
+        </p:spPr>
+        <p:style>
+          <a:lnRef idx="2">
+            <a:schemeClr val="dk1"/>
+          </a:lnRef>
+          <a:fillRef idx="0">
+            <a:schemeClr val="dk1"/>
+          </a:fillRef>
+          <a:effectRef idx="1">
+            <a:schemeClr val="dk1"/>
+          </a:effectRef>
+          <a:fontRef idx="minor">
+            <a:schemeClr val="tx1"/>
+          </a:fontRef>
+        </p:style>
+      </p:cxnSp>
+      <p:cxnSp>
+        <p:nvCxnSpPr>
+          <p:cNvPr id="30" name="Straight Connector 29">
+            <a:extLst>
+              <a:ext uri="{FF2B5EF4-FFF2-40B4-BE49-F238E27FC236}">
+                <a16:creationId xmlns:a16="http://schemas.microsoft.com/office/drawing/2014/main" id="{5DDC3E23-332C-CEB9-FD4C-0C02D0311D6E}"/>
+              </a:ext>
+            </a:extLst>
+          </p:cNvPr>
+          <p:cNvCxnSpPr>
+            <a:cxnSpLocks/>
+          </p:cNvCxnSpPr>
+          <p:nvPr/>
+        </p:nvCxnSpPr>
+        <p:spPr>
+          <a:xfrm>
+            <a:off x="3252335" y="2088519"/>
+            <a:ext cx="0" cy="2192059"/>
+          </a:xfrm>
+          <a:prstGeom prst="line">
+            <a:avLst/>
+          </a:prstGeom>
+          <a:ln w="57150">
+            <a:solidFill>
+              <a:schemeClr val="bg1"/>
+            </a:solidFill>
+          </a:ln>
+        </p:spPr>
+        <p:style>
+          <a:lnRef idx="2">
+            <a:schemeClr val="dk1"/>
+          </a:lnRef>
+          <a:fillRef idx="0">
+            <a:schemeClr val="dk1"/>
+          </a:fillRef>
+          <a:effectRef idx="1">
+            <a:schemeClr val="dk1"/>
+          </a:effectRef>
+          <a:fontRef idx="minor">
+            <a:schemeClr val="tx1"/>
+          </a:fontRef>
+        </p:style>
+      </p:cxnSp>
+      <p:cxnSp>
+        <p:nvCxnSpPr>
+          <p:cNvPr id="32" name="Straight Arrow Connector 31">
+            <a:extLst>
+              <a:ext uri="{FF2B5EF4-FFF2-40B4-BE49-F238E27FC236}">
+                <a16:creationId xmlns:a16="http://schemas.microsoft.com/office/drawing/2014/main" id="{33B126BF-5642-2834-6455-EA368DD64A1B}"/>
+              </a:ext>
+            </a:extLst>
+          </p:cNvPr>
+          <p:cNvCxnSpPr>
+            <a:cxnSpLocks/>
+          </p:cNvCxnSpPr>
+          <p:nvPr/>
+        </p:nvCxnSpPr>
+        <p:spPr>
+          <a:xfrm>
+            <a:off x="3223633" y="4252933"/>
+            <a:ext cx="553790" cy="0"/>
+          </a:xfrm>
+          <a:prstGeom prst="straightConnector1">
+            <a:avLst/>
+          </a:prstGeom>
+          <a:ln w="57150">
+            <a:solidFill>
+              <a:schemeClr val="bg1"/>
+            </a:solidFill>
+            <a:tailEnd type="triangle"/>
+          </a:ln>
+        </p:spPr>
+        <p:style>
+          <a:lnRef idx="2">
+            <a:schemeClr val="dk1"/>
+          </a:lnRef>
+          <a:fillRef idx="0">
+            <a:schemeClr val="dk1"/>
+          </a:fillRef>
+          <a:effectRef idx="1">
+            <a:schemeClr val="dk1"/>
+          </a:effectRef>
+          <a:fontRef idx="minor">
+            <a:schemeClr val="tx1"/>
+          </a:fontRef>
+        </p:style>
+      </p:cxnSp>
+      <p:cxnSp>
+        <p:nvCxnSpPr>
+          <p:cNvPr id="38" name="Straight Arrow Connector 37">
+            <a:extLst>
+              <a:ext uri="{FF2B5EF4-FFF2-40B4-BE49-F238E27FC236}">
+                <a16:creationId xmlns:a16="http://schemas.microsoft.com/office/drawing/2014/main" id="{97A0AAEF-8673-AD2D-1274-8D666CA042C0}"/>
+              </a:ext>
+            </a:extLst>
+          </p:cNvPr>
+          <p:cNvCxnSpPr>
+            <a:cxnSpLocks/>
+          </p:cNvCxnSpPr>
+          <p:nvPr/>
+        </p:nvCxnSpPr>
+        <p:spPr>
+          <a:xfrm>
+            <a:off x="3223633" y="2108049"/>
+            <a:ext cx="553790" cy="0"/>
+          </a:xfrm>
+          <a:prstGeom prst="straightConnector1">
+            <a:avLst/>
+          </a:prstGeom>
+          <a:ln w="57150">
+            <a:solidFill>
+              <a:schemeClr val="bg1"/>
+            </a:solidFill>
+            <a:tailEnd type="triangle"/>
+          </a:ln>
+        </p:spPr>
+        <p:style>
+          <a:lnRef idx="2">
+            <a:schemeClr val="dk1"/>
+          </a:lnRef>
+          <a:fillRef idx="0">
+            <a:schemeClr val="dk1"/>
+          </a:fillRef>
+          <a:effectRef idx="1">
+            <a:schemeClr val="dk1"/>
+          </a:effectRef>
+          <a:fontRef idx="minor">
+            <a:schemeClr val="tx1"/>
+          </a:fontRef>
+        </p:style>
+      </p:cxnSp>
+      <p:cxnSp>
+        <p:nvCxnSpPr>
+          <p:cNvPr id="43" name="Straight Arrow Connector 42">
+            <a:extLst>
+              <a:ext uri="{FF2B5EF4-FFF2-40B4-BE49-F238E27FC236}">
+                <a16:creationId xmlns:a16="http://schemas.microsoft.com/office/drawing/2014/main" id="{979FE1A7-E7B6-EC06-E538-17B4040394A4}"/>
+              </a:ext>
+            </a:extLst>
+          </p:cNvPr>
+          <p:cNvCxnSpPr>
+            <a:cxnSpLocks/>
+          </p:cNvCxnSpPr>
+          <p:nvPr/>
+        </p:nvCxnSpPr>
+        <p:spPr>
+          <a:xfrm>
+            <a:off x="4820612" y="4262221"/>
+            <a:ext cx="405000" cy="0"/>
+          </a:xfrm>
+          <a:prstGeom prst="straightConnector1">
+            <a:avLst/>
+          </a:prstGeom>
+          <a:ln w="57150">
+            <a:solidFill>
+              <a:schemeClr val="bg1"/>
+            </a:solidFill>
+            <a:tailEnd type="triangle"/>
+          </a:ln>
+        </p:spPr>
+        <p:style>
+          <a:lnRef idx="2">
+            <a:schemeClr val="dk1"/>
+          </a:lnRef>
+          <a:fillRef idx="0">
+            <a:schemeClr val="dk1"/>
+          </a:fillRef>
+          <a:effectRef idx="1">
+            <a:schemeClr val="dk1"/>
+          </a:effectRef>
+          <a:fontRef idx="minor">
+            <a:schemeClr val="tx1"/>
+          </a:fontRef>
+        </p:style>
+      </p:cxnSp>
+      <p:cxnSp>
+        <p:nvCxnSpPr>
+          <p:cNvPr id="48" name="Straight Arrow Connector 47">
+            <a:extLst>
+              <a:ext uri="{FF2B5EF4-FFF2-40B4-BE49-F238E27FC236}">
+                <a16:creationId xmlns:a16="http://schemas.microsoft.com/office/drawing/2014/main" id="{470DDE27-2258-6174-D47D-B75E7F759A6D}"/>
+              </a:ext>
+            </a:extLst>
+          </p:cNvPr>
+          <p:cNvCxnSpPr>
+            <a:cxnSpLocks/>
+          </p:cNvCxnSpPr>
+          <p:nvPr/>
+        </p:nvCxnSpPr>
+        <p:spPr>
+          <a:xfrm>
+            <a:off x="4820612" y="3182933"/>
+            <a:ext cx="405000" cy="0"/>
+          </a:xfrm>
+          <a:prstGeom prst="straightConnector1">
+            <a:avLst/>
+          </a:prstGeom>
+          <a:ln w="57150">
+            <a:solidFill>
+              <a:schemeClr val="bg1"/>
+            </a:solidFill>
+            <a:tailEnd type="triangle"/>
+          </a:ln>
+        </p:spPr>
+        <p:style>
+          <a:lnRef idx="2">
+            <a:schemeClr val="dk1"/>
+          </a:lnRef>
+          <a:fillRef idx="0">
+            <a:schemeClr val="dk1"/>
+          </a:fillRef>
+          <a:effectRef idx="1">
+            <a:schemeClr val="dk1"/>
+          </a:effectRef>
+          <a:fontRef idx="minor">
+            <a:schemeClr val="tx1"/>
+          </a:fontRef>
+        </p:style>
+      </p:cxnSp>
+      <p:cxnSp>
+        <p:nvCxnSpPr>
+          <p:cNvPr id="49" name="Straight Arrow Connector 48">
+            <a:extLst>
+              <a:ext uri="{FF2B5EF4-FFF2-40B4-BE49-F238E27FC236}">
+                <a16:creationId xmlns:a16="http://schemas.microsoft.com/office/drawing/2014/main" id="{477CAAD2-BB70-D07E-D6D1-AB6E12D39AC1}"/>
+              </a:ext>
+            </a:extLst>
+          </p:cNvPr>
+          <p:cNvCxnSpPr>
+            <a:cxnSpLocks/>
+          </p:cNvCxnSpPr>
+          <p:nvPr/>
+        </p:nvCxnSpPr>
+        <p:spPr>
+          <a:xfrm>
+            <a:off x="4809161" y="2108048"/>
+            <a:ext cx="405000" cy="0"/>
+          </a:xfrm>
+          <a:prstGeom prst="straightConnector1">
+            <a:avLst/>
+          </a:prstGeom>
+          <a:ln w="57150">
+            <a:solidFill>
+              <a:schemeClr val="bg1"/>
+            </a:solidFill>
+            <a:tailEnd type="triangle"/>
+          </a:ln>
+        </p:spPr>
+        <p:style>
+          <a:lnRef idx="2">
+            <a:schemeClr val="dk1"/>
+          </a:lnRef>
+          <a:fillRef idx="0">
+            <a:schemeClr val="dk1"/>
+          </a:fillRef>
+          <a:effectRef idx="1">
+            <a:schemeClr val="dk1"/>
+          </a:effectRef>
+          <a:fontRef idx="minor">
+            <a:schemeClr val="tx1"/>
+          </a:fontRef>
+        </p:style>
+      </p:cxnSp>
+      <p:grpSp>
+        <p:nvGrpSpPr>
+          <p:cNvPr id="50" name="Group 49">
+            <a:extLst>
+              <a:ext uri="{FF2B5EF4-FFF2-40B4-BE49-F238E27FC236}">
+                <a16:creationId xmlns:a16="http://schemas.microsoft.com/office/drawing/2014/main" id="{75245955-379A-C911-27E8-E3C8FEC677B4}"/>
+              </a:ext>
+            </a:extLst>
+          </p:cNvPr>
+          <p:cNvGrpSpPr/>
+          <p:nvPr/>
+        </p:nvGrpSpPr>
+        <p:grpSpPr>
+          <a:xfrm>
+            <a:off x="7759220" y="2566415"/>
+            <a:ext cx="1216152" cy="1216152"/>
+            <a:chOff x="1871202" y="2751585"/>
+            <a:chExt cx="1216152" cy="1216152"/>
+          </a:xfrm>
+        </p:grpSpPr>
+        <p:sp>
+          <p:nvSpPr>
+            <p:cNvPr id="51" name="Oval 50">
+              <a:extLst>
+                <a:ext uri="{FF2B5EF4-FFF2-40B4-BE49-F238E27FC236}">
+                  <a16:creationId xmlns:a16="http://schemas.microsoft.com/office/drawing/2014/main" id="{A707C127-917B-BD2D-AA38-0B5CA3B4B7F9}"/>
+                </a:ext>
+              </a:extLst>
+            </p:cNvPr>
+            <p:cNvSpPr/>
+            <p:nvPr/>
+          </p:nvSpPr>
+          <p:spPr>
+            <a:xfrm>
+              <a:off x="2033683" y="2914066"/>
+              <a:ext cx="891190" cy="891190"/>
+            </a:xfrm>
+            <a:prstGeom prst="ellipse">
+              <a:avLst/>
+            </a:prstGeom>
+            <a:solidFill>
+              <a:schemeClr val="bg1">
+                <a:lumMod val="85000"/>
+              </a:schemeClr>
+            </a:solidFill>
+            <a:ln>
+              <a:solidFill>
+                <a:schemeClr val="tx1">
+                  <a:lumMod val="50000"/>
+                  <a:lumOff val="50000"/>
+                </a:schemeClr>
+              </a:solidFill>
+            </a:ln>
+          </p:spPr>
+          <p:style>
+            <a:lnRef idx="2">
+              <a:schemeClr val="accent1">
+                <a:shade val="15000"/>
+              </a:schemeClr>
+            </a:lnRef>
+            <a:fillRef idx="1">
+              <a:schemeClr val="accent1"/>
+            </a:fillRef>
+            <a:effectRef idx="0">
+              <a:schemeClr val="accent1"/>
+            </a:effectRef>
+            <a:fontRef idx="minor">
+              <a:schemeClr val="lt1"/>
+            </a:fontRef>
+          </p:style>
+          <p:txBody>
+            <a:bodyPr rtlCol="0" anchor="ctr"/>
+            <a:lstStyle/>
+            <a:p>
+              <a:pPr algn="ctr"/>
+              <a:endParaRPr lang="en-US"/>
+            </a:p>
+          </p:txBody>
+        </p:sp>
+        <p:sp>
+          <p:nvSpPr>
+            <p:cNvPr id="52" name="Multiply 51">
+              <a:extLst>
+                <a:ext uri="{FF2B5EF4-FFF2-40B4-BE49-F238E27FC236}">
+                  <a16:creationId xmlns:a16="http://schemas.microsoft.com/office/drawing/2014/main" id="{CF7F204A-F08A-2B42-9DD8-C0C8DB51DA06}"/>
+                </a:ext>
+              </a:extLst>
+            </p:cNvPr>
+            <p:cNvSpPr/>
+            <p:nvPr/>
+          </p:nvSpPr>
+          <p:spPr>
+            <a:xfrm>
+              <a:off x="1871202" y="2751585"/>
+              <a:ext cx="1216152" cy="1216152"/>
+            </a:xfrm>
+            <a:prstGeom prst="mathMultiply">
+              <a:avLst>
+                <a:gd name="adj1" fmla="val 2711"/>
+              </a:avLst>
+            </a:prstGeom>
+            <a:solidFill>
+              <a:schemeClr val="tx1">
+                <a:lumMod val="50000"/>
+                <a:lumOff val="50000"/>
+              </a:schemeClr>
+            </a:solidFill>
+            <a:ln>
+              <a:noFill/>
+            </a:ln>
+          </p:spPr>
+          <p:style>
+            <a:lnRef idx="2">
+              <a:schemeClr val="accent1">
+                <a:shade val="15000"/>
+              </a:schemeClr>
+            </a:lnRef>
+            <a:fillRef idx="1">
+              <a:schemeClr val="accent1"/>
+            </a:fillRef>
+            <a:effectRef idx="0">
+              <a:schemeClr val="accent1"/>
+            </a:effectRef>
+            <a:fontRef idx="minor">
+              <a:schemeClr val="lt1"/>
+            </a:fontRef>
+          </p:style>
+          <p:txBody>
+            <a:bodyPr rtlCol="0" anchor="ctr"/>
+            <a:lstStyle/>
+            <a:p>
+              <a:pPr algn="ctr"/>
+              <a:endParaRPr lang="en-US"/>
+            </a:p>
+          </p:txBody>
+        </p:sp>
+      </p:grpSp>
+      <p:cxnSp>
+        <p:nvCxnSpPr>
+          <p:cNvPr id="56" name="Straight Arrow Connector 55">
+            <a:extLst>
+              <a:ext uri="{FF2B5EF4-FFF2-40B4-BE49-F238E27FC236}">
+                <a16:creationId xmlns:a16="http://schemas.microsoft.com/office/drawing/2014/main" id="{92335EBD-E918-88F9-CD7C-82BE47EFD286}"/>
+              </a:ext>
+            </a:extLst>
+          </p:cNvPr>
+          <p:cNvCxnSpPr>
+            <a:cxnSpLocks/>
+          </p:cNvCxnSpPr>
+          <p:nvPr/>
+        </p:nvCxnSpPr>
+        <p:spPr>
+          <a:xfrm>
+            <a:off x="7333412" y="3182364"/>
+            <a:ext cx="583243" cy="0"/>
+          </a:xfrm>
+          <a:prstGeom prst="straightConnector1">
+            <a:avLst/>
+          </a:prstGeom>
+          <a:ln w="57150">
+            <a:solidFill>
+              <a:schemeClr val="bg1"/>
+            </a:solidFill>
+            <a:tailEnd type="triangle"/>
+          </a:ln>
+        </p:spPr>
+        <p:style>
+          <a:lnRef idx="2">
+            <a:schemeClr val="dk1"/>
+          </a:lnRef>
+          <a:fillRef idx="0">
+            <a:schemeClr val="dk1"/>
+          </a:fillRef>
+          <a:effectRef idx="1">
+            <a:schemeClr val="dk1"/>
+          </a:effectRef>
+          <a:fontRef idx="minor">
+            <a:schemeClr val="tx1"/>
+          </a:fontRef>
+        </p:style>
+      </p:cxnSp>
+      <p:cxnSp>
+        <p:nvCxnSpPr>
+          <p:cNvPr id="58" name="Straight Connector 57">
+            <a:extLst>
+              <a:ext uri="{FF2B5EF4-FFF2-40B4-BE49-F238E27FC236}">
+                <a16:creationId xmlns:a16="http://schemas.microsoft.com/office/drawing/2014/main" id="{09B083C4-635C-9C1B-47C9-5839C35747CA}"/>
+              </a:ext>
+            </a:extLst>
+          </p:cNvPr>
+          <p:cNvCxnSpPr>
+            <a:cxnSpLocks/>
+          </p:cNvCxnSpPr>
+          <p:nvPr/>
+        </p:nvCxnSpPr>
+        <p:spPr>
+          <a:xfrm>
+            <a:off x="7335239" y="2103077"/>
+            <a:ext cx="1059459" cy="0"/>
+          </a:xfrm>
+          <a:prstGeom prst="line">
+            <a:avLst/>
+          </a:prstGeom>
+          <a:ln w="57150">
+            <a:solidFill>
+              <a:schemeClr val="bg1"/>
+            </a:solidFill>
+          </a:ln>
+        </p:spPr>
+        <p:style>
+          <a:lnRef idx="2">
+            <a:schemeClr val="dk1"/>
+          </a:lnRef>
+          <a:fillRef idx="0">
+            <a:schemeClr val="dk1"/>
+          </a:fillRef>
+          <a:effectRef idx="1">
+            <a:schemeClr val="dk1"/>
+          </a:effectRef>
+          <a:fontRef idx="minor">
+            <a:schemeClr val="tx1"/>
+          </a:fontRef>
+        </p:style>
+      </p:cxnSp>
+      <p:cxnSp>
+        <p:nvCxnSpPr>
+          <p:cNvPr id="60" name="Straight Arrow Connector 59">
+            <a:extLst>
+              <a:ext uri="{FF2B5EF4-FFF2-40B4-BE49-F238E27FC236}">
+                <a16:creationId xmlns:a16="http://schemas.microsoft.com/office/drawing/2014/main" id="{56CB6E8F-5035-3F2A-863E-75A6465240DB}"/>
+              </a:ext>
+            </a:extLst>
+          </p:cNvPr>
+          <p:cNvCxnSpPr>
+            <a:cxnSpLocks/>
+          </p:cNvCxnSpPr>
+          <p:nvPr/>
+        </p:nvCxnSpPr>
+        <p:spPr>
+          <a:xfrm>
+            <a:off x="8367296" y="2088519"/>
+            <a:ext cx="0" cy="632101"/>
+          </a:xfrm>
+          <a:prstGeom prst="straightConnector1">
+            <a:avLst/>
+          </a:prstGeom>
+          <a:ln w="57150">
+            <a:solidFill>
+              <a:schemeClr val="bg1"/>
+            </a:solidFill>
+            <a:tailEnd type="triangle"/>
+          </a:ln>
+        </p:spPr>
+        <p:style>
+          <a:lnRef idx="2">
+            <a:schemeClr val="dk1"/>
+          </a:lnRef>
+          <a:fillRef idx="0">
+            <a:schemeClr val="dk1"/>
+          </a:fillRef>
+          <a:effectRef idx="1">
+            <a:schemeClr val="dk1"/>
+          </a:effectRef>
+          <a:fontRef idx="minor">
+            <a:schemeClr val="tx1"/>
+          </a:fontRef>
+        </p:style>
+      </p:cxnSp>
+      <p:cxnSp>
+        <p:nvCxnSpPr>
+          <p:cNvPr id="65" name="Straight Connector 64">
+            <a:extLst>
+              <a:ext uri="{FF2B5EF4-FFF2-40B4-BE49-F238E27FC236}">
+                <a16:creationId xmlns:a16="http://schemas.microsoft.com/office/drawing/2014/main" id="{26E0C8F4-BF05-B8FA-408D-46919CBB7C10}"/>
+              </a:ext>
+            </a:extLst>
+          </p:cNvPr>
+          <p:cNvCxnSpPr>
+            <a:cxnSpLocks/>
+          </p:cNvCxnSpPr>
+          <p:nvPr/>
+        </p:nvCxnSpPr>
+        <p:spPr>
+          <a:xfrm>
+            <a:off x="7334353" y="4252933"/>
+            <a:ext cx="1059459" cy="0"/>
+          </a:xfrm>
+          <a:prstGeom prst="line">
+            <a:avLst/>
+          </a:prstGeom>
+          <a:ln w="57150">
+            <a:solidFill>
+              <a:schemeClr val="bg1"/>
+            </a:solidFill>
+          </a:ln>
+        </p:spPr>
+        <p:style>
+          <a:lnRef idx="2">
+            <a:schemeClr val="dk1"/>
+          </a:lnRef>
+          <a:fillRef idx="0">
+            <a:schemeClr val="dk1"/>
+          </a:fillRef>
+          <a:effectRef idx="1">
+            <a:schemeClr val="dk1"/>
+          </a:effectRef>
+          <a:fontRef idx="minor">
+            <a:schemeClr val="tx1"/>
+          </a:fontRef>
+        </p:style>
+      </p:cxnSp>
+      <p:cxnSp>
+        <p:nvCxnSpPr>
+          <p:cNvPr id="66" name="Straight Arrow Connector 65">
+            <a:extLst>
+              <a:ext uri="{FF2B5EF4-FFF2-40B4-BE49-F238E27FC236}">
+                <a16:creationId xmlns:a16="http://schemas.microsoft.com/office/drawing/2014/main" id="{25B5803F-9852-C2EC-711B-99FBFC0A53D8}"/>
+              </a:ext>
+            </a:extLst>
+          </p:cNvPr>
+          <p:cNvCxnSpPr>
+            <a:cxnSpLocks/>
+          </p:cNvCxnSpPr>
+          <p:nvPr/>
+        </p:nvCxnSpPr>
+        <p:spPr>
+          <a:xfrm flipV="1">
+            <a:off x="8367296" y="3630909"/>
+            <a:ext cx="0" cy="630936"/>
+          </a:xfrm>
+          <a:prstGeom prst="straightConnector1">
+            <a:avLst/>
+          </a:prstGeom>
+          <a:ln w="57150">
+            <a:solidFill>
+              <a:schemeClr val="bg1"/>
+            </a:solidFill>
+            <a:tailEnd type="triangle"/>
+          </a:ln>
+        </p:spPr>
+        <p:style>
+          <a:lnRef idx="2">
+            <a:schemeClr val="dk1"/>
+          </a:lnRef>
+          <a:fillRef idx="0">
+            <a:schemeClr val="dk1"/>
+          </a:fillRef>
+          <a:effectRef idx="1">
+            <a:schemeClr val="dk1"/>
+          </a:effectRef>
+          <a:fontRef idx="minor">
+            <a:schemeClr val="tx1"/>
+          </a:fontRef>
+        </p:style>
+      </p:cxnSp>
+      <p:sp>
+        <p:nvSpPr>
+          <p:cNvPr id="68" name="Rectangle 67">
+            <a:extLst>
+              <a:ext uri="{FF2B5EF4-FFF2-40B4-BE49-F238E27FC236}">
+                <a16:creationId xmlns:a16="http://schemas.microsoft.com/office/drawing/2014/main" id="{7286F75E-FA1B-B2DF-F4CA-75A487B7A8D4}"/>
+              </a:ext>
+            </a:extLst>
+          </p:cNvPr>
+          <p:cNvSpPr/>
+          <p:nvPr/>
+        </p:nvSpPr>
+        <p:spPr>
+          <a:xfrm>
+            <a:off x="10314154" y="2809887"/>
+            <a:ext cx="1341902" cy="709137"/>
+          </a:xfrm>
+          <a:prstGeom prst="rect">
+            <a:avLst/>
+          </a:prstGeom>
+          <a:solidFill>
+            <a:schemeClr val="bg1">
+              <a:lumMod val="85000"/>
+            </a:schemeClr>
+          </a:solidFill>
+          <a:ln>
+            <a:solidFill>
+              <a:schemeClr val="tx1">
+                <a:lumMod val="50000"/>
+                <a:lumOff val="50000"/>
+              </a:schemeClr>
+            </a:solidFill>
+          </a:ln>
+        </p:spPr>
+        <p:style>
+          <a:lnRef idx="2">
+            <a:schemeClr val="accent1">
+              <a:shade val="15000"/>
+            </a:schemeClr>
+          </a:lnRef>
+          <a:fillRef idx="1">
+            <a:schemeClr val="accent1"/>
+          </a:fillRef>
+          <a:effectRef idx="0">
+            <a:schemeClr val="accent1"/>
+          </a:effectRef>
+          <a:fontRef idx="minor">
+            <a:schemeClr val="lt1"/>
+          </a:fontRef>
+        </p:style>
+        <p:txBody>
+          <a:bodyPr rtlCol="0" anchor="ctr"/>
+          <a:lstStyle/>
+          <a:p>
+            <a:pPr algn="ctr"/>
+            <a:r>
+              <a:rPr lang="en-US" sz="2000" b="1" dirty="0">
+                <a:solidFill>
+                  <a:schemeClr val="tx1">
+                    <a:lumMod val="75000"/>
+                    <a:lumOff val="25000"/>
+                  </a:schemeClr>
+                </a:solidFill>
+                <a:latin typeface="Arial Black" panose="020B0604020202020204" pitchFamily="34" charset="0"/>
+                <a:cs typeface="Arial Black" panose="020B0604020202020204" pitchFamily="34" charset="0"/>
+              </a:rPr>
+              <a:t>Motors</a:t>
+            </a:r>
+            <a:endParaRPr lang="en-US" sz="2800" i="1" dirty="0">
+              <a:solidFill>
+                <a:schemeClr val="tx1">
+                  <a:lumMod val="75000"/>
+                  <a:lumOff val="25000"/>
+                </a:schemeClr>
+              </a:solidFill>
+              <a:latin typeface="Arial Black" panose="020B0604020202020204" pitchFamily="34" charset="0"/>
+              <a:cs typeface="Arial Black" panose="020B0604020202020204" pitchFamily="34" charset="0"/>
+            </a:endParaRPr>
+          </a:p>
+        </p:txBody>
+      </p:sp>
+      <p:cxnSp>
+        <p:nvCxnSpPr>
+          <p:cNvPr id="69" name="Straight Arrow Connector 68">
+            <a:extLst>
+              <a:ext uri="{FF2B5EF4-FFF2-40B4-BE49-F238E27FC236}">
+                <a16:creationId xmlns:a16="http://schemas.microsoft.com/office/drawing/2014/main" id="{F140F28F-A33A-51A2-7166-20829C4EE405}"/>
+              </a:ext>
+            </a:extLst>
+          </p:cNvPr>
+          <p:cNvCxnSpPr>
+            <a:cxnSpLocks/>
+            <a:stCxn id="51" idx="6"/>
+          </p:cNvCxnSpPr>
+          <p:nvPr/>
+        </p:nvCxnSpPr>
+        <p:spPr>
+          <a:xfrm flipV="1">
+            <a:off x="8812891" y="3166215"/>
+            <a:ext cx="1503766" cy="0"/>
+          </a:xfrm>
+          <a:prstGeom prst="straightConnector1">
+            <a:avLst/>
+          </a:prstGeom>
+          <a:ln w="57150">
+            <a:solidFill>
+              <a:schemeClr val="bg1"/>
+            </a:solidFill>
+            <a:tailEnd type="triangle"/>
+          </a:ln>
+        </p:spPr>
+        <p:style>
+          <a:lnRef idx="2">
+            <a:schemeClr val="dk1"/>
+          </a:lnRef>
+          <a:fillRef idx="0">
+            <a:schemeClr val="dk1"/>
+          </a:fillRef>
+          <a:effectRef idx="1">
+            <a:schemeClr val="dk1"/>
+          </a:effectRef>
+          <a:fontRef idx="minor">
+            <a:schemeClr val="tx1"/>
+          </a:fontRef>
+        </p:style>
+      </p:cxnSp>
+      <p:cxnSp>
+        <p:nvCxnSpPr>
+          <p:cNvPr id="79" name="Straight Arrow Connector 78">
+            <a:extLst>
+              <a:ext uri="{FF2B5EF4-FFF2-40B4-BE49-F238E27FC236}">
+                <a16:creationId xmlns:a16="http://schemas.microsoft.com/office/drawing/2014/main" id="{2A6E2612-C4CF-0579-22C4-B8347AC0D057}"/>
+              </a:ext>
+            </a:extLst>
+          </p:cNvPr>
+          <p:cNvCxnSpPr>
+            <a:cxnSpLocks/>
+          </p:cNvCxnSpPr>
+          <p:nvPr/>
+        </p:nvCxnSpPr>
+        <p:spPr>
+          <a:xfrm>
+            <a:off x="11656056" y="3182364"/>
+            <a:ext cx="1661829" cy="0"/>
+          </a:xfrm>
+          <a:prstGeom prst="straightConnector1">
+            <a:avLst/>
+          </a:prstGeom>
+          <a:ln w="57150">
+            <a:solidFill>
+              <a:schemeClr val="bg1"/>
+            </a:solidFill>
+            <a:tailEnd type="triangle"/>
+          </a:ln>
+        </p:spPr>
+        <p:style>
+          <a:lnRef idx="2">
+            <a:schemeClr val="dk1"/>
+          </a:lnRef>
+          <a:fillRef idx="0">
+            <a:schemeClr val="dk1"/>
+          </a:fillRef>
+          <a:effectRef idx="1">
+            <a:schemeClr val="dk1"/>
+          </a:effectRef>
+          <a:fontRef idx="minor">
+            <a:schemeClr val="tx1"/>
+          </a:fontRef>
+        </p:style>
+      </p:cxnSp>
+      <p:sp>
+        <p:nvSpPr>
+          <p:cNvPr id="81" name="Rectangle 80">
+            <a:extLst>
+              <a:ext uri="{FF2B5EF4-FFF2-40B4-BE49-F238E27FC236}">
+                <a16:creationId xmlns:a16="http://schemas.microsoft.com/office/drawing/2014/main" id="{32AAA303-456B-78AB-CFEE-C7456D8532B2}"/>
+              </a:ext>
+            </a:extLst>
+          </p:cNvPr>
+          <p:cNvSpPr/>
+          <p:nvPr/>
+        </p:nvSpPr>
+        <p:spPr>
+          <a:xfrm>
+            <a:off x="5623283" y="5248885"/>
+            <a:ext cx="1341902" cy="709137"/>
+          </a:xfrm>
+          <a:prstGeom prst="rect">
+            <a:avLst/>
+          </a:prstGeom>
+          <a:solidFill>
+            <a:schemeClr val="bg1">
+              <a:lumMod val="85000"/>
+            </a:schemeClr>
+          </a:solidFill>
+          <a:ln>
+            <a:solidFill>
+              <a:schemeClr val="tx1">
+                <a:lumMod val="50000"/>
+                <a:lumOff val="50000"/>
+              </a:schemeClr>
+            </a:solidFill>
+          </a:ln>
+        </p:spPr>
+        <p:style>
+          <a:lnRef idx="2">
+            <a:schemeClr val="accent1">
+              <a:shade val="15000"/>
+            </a:schemeClr>
+          </a:lnRef>
+          <a:fillRef idx="1">
+            <a:schemeClr val="accent1"/>
+          </a:fillRef>
+          <a:effectRef idx="0">
+            <a:schemeClr val="accent1"/>
+          </a:effectRef>
+          <a:fontRef idx="minor">
+            <a:schemeClr val="lt1"/>
+          </a:fontRef>
+        </p:style>
+        <p:txBody>
+          <a:bodyPr rtlCol="0" anchor="ctr"/>
+          <a:lstStyle/>
+          <a:p>
+            <a:pPr algn="ctr"/>
+            <a:r>
+              <a:rPr lang="en-US" sz="2000" b="1" dirty="0">
+                <a:solidFill>
+                  <a:schemeClr val="tx1">
+                    <a:lumMod val="75000"/>
+                    <a:lumOff val="25000"/>
+                  </a:schemeClr>
+                </a:solidFill>
+                <a:latin typeface="Arial Black" panose="020B0604020202020204" pitchFamily="34" charset="0"/>
+                <a:cs typeface="Arial Black" panose="020B0604020202020204" pitchFamily="34" charset="0"/>
+              </a:rPr>
+              <a:t>Sensors</a:t>
+            </a:r>
+            <a:endParaRPr lang="en-US" sz="2800" i="1" dirty="0">
+              <a:solidFill>
+                <a:schemeClr val="tx1">
+                  <a:lumMod val="75000"/>
+                  <a:lumOff val="25000"/>
+                </a:schemeClr>
+              </a:solidFill>
+              <a:latin typeface="Arial Black" panose="020B0604020202020204" pitchFamily="34" charset="0"/>
+              <a:cs typeface="Arial Black" panose="020B0604020202020204" pitchFamily="34" charset="0"/>
+            </a:endParaRPr>
+          </a:p>
+        </p:txBody>
+      </p:sp>
+      <p:cxnSp>
+        <p:nvCxnSpPr>
+          <p:cNvPr id="82" name="Straight Connector 81">
+            <a:extLst>
+              <a:ext uri="{FF2B5EF4-FFF2-40B4-BE49-F238E27FC236}">
+                <a16:creationId xmlns:a16="http://schemas.microsoft.com/office/drawing/2014/main" id="{4997CA9F-7E15-AE8B-123E-BD8654F09657}"/>
+              </a:ext>
+            </a:extLst>
+          </p:cNvPr>
+          <p:cNvCxnSpPr>
+            <a:cxnSpLocks/>
+          </p:cNvCxnSpPr>
+          <p:nvPr/>
+        </p:nvCxnSpPr>
+        <p:spPr>
+          <a:xfrm>
+            <a:off x="12560032" y="3182364"/>
+            <a:ext cx="0" cy="2455804"/>
+          </a:xfrm>
+          <a:prstGeom prst="line">
+            <a:avLst/>
+          </a:prstGeom>
+          <a:ln w="57150">
+            <a:solidFill>
+              <a:schemeClr val="bg1"/>
+            </a:solidFill>
+          </a:ln>
+        </p:spPr>
+        <p:style>
+          <a:lnRef idx="2">
+            <a:schemeClr val="dk1"/>
+          </a:lnRef>
+          <a:fillRef idx="0">
+            <a:schemeClr val="dk1"/>
+          </a:fillRef>
+          <a:effectRef idx="1">
+            <a:schemeClr val="dk1"/>
+          </a:effectRef>
+          <a:fontRef idx="minor">
+            <a:schemeClr val="tx1"/>
+          </a:fontRef>
+        </p:style>
+      </p:cxnSp>
+      <p:cxnSp>
+        <p:nvCxnSpPr>
+          <p:cNvPr id="83" name="Straight Arrow Connector 82">
+            <a:extLst>
+              <a:ext uri="{FF2B5EF4-FFF2-40B4-BE49-F238E27FC236}">
+                <a16:creationId xmlns:a16="http://schemas.microsoft.com/office/drawing/2014/main" id="{B62A88A2-C640-DF8D-A1E6-A87AC3F98EE4}"/>
+              </a:ext>
+            </a:extLst>
+          </p:cNvPr>
+          <p:cNvCxnSpPr>
+            <a:cxnSpLocks/>
+          </p:cNvCxnSpPr>
+          <p:nvPr/>
+        </p:nvCxnSpPr>
+        <p:spPr>
+          <a:xfrm flipH="1">
+            <a:off x="6965185" y="5607450"/>
+            <a:ext cx="5594847" cy="3566"/>
+          </a:xfrm>
+          <a:prstGeom prst="straightConnector1">
+            <a:avLst/>
+          </a:prstGeom>
+          <a:ln w="57150">
+            <a:solidFill>
+              <a:schemeClr val="bg1"/>
+            </a:solidFill>
+            <a:tailEnd type="triangle"/>
+          </a:ln>
+        </p:spPr>
+        <p:style>
+          <a:lnRef idx="2">
+            <a:schemeClr val="dk1"/>
+          </a:lnRef>
+          <a:fillRef idx="0">
+            <a:schemeClr val="dk1"/>
+          </a:fillRef>
+          <a:effectRef idx="1">
+            <a:schemeClr val="dk1"/>
+          </a:effectRef>
+          <a:fontRef idx="minor">
+            <a:schemeClr val="tx1"/>
+          </a:fontRef>
+        </p:style>
+      </p:cxnSp>
+      <p:cxnSp>
+        <p:nvCxnSpPr>
+          <p:cNvPr id="94" name="Straight Connector 93">
+            <a:extLst>
+              <a:ext uri="{FF2B5EF4-FFF2-40B4-BE49-F238E27FC236}">
+                <a16:creationId xmlns:a16="http://schemas.microsoft.com/office/drawing/2014/main" id="{8CA3FFDF-726B-8948-D2F9-CC668E30BBC5}"/>
+              </a:ext>
+            </a:extLst>
+          </p:cNvPr>
+          <p:cNvCxnSpPr>
+            <a:cxnSpLocks/>
+            <a:endCxn id="81" idx="1"/>
+          </p:cNvCxnSpPr>
+          <p:nvPr/>
+        </p:nvCxnSpPr>
+        <p:spPr>
+          <a:xfrm>
+            <a:off x="1990086" y="5601645"/>
+            <a:ext cx="3633197" cy="1809"/>
+          </a:xfrm>
+          <a:prstGeom prst="line">
+            <a:avLst/>
+          </a:prstGeom>
+          <a:ln w="57150">
+            <a:solidFill>
+              <a:schemeClr val="bg1"/>
+            </a:solidFill>
+          </a:ln>
+        </p:spPr>
+        <p:style>
+          <a:lnRef idx="2">
+            <a:schemeClr val="dk1"/>
+          </a:lnRef>
+          <a:fillRef idx="0">
+            <a:schemeClr val="dk1"/>
+          </a:fillRef>
+          <a:effectRef idx="1">
+            <a:schemeClr val="dk1"/>
+          </a:effectRef>
+          <a:fontRef idx="minor">
+            <a:schemeClr val="tx1"/>
+          </a:fontRef>
+        </p:style>
+      </p:cxnSp>
+      <p:cxnSp>
+        <p:nvCxnSpPr>
+          <p:cNvPr id="95" name="Straight Arrow Connector 94">
+            <a:extLst>
+              <a:ext uri="{FF2B5EF4-FFF2-40B4-BE49-F238E27FC236}">
+                <a16:creationId xmlns:a16="http://schemas.microsoft.com/office/drawing/2014/main" id="{DCE5DE7A-A132-96F1-D3EF-E6C1DB93941C}"/>
+              </a:ext>
+            </a:extLst>
+          </p:cNvPr>
+          <p:cNvCxnSpPr>
+            <a:cxnSpLocks/>
+            <a:endCxn id="7" idx="4"/>
+          </p:cNvCxnSpPr>
+          <p:nvPr/>
+        </p:nvCxnSpPr>
+        <p:spPr>
+          <a:xfrm flipV="1">
+            <a:off x="2017415" y="3627959"/>
+            <a:ext cx="2766" cy="1982598"/>
+          </a:xfrm>
+          <a:prstGeom prst="straightConnector1">
+            <a:avLst/>
+          </a:prstGeom>
+          <a:ln w="57150">
+            <a:solidFill>
+              <a:schemeClr val="bg1"/>
+            </a:solidFill>
+            <a:tailEnd type="triangle"/>
+          </a:ln>
+        </p:spPr>
+        <p:style>
+          <a:lnRef idx="2">
+            <a:schemeClr val="dk1"/>
+          </a:lnRef>
+          <a:fillRef idx="0">
+            <a:schemeClr val="dk1"/>
+          </a:fillRef>
+          <a:effectRef idx="1">
+            <a:schemeClr val="dk1"/>
+          </a:effectRef>
+          <a:fontRef idx="minor">
+            <a:schemeClr val="tx1"/>
+          </a:fontRef>
+        </p:style>
+      </p:cxnSp>
+      <mc:AlternateContent xmlns:mc="http://schemas.openxmlformats.org/markup-compatibility/2006" xmlns:a14="http://schemas.microsoft.com/office/drawing/2010/main">
+        <mc:Choice Requires="a14">
+          <p:sp>
+            <p:nvSpPr>
+              <p:cNvPr id="103" name="TextBox 102">
+                <a:extLst>
+                  <a:ext uri="{FF2B5EF4-FFF2-40B4-BE49-F238E27FC236}">
+                    <a16:creationId xmlns:a16="http://schemas.microsoft.com/office/drawing/2014/main" id="{6FB94B0B-62D8-FBF1-CF93-DAF2B41E7F38}"/>
+                  </a:ext>
+                </a:extLst>
+              </p:cNvPr>
+              <p:cNvSpPr txBox="1"/>
+              <p:nvPr/>
+            </p:nvSpPr>
+            <p:spPr>
+              <a:xfrm>
+                <a:off x="-39771" y="2504630"/>
+                <a:ext cx="1661829" cy="646331"/>
+              </a:xfrm>
+              <a:prstGeom prst="rect">
+                <a:avLst/>
+              </a:prstGeom>
+              <a:noFill/>
+            </p:spPr>
+            <p:txBody>
+              <a:bodyPr wrap="square">
+                <a:spAutoFit/>
+              </a:bodyPr>
+              <a:lstStyle/>
+              <a:p>
+                <a:pPr algn="ctr"/>
+                <a:r>
+                  <a:rPr lang="en-US" dirty="0">
+                    <a:solidFill>
+                      <a:schemeClr val="bg1"/>
+                    </a:solidFill>
+                    <a:latin typeface="Trebuchet MS" panose="020B0703020202090204" pitchFamily="34" charset="0"/>
+                  </a:rPr>
+                  <a:t>Target Angle </a:t>
+                </a:r>
+                <a14:m>
+                  <m:oMath xmlns:m="http://schemas.openxmlformats.org/officeDocument/2006/math">
+                    <m:r>
+                      <a:rPr lang="en-US" i="1" smtClean="0">
+                        <a:solidFill>
+                          <a:schemeClr val="bg1"/>
+                        </a:solidFill>
+                        <a:latin typeface="Cambria Math" panose="02040503050406030204" pitchFamily="18" charset="0"/>
+                      </a:rPr>
+                      <m:t>0°</m:t>
+                    </m:r>
+                  </m:oMath>
+                </a14:m>
+                <a:endParaRPr lang="en-US" i="1" dirty="0">
+                  <a:solidFill>
+                    <a:schemeClr val="bg1"/>
+                  </a:solidFill>
+                  <a:latin typeface="Trebuchet MS" panose="020B0703020202090204" pitchFamily="34" charset="0"/>
+                </a:endParaRPr>
+              </a:p>
+            </p:txBody>
+          </p:sp>
+        </mc:Choice>
+        <mc:Fallback xmlns="">
+          <p:sp>
+            <p:nvSpPr>
+              <p:cNvPr id="103" name="TextBox 102">
+                <a:extLst>
+                  <a:ext uri="{FF2B5EF4-FFF2-40B4-BE49-F238E27FC236}">
+                    <a16:creationId xmlns:a16="http://schemas.microsoft.com/office/drawing/2014/main" id="{6FB94B0B-62D8-FBF1-CF93-DAF2B41E7F38}"/>
+                  </a:ext>
+                </a:extLst>
+              </p:cNvPr>
+              <p:cNvSpPr txBox="1">
+                <a:spLocks noRot="1" noChangeAspect="1" noMove="1" noResize="1" noEditPoints="1" noAdjustHandles="1" noChangeArrowheads="1" noChangeShapeType="1" noTextEdit="1"/>
+              </p:cNvSpPr>
+              <p:nvPr/>
+            </p:nvSpPr>
+            <p:spPr>
+              <a:xfrm>
+                <a:off x="-39771" y="2504630"/>
+                <a:ext cx="1661829" cy="646331"/>
+              </a:xfrm>
+              <a:prstGeom prst="rect">
+                <a:avLst/>
+              </a:prstGeom>
+              <a:blipFill>
+                <a:blip r:embed="rId8"/>
+                <a:stretch>
+                  <a:fillRect t="-5769" r="-758"/>
+                </a:stretch>
+              </a:blipFill>
+            </p:spPr>
+            <p:txBody>
+              <a:bodyPr/>
+              <a:lstStyle/>
+              <a:p>
+                <a:r>
+                  <a:rPr lang="en-US">
+                    <a:noFill/>
+                  </a:rPr>
+                  <a:t> </a:t>
+                </a:r>
+              </a:p>
+            </p:txBody>
+          </p:sp>
+        </mc:Fallback>
+      </mc:AlternateContent>
+      <mc:AlternateContent xmlns:mc="http://schemas.openxmlformats.org/markup-compatibility/2006" xmlns:a14="http://schemas.microsoft.com/office/drawing/2010/main">
+        <mc:Choice Requires="a14">
+          <p:sp>
+            <p:nvSpPr>
+              <p:cNvPr id="105" name="TextBox 104">
+                <a:extLst>
+                  <a:ext uri="{FF2B5EF4-FFF2-40B4-BE49-F238E27FC236}">
+                    <a16:creationId xmlns:a16="http://schemas.microsoft.com/office/drawing/2014/main" id="{2A58F3C3-1442-2555-EAC4-1253C1D6996A}"/>
+                  </a:ext>
+                </a:extLst>
+              </p:cNvPr>
+              <p:cNvSpPr txBox="1"/>
+              <p:nvPr/>
+            </p:nvSpPr>
+            <p:spPr>
+              <a:xfrm>
+                <a:off x="1979375" y="2523362"/>
+                <a:ext cx="1661829" cy="646331"/>
+              </a:xfrm>
+              <a:prstGeom prst="rect">
+                <a:avLst/>
+              </a:prstGeom>
+              <a:noFill/>
+            </p:spPr>
+            <p:txBody>
+              <a:bodyPr wrap="square">
+                <a:spAutoFit/>
+              </a:bodyPr>
+              <a:lstStyle/>
+              <a:p>
+                <a:pPr algn="ctr"/>
+                <a:r>
+                  <a:rPr lang="en-US" dirty="0">
+                    <a:solidFill>
+                      <a:schemeClr val="bg1"/>
+                    </a:solidFill>
+                    <a:latin typeface="Trebuchet MS" panose="020B0703020202090204" pitchFamily="34" charset="0"/>
+                  </a:rPr>
+                  <a:t>Error</a:t>
+                </a:r>
+              </a:p>
+              <a:p>
+                <a:pPr algn="ctr"/>
+                <a14:m>
+                  <m:oMathPara xmlns:m="http://schemas.openxmlformats.org/officeDocument/2006/math">
+                    <m:oMathParaPr>
+                      <m:jc m:val="centerGroup"/>
+                    </m:oMathParaPr>
+                    <m:oMath xmlns:m="http://schemas.openxmlformats.org/officeDocument/2006/math">
+                      <m:r>
+                        <a:rPr lang="en-US" b="0" i="1" smtClean="0">
+                          <a:solidFill>
+                            <a:schemeClr val="bg1"/>
+                          </a:solidFill>
+                          <a:latin typeface="Cambria Math" panose="02040503050406030204" pitchFamily="18" charset="0"/>
+                        </a:rPr>
+                        <m:t>𝑒</m:t>
+                      </m:r>
+                      <m:r>
+                        <a:rPr lang="en-US" b="0" i="1" smtClean="0">
+                          <a:solidFill>
+                            <a:schemeClr val="bg1"/>
+                          </a:solidFill>
+                          <a:latin typeface="Cambria Math" panose="02040503050406030204" pitchFamily="18" charset="0"/>
+                        </a:rPr>
+                        <m:t>(</m:t>
+                      </m:r>
+                      <m:r>
+                        <a:rPr lang="en-US" b="0" i="1" smtClean="0">
+                          <a:solidFill>
+                            <a:schemeClr val="bg1"/>
+                          </a:solidFill>
+                          <a:latin typeface="Cambria Math" panose="02040503050406030204" pitchFamily="18" charset="0"/>
+                        </a:rPr>
+                        <m:t>𝑡</m:t>
+                      </m:r>
+                      <m:r>
+                        <a:rPr lang="en-US" b="0" i="1" smtClean="0">
+                          <a:solidFill>
+                            <a:schemeClr val="bg1"/>
+                          </a:solidFill>
+                          <a:latin typeface="Cambria Math" panose="02040503050406030204" pitchFamily="18" charset="0"/>
+                        </a:rPr>
+                        <m:t>)</m:t>
+                      </m:r>
+                    </m:oMath>
+                  </m:oMathPara>
+                </a14:m>
+                <a:endParaRPr lang="en-US" i="1" dirty="0">
+                  <a:solidFill>
+                    <a:schemeClr val="bg1"/>
+                  </a:solidFill>
+                  <a:latin typeface="Trebuchet MS" panose="020B0703020202090204" pitchFamily="34" charset="0"/>
+                </a:endParaRPr>
+              </a:p>
+            </p:txBody>
+          </p:sp>
+        </mc:Choice>
+        <mc:Fallback xmlns="">
+          <p:sp>
+            <p:nvSpPr>
+              <p:cNvPr id="105" name="TextBox 104">
+                <a:extLst>
+                  <a:ext uri="{FF2B5EF4-FFF2-40B4-BE49-F238E27FC236}">
+                    <a16:creationId xmlns:a16="http://schemas.microsoft.com/office/drawing/2014/main" id="{2A58F3C3-1442-2555-EAC4-1253C1D6996A}"/>
+                  </a:ext>
+                </a:extLst>
+              </p:cNvPr>
+              <p:cNvSpPr txBox="1">
+                <a:spLocks noRot="1" noChangeAspect="1" noMove="1" noResize="1" noEditPoints="1" noAdjustHandles="1" noChangeArrowheads="1" noChangeShapeType="1" noTextEdit="1"/>
+              </p:cNvSpPr>
+              <p:nvPr/>
+            </p:nvSpPr>
+            <p:spPr>
+              <a:xfrm>
+                <a:off x="1979375" y="2523362"/>
+                <a:ext cx="1661829" cy="646331"/>
+              </a:xfrm>
+              <a:prstGeom prst="rect">
+                <a:avLst/>
+              </a:prstGeom>
+              <a:blipFill>
+                <a:blip r:embed="rId9"/>
+                <a:stretch>
+                  <a:fillRect t="-3846" b="-7692"/>
+                </a:stretch>
+              </a:blipFill>
+            </p:spPr>
+            <p:txBody>
+              <a:bodyPr/>
+              <a:lstStyle/>
+              <a:p>
+                <a:r>
+                  <a:rPr lang="en-US">
+                    <a:noFill/>
+                  </a:rPr>
+                  <a:t> </a:t>
+                </a:r>
+              </a:p>
+            </p:txBody>
+          </p:sp>
+        </mc:Fallback>
+      </mc:AlternateContent>
+      <mc:AlternateContent xmlns:mc="http://schemas.openxmlformats.org/markup-compatibility/2006" xmlns:a14="http://schemas.microsoft.com/office/drawing/2010/main">
+        <mc:Choice Requires="a14">
+          <p:sp>
+            <p:nvSpPr>
+              <p:cNvPr id="106" name="TextBox 105">
+                <a:extLst>
+                  <a:ext uri="{FF2B5EF4-FFF2-40B4-BE49-F238E27FC236}">
+                    <a16:creationId xmlns:a16="http://schemas.microsoft.com/office/drawing/2014/main" id="{B3318238-5608-7953-497C-2884550A1C27}"/>
+                  </a:ext>
+                </a:extLst>
+              </p:cNvPr>
+              <p:cNvSpPr txBox="1"/>
+              <p:nvPr/>
+            </p:nvSpPr>
+            <p:spPr>
+              <a:xfrm>
+                <a:off x="2104143" y="4914868"/>
+                <a:ext cx="1823965" cy="679481"/>
+              </a:xfrm>
+              <a:prstGeom prst="rect">
+                <a:avLst/>
+              </a:prstGeom>
+              <a:noFill/>
+            </p:spPr>
+            <p:txBody>
+              <a:bodyPr wrap="square">
+                <a:spAutoFit/>
+              </a:bodyPr>
+              <a:lstStyle/>
+              <a:p>
+                <a:pPr algn="ctr"/>
+                <a:r>
+                  <a:rPr lang="en-US" dirty="0">
+                    <a:solidFill>
+                      <a:schemeClr val="bg1"/>
+                    </a:solidFill>
+                    <a:latin typeface="Trebuchet MS" panose="020B0703020202090204" pitchFamily="34" charset="0"/>
+                  </a:rPr>
+                  <a:t>Measured Angle</a:t>
+                </a:r>
+              </a:p>
+              <a:p>
+                <a:pPr algn="ctr"/>
+                <a14:m>
+                  <m:oMathPara xmlns:m="http://schemas.openxmlformats.org/officeDocument/2006/math">
+                    <m:oMathParaPr>
+                      <m:jc m:val="centerGroup"/>
+                    </m:oMathParaPr>
+                    <m:oMath xmlns:m="http://schemas.openxmlformats.org/officeDocument/2006/math">
+                      <m:acc>
+                        <m:accPr>
+                          <m:chr m:val="̂"/>
+                          <m:ctrlPr>
+                            <a:rPr lang="en-US" b="0" i="1" smtClean="0">
+                              <a:solidFill>
+                                <a:schemeClr val="bg1"/>
+                              </a:solidFill>
+                              <a:latin typeface="Cambria Math" panose="02040503050406030204" pitchFamily="18" charset="0"/>
+                            </a:rPr>
+                          </m:ctrlPr>
+                        </m:accPr>
+                        <m:e>
+                          <m:r>
+                            <a:rPr lang="en-US" b="0" i="1" smtClean="0">
+                              <a:solidFill>
+                                <a:schemeClr val="bg1"/>
+                              </a:solidFill>
+                              <a:latin typeface="Cambria Math" panose="02040503050406030204" pitchFamily="18" charset="0"/>
+                            </a:rPr>
+                            <m:t>𝜃</m:t>
+                          </m:r>
+                        </m:e>
+                      </m:acc>
+                      <m:r>
+                        <a:rPr lang="en-US" b="0" i="1" smtClean="0">
+                          <a:solidFill>
+                            <a:schemeClr val="bg1"/>
+                          </a:solidFill>
+                          <a:latin typeface="Cambria Math" panose="02040503050406030204" pitchFamily="18" charset="0"/>
+                        </a:rPr>
+                        <m:t>(</m:t>
+                      </m:r>
+                      <m:r>
+                        <a:rPr lang="en-US" b="0" i="1" smtClean="0">
+                          <a:solidFill>
+                            <a:schemeClr val="bg1"/>
+                          </a:solidFill>
+                          <a:latin typeface="Cambria Math" panose="02040503050406030204" pitchFamily="18" charset="0"/>
+                        </a:rPr>
+                        <m:t>𝑡</m:t>
+                      </m:r>
+                      <m:r>
+                        <a:rPr lang="en-US" b="0" i="1" smtClean="0">
+                          <a:solidFill>
+                            <a:schemeClr val="bg1"/>
+                          </a:solidFill>
+                          <a:latin typeface="Cambria Math" panose="02040503050406030204" pitchFamily="18" charset="0"/>
+                        </a:rPr>
+                        <m:t>)</m:t>
+                      </m:r>
+                    </m:oMath>
+                  </m:oMathPara>
+                </a14:m>
+                <a:endParaRPr lang="en-US" i="1" dirty="0">
+                  <a:solidFill>
+                    <a:schemeClr val="bg1"/>
+                  </a:solidFill>
+                  <a:latin typeface="Trebuchet MS" panose="020B0703020202090204" pitchFamily="34" charset="0"/>
+                </a:endParaRPr>
+              </a:p>
+            </p:txBody>
+          </p:sp>
+        </mc:Choice>
+        <mc:Fallback xmlns="">
+          <p:sp>
+            <p:nvSpPr>
+              <p:cNvPr id="106" name="TextBox 105">
+                <a:extLst>
+                  <a:ext uri="{FF2B5EF4-FFF2-40B4-BE49-F238E27FC236}">
+                    <a16:creationId xmlns:a16="http://schemas.microsoft.com/office/drawing/2014/main" id="{B3318238-5608-7953-497C-2884550A1C27}"/>
+                  </a:ext>
+                </a:extLst>
+              </p:cNvPr>
+              <p:cNvSpPr txBox="1">
+                <a:spLocks noRot="1" noChangeAspect="1" noMove="1" noResize="1" noEditPoints="1" noAdjustHandles="1" noChangeArrowheads="1" noChangeShapeType="1" noTextEdit="1"/>
+              </p:cNvSpPr>
+              <p:nvPr/>
+            </p:nvSpPr>
+            <p:spPr>
+              <a:xfrm>
+                <a:off x="2104143" y="4914868"/>
+                <a:ext cx="1823965" cy="679481"/>
+              </a:xfrm>
+              <a:prstGeom prst="rect">
+                <a:avLst/>
+              </a:prstGeom>
+              <a:blipFill>
+                <a:blip r:embed="rId10"/>
+                <a:stretch>
+                  <a:fillRect l="-1379" t="-3636" r="-1379" b="-5455"/>
+                </a:stretch>
+              </a:blipFill>
+            </p:spPr>
+            <p:txBody>
+              <a:bodyPr/>
+              <a:lstStyle/>
+              <a:p>
+                <a:r>
+                  <a:rPr lang="en-US">
+                    <a:noFill/>
+                  </a:rPr>
+                  <a:t> </a:t>
+                </a:r>
+              </a:p>
+            </p:txBody>
+          </p:sp>
+        </mc:Fallback>
+      </mc:AlternateContent>
+      <mc:AlternateContent xmlns:mc="http://schemas.openxmlformats.org/markup-compatibility/2006" xmlns:a14="http://schemas.microsoft.com/office/drawing/2010/main">
+        <mc:Choice Requires="a14">
+          <p:sp>
+            <p:nvSpPr>
+              <p:cNvPr id="107" name="TextBox 106">
+                <a:extLst>
+                  <a:ext uri="{FF2B5EF4-FFF2-40B4-BE49-F238E27FC236}">
+                    <a16:creationId xmlns:a16="http://schemas.microsoft.com/office/drawing/2014/main" id="{919E2F25-4F96-B419-74A0-5DF2197EEED8}"/>
+                  </a:ext>
+                </a:extLst>
+              </p:cNvPr>
+              <p:cNvSpPr txBox="1"/>
+              <p:nvPr/>
+            </p:nvSpPr>
+            <p:spPr>
+              <a:xfrm>
+                <a:off x="1979375" y="3446775"/>
+                <a:ext cx="675095" cy="523220"/>
+              </a:xfrm>
+              <a:prstGeom prst="rect">
+                <a:avLst/>
+              </a:prstGeom>
+              <a:noFill/>
+            </p:spPr>
+            <p:txBody>
+              <a:bodyPr wrap="square">
+                <a:spAutoFit/>
+              </a:bodyPr>
+              <a:lstStyle/>
+              <a:p>
+                <a:pPr algn="ctr"/>
+                <a14:m>
+                  <m:oMathPara xmlns:m="http://schemas.openxmlformats.org/officeDocument/2006/math">
+                    <m:oMathParaPr>
+                      <m:jc m:val="centerGroup"/>
+                    </m:oMathParaPr>
+                    <m:oMath xmlns:m="http://schemas.openxmlformats.org/officeDocument/2006/math">
+                      <m:r>
+                        <a:rPr lang="en-US" sz="2800" b="1" i="1" smtClean="0">
+                          <a:solidFill>
+                            <a:schemeClr val="bg1"/>
+                          </a:solidFill>
+                          <a:latin typeface="Cambria Math" panose="02040503050406030204" pitchFamily="18" charset="0"/>
+                        </a:rPr>
+                        <m:t>–</m:t>
+                      </m:r>
+                    </m:oMath>
+                  </m:oMathPara>
+                </a14:m>
+                <a:endParaRPr lang="en-US" b="1" i="1" dirty="0">
+                  <a:solidFill>
+                    <a:schemeClr val="bg1"/>
+                  </a:solidFill>
+                  <a:latin typeface="Trebuchet MS" panose="020B0703020202090204" pitchFamily="34" charset="0"/>
+                </a:endParaRPr>
+              </a:p>
+            </p:txBody>
+          </p:sp>
+        </mc:Choice>
+        <mc:Fallback xmlns="">
+          <p:sp>
+            <p:nvSpPr>
+              <p:cNvPr id="107" name="TextBox 106">
+                <a:extLst>
+                  <a:ext uri="{FF2B5EF4-FFF2-40B4-BE49-F238E27FC236}">
+                    <a16:creationId xmlns:a16="http://schemas.microsoft.com/office/drawing/2014/main" id="{919E2F25-4F96-B419-74A0-5DF2197EEED8}"/>
+                  </a:ext>
+                </a:extLst>
+              </p:cNvPr>
+              <p:cNvSpPr txBox="1">
+                <a:spLocks noRot="1" noChangeAspect="1" noMove="1" noResize="1" noEditPoints="1" noAdjustHandles="1" noChangeArrowheads="1" noChangeShapeType="1" noTextEdit="1"/>
+              </p:cNvSpPr>
+              <p:nvPr/>
+            </p:nvSpPr>
+            <p:spPr>
+              <a:xfrm>
+                <a:off x="1979375" y="3446775"/>
+                <a:ext cx="675095" cy="523220"/>
+              </a:xfrm>
+              <a:prstGeom prst="rect">
+                <a:avLst/>
+              </a:prstGeom>
+              <a:blipFill>
+                <a:blip r:embed="rId11"/>
+                <a:stretch>
+                  <a:fillRect/>
+                </a:stretch>
+              </a:blipFill>
+            </p:spPr>
+            <p:txBody>
+              <a:bodyPr/>
+              <a:lstStyle/>
+              <a:p>
+                <a:r>
+                  <a:rPr lang="en-US">
+                    <a:noFill/>
+                  </a:rPr>
+                  <a:t> </a:t>
+                </a:r>
+              </a:p>
+            </p:txBody>
+          </p:sp>
+        </mc:Fallback>
+      </mc:AlternateContent>
+      <mc:AlternateContent xmlns:mc="http://schemas.openxmlformats.org/markup-compatibility/2006" xmlns:a14="http://schemas.microsoft.com/office/drawing/2010/main">
+        <mc:Choice Requires="a14">
+          <p:sp>
+            <p:nvSpPr>
+              <p:cNvPr id="108" name="TextBox 107">
+                <a:extLst>
+                  <a:ext uri="{FF2B5EF4-FFF2-40B4-BE49-F238E27FC236}">
+                    <a16:creationId xmlns:a16="http://schemas.microsoft.com/office/drawing/2014/main" id="{9E6FC5BA-536F-DEAC-B45D-6D128C9D1828}"/>
+                  </a:ext>
+                </a:extLst>
+              </p:cNvPr>
+              <p:cNvSpPr txBox="1"/>
+              <p:nvPr/>
+            </p:nvSpPr>
+            <p:spPr>
+              <a:xfrm>
+                <a:off x="1167901" y="2744364"/>
+                <a:ext cx="675095" cy="369332"/>
+              </a:xfrm>
+              <a:prstGeom prst="rect">
+                <a:avLst/>
+              </a:prstGeom>
+              <a:noFill/>
+            </p:spPr>
+            <p:txBody>
+              <a:bodyPr wrap="square">
+                <a:spAutoFit/>
+              </a:bodyPr>
+              <a:lstStyle/>
+              <a:p>
+                <a:pPr algn="ctr"/>
+                <a14:m>
+                  <m:oMathPara xmlns:m="http://schemas.openxmlformats.org/officeDocument/2006/math">
+                    <m:oMathParaPr>
+                      <m:jc m:val="centerGroup"/>
+                    </m:oMathParaPr>
+                    <m:oMath xmlns:m="http://schemas.openxmlformats.org/officeDocument/2006/math">
+                      <m:r>
+                        <a:rPr lang="en-US" b="1" i="1" smtClean="0">
+                          <a:solidFill>
+                            <a:schemeClr val="bg1"/>
+                          </a:solidFill>
+                          <a:latin typeface="Cambria Math" panose="02040503050406030204" pitchFamily="18" charset="0"/>
+                        </a:rPr>
+                        <m:t>+</m:t>
+                      </m:r>
+                    </m:oMath>
+                  </m:oMathPara>
+                </a14:m>
+                <a:endParaRPr lang="en-US" b="1" i="1" dirty="0">
+                  <a:solidFill>
+                    <a:schemeClr val="bg1"/>
+                  </a:solidFill>
+                  <a:latin typeface="Trebuchet MS" panose="020B0703020202090204" pitchFamily="34" charset="0"/>
+                </a:endParaRPr>
+              </a:p>
+            </p:txBody>
+          </p:sp>
+        </mc:Choice>
+        <mc:Fallback xmlns="">
+          <p:sp>
+            <p:nvSpPr>
+              <p:cNvPr id="108" name="TextBox 107">
+                <a:extLst>
+                  <a:ext uri="{FF2B5EF4-FFF2-40B4-BE49-F238E27FC236}">
+                    <a16:creationId xmlns:a16="http://schemas.microsoft.com/office/drawing/2014/main" id="{9E6FC5BA-536F-DEAC-B45D-6D128C9D1828}"/>
+                  </a:ext>
+                </a:extLst>
+              </p:cNvPr>
+              <p:cNvSpPr txBox="1">
+                <a:spLocks noRot="1" noChangeAspect="1" noMove="1" noResize="1" noEditPoints="1" noAdjustHandles="1" noChangeArrowheads="1" noChangeShapeType="1" noTextEdit="1"/>
+              </p:cNvSpPr>
+              <p:nvPr/>
+            </p:nvSpPr>
+            <p:spPr>
+              <a:xfrm>
+                <a:off x="1167901" y="2744364"/>
+                <a:ext cx="675095" cy="369332"/>
+              </a:xfrm>
+              <a:prstGeom prst="rect">
+                <a:avLst/>
+              </a:prstGeom>
+              <a:blipFill>
+                <a:blip r:embed="rId12"/>
+                <a:stretch>
+                  <a:fillRect/>
+                </a:stretch>
+              </a:blipFill>
+            </p:spPr>
+            <p:txBody>
+              <a:bodyPr/>
+              <a:lstStyle/>
+              <a:p>
+                <a:r>
+                  <a:rPr lang="en-US">
+                    <a:noFill/>
+                  </a:rPr>
+                  <a:t> </a:t>
+                </a:r>
+              </a:p>
+            </p:txBody>
+          </p:sp>
+        </mc:Fallback>
+      </mc:AlternateContent>
+      <mc:AlternateContent xmlns:mc="http://schemas.openxmlformats.org/markup-compatibility/2006" xmlns:a14="http://schemas.microsoft.com/office/drawing/2010/main">
+        <mc:Choice Requires="a14">
+          <p:sp>
+            <p:nvSpPr>
+              <p:cNvPr id="109" name="TextBox 108">
+                <a:extLst>
+                  <a:ext uri="{FF2B5EF4-FFF2-40B4-BE49-F238E27FC236}">
+                    <a16:creationId xmlns:a16="http://schemas.microsoft.com/office/drawing/2014/main" id="{2BFD2722-4223-9DBA-534E-239BF66F6172}"/>
+                  </a:ext>
+                </a:extLst>
+              </p:cNvPr>
+              <p:cNvSpPr txBox="1"/>
+              <p:nvPr/>
+            </p:nvSpPr>
+            <p:spPr>
+              <a:xfrm>
+                <a:off x="7526946" y="2776629"/>
+                <a:ext cx="675095" cy="369332"/>
+              </a:xfrm>
+              <a:prstGeom prst="rect">
+                <a:avLst/>
+              </a:prstGeom>
+              <a:noFill/>
+            </p:spPr>
+            <p:txBody>
+              <a:bodyPr wrap="square">
+                <a:spAutoFit/>
+              </a:bodyPr>
+              <a:lstStyle/>
+              <a:p>
+                <a:pPr algn="ctr"/>
+                <a14:m>
+                  <m:oMathPara xmlns:m="http://schemas.openxmlformats.org/officeDocument/2006/math">
+                    <m:oMathParaPr>
+                      <m:jc m:val="centerGroup"/>
+                    </m:oMathParaPr>
+                    <m:oMath xmlns:m="http://schemas.openxmlformats.org/officeDocument/2006/math">
+                      <m:r>
+                        <a:rPr lang="en-US" b="1" i="1" smtClean="0">
+                          <a:solidFill>
+                            <a:schemeClr val="bg1"/>
+                          </a:solidFill>
+                          <a:latin typeface="Cambria Math" panose="02040503050406030204" pitchFamily="18" charset="0"/>
+                        </a:rPr>
+                        <m:t>+</m:t>
+                      </m:r>
+                    </m:oMath>
+                  </m:oMathPara>
+                </a14:m>
+                <a:endParaRPr lang="en-US" b="1" i="1" dirty="0">
+                  <a:solidFill>
+                    <a:schemeClr val="bg1"/>
+                  </a:solidFill>
+                  <a:latin typeface="Trebuchet MS" panose="020B0703020202090204" pitchFamily="34" charset="0"/>
+                </a:endParaRPr>
+              </a:p>
+            </p:txBody>
+          </p:sp>
+        </mc:Choice>
+        <mc:Fallback xmlns="">
+          <p:sp>
+            <p:nvSpPr>
+              <p:cNvPr id="109" name="TextBox 108">
+                <a:extLst>
+                  <a:ext uri="{FF2B5EF4-FFF2-40B4-BE49-F238E27FC236}">
+                    <a16:creationId xmlns:a16="http://schemas.microsoft.com/office/drawing/2014/main" id="{2BFD2722-4223-9DBA-534E-239BF66F6172}"/>
+                  </a:ext>
+                </a:extLst>
+              </p:cNvPr>
+              <p:cNvSpPr txBox="1">
+                <a:spLocks noRot="1" noChangeAspect="1" noMove="1" noResize="1" noEditPoints="1" noAdjustHandles="1" noChangeArrowheads="1" noChangeShapeType="1" noTextEdit="1"/>
+              </p:cNvSpPr>
+              <p:nvPr/>
+            </p:nvSpPr>
+            <p:spPr>
+              <a:xfrm>
+                <a:off x="7526946" y="2776629"/>
+                <a:ext cx="675095" cy="369332"/>
+              </a:xfrm>
+              <a:prstGeom prst="rect">
+                <a:avLst/>
+              </a:prstGeom>
+              <a:blipFill>
+                <a:blip r:embed="rId13"/>
+                <a:stretch>
+                  <a:fillRect/>
+                </a:stretch>
+              </a:blipFill>
+            </p:spPr>
+            <p:txBody>
+              <a:bodyPr/>
+              <a:lstStyle/>
+              <a:p>
+                <a:r>
+                  <a:rPr lang="en-US">
+                    <a:noFill/>
+                  </a:rPr>
+                  <a:t> </a:t>
+                </a:r>
+              </a:p>
+            </p:txBody>
+          </p:sp>
+        </mc:Fallback>
+      </mc:AlternateContent>
+      <mc:AlternateContent xmlns:mc="http://schemas.openxmlformats.org/markup-compatibility/2006" xmlns:a14="http://schemas.microsoft.com/office/drawing/2010/main">
+        <mc:Choice Requires="a14">
+          <p:sp>
+            <p:nvSpPr>
+              <p:cNvPr id="110" name="TextBox 109">
+                <a:extLst>
+                  <a:ext uri="{FF2B5EF4-FFF2-40B4-BE49-F238E27FC236}">
+                    <a16:creationId xmlns:a16="http://schemas.microsoft.com/office/drawing/2014/main" id="{440FC8C2-64E3-0213-BF37-B9C7E39E1793}"/>
+                  </a:ext>
+                </a:extLst>
+              </p:cNvPr>
+              <p:cNvSpPr txBox="1"/>
+              <p:nvPr/>
+            </p:nvSpPr>
+            <p:spPr>
+              <a:xfrm>
+                <a:off x="7864082" y="2420035"/>
+                <a:ext cx="675095" cy="369332"/>
+              </a:xfrm>
+              <a:prstGeom prst="rect">
+                <a:avLst/>
+              </a:prstGeom>
+              <a:noFill/>
+            </p:spPr>
+            <p:txBody>
+              <a:bodyPr wrap="square">
+                <a:spAutoFit/>
+              </a:bodyPr>
+              <a:lstStyle/>
+              <a:p>
+                <a:pPr algn="ctr"/>
+                <a14:m>
+                  <m:oMathPara xmlns:m="http://schemas.openxmlformats.org/officeDocument/2006/math">
+                    <m:oMathParaPr>
+                      <m:jc m:val="centerGroup"/>
+                    </m:oMathParaPr>
+                    <m:oMath xmlns:m="http://schemas.openxmlformats.org/officeDocument/2006/math">
+                      <m:r>
+                        <a:rPr lang="en-US" b="1" i="1" smtClean="0">
+                          <a:solidFill>
+                            <a:schemeClr val="bg1"/>
+                          </a:solidFill>
+                          <a:latin typeface="Cambria Math" panose="02040503050406030204" pitchFamily="18" charset="0"/>
+                        </a:rPr>
+                        <m:t>+</m:t>
+                      </m:r>
+                    </m:oMath>
+                  </m:oMathPara>
+                </a14:m>
+                <a:endParaRPr lang="en-US" b="1" i="1" dirty="0">
+                  <a:solidFill>
+                    <a:schemeClr val="bg1"/>
+                  </a:solidFill>
+                  <a:latin typeface="Trebuchet MS" panose="020B0703020202090204" pitchFamily="34" charset="0"/>
+                </a:endParaRPr>
+              </a:p>
+            </p:txBody>
+          </p:sp>
+        </mc:Choice>
+        <mc:Fallback xmlns="">
+          <p:sp>
+            <p:nvSpPr>
+              <p:cNvPr id="110" name="TextBox 109">
+                <a:extLst>
+                  <a:ext uri="{FF2B5EF4-FFF2-40B4-BE49-F238E27FC236}">
+                    <a16:creationId xmlns:a16="http://schemas.microsoft.com/office/drawing/2014/main" id="{440FC8C2-64E3-0213-BF37-B9C7E39E1793}"/>
+                  </a:ext>
+                </a:extLst>
+              </p:cNvPr>
+              <p:cNvSpPr txBox="1">
+                <a:spLocks noRot="1" noChangeAspect="1" noMove="1" noResize="1" noEditPoints="1" noAdjustHandles="1" noChangeArrowheads="1" noChangeShapeType="1" noTextEdit="1"/>
+              </p:cNvSpPr>
+              <p:nvPr/>
+            </p:nvSpPr>
+            <p:spPr>
+              <a:xfrm>
+                <a:off x="7864082" y="2420035"/>
+                <a:ext cx="675095" cy="369332"/>
+              </a:xfrm>
+              <a:prstGeom prst="rect">
+                <a:avLst/>
+              </a:prstGeom>
+              <a:blipFill>
+                <a:blip r:embed="rId14"/>
+                <a:stretch>
+                  <a:fillRect/>
+                </a:stretch>
+              </a:blipFill>
+            </p:spPr>
+            <p:txBody>
+              <a:bodyPr/>
+              <a:lstStyle/>
+              <a:p>
+                <a:r>
+                  <a:rPr lang="en-US">
+                    <a:noFill/>
+                  </a:rPr>
+                  <a:t> </a:t>
+                </a:r>
+              </a:p>
+            </p:txBody>
+          </p:sp>
+        </mc:Fallback>
+      </mc:AlternateContent>
+      <mc:AlternateContent xmlns:mc="http://schemas.openxmlformats.org/markup-compatibility/2006" xmlns:a14="http://schemas.microsoft.com/office/drawing/2010/main">
+        <mc:Choice Requires="a14">
+          <p:sp>
+            <p:nvSpPr>
+              <p:cNvPr id="111" name="TextBox 110">
+                <a:extLst>
+                  <a:ext uri="{FF2B5EF4-FFF2-40B4-BE49-F238E27FC236}">
+                    <a16:creationId xmlns:a16="http://schemas.microsoft.com/office/drawing/2014/main" id="{4AC3FEAC-2171-932A-CF6A-315A7B178894}"/>
+                  </a:ext>
+                </a:extLst>
+              </p:cNvPr>
+              <p:cNvSpPr txBox="1"/>
+              <p:nvPr/>
+            </p:nvSpPr>
+            <p:spPr>
+              <a:xfrm>
+                <a:off x="7865026" y="3519990"/>
+                <a:ext cx="675095" cy="369332"/>
+              </a:xfrm>
+              <a:prstGeom prst="rect">
+                <a:avLst/>
+              </a:prstGeom>
+              <a:noFill/>
+            </p:spPr>
+            <p:txBody>
+              <a:bodyPr wrap="square">
+                <a:spAutoFit/>
+              </a:bodyPr>
+              <a:lstStyle/>
+              <a:p>
+                <a:pPr algn="ctr"/>
+                <a14:m>
+                  <m:oMathPara xmlns:m="http://schemas.openxmlformats.org/officeDocument/2006/math">
+                    <m:oMathParaPr>
+                      <m:jc m:val="centerGroup"/>
+                    </m:oMathParaPr>
+                    <m:oMath xmlns:m="http://schemas.openxmlformats.org/officeDocument/2006/math">
+                      <m:r>
+                        <a:rPr lang="en-US" b="1" i="1" smtClean="0">
+                          <a:solidFill>
+                            <a:schemeClr val="bg1"/>
+                          </a:solidFill>
+                          <a:latin typeface="Cambria Math" panose="02040503050406030204" pitchFamily="18" charset="0"/>
+                        </a:rPr>
+                        <m:t>+</m:t>
+                      </m:r>
+                    </m:oMath>
+                  </m:oMathPara>
+                </a14:m>
+                <a:endParaRPr lang="en-US" b="1" i="1" dirty="0">
+                  <a:solidFill>
+                    <a:schemeClr val="bg1"/>
+                  </a:solidFill>
+                  <a:latin typeface="Trebuchet MS" panose="020B0703020202090204" pitchFamily="34" charset="0"/>
+                </a:endParaRPr>
+              </a:p>
+            </p:txBody>
+          </p:sp>
+        </mc:Choice>
+        <mc:Fallback xmlns="">
+          <p:sp>
+            <p:nvSpPr>
+              <p:cNvPr id="111" name="TextBox 110">
+                <a:extLst>
+                  <a:ext uri="{FF2B5EF4-FFF2-40B4-BE49-F238E27FC236}">
+                    <a16:creationId xmlns:a16="http://schemas.microsoft.com/office/drawing/2014/main" id="{4AC3FEAC-2171-932A-CF6A-315A7B178894}"/>
+                  </a:ext>
+                </a:extLst>
+              </p:cNvPr>
+              <p:cNvSpPr txBox="1">
+                <a:spLocks noRot="1" noChangeAspect="1" noMove="1" noResize="1" noEditPoints="1" noAdjustHandles="1" noChangeArrowheads="1" noChangeShapeType="1" noTextEdit="1"/>
+              </p:cNvSpPr>
+              <p:nvPr/>
+            </p:nvSpPr>
+            <p:spPr>
+              <a:xfrm>
+                <a:off x="7865026" y="3519990"/>
+                <a:ext cx="675095" cy="369332"/>
+              </a:xfrm>
+              <a:prstGeom prst="rect">
+                <a:avLst/>
+              </a:prstGeom>
+              <a:blipFill>
+                <a:blip r:embed="rId15"/>
+                <a:stretch>
+                  <a:fillRect/>
+                </a:stretch>
+              </a:blipFill>
+            </p:spPr>
+            <p:txBody>
+              <a:bodyPr/>
+              <a:lstStyle/>
+              <a:p>
+                <a:r>
+                  <a:rPr lang="en-US">
+                    <a:noFill/>
+                  </a:rPr>
+                  <a:t> </a:t>
+                </a:r>
+              </a:p>
+            </p:txBody>
+          </p:sp>
+        </mc:Fallback>
+      </mc:AlternateContent>
+      <p:sp>
+        <p:nvSpPr>
+          <p:cNvPr id="112" name="TextBox 111">
+            <a:extLst>
+              <a:ext uri="{FF2B5EF4-FFF2-40B4-BE49-F238E27FC236}">
+                <a16:creationId xmlns:a16="http://schemas.microsoft.com/office/drawing/2014/main" id="{5142FC48-996A-E7FE-430F-4507F833EF66}"/>
+              </a:ext>
+            </a:extLst>
+          </p:cNvPr>
+          <p:cNvSpPr txBox="1"/>
+          <p:nvPr/>
+        </p:nvSpPr>
+        <p:spPr>
+          <a:xfrm>
+            <a:off x="8654828" y="5201968"/>
+            <a:ext cx="1661829" cy="369332"/>
+          </a:xfrm>
+          <a:prstGeom prst="rect">
+            <a:avLst/>
+          </a:prstGeom>
+          <a:noFill/>
+        </p:spPr>
+        <p:txBody>
+          <a:bodyPr wrap="square">
+            <a:spAutoFit/>
+          </a:bodyPr>
+          <a:lstStyle/>
+          <a:p>
+            <a:pPr algn="ctr"/>
+            <a:r>
+              <a:rPr lang="en-US" dirty="0">
+                <a:solidFill>
+                  <a:schemeClr val="bg1"/>
+                </a:solidFill>
+                <a:latin typeface="Trebuchet MS" panose="020B0703020202090204" pitchFamily="34" charset="0"/>
+              </a:rPr>
+              <a:t>Feedback</a:t>
+            </a:r>
+          </a:p>
+        </p:txBody>
+      </p:sp>
+      <p:sp>
+        <p:nvSpPr>
+          <p:cNvPr id="113" name="TextBox 112">
+            <a:extLst>
+              <a:ext uri="{FF2B5EF4-FFF2-40B4-BE49-F238E27FC236}">
+                <a16:creationId xmlns:a16="http://schemas.microsoft.com/office/drawing/2014/main" id="{C8F2D6A0-97C1-BE11-1610-7F4817B32BE7}"/>
+              </a:ext>
+            </a:extLst>
+          </p:cNvPr>
+          <p:cNvSpPr txBox="1"/>
+          <p:nvPr/>
+        </p:nvSpPr>
+        <p:spPr>
+          <a:xfrm>
+            <a:off x="8782763" y="2499383"/>
+            <a:ext cx="1341280" cy="646331"/>
+          </a:xfrm>
+          <a:prstGeom prst="rect">
+            <a:avLst/>
+          </a:prstGeom>
+          <a:noFill/>
+        </p:spPr>
+        <p:txBody>
+          <a:bodyPr wrap="square">
+            <a:spAutoFit/>
+          </a:bodyPr>
+          <a:lstStyle/>
+          <a:p>
+            <a:pPr algn="ctr"/>
+            <a:r>
+              <a:rPr lang="en-US" dirty="0">
+                <a:solidFill>
+                  <a:schemeClr val="bg1"/>
+                </a:solidFill>
+                <a:latin typeface="Trebuchet MS" panose="020B0703020202090204" pitchFamily="34" charset="0"/>
+              </a:rPr>
+              <a:t>Controller Output</a:t>
+            </a:r>
+          </a:p>
+        </p:txBody>
+      </p:sp>
+      <mc:AlternateContent xmlns:mc="http://schemas.openxmlformats.org/markup-compatibility/2006" xmlns:a14="http://schemas.microsoft.com/office/drawing/2010/main">
+        <mc:Choice Requires="a14">
+          <p:sp>
+            <p:nvSpPr>
+              <p:cNvPr id="119" name="TextBox 118">
+                <a:extLst>
+                  <a:ext uri="{FF2B5EF4-FFF2-40B4-BE49-F238E27FC236}">
+                    <a16:creationId xmlns:a16="http://schemas.microsoft.com/office/drawing/2014/main" id="{944F90AE-8199-8B2B-1FE1-CE8117C55BDA}"/>
+                  </a:ext>
+                </a:extLst>
+              </p:cNvPr>
+              <p:cNvSpPr txBox="1"/>
+              <p:nvPr/>
+            </p:nvSpPr>
+            <p:spPr>
+              <a:xfrm>
+                <a:off x="11656056" y="2467365"/>
+                <a:ext cx="1661829" cy="646331"/>
+              </a:xfrm>
+              <a:prstGeom prst="rect">
+                <a:avLst/>
+              </a:prstGeom>
+              <a:noFill/>
+            </p:spPr>
+            <p:txBody>
+              <a:bodyPr wrap="square">
+                <a:spAutoFit/>
+              </a:bodyPr>
+              <a:lstStyle/>
+              <a:p>
+                <a:pPr algn="ctr"/>
+                <a:r>
+                  <a:rPr lang="en-US" dirty="0">
+                    <a:solidFill>
+                      <a:schemeClr val="bg1"/>
+                    </a:solidFill>
+                    <a:latin typeface="Trebuchet MS" panose="020B0703020202090204" pitchFamily="34" charset="0"/>
+                  </a:rPr>
+                  <a:t>Current Angle</a:t>
+                </a:r>
+              </a:p>
+              <a:p>
+                <a:pPr algn="ctr"/>
+                <a14:m>
+                  <m:oMathPara xmlns:m="http://schemas.openxmlformats.org/officeDocument/2006/math">
+                    <m:oMathParaPr>
+                      <m:jc m:val="centerGroup"/>
+                    </m:oMathParaPr>
+                    <m:oMath xmlns:m="http://schemas.openxmlformats.org/officeDocument/2006/math">
+                      <m:r>
+                        <a:rPr lang="en-US" b="0" i="1" smtClean="0">
+                          <a:solidFill>
+                            <a:schemeClr val="bg1"/>
+                          </a:solidFill>
+                          <a:latin typeface="Cambria Math" panose="02040503050406030204" pitchFamily="18" charset="0"/>
+                        </a:rPr>
+                        <m:t>𝜃</m:t>
+                      </m:r>
+                      <m:r>
+                        <a:rPr lang="en-US" b="0" i="1" smtClean="0">
+                          <a:solidFill>
+                            <a:schemeClr val="bg1"/>
+                          </a:solidFill>
+                          <a:latin typeface="Cambria Math" panose="02040503050406030204" pitchFamily="18" charset="0"/>
+                        </a:rPr>
+                        <m:t>(</m:t>
+                      </m:r>
+                      <m:r>
+                        <a:rPr lang="en-US" b="0" i="1" smtClean="0">
+                          <a:solidFill>
+                            <a:schemeClr val="bg1"/>
+                          </a:solidFill>
+                          <a:latin typeface="Cambria Math" panose="02040503050406030204" pitchFamily="18" charset="0"/>
+                        </a:rPr>
+                        <m:t>𝑡</m:t>
+                      </m:r>
+                      <m:r>
+                        <a:rPr lang="en-US" b="0" i="1" smtClean="0">
+                          <a:solidFill>
+                            <a:schemeClr val="bg1"/>
+                          </a:solidFill>
+                          <a:latin typeface="Cambria Math" panose="02040503050406030204" pitchFamily="18" charset="0"/>
+                        </a:rPr>
+                        <m:t>)</m:t>
+                      </m:r>
+                    </m:oMath>
+                  </m:oMathPara>
+                </a14:m>
+                <a:endParaRPr lang="en-US" i="1" dirty="0">
+                  <a:solidFill>
+                    <a:schemeClr val="bg1"/>
+                  </a:solidFill>
+                  <a:latin typeface="Trebuchet MS" panose="020B0703020202090204" pitchFamily="34" charset="0"/>
+                </a:endParaRPr>
+              </a:p>
+            </p:txBody>
+          </p:sp>
+        </mc:Choice>
+        <mc:Fallback xmlns="">
+          <p:sp>
+            <p:nvSpPr>
+              <p:cNvPr id="119" name="TextBox 118">
+                <a:extLst>
+                  <a:ext uri="{FF2B5EF4-FFF2-40B4-BE49-F238E27FC236}">
+                    <a16:creationId xmlns:a16="http://schemas.microsoft.com/office/drawing/2014/main" id="{944F90AE-8199-8B2B-1FE1-CE8117C55BDA}"/>
+                  </a:ext>
+                </a:extLst>
+              </p:cNvPr>
+              <p:cNvSpPr txBox="1">
+                <a:spLocks noRot="1" noChangeAspect="1" noMove="1" noResize="1" noEditPoints="1" noAdjustHandles="1" noChangeArrowheads="1" noChangeShapeType="1" noTextEdit="1"/>
+              </p:cNvSpPr>
+              <p:nvPr/>
+            </p:nvSpPr>
+            <p:spPr>
+              <a:xfrm>
+                <a:off x="11656056" y="2467365"/>
+                <a:ext cx="1661829" cy="646331"/>
+              </a:xfrm>
+              <a:prstGeom prst="rect">
+                <a:avLst/>
+              </a:prstGeom>
+              <a:blipFill>
+                <a:blip r:embed="rId16"/>
+                <a:stretch>
+                  <a:fillRect l="-758" t="-3846" r="-758" b="-7692"/>
+                </a:stretch>
+              </a:blipFill>
+            </p:spPr>
+            <p:txBody>
+              <a:bodyPr/>
+              <a:lstStyle/>
+              <a:p>
+                <a:r>
+                  <a:rPr lang="en-US">
+                    <a:noFill/>
+                  </a:rPr>
+                  <a:t> </a:t>
+                </a:r>
+              </a:p>
+            </p:txBody>
+          </p:sp>
+        </mc:Fallback>
+      </mc:AlternateContent>
+    </p:spTree>
+    <p:extLst>
+      <p:ext uri="{BB962C8B-B14F-4D97-AF65-F5344CB8AC3E}">
+        <p14:creationId xmlns:p14="http://schemas.microsoft.com/office/powerpoint/2010/main" val="3695089591"/>
+      </p:ext>
+    </p:extLst>
+  </p:cSld>
+  <p:clrMapOvr>
+    <a:masterClrMapping/>
+  </p:clrMapOvr>
+</p:sld>
+</file>
+
+<file path=ppt/slides/slide4.xml><?xml version="1.0" encoding="utf-8"?>
+<p:sld xmlns:a="http://schemas.openxmlformats.org/drawingml/2006/main" xmlns:r="http://schemas.openxmlformats.org/officeDocument/2006/relationships" xmlns:p="http://schemas.openxmlformats.org/presentationml/2006/main">
+  <p:cSld>
+    <p:bg>
+      <p:bgPr>
+        <a:solidFill>
+          <a:schemeClr val="bg1"/>
+        </a:solidFill>
+        <a:effectLst/>
+      </p:bgPr>
+    </p:bg>
+    <p:spTree>
+      <p:nvGrpSpPr>
+        <p:cNvPr id="1" name=""/>
+        <p:cNvGrpSpPr/>
+        <p:nvPr/>
+      </p:nvGrpSpPr>
+      <p:grpSpPr>
+        <a:xfrm>
+          <a:off x="0" y="0"/>
+          <a:ext cx="0" cy="0"/>
+          <a:chOff x="0" y="0"/>
+          <a:chExt cx="0" cy="0"/>
+        </a:xfrm>
+      </p:grpSpPr>
+      <p:sp>
+        <p:nvSpPr>
+          <p:cNvPr id="9" name="Oval 8">
+            <a:extLst>
+              <a:ext uri="{FF2B5EF4-FFF2-40B4-BE49-F238E27FC236}">
+                <a16:creationId xmlns:a16="http://schemas.microsoft.com/office/drawing/2014/main" id="{74023EF0-9D13-2C0E-7E0C-3554584AEBFD}"/>
+              </a:ext>
+            </a:extLst>
+          </p:cNvPr>
+          <p:cNvSpPr/>
+          <p:nvPr/>
+        </p:nvSpPr>
+        <p:spPr>
+          <a:xfrm>
+            <a:off x="4414010" y="5892799"/>
+            <a:ext cx="3070138" cy="330811"/>
+          </a:xfrm>
+          <a:prstGeom prst="ellipse">
+            <a:avLst/>
+          </a:prstGeom>
+          <a:solidFill>
+            <a:schemeClr val="bg1">
+              <a:lumMod val="75000"/>
+            </a:schemeClr>
+          </a:solidFill>
+          <a:ln>
+            <a:solidFill>
+              <a:schemeClr val="bg1">
+                <a:lumMod val="75000"/>
+              </a:schemeClr>
+            </a:solidFill>
+          </a:ln>
+        </p:spPr>
+        <p:style>
+          <a:lnRef idx="2">
+            <a:schemeClr val="accent1">
+              <a:shade val="15000"/>
+            </a:schemeClr>
+          </a:lnRef>
+          <a:fillRef idx="1">
+            <a:schemeClr val="accent1"/>
+          </a:fillRef>
+          <a:effectRef idx="0">
+            <a:schemeClr val="accent1"/>
+          </a:effectRef>
+          <a:fontRef idx="minor">
+            <a:schemeClr val="lt1"/>
+          </a:fontRef>
+        </p:style>
+        <p:txBody>
+          <a:bodyPr rtlCol="0" anchor="ctr"/>
+          <a:lstStyle/>
+          <a:p>
+            <a:pPr algn="ctr"/>
+            <a:endParaRPr lang="en-US"/>
+          </a:p>
+        </p:txBody>
+      </p:sp>
+      <p:pic>
+        <p:nvPicPr>
+          <p:cNvPr id="5" name="Picture 4">
+            <a:extLst>
+              <a:ext uri="{FF2B5EF4-FFF2-40B4-BE49-F238E27FC236}">
+                <a16:creationId xmlns:a16="http://schemas.microsoft.com/office/drawing/2014/main" id="{14A3301F-7451-EC82-2DE4-A546A1D76359}"/>
+              </a:ext>
+            </a:extLst>
+          </p:cNvPr>
+          <p:cNvPicPr>
+            <a:picLocks noChangeAspect="1"/>
+          </p:cNvPicPr>
+          <p:nvPr/>
+        </p:nvPicPr>
+        <p:blipFill>
+          <a:blip r:embed="rId2"/>
+          <a:srcRect l="18121" t="4402" r="10576" b="4985"/>
+          <a:stretch>
+            <a:fillRect/>
+          </a:stretch>
+        </p:blipFill>
+        <p:spPr>
+          <a:xfrm>
+            <a:off x="4560931" y="594710"/>
+            <a:ext cx="3070137" cy="5465379"/>
+          </a:xfrm>
+          <a:prstGeom prst="rect">
+            <a:avLst/>
+          </a:prstGeom>
+        </p:spPr>
+      </p:pic>
+      <p:sp>
+        <p:nvSpPr>
+          <p:cNvPr id="6" name="Rectangle 5">
+            <a:extLst>
+              <a:ext uri="{FF2B5EF4-FFF2-40B4-BE49-F238E27FC236}">
+                <a16:creationId xmlns:a16="http://schemas.microsoft.com/office/drawing/2014/main" id="{6F545D20-53B1-5134-F88E-B5DD53162D35}"/>
+              </a:ext>
+            </a:extLst>
+          </p:cNvPr>
+          <p:cNvSpPr>
+            <a:spLocks noChangeAspect="1"/>
+          </p:cNvSpPr>
+          <p:nvPr/>
+        </p:nvSpPr>
+        <p:spPr>
+          <a:xfrm>
+            <a:off x="-1453665" y="314323"/>
+            <a:ext cx="5033110" cy="6291387"/>
+          </a:xfrm>
+          <a:prstGeom prst="rect">
+            <a:avLst/>
+          </a:prstGeom>
+          <a:noFill/>
+          <a:ln>
+            <a:noFill/>
+          </a:ln>
+        </p:spPr>
+        <p:style>
+          <a:lnRef idx="2">
+            <a:schemeClr val="accent1">
+              <a:shade val="15000"/>
+            </a:schemeClr>
+          </a:lnRef>
+          <a:fillRef idx="1">
+            <a:schemeClr val="accent1"/>
+          </a:fillRef>
+          <a:effectRef idx="0">
+            <a:schemeClr val="accent1"/>
+          </a:effectRef>
+          <a:fontRef idx="minor">
+            <a:schemeClr val="lt1"/>
+          </a:fontRef>
+        </p:style>
+        <p:txBody>
+          <a:bodyPr rtlCol="0" anchor="ctr"/>
+          <a:lstStyle/>
+          <a:p>
+            <a:pPr algn="ctr"/>
+            <a:endParaRPr lang="en-US"/>
+          </a:p>
+        </p:txBody>
+      </p:sp>
+      <p:sp>
+        <p:nvSpPr>
+          <p:cNvPr id="7" name="Rectangle 6">
+            <a:extLst>
+              <a:ext uri="{FF2B5EF4-FFF2-40B4-BE49-F238E27FC236}">
+                <a16:creationId xmlns:a16="http://schemas.microsoft.com/office/drawing/2014/main" id="{374C9188-456E-94F0-D924-72D58A61E17C}"/>
+              </a:ext>
+            </a:extLst>
+          </p:cNvPr>
+          <p:cNvSpPr>
+            <a:spLocks noChangeAspect="1"/>
+          </p:cNvSpPr>
+          <p:nvPr/>
+        </p:nvSpPr>
+        <p:spPr>
+          <a:xfrm>
+            <a:off x="3579445" y="314323"/>
+            <a:ext cx="5033110" cy="6291387"/>
+          </a:xfrm>
+          <a:prstGeom prst="rect">
+            <a:avLst/>
+          </a:prstGeom>
+          <a:noFill/>
+          <a:ln>
+            <a:noFill/>
+          </a:ln>
+        </p:spPr>
+        <p:style>
+          <a:lnRef idx="2">
+            <a:schemeClr val="accent1">
+              <a:shade val="15000"/>
+            </a:schemeClr>
+          </a:lnRef>
+          <a:fillRef idx="1">
+            <a:schemeClr val="accent1"/>
+          </a:fillRef>
+          <a:effectRef idx="0">
+            <a:schemeClr val="accent1"/>
+          </a:effectRef>
+          <a:fontRef idx="minor">
+            <a:schemeClr val="lt1"/>
+          </a:fontRef>
+        </p:style>
+        <p:txBody>
+          <a:bodyPr rtlCol="0" anchor="ctr"/>
+          <a:lstStyle/>
+          <a:p>
+            <a:pPr algn="ctr"/>
+            <a:endParaRPr lang="en-US"/>
+          </a:p>
+        </p:txBody>
+      </p:sp>
+      <p:sp>
+        <p:nvSpPr>
+          <p:cNvPr id="8" name="Rectangle 7">
+            <a:extLst>
+              <a:ext uri="{FF2B5EF4-FFF2-40B4-BE49-F238E27FC236}">
+                <a16:creationId xmlns:a16="http://schemas.microsoft.com/office/drawing/2014/main" id="{1A9BA4F0-7C29-AB26-F8F4-8064DFA6689F}"/>
+              </a:ext>
+            </a:extLst>
+          </p:cNvPr>
+          <p:cNvSpPr>
+            <a:spLocks noChangeAspect="1"/>
+          </p:cNvSpPr>
+          <p:nvPr/>
+        </p:nvSpPr>
+        <p:spPr>
+          <a:xfrm>
+            <a:off x="8612555" y="316033"/>
+            <a:ext cx="5033110" cy="6291387"/>
+          </a:xfrm>
+          <a:prstGeom prst="rect">
+            <a:avLst/>
+          </a:prstGeom>
+          <a:noFill/>
+          <a:ln>
+            <a:noFill/>
+          </a:ln>
+        </p:spPr>
+        <p:style>
+          <a:lnRef idx="2">
+            <a:schemeClr val="accent1">
+              <a:shade val="15000"/>
+            </a:schemeClr>
+          </a:lnRef>
+          <a:fillRef idx="1">
+            <a:schemeClr val="accent1"/>
+          </a:fillRef>
+          <a:effectRef idx="0">
+            <a:schemeClr val="accent1"/>
+          </a:effectRef>
+          <a:fontRef idx="minor">
+            <a:schemeClr val="lt1"/>
+          </a:fontRef>
+        </p:style>
+        <p:txBody>
+          <a:bodyPr rtlCol="0" anchor="ctr"/>
+          <a:lstStyle/>
+          <a:p>
+            <a:pPr algn="ctr"/>
+            <a:endParaRPr lang="en-US"/>
+          </a:p>
+        </p:txBody>
+      </p:sp>
+      <p:sp>
+        <p:nvSpPr>
+          <p:cNvPr id="11" name="Oval 10">
+            <a:extLst>
+              <a:ext uri="{FF2B5EF4-FFF2-40B4-BE49-F238E27FC236}">
+                <a16:creationId xmlns:a16="http://schemas.microsoft.com/office/drawing/2014/main" id="{7D5F90C5-27AA-76C9-5150-9BD39B0B56FB}"/>
+              </a:ext>
+            </a:extLst>
+          </p:cNvPr>
+          <p:cNvSpPr/>
+          <p:nvPr/>
+        </p:nvSpPr>
+        <p:spPr>
+          <a:xfrm>
+            <a:off x="-459060" y="5892799"/>
+            <a:ext cx="3070138" cy="330811"/>
+          </a:xfrm>
+          <a:prstGeom prst="ellipse">
+            <a:avLst/>
+          </a:prstGeom>
+          <a:solidFill>
+            <a:schemeClr val="bg1">
+              <a:lumMod val="75000"/>
+            </a:schemeClr>
+          </a:solidFill>
+          <a:ln>
+            <a:solidFill>
+              <a:schemeClr val="bg1">
+                <a:lumMod val="75000"/>
+              </a:schemeClr>
+            </a:solidFill>
+          </a:ln>
+        </p:spPr>
+        <p:style>
+          <a:lnRef idx="2">
+            <a:schemeClr val="accent1">
+              <a:shade val="15000"/>
+            </a:schemeClr>
+          </a:lnRef>
+          <a:fillRef idx="1">
+            <a:schemeClr val="accent1"/>
+          </a:fillRef>
+          <a:effectRef idx="0">
+            <a:schemeClr val="accent1"/>
+          </a:effectRef>
+          <a:fontRef idx="minor">
+            <a:schemeClr val="lt1"/>
+          </a:fontRef>
+        </p:style>
+        <p:txBody>
+          <a:bodyPr rtlCol="0" anchor="ctr"/>
+          <a:lstStyle/>
+          <a:p>
+            <a:pPr algn="ctr"/>
+            <a:endParaRPr lang="en-US"/>
+          </a:p>
+        </p:txBody>
+      </p:sp>
+      <p:pic>
+        <p:nvPicPr>
+          <p:cNvPr id="13" name="Picture 12">
+            <a:extLst>
+              <a:ext uri="{FF2B5EF4-FFF2-40B4-BE49-F238E27FC236}">
+                <a16:creationId xmlns:a16="http://schemas.microsoft.com/office/drawing/2014/main" id="{855E4EC6-8BDC-5FB6-0A73-760315B97100}"/>
+              </a:ext>
+            </a:extLst>
+          </p:cNvPr>
+          <p:cNvPicPr>
+            <a:picLocks noChangeAspect="1"/>
+          </p:cNvPicPr>
+          <p:nvPr/>
+        </p:nvPicPr>
+        <p:blipFill>
+          <a:blip r:embed="rId2"/>
+          <a:srcRect l="18121" t="4402" r="10576" b="4985"/>
+          <a:stretch>
+            <a:fillRect/>
+          </a:stretch>
+        </p:blipFill>
+        <p:spPr>
+          <a:xfrm rot="600000">
+            <a:off x="-472179" y="594710"/>
+            <a:ext cx="3070137" cy="5465379"/>
+          </a:xfrm>
+          <a:prstGeom prst="rect">
+            <a:avLst/>
+          </a:prstGeom>
+        </p:spPr>
+      </p:pic>
+      <p:sp>
+        <p:nvSpPr>
+          <p:cNvPr id="15" name="Oval 14">
+            <a:extLst>
+              <a:ext uri="{FF2B5EF4-FFF2-40B4-BE49-F238E27FC236}">
+                <a16:creationId xmlns:a16="http://schemas.microsoft.com/office/drawing/2014/main" id="{096A83AC-99C2-5CAD-1703-BDEB68D5A478}"/>
+              </a:ext>
+            </a:extLst>
+          </p:cNvPr>
+          <p:cNvSpPr/>
+          <p:nvPr/>
+        </p:nvSpPr>
+        <p:spPr>
+          <a:xfrm>
+            <a:off x="9505176" y="5892799"/>
+            <a:ext cx="3070138" cy="330811"/>
+          </a:xfrm>
+          <a:prstGeom prst="ellipse">
+            <a:avLst/>
+          </a:prstGeom>
+          <a:solidFill>
+            <a:schemeClr val="bg1">
+              <a:lumMod val="75000"/>
+            </a:schemeClr>
+          </a:solidFill>
+          <a:ln>
+            <a:solidFill>
+              <a:schemeClr val="bg1">
+                <a:lumMod val="75000"/>
+              </a:schemeClr>
+            </a:solidFill>
+          </a:ln>
+        </p:spPr>
+        <p:style>
+          <a:lnRef idx="2">
+            <a:schemeClr val="accent1">
+              <a:shade val="15000"/>
+            </a:schemeClr>
+          </a:lnRef>
+          <a:fillRef idx="1">
+            <a:schemeClr val="accent1"/>
+          </a:fillRef>
+          <a:effectRef idx="0">
+            <a:schemeClr val="accent1"/>
+          </a:effectRef>
+          <a:fontRef idx="minor">
+            <a:schemeClr val="lt1"/>
+          </a:fontRef>
+        </p:style>
+        <p:txBody>
+          <a:bodyPr rtlCol="0" anchor="ctr"/>
+          <a:lstStyle/>
+          <a:p>
+            <a:pPr algn="ctr"/>
+            <a:endParaRPr lang="en-US"/>
+          </a:p>
+        </p:txBody>
+      </p:sp>
+      <p:pic>
+        <p:nvPicPr>
+          <p:cNvPr id="17" name="Picture 16">
+            <a:extLst>
+              <a:ext uri="{FF2B5EF4-FFF2-40B4-BE49-F238E27FC236}">
+                <a16:creationId xmlns:a16="http://schemas.microsoft.com/office/drawing/2014/main" id="{DB492860-99E1-0603-1328-0CD50FE5C476}"/>
+              </a:ext>
+            </a:extLst>
+          </p:cNvPr>
+          <p:cNvPicPr>
+            <a:picLocks noChangeAspect="1"/>
+          </p:cNvPicPr>
+          <p:nvPr/>
+        </p:nvPicPr>
+        <p:blipFill>
+          <a:blip r:embed="rId2"/>
+          <a:srcRect l="18121" t="4402" r="10576" b="4985"/>
+          <a:stretch>
+            <a:fillRect/>
+          </a:stretch>
+        </p:blipFill>
+        <p:spPr>
+          <a:xfrm rot="-600000">
+            <a:off x="9594041" y="594710"/>
+            <a:ext cx="3070137" cy="5465379"/>
+          </a:xfrm>
+          <a:prstGeom prst="rect">
+            <a:avLst/>
+          </a:prstGeom>
+        </p:spPr>
+      </p:pic>
+      <p:sp>
+        <p:nvSpPr>
+          <p:cNvPr id="24" name="Right Arrow 23">
+            <a:extLst>
+              <a:ext uri="{FF2B5EF4-FFF2-40B4-BE49-F238E27FC236}">
+                <a16:creationId xmlns:a16="http://schemas.microsoft.com/office/drawing/2014/main" id="{524A0F48-7E3B-94C2-95C7-82F7123ACE3D}"/>
+              </a:ext>
+            </a:extLst>
+          </p:cNvPr>
+          <p:cNvSpPr/>
+          <p:nvPr/>
+        </p:nvSpPr>
+        <p:spPr>
+          <a:xfrm>
+            <a:off x="2019235" y="5561988"/>
+            <a:ext cx="784950" cy="330811"/>
+          </a:xfrm>
+          <a:prstGeom prst="rightArrow">
+            <a:avLst>
+              <a:gd name="adj1" fmla="val 50000"/>
+              <a:gd name="adj2" fmla="val 89487"/>
+            </a:avLst>
+          </a:prstGeom>
+          <a:solidFill>
+            <a:schemeClr val="bg1">
+              <a:lumMod val="75000"/>
+            </a:schemeClr>
+          </a:solidFill>
+          <a:ln>
+            <a:solidFill>
+              <a:schemeClr val="bg1">
+                <a:lumMod val="75000"/>
+              </a:schemeClr>
+            </a:solidFill>
+          </a:ln>
+        </p:spPr>
+        <p:style>
+          <a:lnRef idx="2">
+            <a:schemeClr val="accent1">
+              <a:shade val="15000"/>
+            </a:schemeClr>
+          </a:lnRef>
+          <a:fillRef idx="1">
+            <a:schemeClr val="accent1"/>
+          </a:fillRef>
+          <a:effectRef idx="0">
+            <a:schemeClr val="accent1"/>
+          </a:effectRef>
+          <a:fontRef idx="minor">
+            <a:schemeClr val="lt1"/>
+          </a:fontRef>
+        </p:style>
+        <p:txBody>
+          <a:bodyPr rtlCol="0" anchor="ctr"/>
+          <a:lstStyle/>
+          <a:p>
+            <a:pPr algn="ctr"/>
+            <a:endParaRPr lang="en-US"/>
+          </a:p>
+        </p:txBody>
+      </p:sp>
+      <p:sp>
+        <p:nvSpPr>
+          <p:cNvPr id="23" name="Right Arrow 22">
+            <a:extLst>
+              <a:ext uri="{FF2B5EF4-FFF2-40B4-BE49-F238E27FC236}">
+                <a16:creationId xmlns:a16="http://schemas.microsoft.com/office/drawing/2014/main" id="{9E04045C-BDA3-5F59-3DD3-1606AB540D4D}"/>
+              </a:ext>
+            </a:extLst>
+          </p:cNvPr>
+          <p:cNvSpPr/>
+          <p:nvPr/>
+        </p:nvSpPr>
+        <p:spPr>
+          <a:xfrm>
+            <a:off x="2128151" y="5561988"/>
+            <a:ext cx="784950" cy="330811"/>
+          </a:xfrm>
+          <a:prstGeom prst="rightArrow">
+            <a:avLst>
+              <a:gd name="adj1" fmla="val 50000"/>
+              <a:gd name="adj2" fmla="val 89487"/>
+            </a:avLst>
+          </a:prstGeom>
+          <a:solidFill>
+            <a:schemeClr val="bg1">
+              <a:lumMod val="50000"/>
+            </a:schemeClr>
+          </a:solidFill>
+          <a:ln>
+            <a:solidFill>
+              <a:schemeClr val="bg1">
+                <a:lumMod val="50000"/>
+              </a:schemeClr>
+            </a:solidFill>
+          </a:ln>
+        </p:spPr>
+        <p:style>
+          <a:lnRef idx="2">
+            <a:schemeClr val="accent1">
+              <a:shade val="15000"/>
+            </a:schemeClr>
+          </a:lnRef>
+          <a:fillRef idx="1">
+            <a:schemeClr val="accent1"/>
+          </a:fillRef>
+          <a:effectRef idx="0">
+            <a:schemeClr val="accent1"/>
+          </a:effectRef>
+          <a:fontRef idx="minor">
+            <a:schemeClr val="lt1"/>
+          </a:fontRef>
+        </p:style>
+        <p:txBody>
+          <a:bodyPr rtlCol="0" anchor="ctr"/>
+          <a:lstStyle/>
+          <a:p>
+            <a:pPr algn="ctr"/>
+            <a:endParaRPr lang="en-US"/>
+          </a:p>
+        </p:txBody>
+      </p:sp>
+      <p:sp>
+        <p:nvSpPr>
+          <p:cNvPr id="22" name="Right Arrow 21">
+            <a:extLst>
+              <a:ext uri="{FF2B5EF4-FFF2-40B4-BE49-F238E27FC236}">
+                <a16:creationId xmlns:a16="http://schemas.microsoft.com/office/drawing/2014/main" id="{A23EAE87-E317-F222-57A5-0EA532105384}"/>
+              </a:ext>
+            </a:extLst>
+          </p:cNvPr>
+          <p:cNvSpPr/>
+          <p:nvPr/>
+        </p:nvSpPr>
+        <p:spPr>
+          <a:xfrm>
+            <a:off x="2230292" y="5561988"/>
+            <a:ext cx="784950" cy="330811"/>
+          </a:xfrm>
+          <a:prstGeom prst="rightArrow">
+            <a:avLst>
+              <a:gd name="adj1" fmla="val 50000"/>
+              <a:gd name="adj2" fmla="val 89487"/>
+            </a:avLst>
+          </a:prstGeom>
+          <a:solidFill>
+            <a:srgbClr val="068EDD"/>
+          </a:solidFill>
+          <a:ln>
+            <a:solidFill>
+              <a:schemeClr val="tx2">
+                <a:lumMod val="90000"/>
+                <a:lumOff val="10000"/>
+              </a:schemeClr>
+            </a:solidFill>
+          </a:ln>
+        </p:spPr>
+        <p:style>
+          <a:lnRef idx="2">
+            <a:schemeClr val="accent1">
+              <a:shade val="15000"/>
+            </a:schemeClr>
+          </a:lnRef>
+          <a:fillRef idx="1">
+            <a:schemeClr val="accent1"/>
+          </a:fillRef>
+          <a:effectRef idx="0">
+            <a:schemeClr val="accent1"/>
+          </a:effectRef>
+          <a:fontRef idx="minor">
+            <a:schemeClr val="lt1"/>
+          </a:fontRef>
+        </p:style>
+        <p:txBody>
+          <a:bodyPr rtlCol="0" anchor="ctr"/>
+          <a:lstStyle/>
+          <a:p>
+            <a:pPr algn="ctr"/>
+            <a:endParaRPr lang="en-US"/>
+          </a:p>
+        </p:txBody>
+      </p:sp>
+      <p:sp>
+        <p:nvSpPr>
+          <p:cNvPr id="27" name="Right Arrow 26">
+            <a:extLst>
+              <a:ext uri="{FF2B5EF4-FFF2-40B4-BE49-F238E27FC236}">
+                <a16:creationId xmlns:a16="http://schemas.microsoft.com/office/drawing/2014/main" id="{89B085E7-8D29-3E7C-088B-6BD3612B760A}"/>
+              </a:ext>
+            </a:extLst>
+          </p:cNvPr>
+          <p:cNvSpPr/>
+          <p:nvPr/>
+        </p:nvSpPr>
+        <p:spPr>
+          <a:xfrm rot="10800000">
+            <a:off x="9559544" y="5561988"/>
+            <a:ext cx="784950" cy="330811"/>
+          </a:xfrm>
+          <a:prstGeom prst="rightArrow">
+            <a:avLst>
+              <a:gd name="adj1" fmla="val 50000"/>
+              <a:gd name="adj2" fmla="val 89487"/>
+            </a:avLst>
+          </a:prstGeom>
+          <a:solidFill>
+            <a:schemeClr val="bg1">
+              <a:lumMod val="75000"/>
+            </a:schemeClr>
+          </a:solidFill>
+          <a:ln>
+            <a:solidFill>
+              <a:schemeClr val="bg1">
+                <a:lumMod val="75000"/>
+              </a:schemeClr>
+            </a:solidFill>
+          </a:ln>
+        </p:spPr>
+        <p:style>
+          <a:lnRef idx="2">
+            <a:schemeClr val="accent1">
+              <a:shade val="15000"/>
+            </a:schemeClr>
+          </a:lnRef>
+          <a:fillRef idx="1">
+            <a:schemeClr val="accent1"/>
+          </a:fillRef>
+          <a:effectRef idx="0">
+            <a:schemeClr val="accent1"/>
+          </a:effectRef>
+          <a:fontRef idx="minor">
+            <a:schemeClr val="lt1"/>
+          </a:fontRef>
+        </p:style>
+        <p:txBody>
+          <a:bodyPr rtlCol="0" anchor="ctr"/>
+          <a:lstStyle/>
+          <a:p>
+            <a:pPr algn="ctr"/>
+            <a:endParaRPr lang="en-US"/>
+          </a:p>
+        </p:txBody>
+      </p:sp>
+      <p:sp>
+        <p:nvSpPr>
+          <p:cNvPr id="26" name="Right Arrow 25">
+            <a:extLst>
+              <a:ext uri="{FF2B5EF4-FFF2-40B4-BE49-F238E27FC236}">
+                <a16:creationId xmlns:a16="http://schemas.microsoft.com/office/drawing/2014/main" id="{04FFCE8E-5D4A-E906-2541-6EF1C7131BE6}"/>
+              </a:ext>
+            </a:extLst>
+          </p:cNvPr>
+          <p:cNvSpPr/>
+          <p:nvPr/>
+        </p:nvSpPr>
+        <p:spPr>
+          <a:xfrm rot="10800000">
+            <a:off x="9457403" y="5561988"/>
+            <a:ext cx="784950" cy="330811"/>
+          </a:xfrm>
+          <a:prstGeom prst="rightArrow">
+            <a:avLst>
+              <a:gd name="adj1" fmla="val 50000"/>
+              <a:gd name="adj2" fmla="val 89487"/>
+            </a:avLst>
+          </a:prstGeom>
+          <a:solidFill>
+            <a:schemeClr val="bg1">
+              <a:lumMod val="50000"/>
+            </a:schemeClr>
+          </a:solidFill>
+          <a:ln>
+            <a:solidFill>
+              <a:schemeClr val="bg1">
+                <a:lumMod val="50000"/>
+              </a:schemeClr>
+            </a:solidFill>
+          </a:ln>
+        </p:spPr>
+        <p:style>
+          <a:lnRef idx="2">
+            <a:schemeClr val="accent1">
+              <a:shade val="15000"/>
+            </a:schemeClr>
+          </a:lnRef>
+          <a:fillRef idx="1">
+            <a:schemeClr val="accent1"/>
+          </a:fillRef>
+          <a:effectRef idx="0">
+            <a:schemeClr val="accent1"/>
+          </a:effectRef>
+          <a:fontRef idx="minor">
+            <a:schemeClr val="lt1"/>
+          </a:fontRef>
+        </p:style>
+        <p:txBody>
+          <a:bodyPr rtlCol="0" anchor="ctr"/>
+          <a:lstStyle/>
+          <a:p>
+            <a:pPr algn="ctr"/>
+            <a:endParaRPr lang="en-US"/>
+          </a:p>
+        </p:txBody>
+      </p:sp>
+      <p:sp>
+        <p:nvSpPr>
+          <p:cNvPr id="25" name="Right Arrow 24">
+            <a:extLst>
+              <a:ext uri="{FF2B5EF4-FFF2-40B4-BE49-F238E27FC236}">
+                <a16:creationId xmlns:a16="http://schemas.microsoft.com/office/drawing/2014/main" id="{755C904A-C039-28DF-7CDD-ACE2C9379347}"/>
+              </a:ext>
+            </a:extLst>
+          </p:cNvPr>
+          <p:cNvSpPr/>
+          <p:nvPr/>
+        </p:nvSpPr>
+        <p:spPr>
+          <a:xfrm rot="10800000">
+            <a:off x="9348487" y="5561988"/>
+            <a:ext cx="784950" cy="330811"/>
+          </a:xfrm>
+          <a:prstGeom prst="rightArrow">
+            <a:avLst>
+              <a:gd name="adj1" fmla="val 50000"/>
+              <a:gd name="adj2" fmla="val 89487"/>
+            </a:avLst>
+          </a:prstGeom>
+          <a:solidFill>
+            <a:srgbClr val="068EDD"/>
+          </a:solidFill>
+          <a:ln>
+            <a:solidFill>
+              <a:schemeClr val="tx2">
+                <a:lumMod val="90000"/>
+                <a:lumOff val="10000"/>
+              </a:schemeClr>
+            </a:solidFill>
+          </a:ln>
+        </p:spPr>
+        <p:style>
+          <a:lnRef idx="2">
+            <a:schemeClr val="accent1">
+              <a:shade val="15000"/>
+            </a:schemeClr>
+          </a:lnRef>
+          <a:fillRef idx="1">
+            <a:schemeClr val="accent1"/>
+          </a:fillRef>
+          <a:effectRef idx="0">
+            <a:schemeClr val="accent1"/>
+          </a:effectRef>
+          <a:fontRef idx="minor">
+            <a:schemeClr val="lt1"/>
+          </a:fontRef>
+        </p:style>
+        <p:txBody>
+          <a:bodyPr rtlCol="0" anchor="ctr"/>
+          <a:lstStyle/>
+          <a:p>
+            <a:pPr algn="ctr"/>
+            <a:endParaRPr lang="en-US"/>
+          </a:p>
+        </p:txBody>
+      </p:sp>
+      <p:sp>
+        <p:nvSpPr>
+          <p:cNvPr id="30" name="Circular Arrow 29">
+            <a:extLst>
+              <a:ext uri="{FF2B5EF4-FFF2-40B4-BE49-F238E27FC236}">
+                <a16:creationId xmlns:a16="http://schemas.microsoft.com/office/drawing/2014/main" id="{D7CF51C5-E4BA-BFA8-06B8-7F2C92096C1F}"/>
+              </a:ext>
+            </a:extLst>
+          </p:cNvPr>
+          <p:cNvSpPr/>
+          <p:nvPr/>
+        </p:nvSpPr>
+        <p:spPr>
+          <a:xfrm rot="2384124">
+            <a:off x="2244719" y="539785"/>
+            <a:ext cx="886627" cy="980652"/>
+          </a:xfrm>
+          <a:prstGeom prst="circularArrow">
+            <a:avLst>
+              <a:gd name="adj1" fmla="val 12500"/>
+              <a:gd name="adj2" fmla="val 1245502"/>
+              <a:gd name="adj3" fmla="val 20457681"/>
+              <a:gd name="adj4" fmla="val 13890118"/>
+              <a:gd name="adj5" fmla="val 13518"/>
+            </a:avLst>
+          </a:prstGeom>
+          <a:solidFill>
+            <a:srgbClr val="068EDD"/>
+          </a:solidFill>
+          <a:ln>
+            <a:solidFill>
+              <a:schemeClr val="tx2">
+                <a:lumMod val="90000"/>
+                <a:lumOff val="10000"/>
+              </a:schemeClr>
+            </a:solidFill>
+          </a:ln>
+        </p:spPr>
+        <p:style>
+          <a:lnRef idx="2">
+            <a:schemeClr val="accent1">
+              <a:shade val="15000"/>
+            </a:schemeClr>
+          </a:lnRef>
+          <a:fillRef idx="1">
+            <a:schemeClr val="accent1"/>
+          </a:fillRef>
+          <a:effectRef idx="0">
+            <a:schemeClr val="accent1"/>
+          </a:effectRef>
+          <a:fontRef idx="minor">
+            <a:schemeClr val="lt1"/>
+          </a:fontRef>
+        </p:style>
+        <p:txBody>
+          <a:bodyPr rtlCol="0" anchor="ctr"/>
+          <a:lstStyle/>
+          <a:p>
+            <a:pPr algn="ctr"/>
+            <a:endParaRPr lang="en-US">
+              <a:solidFill>
+                <a:schemeClr val="tx1"/>
+              </a:solidFill>
+            </a:endParaRPr>
+          </a:p>
+        </p:txBody>
+      </p:sp>
+      <p:sp>
+        <p:nvSpPr>
+          <p:cNvPr id="31" name="Circular Arrow 30">
+            <a:extLst>
+              <a:ext uri="{FF2B5EF4-FFF2-40B4-BE49-F238E27FC236}">
+                <a16:creationId xmlns:a16="http://schemas.microsoft.com/office/drawing/2014/main" id="{DFE75C65-5EC7-C4EC-1B2F-74377CEFC9EF}"/>
+              </a:ext>
+            </a:extLst>
+          </p:cNvPr>
+          <p:cNvSpPr/>
+          <p:nvPr/>
+        </p:nvSpPr>
+        <p:spPr>
+          <a:xfrm rot="19215876" flipH="1">
+            <a:off x="8823588" y="586485"/>
+            <a:ext cx="886627" cy="980652"/>
+          </a:xfrm>
+          <a:prstGeom prst="circularArrow">
+            <a:avLst>
+              <a:gd name="adj1" fmla="val 12500"/>
+              <a:gd name="adj2" fmla="val 1245502"/>
+              <a:gd name="adj3" fmla="val 20457681"/>
+              <a:gd name="adj4" fmla="val 13890118"/>
+              <a:gd name="adj5" fmla="val 13518"/>
+            </a:avLst>
+          </a:prstGeom>
+          <a:solidFill>
+            <a:srgbClr val="068EDD"/>
+          </a:solidFill>
+          <a:ln>
+            <a:solidFill>
+              <a:schemeClr val="tx2">
+                <a:lumMod val="90000"/>
+                <a:lumOff val="10000"/>
+              </a:schemeClr>
+            </a:solidFill>
+          </a:ln>
+        </p:spPr>
+        <p:style>
+          <a:lnRef idx="2">
+            <a:schemeClr val="accent1">
+              <a:shade val="15000"/>
+            </a:schemeClr>
+          </a:lnRef>
+          <a:fillRef idx="1">
+            <a:schemeClr val="accent1"/>
+          </a:fillRef>
+          <a:effectRef idx="0">
+            <a:schemeClr val="accent1"/>
+          </a:effectRef>
+          <a:fontRef idx="minor">
+            <a:schemeClr val="lt1"/>
+          </a:fontRef>
+        </p:style>
+        <p:txBody>
+          <a:bodyPr rtlCol="0" anchor="ctr"/>
+          <a:lstStyle/>
+          <a:p>
+            <a:pPr algn="ctr"/>
+            <a:endParaRPr lang="en-US">
+              <a:solidFill>
+                <a:schemeClr val="tx1"/>
+              </a:solidFill>
+            </a:endParaRPr>
+          </a:p>
+        </p:txBody>
+      </p:sp>
+    </p:spTree>
+    <p:extLst>
+      <p:ext uri="{BB962C8B-B14F-4D97-AF65-F5344CB8AC3E}">
+        <p14:creationId xmlns:p14="http://schemas.microsoft.com/office/powerpoint/2010/main" val="1543428680"/>
+      </p:ext>
+    </p:extLst>
+  </p:cSld>
+  <p:clrMapOvr>
+    <a:masterClrMapping/>
+  </p:clrMapOvr>
+</p:sld>
+</file>
+
+<file path=ppt/slides/slide5.xml><?xml version="1.0" encoding="utf-8"?>
+<p:sld xmlns:a="http://schemas.openxmlformats.org/drawingml/2006/main" xmlns:r="http://schemas.openxmlformats.org/officeDocument/2006/relationships" xmlns:p="http://schemas.openxmlformats.org/presentationml/2006/main">
+  <p:cSld>
+    <p:bg>
+      <p:bgPr>
+        <a:solidFill>
+          <a:srgbClr val="141820"/>
+        </a:solidFill>
+        <a:effectLst/>
+      </p:bgPr>
+    </p:bg>
+    <p:spTree>
+      <p:nvGrpSpPr>
+        <p:cNvPr id="1" name="">
+          <a:extLst>
+            <a:ext uri="{FF2B5EF4-FFF2-40B4-BE49-F238E27FC236}">
+              <a16:creationId xmlns:a16="http://schemas.microsoft.com/office/drawing/2014/main" id="{E0D6703D-5B9E-3DF4-92A8-ACAD9169AB0F}"/>
+            </a:ext>
+          </a:extLst>
+        </p:cNvPr>
+        <p:cNvGrpSpPr/>
+        <p:nvPr/>
+      </p:nvGrpSpPr>
+      <p:grpSpPr>
+        <a:xfrm>
+          <a:off x="0" y="0"/>
+          <a:ext cx="0" cy="0"/>
+          <a:chOff x="0" y="0"/>
+          <a:chExt cx="0" cy="0"/>
+        </a:xfrm>
+      </p:grpSpPr>
+      <p:sp>
+        <p:nvSpPr>
+          <p:cNvPr id="9" name="Oval 8">
+            <a:extLst>
+              <a:ext uri="{FF2B5EF4-FFF2-40B4-BE49-F238E27FC236}">
+                <a16:creationId xmlns:a16="http://schemas.microsoft.com/office/drawing/2014/main" id="{4A621C91-B0B0-D3C1-9560-EB7D115DFAE4}"/>
+              </a:ext>
+            </a:extLst>
+          </p:cNvPr>
+          <p:cNvSpPr/>
+          <p:nvPr/>
+        </p:nvSpPr>
+        <p:spPr>
+          <a:xfrm>
+            <a:off x="4414010" y="5892799"/>
+            <a:ext cx="3070138" cy="330811"/>
+          </a:xfrm>
+          <a:prstGeom prst="ellipse">
+            <a:avLst/>
+          </a:prstGeom>
+          <a:solidFill>
+            <a:schemeClr val="bg1">
+              <a:lumMod val="50000"/>
+            </a:schemeClr>
+          </a:solidFill>
+          <a:ln>
+            <a:solidFill>
+              <a:schemeClr val="bg1">
+                <a:lumMod val="50000"/>
+              </a:schemeClr>
+            </a:solidFill>
+          </a:ln>
+        </p:spPr>
+        <p:style>
+          <a:lnRef idx="2">
+            <a:schemeClr val="accent1">
+              <a:shade val="15000"/>
+            </a:schemeClr>
+          </a:lnRef>
+          <a:fillRef idx="1">
+            <a:schemeClr val="accent1"/>
+          </a:fillRef>
+          <a:effectRef idx="0">
+            <a:schemeClr val="accent1"/>
+          </a:effectRef>
+          <a:fontRef idx="minor">
+            <a:schemeClr val="lt1"/>
+          </a:fontRef>
+        </p:style>
+        <p:txBody>
+          <a:bodyPr rtlCol="0" anchor="ctr"/>
+          <a:lstStyle/>
+          <a:p>
+            <a:pPr algn="ctr"/>
+            <a:endParaRPr lang="en-US"/>
+          </a:p>
+        </p:txBody>
+      </p:sp>
+      <p:pic>
+        <p:nvPicPr>
+          <p:cNvPr id="5" name="Picture 4">
+            <a:extLst>
+              <a:ext uri="{FF2B5EF4-FFF2-40B4-BE49-F238E27FC236}">
+                <a16:creationId xmlns:a16="http://schemas.microsoft.com/office/drawing/2014/main" id="{284F4520-CEB1-87FA-D1A9-C7B67338A966}"/>
+              </a:ext>
+            </a:extLst>
+          </p:cNvPr>
+          <p:cNvPicPr>
+            <a:picLocks noChangeAspect="1"/>
+          </p:cNvPicPr>
+          <p:nvPr/>
+        </p:nvPicPr>
+        <p:blipFill>
+          <a:blip r:embed="rId2"/>
+          <a:srcRect l="18121" t="4402" r="10576" b="4985"/>
+          <a:stretch>
+            <a:fillRect/>
+          </a:stretch>
+        </p:blipFill>
+        <p:spPr>
+          <a:xfrm>
+            <a:off x="4560931" y="594710"/>
+            <a:ext cx="3070137" cy="5465379"/>
+          </a:xfrm>
+          <a:prstGeom prst="rect">
+            <a:avLst/>
+          </a:prstGeom>
+        </p:spPr>
+      </p:pic>
+      <p:sp>
+        <p:nvSpPr>
+          <p:cNvPr id="6" name="Rectangle 5">
+            <a:extLst>
+              <a:ext uri="{FF2B5EF4-FFF2-40B4-BE49-F238E27FC236}">
+                <a16:creationId xmlns:a16="http://schemas.microsoft.com/office/drawing/2014/main" id="{82E90E21-8A66-29B2-42B7-AE6C3D60F835}"/>
+              </a:ext>
+            </a:extLst>
+          </p:cNvPr>
+          <p:cNvSpPr>
+            <a:spLocks noChangeAspect="1"/>
+          </p:cNvSpPr>
+          <p:nvPr/>
+        </p:nvSpPr>
+        <p:spPr>
+          <a:xfrm>
+            <a:off x="-1453665" y="314323"/>
+            <a:ext cx="5033110" cy="6291387"/>
+          </a:xfrm>
+          <a:prstGeom prst="rect">
+            <a:avLst/>
+          </a:prstGeom>
+          <a:noFill/>
+          <a:ln>
+            <a:noFill/>
+          </a:ln>
+        </p:spPr>
+        <p:style>
+          <a:lnRef idx="2">
+            <a:schemeClr val="accent1">
+              <a:shade val="15000"/>
+            </a:schemeClr>
+          </a:lnRef>
+          <a:fillRef idx="1">
+            <a:schemeClr val="accent1"/>
+          </a:fillRef>
+          <a:effectRef idx="0">
+            <a:schemeClr val="accent1"/>
+          </a:effectRef>
+          <a:fontRef idx="minor">
+            <a:schemeClr val="lt1"/>
+          </a:fontRef>
+        </p:style>
+        <p:txBody>
+          <a:bodyPr rtlCol="0" anchor="ctr"/>
+          <a:lstStyle/>
+          <a:p>
+            <a:pPr algn="ctr"/>
+            <a:endParaRPr lang="en-US"/>
+          </a:p>
+        </p:txBody>
+      </p:sp>
+      <p:sp>
+        <p:nvSpPr>
+          <p:cNvPr id="7" name="Rectangle 6">
+            <a:extLst>
+              <a:ext uri="{FF2B5EF4-FFF2-40B4-BE49-F238E27FC236}">
+                <a16:creationId xmlns:a16="http://schemas.microsoft.com/office/drawing/2014/main" id="{82FAFD7A-DD86-FD1D-5F05-138A68B7299E}"/>
+              </a:ext>
+            </a:extLst>
+          </p:cNvPr>
+          <p:cNvSpPr>
+            <a:spLocks noChangeAspect="1"/>
+          </p:cNvSpPr>
+          <p:nvPr/>
+        </p:nvSpPr>
+        <p:spPr>
+          <a:xfrm>
+            <a:off x="3579445" y="314323"/>
+            <a:ext cx="5033110" cy="6291387"/>
+          </a:xfrm>
+          <a:prstGeom prst="rect">
+            <a:avLst/>
+          </a:prstGeom>
+          <a:noFill/>
+          <a:ln>
+            <a:noFill/>
+          </a:ln>
+        </p:spPr>
+        <p:style>
+          <a:lnRef idx="2">
+            <a:schemeClr val="accent1">
+              <a:shade val="15000"/>
+            </a:schemeClr>
+          </a:lnRef>
+          <a:fillRef idx="1">
+            <a:schemeClr val="accent1"/>
+          </a:fillRef>
+          <a:effectRef idx="0">
+            <a:schemeClr val="accent1"/>
+          </a:effectRef>
+          <a:fontRef idx="minor">
+            <a:schemeClr val="lt1"/>
+          </a:fontRef>
+        </p:style>
+        <p:txBody>
+          <a:bodyPr rtlCol="0" anchor="ctr"/>
+          <a:lstStyle/>
+          <a:p>
+            <a:pPr algn="ctr"/>
+            <a:endParaRPr lang="en-US"/>
+          </a:p>
+        </p:txBody>
+      </p:sp>
+      <p:sp>
+        <p:nvSpPr>
+          <p:cNvPr id="8" name="Rectangle 7">
+            <a:extLst>
+              <a:ext uri="{FF2B5EF4-FFF2-40B4-BE49-F238E27FC236}">
+                <a16:creationId xmlns:a16="http://schemas.microsoft.com/office/drawing/2014/main" id="{192A0CE3-53E0-324D-F664-87F65A7BCF93}"/>
+              </a:ext>
+            </a:extLst>
+          </p:cNvPr>
+          <p:cNvSpPr>
+            <a:spLocks noChangeAspect="1"/>
+          </p:cNvSpPr>
+          <p:nvPr/>
+        </p:nvSpPr>
+        <p:spPr>
+          <a:xfrm>
+            <a:off x="8612555" y="316033"/>
+            <a:ext cx="5033110" cy="6291387"/>
+          </a:xfrm>
+          <a:prstGeom prst="rect">
+            <a:avLst/>
+          </a:prstGeom>
+          <a:noFill/>
+          <a:ln>
+            <a:noFill/>
+          </a:ln>
+        </p:spPr>
+        <p:style>
+          <a:lnRef idx="2">
+            <a:schemeClr val="accent1">
+              <a:shade val="15000"/>
+            </a:schemeClr>
+          </a:lnRef>
+          <a:fillRef idx="1">
+            <a:schemeClr val="accent1"/>
+          </a:fillRef>
+          <a:effectRef idx="0">
+            <a:schemeClr val="accent1"/>
+          </a:effectRef>
+          <a:fontRef idx="minor">
+            <a:schemeClr val="lt1"/>
+          </a:fontRef>
+        </p:style>
+        <p:txBody>
+          <a:bodyPr rtlCol="0" anchor="ctr"/>
+          <a:lstStyle/>
+          <a:p>
+            <a:pPr algn="ctr"/>
+            <a:endParaRPr lang="en-US"/>
+          </a:p>
+        </p:txBody>
+      </p:sp>
+      <p:sp>
+        <p:nvSpPr>
+          <p:cNvPr id="11" name="Oval 10">
+            <a:extLst>
+              <a:ext uri="{FF2B5EF4-FFF2-40B4-BE49-F238E27FC236}">
+                <a16:creationId xmlns:a16="http://schemas.microsoft.com/office/drawing/2014/main" id="{494A6011-1671-6033-9AE7-3E6B8DE435C3}"/>
+              </a:ext>
+            </a:extLst>
+          </p:cNvPr>
+          <p:cNvSpPr/>
+          <p:nvPr/>
+        </p:nvSpPr>
+        <p:spPr>
+          <a:xfrm>
+            <a:off x="-459060" y="5892799"/>
+            <a:ext cx="3070138" cy="330811"/>
+          </a:xfrm>
+          <a:prstGeom prst="ellipse">
+            <a:avLst/>
+          </a:prstGeom>
+          <a:solidFill>
+            <a:schemeClr val="bg1">
+              <a:lumMod val="50000"/>
+            </a:schemeClr>
+          </a:solidFill>
+          <a:ln>
+            <a:solidFill>
+              <a:schemeClr val="bg1">
+                <a:lumMod val="50000"/>
+              </a:schemeClr>
+            </a:solidFill>
+          </a:ln>
+        </p:spPr>
+        <p:style>
+          <a:lnRef idx="2">
+            <a:schemeClr val="accent1">
+              <a:shade val="15000"/>
+            </a:schemeClr>
+          </a:lnRef>
+          <a:fillRef idx="1">
+            <a:schemeClr val="accent1"/>
+          </a:fillRef>
+          <a:effectRef idx="0">
+            <a:schemeClr val="accent1"/>
+          </a:effectRef>
+          <a:fontRef idx="minor">
+            <a:schemeClr val="lt1"/>
+          </a:fontRef>
+        </p:style>
+        <p:txBody>
+          <a:bodyPr rtlCol="0" anchor="ctr"/>
+          <a:lstStyle/>
+          <a:p>
+            <a:pPr algn="ctr"/>
+            <a:endParaRPr lang="en-US"/>
+          </a:p>
+        </p:txBody>
+      </p:sp>
+      <p:pic>
+        <p:nvPicPr>
+          <p:cNvPr id="13" name="Picture 12">
+            <a:extLst>
+              <a:ext uri="{FF2B5EF4-FFF2-40B4-BE49-F238E27FC236}">
+                <a16:creationId xmlns:a16="http://schemas.microsoft.com/office/drawing/2014/main" id="{5C211B89-350E-0A97-6261-7FFEE3D05B3E}"/>
+              </a:ext>
+            </a:extLst>
+          </p:cNvPr>
+          <p:cNvPicPr>
+            <a:picLocks noChangeAspect="1"/>
+          </p:cNvPicPr>
+          <p:nvPr/>
+        </p:nvPicPr>
+        <p:blipFill>
+          <a:blip r:embed="rId2"/>
+          <a:srcRect l="18121" t="4402" r="10576" b="4985"/>
+          <a:stretch>
+            <a:fillRect/>
+          </a:stretch>
+        </p:blipFill>
+        <p:spPr>
+          <a:xfrm rot="600000">
+            <a:off x="-472179" y="594710"/>
+            <a:ext cx="3070137" cy="5465379"/>
+          </a:xfrm>
+          <a:prstGeom prst="rect">
+            <a:avLst/>
+          </a:prstGeom>
+        </p:spPr>
+      </p:pic>
+      <p:sp>
+        <p:nvSpPr>
+          <p:cNvPr id="15" name="Oval 14">
+            <a:extLst>
+              <a:ext uri="{FF2B5EF4-FFF2-40B4-BE49-F238E27FC236}">
+                <a16:creationId xmlns:a16="http://schemas.microsoft.com/office/drawing/2014/main" id="{BD703E35-646F-8B8C-1F26-AD5D664895A5}"/>
+              </a:ext>
+            </a:extLst>
+          </p:cNvPr>
+          <p:cNvSpPr/>
+          <p:nvPr/>
+        </p:nvSpPr>
+        <p:spPr>
+          <a:xfrm>
+            <a:off x="9505176" y="5892799"/>
+            <a:ext cx="3070138" cy="330811"/>
+          </a:xfrm>
+          <a:prstGeom prst="ellipse">
+            <a:avLst/>
+          </a:prstGeom>
+          <a:solidFill>
+            <a:schemeClr val="bg1">
+              <a:lumMod val="50000"/>
+            </a:schemeClr>
+          </a:solidFill>
+          <a:ln>
+            <a:solidFill>
+              <a:schemeClr val="bg1">
+                <a:lumMod val="50000"/>
+              </a:schemeClr>
+            </a:solidFill>
+          </a:ln>
+        </p:spPr>
+        <p:style>
+          <a:lnRef idx="2">
+            <a:schemeClr val="accent1">
+              <a:shade val="15000"/>
+            </a:schemeClr>
+          </a:lnRef>
+          <a:fillRef idx="1">
+            <a:schemeClr val="accent1"/>
+          </a:fillRef>
+          <a:effectRef idx="0">
+            <a:schemeClr val="accent1"/>
+          </a:effectRef>
+          <a:fontRef idx="minor">
+            <a:schemeClr val="lt1"/>
+          </a:fontRef>
+        </p:style>
+        <p:txBody>
+          <a:bodyPr rtlCol="0" anchor="ctr"/>
+          <a:lstStyle/>
+          <a:p>
+            <a:pPr algn="ctr"/>
+            <a:endParaRPr lang="en-US"/>
+          </a:p>
+        </p:txBody>
+      </p:sp>
+      <p:pic>
+        <p:nvPicPr>
+          <p:cNvPr id="17" name="Picture 16">
+            <a:extLst>
+              <a:ext uri="{FF2B5EF4-FFF2-40B4-BE49-F238E27FC236}">
+                <a16:creationId xmlns:a16="http://schemas.microsoft.com/office/drawing/2014/main" id="{B9AC6EAA-5AEB-718F-19BA-FE0C60A87BF4}"/>
+              </a:ext>
+            </a:extLst>
+          </p:cNvPr>
+          <p:cNvPicPr>
+            <a:picLocks noChangeAspect="1"/>
+          </p:cNvPicPr>
+          <p:nvPr/>
+        </p:nvPicPr>
+        <p:blipFill>
+          <a:blip r:embed="rId2"/>
+          <a:srcRect l="18121" t="4402" r="10576" b="4985"/>
+          <a:stretch>
+            <a:fillRect/>
+          </a:stretch>
+        </p:blipFill>
+        <p:spPr>
+          <a:xfrm rot="-600000">
+            <a:off x="9594041" y="594710"/>
+            <a:ext cx="3070137" cy="5465379"/>
+          </a:xfrm>
+          <a:prstGeom prst="rect">
+            <a:avLst/>
+          </a:prstGeom>
+        </p:spPr>
+      </p:pic>
+      <p:sp>
+        <p:nvSpPr>
+          <p:cNvPr id="24" name="Right Arrow 23">
+            <a:extLst>
+              <a:ext uri="{FF2B5EF4-FFF2-40B4-BE49-F238E27FC236}">
+                <a16:creationId xmlns:a16="http://schemas.microsoft.com/office/drawing/2014/main" id="{6507D2D8-F3DA-B5EC-1C13-51DDF7AA416E}"/>
+              </a:ext>
+            </a:extLst>
+          </p:cNvPr>
+          <p:cNvSpPr/>
+          <p:nvPr/>
+        </p:nvSpPr>
+        <p:spPr>
+          <a:xfrm>
+            <a:off x="2019235" y="5561988"/>
+            <a:ext cx="784950" cy="330811"/>
+          </a:xfrm>
+          <a:prstGeom prst="rightArrow">
+            <a:avLst>
+              <a:gd name="adj1" fmla="val 50000"/>
+              <a:gd name="adj2" fmla="val 89487"/>
+            </a:avLst>
+          </a:prstGeom>
+          <a:solidFill>
+            <a:schemeClr val="tx2">
+              <a:lumMod val="90000"/>
+              <a:lumOff val="10000"/>
+            </a:schemeClr>
+          </a:solidFill>
+          <a:ln>
+            <a:solidFill>
+              <a:schemeClr val="tx2">
+                <a:lumMod val="90000"/>
+                <a:lumOff val="10000"/>
+              </a:schemeClr>
+            </a:solidFill>
+          </a:ln>
+        </p:spPr>
+        <p:style>
+          <a:lnRef idx="2">
+            <a:schemeClr val="accent1">
+              <a:shade val="15000"/>
+            </a:schemeClr>
+          </a:lnRef>
+          <a:fillRef idx="1">
+            <a:schemeClr val="accent1"/>
+          </a:fillRef>
+          <a:effectRef idx="0">
+            <a:schemeClr val="accent1"/>
+          </a:effectRef>
+          <a:fontRef idx="minor">
+            <a:schemeClr val="lt1"/>
+          </a:fontRef>
+        </p:style>
+        <p:txBody>
+          <a:bodyPr rtlCol="0" anchor="ctr"/>
+          <a:lstStyle/>
+          <a:p>
+            <a:pPr algn="ctr"/>
+            <a:endParaRPr lang="en-US"/>
+          </a:p>
+        </p:txBody>
+      </p:sp>
+      <p:sp>
+        <p:nvSpPr>
+          <p:cNvPr id="23" name="Right Arrow 22">
+            <a:extLst>
+              <a:ext uri="{FF2B5EF4-FFF2-40B4-BE49-F238E27FC236}">
+                <a16:creationId xmlns:a16="http://schemas.microsoft.com/office/drawing/2014/main" id="{A5254FE1-4E61-C9EE-777E-B1BE4A69E6E2}"/>
+              </a:ext>
+            </a:extLst>
+          </p:cNvPr>
+          <p:cNvSpPr/>
+          <p:nvPr/>
+        </p:nvSpPr>
+        <p:spPr>
+          <a:xfrm>
+            <a:off x="2128151" y="5561988"/>
+            <a:ext cx="784950" cy="330811"/>
+          </a:xfrm>
+          <a:prstGeom prst="rightArrow">
+            <a:avLst>
+              <a:gd name="adj1" fmla="val 50000"/>
+              <a:gd name="adj2" fmla="val 89487"/>
+            </a:avLst>
+          </a:prstGeom>
+          <a:solidFill>
+            <a:schemeClr val="tx2">
+              <a:lumMod val="75000"/>
+              <a:lumOff val="25000"/>
+            </a:schemeClr>
+          </a:solidFill>
+          <a:ln>
+            <a:solidFill>
+              <a:schemeClr val="tx2">
+                <a:lumMod val="75000"/>
+                <a:lumOff val="25000"/>
+              </a:schemeClr>
+            </a:solidFill>
+          </a:ln>
+        </p:spPr>
+        <p:style>
+          <a:lnRef idx="2">
+            <a:schemeClr val="accent1">
+              <a:shade val="15000"/>
+            </a:schemeClr>
+          </a:lnRef>
+          <a:fillRef idx="1">
+            <a:schemeClr val="accent1"/>
+          </a:fillRef>
+          <a:effectRef idx="0">
+            <a:schemeClr val="accent1"/>
+          </a:effectRef>
+          <a:fontRef idx="minor">
+            <a:schemeClr val="lt1"/>
+          </a:fontRef>
+        </p:style>
+        <p:txBody>
+          <a:bodyPr rtlCol="0" anchor="ctr"/>
+          <a:lstStyle/>
+          <a:p>
+            <a:pPr algn="ctr"/>
+            <a:endParaRPr lang="en-US"/>
+          </a:p>
+        </p:txBody>
+      </p:sp>
+      <p:sp>
+        <p:nvSpPr>
+          <p:cNvPr id="22" name="Right Arrow 21">
+            <a:extLst>
+              <a:ext uri="{FF2B5EF4-FFF2-40B4-BE49-F238E27FC236}">
+                <a16:creationId xmlns:a16="http://schemas.microsoft.com/office/drawing/2014/main" id="{AD87AA8B-0AF0-299D-8A95-5B1E26FA8EE1}"/>
+              </a:ext>
+            </a:extLst>
+          </p:cNvPr>
+          <p:cNvSpPr/>
+          <p:nvPr/>
+        </p:nvSpPr>
+        <p:spPr>
+          <a:xfrm>
+            <a:off x="2230292" y="5561988"/>
+            <a:ext cx="784950" cy="330811"/>
+          </a:xfrm>
+          <a:prstGeom prst="rightArrow">
+            <a:avLst>
+              <a:gd name="adj1" fmla="val 50000"/>
+              <a:gd name="adj2" fmla="val 89487"/>
+            </a:avLst>
+          </a:prstGeom>
+          <a:solidFill>
+            <a:srgbClr val="068EDD"/>
+          </a:solidFill>
+          <a:ln>
+            <a:solidFill>
+              <a:schemeClr val="tx2">
+                <a:lumMod val="90000"/>
+                <a:lumOff val="10000"/>
+              </a:schemeClr>
+            </a:solidFill>
+          </a:ln>
+        </p:spPr>
+        <p:style>
+          <a:lnRef idx="2">
+            <a:schemeClr val="accent1">
+              <a:shade val="15000"/>
+            </a:schemeClr>
+          </a:lnRef>
+          <a:fillRef idx="1">
+            <a:schemeClr val="accent1"/>
+          </a:fillRef>
+          <a:effectRef idx="0">
+            <a:schemeClr val="accent1"/>
+          </a:effectRef>
+          <a:fontRef idx="minor">
+            <a:schemeClr val="lt1"/>
+          </a:fontRef>
+        </p:style>
+        <p:txBody>
+          <a:bodyPr rtlCol="0" anchor="ctr"/>
+          <a:lstStyle/>
+          <a:p>
+            <a:pPr algn="ctr"/>
+            <a:endParaRPr lang="en-US"/>
+          </a:p>
+        </p:txBody>
+      </p:sp>
+      <p:sp>
+        <p:nvSpPr>
+          <p:cNvPr id="27" name="Right Arrow 26">
+            <a:extLst>
+              <a:ext uri="{FF2B5EF4-FFF2-40B4-BE49-F238E27FC236}">
+                <a16:creationId xmlns:a16="http://schemas.microsoft.com/office/drawing/2014/main" id="{B57CEB4D-8C11-2143-BD04-F5284C425935}"/>
+              </a:ext>
+            </a:extLst>
+          </p:cNvPr>
+          <p:cNvSpPr/>
+          <p:nvPr/>
+        </p:nvSpPr>
+        <p:spPr>
+          <a:xfrm rot="10800000">
+            <a:off x="9559544" y="5561988"/>
+            <a:ext cx="784950" cy="330811"/>
+          </a:xfrm>
+          <a:prstGeom prst="rightArrow">
+            <a:avLst>
+              <a:gd name="adj1" fmla="val 50000"/>
+              <a:gd name="adj2" fmla="val 89487"/>
+            </a:avLst>
+          </a:prstGeom>
+          <a:solidFill>
+            <a:schemeClr val="tx2">
+              <a:lumMod val="90000"/>
+              <a:lumOff val="10000"/>
+            </a:schemeClr>
+          </a:solidFill>
+          <a:ln>
+            <a:solidFill>
+              <a:schemeClr val="tx2">
+                <a:lumMod val="90000"/>
+                <a:lumOff val="10000"/>
+              </a:schemeClr>
+            </a:solidFill>
+          </a:ln>
+        </p:spPr>
+        <p:style>
+          <a:lnRef idx="2">
+            <a:schemeClr val="accent1">
+              <a:shade val="15000"/>
+            </a:schemeClr>
+          </a:lnRef>
+          <a:fillRef idx="1">
+            <a:schemeClr val="accent1"/>
+          </a:fillRef>
+          <a:effectRef idx="0">
+            <a:schemeClr val="accent1"/>
+          </a:effectRef>
+          <a:fontRef idx="minor">
+            <a:schemeClr val="lt1"/>
+          </a:fontRef>
+        </p:style>
+        <p:txBody>
+          <a:bodyPr rtlCol="0" anchor="ctr"/>
+          <a:lstStyle/>
+          <a:p>
+            <a:pPr algn="ctr"/>
+            <a:endParaRPr lang="en-US"/>
+          </a:p>
+        </p:txBody>
+      </p:sp>
+      <p:sp>
+        <p:nvSpPr>
+          <p:cNvPr id="26" name="Right Arrow 25">
+            <a:extLst>
+              <a:ext uri="{FF2B5EF4-FFF2-40B4-BE49-F238E27FC236}">
+                <a16:creationId xmlns:a16="http://schemas.microsoft.com/office/drawing/2014/main" id="{2CB5B8D8-5CF5-1621-2D4C-AAF06F9F7B83}"/>
+              </a:ext>
+            </a:extLst>
+          </p:cNvPr>
+          <p:cNvSpPr/>
+          <p:nvPr/>
+        </p:nvSpPr>
+        <p:spPr>
+          <a:xfrm rot="10800000">
+            <a:off x="9457403" y="5561988"/>
+            <a:ext cx="784950" cy="330811"/>
+          </a:xfrm>
+          <a:prstGeom prst="rightArrow">
+            <a:avLst>
+              <a:gd name="adj1" fmla="val 50000"/>
+              <a:gd name="adj2" fmla="val 89487"/>
+            </a:avLst>
+          </a:prstGeom>
+          <a:solidFill>
+            <a:schemeClr val="tx2">
+              <a:lumMod val="75000"/>
+              <a:lumOff val="25000"/>
+            </a:schemeClr>
+          </a:solidFill>
+          <a:ln>
+            <a:solidFill>
+              <a:schemeClr val="tx2">
+                <a:lumMod val="75000"/>
+                <a:lumOff val="25000"/>
+              </a:schemeClr>
+            </a:solidFill>
+          </a:ln>
+        </p:spPr>
+        <p:style>
+          <a:lnRef idx="2">
+            <a:schemeClr val="accent1">
+              <a:shade val="15000"/>
+            </a:schemeClr>
+          </a:lnRef>
+          <a:fillRef idx="1">
+            <a:schemeClr val="accent1"/>
+          </a:fillRef>
+          <a:effectRef idx="0">
+            <a:schemeClr val="accent1"/>
+          </a:effectRef>
+          <a:fontRef idx="minor">
+            <a:schemeClr val="lt1"/>
+          </a:fontRef>
+        </p:style>
+        <p:txBody>
+          <a:bodyPr rtlCol="0" anchor="ctr"/>
+          <a:lstStyle/>
+          <a:p>
+            <a:pPr algn="ctr"/>
+            <a:endParaRPr lang="en-US"/>
+          </a:p>
+        </p:txBody>
+      </p:sp>
+      <p:sp>
+        <p:nvSpPr>
+          <p:cNvPr id="25" name="Right Arrow 24">
+            <a:extLst>
+              <a:ext uri="{FF2B5EF4-FFF2-40B4-BE49-F238E27FC236}">
+                <a16:creationId xmlns:a16="http://schemas.microsoft.com/office/drawing/2014/main" id="{562E7F8B-D8CA-9DFB-6DE0-5C043B34760E}"/>
+              </a:ext>
+            </a:extLst>
+          </p:cNvPr>
+          <p:cNvSpPr/>
+          <p:nvPr/>
+        </p:nvSpPr>
+        <p:spPr>
+          <a:xfrm rot="10800000">
+            <a:off x="9348487" y="5561988"/>
+            <a:ext cx="784950" cy="330811"/>
+          </a:xfrm>
+          <a:prstGeom prst="rightArrow">
+            <a:avLst>
+              <a:gd name="adj1" fmla="val 50000"/>
+              <a:gd name="adj2" fmla="val 89487"/>
+            </a:avLst>
+          </a:prstGeom>
+          <a:solidFill>
+            <a:srgbClr val="068EDD"/>
+          </a:solidFill>
+          <a:ln>
+            <a:solidFill>
+              <a:schemeClr val="tx2">
+                <a:lumMod val="90000"/>
+                <a:lumOff val="10000"/>
+              </a:schemeClr>
+            </a:solidFill>
+          </a:ln>
+        </p:spPr>
+        <p:style>
+          <a:lnRef idx="2">
+            <a:schemeClr val="accent1">
+              <a:shade val="15000"/>
+            </a:schemeClr>
+          </a:lnRef>
+          <a:fillRef idx="1">
+            <a:schemeClr val="accent1"/>
+          </a:fillRef>
+          <a:effectRef idx="0">
+            <a:schemeClr val="accent1"/>
+          </a:effectRef>
+          <a:fontRef idx="minor">
+            <a:schemeClr val="lt1"/>
+          </a:fontRef>
+        </p:style>
+        <p:txBody>
+          <a:bodyPr rtlCol="0" anchor="ctr"/>
+          <a:lstStyle/>
+          <a:p>
+            <a:pPr algn="ctr"/>
+            <a:endParaRPr lang="en-US"/>
+          </a:p>
+        </p:txBody>
+      </p:sp>
+      <p:sp>
+        <p:nvSpPr>
+          <p:cNvPr id="30" name="Circular Arrow 29">
+            <a:extLst>
+              <a:ext uri="{FF2B5EF4-FFF2-40B4-BE49-F238E27FC236}">
+                <a16:creationId xmlns:a16="http://schemas.microsoft.com/office/drawing/2014/main" id="{465AEBA1-843A-3930-FC88-4DBF94B934A9}"/>
+              </a:ext>
+            </a:extLst>
+          </p:cNvPr>
+          <p:cNvSpPr/>
+          <p:nvPr/>
+        </p:nvSpPr>
+        <p:spPr>
+          <a:xfrm rot="2384124">
+            <a:off x="2244719" y="539785"/>
+            <a:ext cx="886627" cy="980652"/>
+          </a:xfrm>
+          <a:prstGeom prst="circularArrow">
+            <a:avLst>
+              <a:gd name="adj1" fmla="val 12500"/>
+              <a:gd name="adj2" fmla="val 1245502"/>
+              <a:gd name="adj3" fmla="val 20457681"/>
+              <a:gd name="adj4" fmla="val 13890118"/>
+              <a:gd name="adj5" fmla="val 13518"/>
+            </a:avLst>
+          </a:prstGeom>
+          <a:solidFill>
+            <a:srgbClr val="068EDD"/>
+          </a:solidFill>
+          <a:ln>
+            <a:solidFill>
+              <a:schemeClr val="tx2">
+                <a:lumMod val="90000"/>
+                <a:lumOff val="10000"/>
+              </a:schemeClr>
+            </a:solidFill>
+          </a:ln>
+        </p:spPr>
+        <p:style>
+          <a:lnRef idx="2">
+            <a:schemeClr val="accent1">
+              <a:shade val="15000"/>
+            </a:schemeClr>
+          </a:lnRef>
+          <a:fillRef idx="1">
+            <a:schemeClr val="accent1"/>
+          </a:fillRef>
+          <a:effectRef idx="0">
+            <a:schemeClr val="accent1"/>
+          </a:effectRef>
+          <a:fontRef idx="minor">
+            <a:schemeClr val="lt1"/>
+          </a:fontRef>
+        </p:style>
+        <p:txBody>
+          <a:bodyPr rtlCol="0" anchor="ctr"/>
+          <a:lstStyle/>
+          <a:p>
+            <a:pPr algn="ctr"/>
+            <a:endParaRPr lang="en-US">
+              <a:solidFill>
+                <a:schemeClr val="tx1"/>
+              </a:solidFill>
+            </a:endParaRPr>
+          </a:p>
+        </p:txBody>
+      </p:sp>
+      <p:sp>
+        <p:nvSpPr>
+          <p:cNvPr id="31" name="Circular Arrow 30">
+            <a:extLst>
+              <a:ext uri="{FF2B5EF4-FFF2-40B4-BE49-F238E27FC236}">
+                <a16:creationId xmlns:a16="http://schemas.microsoft.com/office/drawing/2014/main" id="{5AE497DA-01D9-1A5C-E2CD-3072B21F56CB}"/>
+              </a:ext>
+            </a:extLst>
+          </p:cNvPr>
+          <p:cNvSpPr/>
+          <p:nvPr/>
+        </p:nvSpPr>
+        <p:spPr>
+          <a:xfrm rot="19215876" flipH="1">
+            <a:off x="8823588" y="586485"/>
+            <a:ext cx="886627" cy="980652"/>
+          </a:xfrm>
+          <a:prstGeom prst="circularArrow">
+            <a:avLst>
+              <a:gd name="adj1" fmla="val 12500"/>
+              <a:gd name="adj2" fmla="val 1245502"/>
+              <a:gd name="adj3" fmla="val 20457681"/>
+              <a:gd name="adj4" fmla="val 13890118"/>
+              <a:gd name="adj5" fmla="val 13518"/>
+            </a:avLst>
+          </a:prstGeom>
+          <a:solidFill>
+            <a:srgbClr val="068EDD"/>
+          </a:solidFill>
+          <a:ln>
+            <a:solidFill>
+              <a:schemeClr val="tx2">
+                <a:lumMod val="90000"/>
+                <a:lumOff val="10000"/>
+              </a:schemeClr>
+            </a:solidFill>
+          </a:ln>
+        </p:spPr>
+        <p:style>
+          <a:lnRef idx="2">
+            <a:schemeClr val="accent1">
+              <a:shade val="15000"/>
+            </a:schemeClr>
+          </a:lnRef>
+          <a:fillRef idx="1">
+            <a:schemeClr val="accent1"/>
+          </a:fillRef>
+          <a:effectRef idx="0">
+            <a:schemeClr val="accent1"/>
+          </a:effectRef>
+          <a:fontRef idx="minor">
+            <a:schemeClr val="lt1"/>
+          </a:fontRef>
+        </p:style>
+        <p:txBody>
+          <a:bodyPr rtlCol="0" anchor="ctr"/>
+          <a:lstStyle/>
+          <a:p>
+            <a:pPr algn="ctr"/>
+            <a:endParaRPr lang="en-US">
+              <a:solidFill>
+                <a:schemeClr val="tx1"/>
+              </a:solidFill>
+            </a:endParaRPr>
+          </a:p>
+        </p:txBody>
+      </p:sp>
+    </p:spTree>
+    <p:extLst>
+      <p:ext uri="{BB962C8B-B14F-4D97-AF65-F5344CB8AC3E}">
+        <p14:creationId xmlns:p14="http://schemas.microsoft.com/office/powerpoint/2010/main" val="3218585445"/>
       </p:ext>
     </p:extLst>
   </p:cSld>
